--- a/presentation/helm-101/Helm-101-r1.0.pptx
+++ b/presentation/helm-101/Helm-101-r1.0.pptx
@@ -2825,7 +2825,7 @@
           <a:p>
             <a:r>
               <a:rPr lang="en-US" dirty="0"/>
-              <a:t>What it shows: the Helm 4 apply model. A release created by Helm 3 stays on client-side apply until --server-side is set explicitly on an upgrade. With server-side apply, Helm stops with a conflict when another field manager owns a field it wants to set to a different value. The tutorial's step 8 patches spec.replicas with kubectl patch --field-manager=hfd-demo, so a plain helm upgrade stops, and the --force-conflicts upgrade resolves it. Step 9 shows the refusal to adopt an unowned ConfigMap, then adoption with --take-ownership. The design is in HIP-0023. What to show: examples/12-release-lifecycle, ./demo.sh steps 8 and 9. Fallback: chapter 12, section Server-side apply, ownership and conflicts. The Helm 3 force spelling remains in Helm 4 with a deprecation warning and is covered in the flag map at the end.</a:t>
+              <a:t>What it shows: the Helm 4 apply model. A release created by Helm 3 stays on client-side apply until --server-side is set explicitly on an upgrade. With server-side apply, Helm stops with a conflict when another field manager owns a field it wants to set to a different value. The tutorial's step 8 patches spec.replicas with kubectl patch --field-manager=hfd-demo, so a plain helm upgrade stops, and the --force-conflicts upgrade resolves it. Step 9 shows the refusal to adopt an unowned ConfigMap, then adoption, which on 4.3.0 needs --take-ownership --force-conflicts because the existing fields belong to another manager. Step 10 shows --force-replace rejected under server-side apply and working with --server-side=false. The design is in HIP-0023. What to show: examples/12-release-lifecycle, ./demo.sh steps 8 and 9. Fallback: chapter 12, section Server-side apply, ownership and conflicts. The Helm 3 force spelling remains in Helm 4 with a deprecation warning and is covered in the flag map at the end.</a:t>
             </a:r>
             <a:endParaRPr lang="en-US" dirty="0"/>
           </a:p>
@@ -2913,7 +2913,7 @@
           <a:p>
             <a:r>
               <a:rPr lang="en-US" dirty="0"/>
-              <a:t>What it shows: four levels of checking before anything changes in the cluster. helm lint renders every template and checks structure and the schema. helm template renders locally and, piped through kubeconform -strict, validates each object against the Kubernetes schemas; custom resources without a schema in the default catalog are skipped and reported in the summary. --dry-run=client renders and prints notes with no cluster connection. --dry-run=server connects, so lookup returns live objects and .Capabilities.APIVersions reflects the real cluster. In Helm 4, --dry-run takes none, client or server. What to show: ./demo.sh offline in examples/05-values and examples/10-crds-operators; the second expects the postgres render to fail without the operator and shows the guard message. Fallback: chapter 10, the operator guard section, and chapter 13 in the 201 for the full debugging ladder. Remember that lint does not resolve import-values.</a:t>
+              <a:t>What it shows: four levels of checking before anything changes in the cluster. helm lint renders every template and checks structure and the schema. helm template renders locally and, piped through kubeconform -strict, validates each object against the Kubernetes schemas; custom resources without a schema in the default catalog are skipped and reported in the summary. --dry-run=client renders and prints notes with no cluster connection. --dry-run=server connects, so kinds resolve against the API server, lookup returns live objects and .Capabilities.APIVersions reflects the real cluster. On Helm 4.3.0 it does not schema-validate fields: a string containerPort, an unknown field or a Pod Security violation all pass, so use kubeconform, or kubectl apply --server-side --dry-run=server on helm template output, for that. In Helm 4, --dry-run takes none, client or server. What to show: ./demo.sh offline in examples/05-values and examples/10-crds-operators; the second expects the postgres render to fail without the operator and shows the guard message. Fallback: chapter 10, the operator guard section, and chapter 13 in the 201 for the full debugging ladder. Remember that lint does not resolve import-values.</a:t>
             </a:r>
             <a:endParaRPr lang="en-US" dirty="0"/>
           </a:p>
@@ -17068,7 +17068,7 @@
                 <a:ea typeface="Red Hat Text" pitchFamily="34" charset="-122"/>
                 <a:cs typeface="Red Hat Text" pitchFamily="34" charset="-120"/>
               </a:rPr>
-              <a:t>: lets an upgrade adopt resources that lack Helm's ownership annotations.</a:t>
+              <a:t>: lets an upgrade adopt resources that lack Helm's ownership annotations; add --force-conflicts when another manager owns differing fields.</a:t>
             </a:r>
             <a:endParaRPr lang="en-US" sz="1700" dirty="0"/>
           </a:p>
@@ -17112,7 +17112,7 @@
                 <a:ea typeface="Red Hat Text" pitchFamily="34" charset="-122"/>
                 <a:cs typeface="Red Hat Text" pitchFamily="34" charset="-120"/>
               </a:rPr>
-              <a:t>: deletes and recreates objects, which changes an immutable field at the cost of brief downtime.</a:t>
+              <a:t>: replaces objects client-side; Helm 4.3.0 rejects it with server-side apply, so add --server-side=false.</a:t>
             </a:r>
             <a:endParaRPr lang="en-US" sz="1700" dirty="0"/>
           </a:p>
@@ -18484,7 +18484,7 @@
                           <a:ea typeface="Red Hat Text" pitchFamily="34" charset="-122"/>
                           <a:cs typeface="Red Hat Text" pitchFamily="34" charset="-120"/>
                         </a:rPr>
-                        <a:t>upgrade and rollback; both spellings warn</a:t>
+                        <a:t>client-side only: needs --server-side=false; both spellings warn</a:t>
                       </a:r>
                       <a:endParaRPr lang="en-US" sz="1300" dirty="0">
                         <a:latin typeface="Red Hat Text" charset="0"/>

--- a/presentation/helm-101/Helm-101-r1.0.pptx
+++ b/presentation/helm-101/Helm-101-r1.0.pptx
@@ -4043,9 +4043,9 @@
                 <a:solidFill>
                   <a:srgbClr val="EE0000"/>
                 </a:solidFill>
-                <a:latin typeface="Overpass" pitchFamily="34" charset="0"/>
-                <a:ea typeface="Overpass" pitchFamily="34" charset="-122"/>
-                <a:cs typeface="Overpass" pitchFamily="34" charset="-120"/>
+                <a:latin typeface="Red Hat Display" pitchFamily="34" charset="0"/>
+                <a:ea typeface="Red Hat Display" pitchFamily="34" charset="-122"/>
+                <a:cs typeface="Red Hat Display" pitchFamily="34" charset="-120"/>
               </a:rPr>
               <a:t>HELM FOR DEVELOPERS · 101</a:t>
             </a:r>
@@ -4082,9 +4082,9 @@
                 <a:solidFill>
                   <a:srgbClr val="151515"/>
                 </a:solidFill>
-                <a:latin typeface="Overpass" pitchFamily="34" charset="0"/>
-                <a:ea typeface="Overpass" pitchFamily="34" charset="-122"/>
-                <a:cs typeface="Overpass" pitchFamily="34" charset="-120"/>
+                <a:latin typeface="Red Hat Display" pitchFamily="34" charset="0"/>
+                <a:ea typeface="Red Hat Display" pitchFamily="34" charset="-122"/>
+                <a:cs typeface="Red Hat Display" pitchFamily="34" charset="-120"/>
               </a:rPr>
               <a:t>Helm for</a:t>
             </a:r>
@@ -4099,9 +4099,9 @@
                 <a:solidFill>
                   <a:srgbClr val="151515"/>
                 </a:solidFill>
-                <a:latin typeface="Overpass" pitchFamily="34" charset="0"/>
-                <a:ea typeface="Overpass" pitchFamily="34" charset="-122"/>
-                <a:cs typeface="Overpass" pitchFamily="34" charset="-120"/>
+                <a:latin typeface="Red Hat Display" pitchFamily="34" charset="0"/>
+                <a:ea typeface="Red Hat Display" pitchFamily="34" charset="-122"/>
+                <a:cs typeface="Red Hat Display" pitchFamily="34" charset="-120"/>
               </a:rPr>
               <a:t>Developers 101</a:t>
             </a:r>
@@ -4296,9 +4296,9 @@
                 <a:solidFill>
                   <a:srgbClr val="FFFFFF"/>
                 </a:solidFill>
-                <a:latin typeface="Overpass" pitchFamily="34" charset="0"/>
-                <a:ea typeface="Overpass" pitchFamily="34" charset="-122"/>
-                <a:cs typeface="Overpass" pitchFamily="34" charset="-120"/>
+                <a:latin typeface="Red Hat Display" pitchFamily="34" charset="0"/>
+                <a:ea typeface="Red Hat Display" pitchFamily="34" charset="-122"/>
+                <a:cs typeface="Red Hat Display" pitchFamily="34" charset="-120"/>
               </a:rPr>
               <a:t>03</a:t>
             </a:r>
@@ -4335,9 +4335,9 @@
                 <a:solidFill>
                   <a:srgbClr val="FFFFFF"/>
                 </a:solidFill>
-                <a:latin typeface="Overpass" pitchFamily="34" charset="0"/>
-                <a:ea typeface="Overpass" pitchFamily="34" charset="-122"/>
-                <a:cs typeface="Overpass" pitchFamily="34" charset="-120"/>
+                <a:latin typeface="Red Hat Display" pitchFamily="34" charset="0"/>
+                <a:ea typeface="Red Hat Display" pitchFamily="34" charset="-122"/>
+                <a:cs typeface="Red Hat Display" pitchFamily="34" charset="-120"/>
               </a:rPr>
               <a:t>First chart</a:t>
             </a:r>
@@ -4525,9 +4525,9 @@
                 <a:solidFill>
                   <a:srgbClr val="EE0000"/>
                 </a:solidFill>
-                <a:latin typeface="Overpass" pitchFamily="34" charset="0"/>
-                <a:ea typeface="Overpass" pitchFamily="34" charset="-122"/>
-                <a:cs typeface="Overpass" pitchFamily="34" charset="-120"/>
+                <a:latin typeface="Red Hat Display" pitchFamily="34" charset="0"/>
+                <a:ea typeface="Red Hat Display" pitchFamily="34" charset="-122"/>
+                <a:cs typeface="Red Hat Display" pitchFamily="34" charset="-120"/>
               </a:rPr>
               <a:t>FIRST CHART · LAYOUT</a:t>
             </a:r>
@@ -4564,9 +4564,9 @@
                 <a:solidFill>
                   <a:srgbClr val="151515"/>
                 </a:solidFill>
-                <a:latin typeface="Overpass" pitchFamily="34" charset="0"/>
-                <a:ea typeface="Overpass" pitchFamily="34" charset="-122"/>
-                <a:cs typeface="Overpass" pitchFamily="34" charset="-120"/>
+                <a:latin typeface="Red Hat Display" pitchFamily="34" charset="0"/>
+                <a:ea typeface="Red Hat Display" pitchFamily="34" charset="-122"/>
+                <a:cs typeface="Red Hat Display" pitchFamily="34" charset="-120"/>
               </a:rPr>
               <a:t>Chart anatomy</a:t>
             </a:r>
@@ -5161,9 +5161,9 @@
                 <a:solidFill>
                   <a:srgbClr val="EE0000"/>
                 </a:solidFill>
-                <a:latin typeface="Overpass" pitchFamily="34" charset="0"/>
-                <a:ea typeface="Overpass" pitchFamily="34" charset="-122"/>
-                <a:cs typeface="Overpass" pitchFamily="34" charset="-120"/>
+                <a:latin typeface="Red Hat Display" pitchFamily="34" charset="0"/>
+                <a:ea typeface="Red Hat Display" pitchFamily="34" charset="-122"/>
+                <a:cs typeface="Red Hat Display" pitchFamily="34" charset="-120"/>
               </a:rPr>
               <a:t>FIRST CHART · METADATA</a:t>
             </a:r>
@@ -5200,9 +5200,9 @@
                 <a:solidFill>
                   <a:srgbClr val="151515"/>
                 </a:solidFill>
-                <a:latin typeface="Overpass" pitchFamily="34" charset="0"/>
-                <a:ea typeface="Overpass" pitchFamily="34" charset="-122"/>
-                <a:cs typeface="Overpass" pitchFamily="34" charset="-120"/>
+                <a:latin typeface="Red Hat Display" pitchFamily="34" charset="0"/>
+                <a:ea typeface="Red Hat Display" pitchFamily="34" charset="-122"/>
+                <a:cs typeface="Red Hat Display" pitchFamily="34" charset="-120"/>
               </a:rPr>
               <a:t>Chart metadata fields</a:t>
             </a:r>
@@ -5743,9 +5743,9 @@
                 <a:solidFill>
                   <a:srgbClr val="EE0000"/>
                 </a:solidFill>
-                <a:latin typeface="Overpass" pitchFamily="34" charset="0"/>
-                <a:ea typeface="Overpass" pitchFamily="34" charset="-122"/>
-                <a:cs typeface="Overpass" pitchFamily="34" charset="-120"/>
+                <a:latin typeface="Red Hat Display" pitchFamily="34" charset="0"/>
+                <a:ea typeface="Red Hat Display" pitchFamily="34" charset="-122"/>
+                <a:cs typeface="Red Hat Display" pitchFamily="34" charset="-120"/>
               </a:rPr>
               <a:t>FIRST CHART · LIFECYCLE</a:t>
             </a:r>
@@ -5782,9 +5782,9 @@
                 <a:solidFill>
                   <a:srgbClr val="151515"/>
                 </a:solidFill>
-                <a:latin typeface="Overpass" pitchFamily="34" charset="0"/>
-                <a:ea typeface="Overpass" pitchFamily="34" charset="-122"/>
-                <a:cs typeface="Overpass" pitchFamily="34" charset="-120"/>
+                <a:latin typeface="Red Hat Display" pitchFamily="34" charset="0"/>
+                <a:ea typeface="Red Hat Display" pitchFamily="34" charset="-122"/>
+                <a:cs typeface="Red Hat Display" pitchFamily="34" charset="-120"/>
               </a:rPr>
               <a:t>Install, upgrade, rollback</a:t>
             </a:r>
@@ -5971,9 +5971,9 @@
                 <a:solidFill>
                   <a:srgbClr val="EE0000"/>
                 </a:solidFill>
-                <a:latin typeface="Overpass" pitchFamily="34" charset="0"/>
-                <a:ea typeface="Overpass" pitchFamily="34" charset="-122"/>
-                <a:cs typeface="Overpass" pitchFamily="34" charset="-120"/>
+                <a:latin typeface="Red Hat Display" pitchFamily="34" charset="0"/>
+                <a:ea typeface="Red Hat Display" pitchFamily="34" charset="-122"/>
+                <a:cs typeface="Red Hat Display" pitchFamily="34" charset="-120"/>
               </a:rPr>
               <a:t>FIRST CHART · STORAGE</a:t>
             </a:r>
@@ -6010,9 +6010,9 @@
                 <a:solidFill>
                   <a:srgbClr val="151515"/>
                 </a:solidFill>
-                <a:latin typeface="Overpass" pitchFamily="34" charset="0"/>
-                <a:ea typeface="Overpass" pitchFamily="34" charset="-122"/>
-                <a:cs typeface="Overpass" pitchFamily="34" charset="-120"/>
+                <a:latin typeface="Red Hat Display" pitchFamily="34" charset="0"/>
+                <a:ea typeface="Red Hat Display" pitchFamily="34" charset="-122"/>
+                <a:cs typeface="Red Hat Display" pitchFamily="34" charset="-120"/>
               </a:rPr>
               <a:t>Release history and storage</a:t>
             </a:r>
@@ -6395,9 +6395,9 @@
                 <a:solidFill>
                   <a:srgbClr val="FFFFFF"/>
                 </a:solidFill>
-                <a:latin typeface="Overpass" pitchFamily="34" charset="0"/>
-                <a:ea typeface="Overpass" pitchFamily="34" charset="-122"/>
-                <a:cs typeface="Overpass" pitchFamily="34" charset="-120"/>
+                <a:latin typeface="Red Hat Display" pitchFamily="34" charset="0"/>
+                <a:ea typeface="Red Hat Display" pitchFamily="34" charset="-122"/>
+                <a:cs typeface="Red Hat Display" pitchFamily="34" charset="-120"/>
               </a:rPr>
               <a:t>04</a:t>
             </a:r>
@@ -6434,9 +6434,9 @@
                 <a:solidFill>
                   <a:srgbClr val="FFFFFF"/>
                 </a:solidFill>
-                <a:latin typeface="Overpass" pitchFamily="34" charset="0"/>
-                <a:ea typeface="Overpass" pitchFamily="34" charset="-122"/>
-                <a:cs typeface="Overpass" pitchFamily="34" charset="-120"/>
+                <a:latin typeface="Red Hat Display" pitchFamily="34" charset="0"/>
+                <a:ea typeface="Red Hat Display" pitchFamily="34" charset="-122"/>
+                <a:cs typeface="Red Hat Display" pitchFamily="34" charset="-120"/>
               </a:rPr>
               <a:t>Values</a:t>
             </a:r>
@@ -6624,9 +6624,9 @@
                 <a:solidFill>
                   <a:srgbClr val="EE0000"/>
                 </a:solidFill>
-                <a:latin typeface="Overpass" pitchFamily="34" charset="0"/>
-                <a:ea typeface="Overpass" pitchFamily="34" charset="-122"/>
-                <a:cs typeface="Overpass" pitchFamily="34" charset="-120"/>
+                <a:latin typeface="Red Hat Display" pitchFamily="34" charset="0"/>
+                <a:ea typeface="Red Hat Display" pitchFamily="34" charset="-122"/>
+                <a:cs typeface="Red Hat Display" pitchFamily="34" charset="-120"/>
               </a:rPr>
               <a:t>VALUES · MERGE ORDER</a:t>
             </a:r>
@@ -6663,9 +6663,9 @@
                 <a:solidFill>
                   <a:srgbClr val="151515"/>
                 </a:solidFill>
-                <a:latin typeface="Overpass" pitchFamily="34" charset="0"/>
-                <a:ea typeface="Overpass" pitchFamily="34" charset="-122"/>
-                <a:cs typeface="Overpass" pitchFamily="34" charset="-120"/>
+                <a:latin typeface="Red Hat Display" pitchFamily="34" charset="0"/>
+                <a:ea typeface="Red Hat Display" pitchFamily="34" charset="-122"/>
+                <a:cs typeface="Red Hat Display" pitchFamily="34" charset="-120"/>
               </a:rPr>
               <a:t>Values precedence</a:t>
             </a:r>
@@ -6852,9 +6852,9 @@
                 <a:solidFill>
                   <a:srgbClr val="EE0000"/>
                 </a:solidFill>
-                <a:latin typeface="Overpass" pitchFamily="34" charset="0"/>
-                <a:ea typeface="Overpass" pitchFamily="34" charset="-122"/>
-                <a:cs typeface="Overpass" pitchFamily="34" charset="-120"/>
+                <a:latin typeface="Red Hat Display" pitchFamily="34" charset="0"/>
+                <a:ea typeface="Red Hat Display" pitchFamily="34" charset="-122"/>
+                <a:cs typeface="Red Hat Display" pitchFamily="34" charset="-120"/>
               </a:rPr>
               <a:t>VALUES · COMMAND LINE</a:t>
             </a:r>
@@ -6891,9 +6891,9 @@
                 <a:solidFill>
                   <a:srgbClr val="151515"/>
                 </a:solidFill>
-                <a:latin typeface="Overpass" pitchFamily="34" charset="0"/>
-                <a:ea typeface="Overpass" pitchFamily="34" charset="-122"/>
-                <a:cs typeface="Overpass" pitchFamily="34" charset="-120"/>
+                <a:latin typeface="Red Hat Display" pitchFamily="34" charset="0"/>
+                <a:ea typeface="Red Hat Display" pitchFamily="34" charset="-122"/>
+                <a:cs typeface="Red Hat Display" pitchFamily="34" charset="-120"/>
               </a:rPr>
               <a:t>Override flags</a:t>
             </a:r>
@@ -7326,9 +7326,9 @@
                 <a:solidFill>
                   <a:srgbClr val="EE0000"/>
                 </a:solidFill>
-                <a:latin typeface="Overpass" pitchFamily="34" charset="0"/>
-                <a:ea typeface="Overpass" pitchFamily="34" charset="-122"/>
-                <a:cs typeface="Overpass" pitchFamily="34" charset="-120"/>
+                <a:latin typeface="Red Hat Display" pitchFamily="34" charset="0"/>
+                <a:ea typeface="Red Hat Display" pitchFamily="34" charset="-122"/>
+                <a:cs typeface="Red Hat Display" pitchFamily="34" charset="-120"/>
               </a:rPr>
               <a:t>VALUES · VALIDATION</a:t>
             </a:r>
@@ -7365,9 +7365,9 @@
                 <a:solidFill>
                   <a:srgbClr val="151515"/>
                 </a:solidFill>
-                <a:latin typeface="Overpass" pitchFamily="34" charset="0"/>
-                <a:ea typeface="Overpass" pitchFamily="34" charset="-122"/>
-                <a:cs typeface="Overpass" pitchFamily="34" charset="-120"/>
+                <a:latin typeface="Red Hat Display" pitchFamily="34" charset="0"/>
+                <a:ea typeface="Red Hat Display" pitchFamily="34" charset="-122"/>
+                <a:cs typeface="Red Hat Display" pitchFamily="34" charset="-120"/>
               </a:rPr>
               <a:t>Values schema</a:t>
             </a:r>
@@ -8146,9 +8146,9 @@
                 <a:solidFill>
                   <a:srgbClr val="FFFFFF"/>
                 </a:solidFill>
-                <a:latin typeface="Overpass" pitchFamily="34" charset="0"/>
-                <a:ea typeface="Overpass" pitchFamily="34" charset="-122"/>
-                <a:cs typeface="Overpass" pitchFamily="34" charset="-120"/>
+                <a:latin typeface="Red Hat Display" pitchFamily="34" charset="0"/>
+                <a:ea typeface="Red Hat Display" pitchFamily="34" charset="-122"/>
+                <a:cs typeface="Red Hat Display" pitchFamily="34" charset="-120"/>
               </a:rPr>
               <a:t>05</a:t>
             </a:r>
@@ -8185,9 +8185,9 @@
                 <a:solidFill>
                   <a:srgbClr val="FFFFFF"/>
                 </a:solidFill>
-                <a:latin typeface="Overpass" pitchFamily="34" charset="0"/>
-                <a:ea typeface="Overpass" pitchFamily="34" charset="-122"/>
-                <a:cs typeface="Overpass" pitchFamily="34" charset="-120"/>
+                <a:latin typeface="Red Hat Display" pitchFamily="34" charset="0"/>
+                <a:ea typeface="Red Hat Display" pitchFamily="34" charset="-122"/>
+                <a:cs typeface="Red Hat Display" pitchFamily="34" charset="-120"/>
               </a:rPr>
               <a:t>Templates</a:t>
             </a:r>
@@ -8375,9 +8375,9 @@
                 <a:solidFill>
                   <a:srgbClr val="EE0000"/>
                 </a:solidFill>
-                <a:latin typeface="Overpass" pitchFamily="34" charset="0"/>
-                <a:ea typeface="Overpass" pitchFamily="34" charset="-122"/>
-                <a:cs typeface="Overpass" pitchFamily="34" charset="-120"/>
+                <a:latin typeface="Red Hat Display" pitchFamily="34" charset="0"/>
+                <a:ea typeface="Red Hat Display" pitchFamily="34" charset="-122"/>
+                <a:cs typeface="Red Hat Display" pitchFamily="34" charset="-120"/>
               </a:rPr>
               <a:t>101 · SCOPE</a:t>
             </a:r>
@@ -8414,9 +8414,9 @@
                 <a:solidFill>
                   <a:srgbClr val="151515"/>
                 </a:solidFill>
-                <a:latin typeface="Overpass" pitchFamily="34" charset="0"/>
-                <a:ea typeface="Overpass" pitchFamily="34" charset="-122"/>
-                <a:cs typeface="Overpass" pitchFamily="34" charset="-120"/>
+                <a:latin typeface="Red Hat Display" pitchFamily="34" charset="0"/>
+                <a:ea typeface="Red Hat Display" pitchFamily="34" charset="-122"/>
+                <a:cs typeface="Red Hat Display" pitchFamily="34" charset="-120"/>
               </a:rPr>
               <a:t>Session agenda</a:t>
             </a:r>
@@ -8777,9 +8777,9 @@
                 <a:solidFill>
                   <a:srgbClr val="EE0000"/>
                 </a:solidFill>
-                <a:latin typeface="Overpass" pitchFamily="34" charset="0"/>
-                <a:ea typeface="Overpass" pitchFamily="34" charset="-122"/>
-                <a:cs typeface="Overpass" pitchFamily="34" charset="-120"/>
+                <a:latin typeface="Red Hat Display" pitchFamily="34" charset="0"/>
+                <a:ea typeface="Red Hat Display" pitchFamily="34" charset="-122"/>
+                <a:cs typeface="Red Hat Display" pitchFamily="34" charset="-120"/>
               </a:rPr>
               <a:t>TEMPLATES · SYNTAX</a:t>
             </a:r>
@@ -8816,9 +8816,9 @@
                 <a:solidFill>
                   <a:srgbClr val="151515"/>
                 </a:solidFill>
-                <a:latin typeface="Overpass" pitchFamily="34" charset="0"/>
-                <a:ea typeface="Overpass" pitchFamily="34" charset="-122"/>
-                <a:cs typeface="Overpass" pitchFamily="34" charset="-120"/>
+                <a:latin typeface="Red Hat Display" pitchFamily="34" charset="0"/>
+                <a:ea typeface="Red Hat Display" pitchFamily="34" charset="-122"/>
+                <a:cs typeface="Red Hat Display" pitchFamily="34" charset="-120"/>
               </a:rPr>
               <a:t>Go templates and Sprig</a:t>
             </a:r>
@@ -9449,9 +9449,9 @@
                 <a:solidFill>
                   <a:srgbClr val="EE0000"/>
                 </a:solidFill>
-                <a:latin typeface="Overpass" pitchFamily="34" charset="0"/>
-                <a:ea typeface="Overpass" pitchFamily="34" charset="-122"/>
-                <a:cs typeface="Overpass" pitchFamily="34" charset="-120"/>
+                <a:latin typeface="Red Hat Display" pitchFamily="34" charset="0"/>
+                <a:ea typeface="Red Hat Display" pitchFamily="34" charset="-122"/>
+                <a:cs typeface="Red Hat Display" pitchFamily="34" charset="-120"/>
               </a:rPr>
               <a:t>TEMPLATES · CONTROL</a:t>
             </a:r>
@@ -9488,9 +9488,9 @@
                 <a:solidFill>
                   <a:srgbClr val="151515"/>
                 </a:solidFill>
-                <a:latin typeface="Overpass" pitchFamily="34" charset="0"/>
-                <a:ea typeface="Overpass" pitchFamily="34" charset="-122"/>
-                <a:cs typeface="Overpass" pitchFamily="34" charset="-120"/>
+                <a:latin typeface="Red Hat Display" pitchFamily="34" charset="0"/>
+                <a:ea typeface="Red Hat Display" pitchFamily="34" charset="-122"/>
+                <a:cs typeface="Red Hat Display" pitchFamily="34" charset="-120"/>
               </a:rPr>
               <a:t>Flow control and scope</a:t>
             </a:r>
@@ -10013,9 +10013,9 @@
                 <a:solidFill>
                   <a:srgbClr val="EE0000"/>
                 </a:solidFill>
-                <a:latin typeface="Overpass" pitchFamily="34" charset="0"/>
-                <a:ea typeface="Overpass" pitchFamily="34" charset="-122"/>
-                <a:cs typeface="Overpass" pitchFamily="34" charset="-120"/>
+                <a:latin typeface="Red Hat Display" pitchFamily="34" charset="0"/>
+                <a:ea typeface="Red Hat Display" pitchFamily="34" charset="-122"/>
+                <a:cs typeface="Red Hat Display" pitchFamily="34" charset="-120"/>
               </a:rPr>
               <a:t>TEMPLATES · REUSE</a:t>
             </a:r>
@@ -10052,9 +10052,9 @@
                 <a:solidFill>
                   <a:srgbClr val="151515"/>
                 </a:solidFill>
-                <a:latin typeface="Overpass" pitchFamily="34" charset="0"/>
-                <a:ea typeface="Overpass" pitchFamily="34" charset="-122"/>
-                <a:cs typeface="Overpass" pitchFamily="34" charset="-120"/>
+                <a:latin typeface="Red Hat Display" pitchFamily="34" charset="0"/>
+                <a:ea typeface="Red Hat Display" pitchFamily="34" charset="-122"/>
+                <a:cs typeface="Red Hat Display" pitchFamily="34" charset="-120"/>
               </a:rPr>
               <a:t>Named templates</a:t>
             </a:r>
@@ -10739,9 +10739,9 @@
                 <a:solidFill>
                   <a:srgbClr val="EE0000"/>
                 </a:solidFill>
-                <a:latin typeface="Overpass" pitchFamily="34" charset="0"/>
-                <a:ea typeface="Overpass" pitchFamily="34" charset="-122"/>
-                <a:cs typeface="Overpass" pitchFamily="34" charset="-120"/>
+                <a:latin typeface="Red Hat Display" pitchFamily="34" charset="0"/>
+                <a:ea typeface="Red Hat Display" pitchFamily="34" charset="-122"/>
+                <a:cs typeface="Red Hat Display" pitchFamily="34" charset="-120"/>
               </a:rPr>
               <a:t>TEMPLATES · FUNCTIONS</a:t>
             </a:r>
@@ -10778,9 +10778,9 @@
                 <a:solidFill>
                   <a:srgbClr val="151515"/>
                 </a:solidFill>
-                <a:latin typeface="Overpass" pitchFamily="34" charset="0"/>
-                <a:ea typeface="Overpass" pitchFamily="34" charset="-122"/>
-                <a:cs typeface="Overpass" pitchFamily="34" charset="-120"/>
+                <a:latin typeface="Red Hat Display" pitchFamily="34" charset="0"/>
+                <a:ea typeface="Red Hat Display" pitchFamily="34" charset="-122"/>
+                <a:cs typeface="Red Hat Display" pitchFamily="34" charset="-120"/>
               </a:rPr>
               <a:t>tpl, required, fail, lookup</a:t>
             </a:r>
@@ -11724,9 +11724,9 @@
                 <a:solidFill>
                   <a:srgbClr val="EE0000"/>
                 </a:solidFill>
-                <a:latin typeface="Overpass" pitchFamily="34" charset="0"/>
-                <a:ea typeface="Overpass" pitchFamily="34" charset="-122"/>
-                <a:cs typeface="Overpass" pitchFamily="34" charset="-120"/>
+                <a:latin typeface="Red Hat Display" pitchFamily="34" charset="0"/>
+                <a:ea typeface="Red Hat Display" pitchFamily="34" charset="-122"/>
+                <a:cs typeface="Red Hat Display" pitchFamily="34" charset="-120"/>
               </a:rPr>
               <a:t>TEMPLATES · POST-INSTALL</a:t>
             </a:r>
@@ -11763,9 +11763,9 @@
                 <a:solidFill>
                   <a:srgbClr val="151515"/>
                 </a:solidFill>
-                <a:latin typeface="Overpass" pitchFamily="34" charset="0"/>
-                <a:ea typeface="Overpass" pitchFamily="34" charset="-122"/>
-                <a:cs typeface="Overpass" pitchFamily="34" charset="-120"/>
+                <a:latin typeface="Red Hat Display" pitchFamily="34" charset="0"/>
+                <a:ea typeface="Red Hat Display" pitchFamily="34" charset="-122"/>
+                <a:cs typeface="Red Hat Display" pitchFamily="34" charset="-120"/>
               </a:rPr>
               <a:t>Post-install notes</a:t>
             </a:r>
@@ -12202,9 +12202,9 @@
                 <a:solidFill>
                   <a:srgbClr val="FFFFFF"/>
                 </a:solidFill>
-                <a:latin typeface="Overpass" pitchFamily="34" charset="0"/>
-                <a:ea typeface="Overpass" pitchFamily="34" charset="-122"/>
-                <a:cs typeface="Overpass" pitchFamily="34" charset="-120"/>
+                <a:latin typeface="Red Hat Display" pitchFamily="34" charset="0"/>
+                <a:ea typeface="Red Hat Display" pitchFamily="34" charset="-122"/>
+                <a:cs typeface="Red Hat Display" pitchFamily="34" charset="-120"/>
               </a:rPr>
               <a:t>06</a:t>
             </a:r>
@@ -12241,9 +12241,9 @@
                 <a:solidFill>
                   <a:srgbClr val="FFFFFF"/>
                 </a:solidFill>
-                <a:latin typeface="Overpass" pitchFamily="34" charset="0"/>
-                <a:ea typeface="Overpass" pitchFamily="34" charset="-122"/>
-                <a:cs typeface="Overpass" pitchFamily="34" charset="-120"/>
+                <a:latin typeface="Red Hat Display" pitchFamily="34" charset="0"/>
+                <a:ea typeface="Red Hat Display" pitchFamily="34" charset="-122"/>
+                <a:cs typeface="Red Hat Display" pitchFamily="34" charset="-120"/>
               </a:rPr>
               <a:t>Config, data, hooks</a:t>
             </a:r>
@@ -12431,9 +12431,9 @@
                 <a:solidFill>
                   <a:srgbClr val="EE0000"/>
                 </a:solidFill>
-                <a:latin typeface="Overpass" pitchFamily="34" charset="0"/>
-                <a:ea typeface="Overpass" pitchFamily="34" charset="-122"/>
-                <a:cs typeface="Overpass" pitchFamily="34" charset="-120"/>
+                <a:latin typeface="Red Hat Display" pitchFamily="34" charset="0"/>
+                <a:ea typeface="Red Hat Display" pitchFamily="34" charset="-122"/>
+                <a:cs typeface="Red Hat Display" pitchFamily="34" charset="-120"/>
               </a:rPr>
               <a:t>CONFIG · ROLLOUTS</a:t>
             </a:r>
@@ -12470,9 +12470,9 @@
                 <a:solidFill>
                   <a:srgbClr val="151515"/>
                 </a:solidFill>
-                <a:latin typeface="Overpass" pitchFamily="34" charset="0"/>
-                <a:ea typeface="Overpass" pitchFamily="34" charset="-122"/>
-                <a:cs typeface="Overpass" pitchFamily="34" charset="-120"/>
+                <a:latin typeface="Red Hat Display" pitchFamily="34" charset="0"/>
+                <a:ea typeface="Red Hat Display" pitchFamily="34" charset="-122"/>
+                <a:cs typeface="Red Hat Display" pitchFamily="34" charset="-120"/>
               </a:rPr>
               <a:t>Config rollouts with checksums</a:t>
             </a:r>
@@ -12995,9 +12995,9 @@
                 <a:solidFill>
                   <a:srgbClr val="EE0000"/>
                 </a:solidFill>
-                <a:latin typeface="Overpass" pitchFamily="34" charset="0"/>
-                <a:ea typeface="Overpass" pitchFamily="34" charset="-122"/>
-                <a:cs typeface="Overpass" pitchFamily="34" charset="-120"/>
+                <a:latin typeface="Red Hat Display" pitchFamily="34" charset="0"/>
+                <a:ea typeface="Red Hat Display" pitchFamily="34" charset="-122"/>
+                <a:cs typeface="Red Hat Display" pitchFamily="34" charset="-120"/>
               </a:rPr>
               <a:t>CONFIG · SECRETS</a:t>
             </a:r>
@@ -13034,9 +13034,9 @@
                 <a:solidFill>
                   <a:srgbClr val="151515"/>
                 </a:solidFill>
-                <a:latin typeface="Overpass" pitchFamily="34" charset="0"/>
-                <a:ea typeface="Overpass" pitchFamily="34" charset="-122"/>
-                <a:cs typeface="Overpass" pitchFamily="34" charset="-120"/>
+                <a:latin typeface="Red Hat Display" pitchFamily="34" charset="0"/>
+                <a:ea typeface="Red Hat Display" pitchFamily="34" charset="-122"/>
+                <a:cs typeface="Red Hat Display" pitchFamily="34" charset="-120"/>
               </a:rPr>
               <a:t>Secret management options</a:t>
             </a:r>
@@ -14177,9 +14177,9 @@
                 <a:solidFill>
                   <a:srgbClr val="EE0000"/>
                 </a:solidFill>
-                <a:latin typeface="Overpass" pitchFamily="34" charset="0"/>
-                <a:ea typeface="Overpass" pitchFamily="34" charset="-122"/>
-                <a:cs typeface="Overpass" pitchFamily="34" charset="-120"/>
+                <a:latin typeface="Red Hat Display" pitchFamily="34" charset="0"/>
+                <a:ea typeface="Red Hat Display" pitchFamily="34" charset="-122"/>
+                <a:cs typeface="Red Hat Display" pitchFamily="34" charset="-120"/>
               </a:rPr>
               <a:t>DATA · DEPENDENCIES</a:t>
             </a:r>
@@ -14216,9 +14216,9 @@
                 <a:solidFill>
                   <a:srgbClr val="151515"/>
                 </a:solidFill>
-                <a:latin typeface="Overpass" pitchFamily="34" charset="0"/>
-                <a:ea typeface="Overpass" pitchFamily="34" charset="-122"/>
-                <a:cs typeface="Overpass" pitchFamily="34" charset="-120"/>
+                <a:latin typeface="Red Hat Display" pitchFamily="34" charset="0"/>
+                <a:ea typeface="Red Hat Display" pitchFamily="34" charset="-122"/>
+                <a:cs typeface="Red Hat Display" pitchFamily="34" charset="-120"/>
               </a:rPr>
               <a:t>Subcharts and the Postgres operator</a:t>
             </a:r>
@@ -14405,9 +14405,9 @@
                 <a:solidFill>
                   <a:srgbClr val="EE0000"/>
                 </a:solidFill>
-                <a:latin typeface="Overpass" pitchFamily="34" charset="0"/>
-                <a:ea typeface="Overpass" pitchFamily="34" charset="-122"/>
-                <a:cs typeface="Overpass" pitchFamily="34" charset="-120"/>
+                <a:latin typeface="Red Hat Display" pitchFamily="34" charset="0"/>
+                <a:ea typeface="Red Hat Display" pitchFamily="34" charset="-122"/>
+                <a:cs typeface="Red Hat Display" pitchFamily="34" charset="-120"/>
               </a:rPr>
               <a:t>DATA · HOOKS</a:t>
             </a:r>
@@ -14444,9 +14444,9 @@
                 <a:solidFill>
                   <a:srgbClr val="151515"/>
                 </a:solidFill>
-                <a:latin typeface="Overpass" pitchFamily="34" charset="0"/>
-                <a:ea typeface="Overpass" pitchFamily="34" charset="-122"/>
-                <a:cs typeface="Overpass" pitchFamily="34" charset="-120"/>
+                <a:latin typeface="Red Hat Display" pitchFamily="34" charset="0"/>
+                <a:ea typeface="Red Hat Display" pitchFamily="34" charset="-122"/>
+                <a:cs typeface="Red Hat Display" pitchFamily="34" charset="-120"/>
               </a:rPr>
               <a:t>Migration hooks</a:t>
             </a:r>
@@ -14601,9 +14601,9 @@
                 <a:solidFill>
                   <a:srgbClr val="FFFFFF"/>
                 </a:solidFill>
-                <a:latin typeface="Overpass" pitchFamily="34" charset="0"/>
-                <a:ea typeface="Overpass" pitchFamily="34" charset="-122"/>
-                <a:cs typeface="Overpass" pitchFamily="34" charset="-120"/>
+                <a:latin typeface="Red Hat Display" pitchFamily="34" charset="0"/>
+                <a:ea typeface="Red Hat Display" pitchFamily="34" charset="-122"/>
+                <a:cs typeface="Red Hat Display" pitchFamily="34" charset="-120"/>
               </a:rPr>
               <a:t>01</a:t>
             </a:r>
@@ -14640,9 +14640,9 @@
                 <a:solidFill>
                   <a:srgbClr val="FFFFFF"/>
                 </a:solidFill>
-                <a:latin typeface="Overpass" pitchFamily="34" charset="0"/>
-                <a:ea typeface="Overpass" pitchFamily="34" charset="-122"/>
-                <a:cs typeface="Overpass" pitchFamily="34" charset="-120"/>
+                <a:latin typeface="Red Hat Display" pitchFamily="34" charset="0"/>
+                <a:ea typeface="Red Hat Display" pitchFamily="34" charset="-122"/>
+                <a:cs typeface="Red Hat Display" pitchFamily="34" charset="-120"/>
               </a:rPr>
               <a:t>Why Helm</a:t>
             </a:r>
@@ -14830,9 +14830,9 @@
                 <a:solidFill>
                   <a:srgbClr val="EE0000"/>
                 </a:solidFill>
-                <a:latin typeface="Overpass" pitchFamily="34" charset="0"/>
-                <a:ea typeface="Overpass" pitchFamily="34" charset="-122"/>
-                <a:cs typeface="Overpass" pitchFamily="34" charset="-120"/>
+                <a:latin typeface="Red Hat Display" pitchFamily="34" charset="0"/>
+                <a:ea typeface="Red Hat Display" pitchFamily="34" charset="-122"/>
+                <a:cs typeface="Red Hat Display" pitchFamily="34" charset="-120"/>
               </a:rPr>
               <a:t>DATA · HOOK CONTROLS</a:t>
             </a:r>
@@ -14869,9 +14869,9 @@
                 <a:solidFill>
                   <a:srgbClr val="151515"/>
                 </a:solidFill>
-                <a:latin typeface="Overpass" pitchFamily="34" charset="0"/>
-                <a:ea typeface="Overpass" pitchFamily="34" charset="-122"/>
-                <a:cs typeface="Overpass" pitchFamily="34" charset="-120"/>
+                <a:latin typeface="Red Hat Display" pitchFamily="34" charset="0"/>
+                <a:ea typeface="Red Hat Display" pitchFamily="34" charset="-122"/>
+                <a:cs typeface="Red Hat Display" pitchFamily="34" charset="-120"/>
               </a:rPr>
               <a:t>Hook weights and policies</a:t>
             </a:r>
@@ -15980,9 +15980,9 @@
                 <a:solidFill>
                   <a:srgbClr val="FFFFFF"/>
                 </a:solidFill>
-                <a:latin typeface="Overpass" pitchFamily="34" charset="0"/>
-                <a:ea typeface="Overpass" pitchFamily="34" charset="-122"/>
-                <a:cs typeface="Overpass" pitchFamily="34" charset="-120"/>
+                <a:latin typeface="Red Hat Display" pitchFamily="34" charset="0"/>
+                <a:ea typeface="Red Hat Display" pitchFamily="34" charset="-122"/>
+                <a:cs typeface="Red Hat Display" pitchFamily="34" charset="-120"/>
               </a:rPr>
               <a:t>07</a:t>
             </a:r>
@@ -16019,9 +16019,9 @@
                 <a:solidFill>
                   <a:srgbClr val="FFFFFF"/>
                 </a:solidFill>
-                <a:latin typeface="Overpass" pitchFamily="34" charset="0"/>
-                <a:ea typeface="Overpass" pitchFamily="34" charset="-122"/>
-                <a:cs typeface="Overpass" pitchFamily="34" charset="-120"/>
+                <a:latin typeface="Red Hat Display" pitchFamily="34" charset="0"/>
+                <a:ea typeface="Red Hat Display" pitchFamily="34" charset="-122"/>
+                <a:cs typeface="Red Hat Display" pitchFamily="34" charset="-120"/>
               </a:rPr>
               <a:t>Safe releases</a:t>
             </a:r>
@@ -16209,9 +16209,9 @@
                 <a:solidFill>
                   <a:srgbClr val="EE0000"/>
                 </a:solidFill>
-                <a:latin typeface="Overpass" pitchFamily="34" charset="0"/>
-                <a:ea typeface="Overpass" pitchFamily="34" charset="-122"/>
-                <a:cs typeface="Overpass" pitchFamily="34" charset="-120"/>
+                <a:latin typeface="Red Hat Display" pitchFamily="34" charset="0"/>
+                <a:ea typeface="Red Hat Display" pitchFamily="34" charset="-122"/>
+                <a:cs typeface="Red Hat Display" pitchFamily="34" charset="-120"/>
               </a:rPr>
               <a:t>SAFE RELEASES · FAILURE</a:t>
             </a:r>
@@ -16248,9 +16248,9 @@
                 <a:solidFill>
                   <a:srgbClr val="151515"/>
                 </a:solidFill>
-                <a:latin typeface="Overpass" pitchFamily="34" charset="0"/>
-                <a:ea typeface="Overpass" pitchFamily="34" charset="-122"/>
-                <a:cs typeface="Overpass" pitchFamily="34" charset="-120"/>
+                <a:latin typeface="Red Hat Display" pitchFamily="34" charset="0"/>
+                <a:ea typeface="Red Hat Display" pitchFamily="34" charset="-122"/>
+                <a:cs typeface="Red Hat Display" pitchFamily="34" charset="-120"/>
               </a:rPr>
               <a:t>Wait and rollback-on-failure</a:t>
             </a:r>
@@ -16827,9 +16827,9 @@
                 <a:solidFill>
                   <a:srgbClr val="EE0000"/>
                 </a:solidFill>
-                <a:latin typeface="Overpass" pitchFamily="34" charset="0"/>
-                <a:ea typeface="Overpass" pitchFamily="34" charset="-122"/>
-                <a:cs typeface="Overpass" pitchFamily="34" charset="-120"/>
+                <a:latin typeface="Red Hat Display" pitchFamily="34" charset="0"/>
+                <a:ea typeface="Red Hat Display" pitchFamily="34" charset="-122"/>
+                <a:cs typeface="Red Hat Display" pitchFamily="34" charset="-120"/>
               </a:rPr>
               <a:t>SAFE RELEASES · APPLY</a:t>
             </a:r>
@@ -16866,9 +16866,9 @@
                 <a:solidFill>
                   <a:srgbClr val="151515"/>
                 </a:solidFill>
-                <a:latin typeface="Overpass" pitchFamily="34" charset="0"/>
-                <a:ea typeface="Overpass" pitchFamily="34" charset="-122"/>
-                <a:cs typeface="Overpass" pitchFamily="34" charset="-120"/>
+                <a:latin typeface="Red Hat Display" pitchFamily="34" charset="0"/>
+                <a:ea typeface="Red Hat Display" pitchFamily="34" charset="-122"/>
+                <a:cs typeface="Red Hat Display" pitchFamily="34" charset="-120"/>
               </a:rPr>
               <a:t>Server-side apply</a:t>
             </a:r>
@@ -17235,9 +17235,9 @@
                 <a:solidFill>
                   <a:srgbClr val="EE0000"/>
                 </a:solidFill>
-                <a:latin typeface="Overpass" pitchFamily="34" charset="0"/>
-                <a:ea typeface="Overpass" pitchFamily="34" charset="-122"/>
-                <a:cs typeface="Overpass" pitchFamily="34" charset="-120"/>
+                <a:latin typeface="Red Hat Display" pitchFamily="34" charset="0"/>
+                <a:ea typeface="Red Hat Display" pitchFamily="34" charset="-122"/>
+                <a:cs typeface="Red Hat Display" pitchFamily="34" charset="-120"/>
               </a:rPr>
               <a:t>SAFE RELEASES · VERIFY</a:t>
             </a:r>
@@ -17274,9 +17274,9 @@
                 <a:solidFill>
                   <a:srgbClr val="151515"/>
                 </a:solidFill>
-                <a:latin typeface="Overpass" pitchFamily="34" charset="0"/>
-                <a:ea typeface="Overpass" pitchFamily="34" charset="-122"/>
-                <a:cs typeface="Overpass" pitchFamily="34" charset="-120"/>
+                <a:latin typeface="Red Hat Display" pitchFamily="34" charset="0"/>
+                <a:ea typeface="Red Hat Display" pitchFamily="34" charset="-122"/>
+                <a:cs typeface="Red Hat Display" pitchFamily="34" charset="-120"/>
               </a:rPr>
               <a:t>Lint, template, dry-run</a:t>
             </a:r>
@@ -17655,9 +17655,9 @@
                 <a:solidFill>
                   <a:srgbClr val="EE0000"/>
                 </a:solidFill>
-                <a:latin typeface="Overpass" pitchFamily="34" charset="0"/>
-                <a:ea typeface="Overpass" pitchFamily="34" charset="-122"/>
-                <a:cs typeface="Overpass" pitchFamily="34" charset="-120"/>
+                <a:latin typeface="Red Hat Display" pitchFamily="34" charset="0"/>
+                <a:ea typeface="Red Hat Display" pitchFamily="34" charset="-122"/>
+                <a:cs typeface="Red Hat Display" pitchFamily="34" charset="-120"/>
               </a:rPr>
               <a:t>NEXT STEPS</a:t>
             </a:r>
@@ -17694,9 +17694,9 @@
                 <a:solidFill>
                   <a:srgbClr val="151515"/>
                 </a:solidFill>
-                <a:latin typeface="Overpass" pitchFamily="34" charset="0"/>
-                <a:ea typeface="Overpass" pitchFamily="34" charset="-122"/>
-                <a:cs typeface="Overpass" pitchFamily="34" charset="-120"/>
+                <a:latin typeface="Red Hat Display" pitchFamily="34" charset="0"/>
+                <a:ea typeface="Red Hat Display" pitchFamily="34" charset="-122"/>
+                <a:cs typeface="Red Hat Display" pitchFamily="34" charset="-120"/>
               </a:rPr>
               <a:t>Next: Helm 201</a:t>
             </a:r>
@@ -18063,9 +18063,9 @@
                 <a:solidFill>
                   <a:srgbClr val="EE0000"/>
                 </a:solidFill>
-                <a:latin typeface="Overpass" pitchFamily="34" charset="0"/>
-                <a:ea typeface="Overpass" pitchFamily="34" charset="-122"/>
-                <a:cs typeface="Overpass" pitchFamily="34" charset="-120"/>
+                <a:latin typeface="Red Hat Display" pitchFamily="34" charset="0"/>
+                <a:ea typeface="Red Hat Display" pitchFamily="34" charset="-122"/>
+                <a:cs typeface="Red Hat Display" pitchFamily="34" charset="-120"/>
               </a:rPr>
               <a:t>APPENDIX · MIGRATION</a:t>
             </a:r>
@@ -18102,9 +18102,9 @@
                 <a:solidFill>
                   <a:srgbClr val="151515"/>
                 </a:solidFill>
-                <a:latin typeface="Overpass" pitchFamily="34" charset="0"/>
-                <a:ea typeface="Overpass" pitchFamily="34" charset="-122"/>
-                <a:cs typeface="Overpass" pitchFamily="34" charset="-120"/>
+                <a:latin typeface="Red Hat Display" pitchFamily="34" charset="0"/>
+                <a:ea typeface="Red Hat Display" pitchFamily="34" charset="-122"/>
+                <a:cs typeface="Red Hat Display" pitchFamily="34" charset="-120"/>
               </a:rPr>
               <a:t>Helm 3 to 4 flag map</a:t>
             </a:r>
@@ -19442,9 +19442,9 @@
                 <a:solidFill>
                   <a:srgbClr val="EE0000"/>
                 </a:solidFill>
-                <a:latin typeface="Overpass" pitchFamily="34" charset="0"/>
-                <a:ea typeface="Overpass" pitchFamily="34" charset="-122"/>
-                <a:cs typeface="Overpass" pitchFamily="34" charset="-120"/>
+                <a:latin typeface="Red Hat Display" pitchFamily="34" charset="0"/>
+                <a:ea typeface="Red Hat Display" pitchFamily="34" charset="-122"/>
+                <a:cs typeface="Red Hat Display" pitchFamily="34" charset="-120"/>
               </a:rPr>
               <a:t>WHY HELM · THE PROBLEM</a:t>
             </a:r>
@@ -19481,9 +19481,9 @@
                 <a:solidFill>
                   <a:srgbClr val="151515"/>
                 </a:solidFill>
-                <a:latin typeface="Overpass" pitchFamily="34" charset="0"/>
-                <a:ea typeface="Overpass" pitchFamily="34" charset="-122"/>
-                <a:cs typeface="Overpass" pitchFamily="34" charset="-120"/>
+                <a:latin typeface="Red Hat Display" pitchFamily="34" charset="0"/>
+                <a:ea typeface="Red Hat Display" pitchFamily="34" charset="-122"/>
+                <a:cs typeface="Red Hat Display" pitchFamily="34" charset="-120"/>
               </a:rPr>
               <a:t>YAML across environments</a:t>
             </a:r>
@@ -19670,9 +19670,9 @@
                 <a:solidFill>
                   <a:srgbClr val="EE0000"/>
                 </a:solidFill>
-                <a:latin typeface="Overpass" pitchFamily="34" charset="0"/>
-                <a:ea typeface="Overpass" pitchFamily="34" charset="-122"/>
-                <a:cs typeface="Overpass" pitchFamily="34" charset="-120"/>
+                <a:latin typeface="Red Hat Display" pitchFamily="34" charset="0"/>
+                <a:ea typeface="Red Hat Display" pitchFamily="34" charset="-122"/>
+                <a:cs typeface="Red Hat Display" pitchFamily="34" charset="-120"/>
               </a:rPr>
               <a:t>WHY HELM · THE TOOL</a:t>
             </a:r>
@@ -19709,9 +19709,9 @@
                 <a:solidFill>
                   <a:srgbClr val="151515"/>
                 </a:solidFill>
-                <a:latin typeface="Overpass" pitchFamily="34" charset="0"/>
-                <a:ea typeface="Overpass" pitchFamily="34" charset="-122"/>
-                <a:cs typeface="Overpass" pitchFamily="34" charset="-120"/>
+                <a:latin typeface="Red Hat Display" pitchFamily="34" charset="0"/>
+                <a:ea typeface="Red Hat Display" pitchFamily="34" charset="-122"/>
+                <a:cs typeface="Red Hat Display" pitchFamily="34" charset="-120"/>
               </a:rPr>
               <a:t>Package and release manager</a:t>
             </a:r>
@@ -20034,9 +20034,9 @@
                 <a:solidFill>
                   <a:srgbClr val="EE0000"/>
                 </a:solidFill>
-                <a:latin typeface="Overpass" pitchFamily="34" charset="0"/>
-                <a:ea typeface="Overpass" pitchFamily="34" charset="-122"/>
-                <a:cs typeface="Overpass" pitchFamily="34" charset="-120"/>
+                <a:latin typeface="Red Hat Display" pitchFamily="34" charset="0"/>
+                <a:ea typeface="Red Hat Display" pitchFamily="34" charset="-122"/>
+                <a:cs typeface="Red Hat Display" pitchFamily="34" charset="-120"/>
               </a:rPr>
               <a:t>WHY HELM · HELM 4</a:t>
             </a:r>
@@ -20073,9 +20073,9 @@
                 <a:solidFill>
                   <a:srgbClr val="151515"/>
                 </a:solidFill>
-                <a:latin typeface="Overpass" pitchFamily="34" charset="0"/>
-                <a:ea typeface="Overpass" pitchFamily="34" charset="-122"/>
-                <a:cs typeface="Overpass" pitchFamily="34" charset="-120"/>
+                <a:latin typeface="Red Hat Display" pitchFamily="34" charset="0"/>
+                <a:ea typeface="Red Hat Display" pitchFamily="34" charset="-122"/>
+                <a:cs typeface="Red Hat Display" pitchFamily="34" charset="-120"/>
               </a:rPr>
               <a:t>Helm 4 at a glance</a:t>
             </a:r>
@@ -21381,9 +21381,9 @@
                 <a:solidFill>
                   <a:srgbClr val="FFFFFF"/>
                 </a:solidFill>
-                <a:latin typeface="Overpass" pitchFamily="34" charset="0"/>
-                <a:ea typeface="Overpass" pitchFamily="34" charset="-122"/>
-                <a:cs typeface="Overpass" pitchFamily="34" charset="-120"/>
+                <a:latin typeface="Red Hat Display" pitchFamily="34" charset="0"/>
+                <a:ea typeface="Red Hat Display" pitchFamily="34" charset="-122"/>
+                <a:cs typeface="Red Hat Display" pitchFamily="34" charset="-120"/>
               </a:rPr>
               <a:t>02</a:t>
             </a:r>
@@ -21420,9 +21420,9 @@
                 <a:solidFill>
                   <a:srgbClr val="FFFFFF"/>
                 </a:solidFill>
-                <a:latin typeface="Overpass" pitchFamily="34" charset="0"/>
-                <a:ea typeface="Overpass" pitchFamily="34" charset="-122"/>
-                <a:cs typeface="Overpass" pitchFamily="34" charset="-120"/>
+                <a:latin typeface="Red Hat Display" pitchFamily="34" charset="0"/>
+                <a:ea typeface="Red Hat Display" pitchFamily="34" charset="-122"/>
+                <a:cs typeface="Red Hat Display" pitchFamily="34" charset="-120"/>
               </a:rPr>
               <a:t>Core concepts</a:t>
             </a:r>
@@ -21610,9 +21610,9 @@
                 <a:solidFill>
                   <a:srgbClr val="EE0000"/>
                 </a:solidFill>
-                <a:latin typeface="Overpass" pitchFamily="34" charset="0"/>
-                <a:ea typeface="Overpass" pitchFamily="34" charset="-122"/>
-                <a:cs typeface="Overpass" pitchFamily="34" charset="-120"/>
+                <a:latin typeface="Red Hat Display" pitchFamily="34" charset="0"/>
+                <a:ea typeface="Red Hat Display" pitchFamily="34" charset="-122"/>
+                <a:cs typeface="Red Hat Display" pitchFamily="34" charset="-120"/>
               </a:rPr>
               <a:t>CORE CONCEPTS · VOCABULARY</a:t>
             </a:r>
@@ -21649,9 +21649,9 @@
                 <a:solidFill>
                   <a:srgbClr val="151515"/>
                 </a:solidFill>
-                <a:latin typeface="Overpass" pitchFamily="34" charset="0"/>
-                <a:ea typeface="Overpass" pitchFamily="34" charset="-122"/>
-                <a:cs typeface="Overpass" pitchFamily="34" charset="-120"/>
+                <a:latin typeface="Red Hat Display" pitchFamily="34" charset="0"/>
+                <a:ea typeface="Red Hat Display" pitchFamily="34" charset="-122"/>
+                <a:cs typeface="Red Hat Display" pitchFamily="34" charset="-120"/>
               </a:rPr>
               <a:t>Chart, release, repository, values</a:t>
             </a:r>
@@ -21974,9 +21974,9 @@
                 <a:solidFill>
                   <a:srgbClr val="EE0000"/>
                 </a:solidFill>
-                <a:latin typeface="Overpass" pitchFamily="34" charset="0"/>
-                <a:ea typeface="Overpass" pitchFamily="34" charset="-122"/>
-                <a:cs typeface="Overpass" pitchFamily="34" charset="-120"/>
+                <a:latin typeface="Red Hat Display" pitchFamily="34" charset="0"/>
+                <a:ea typeface="Red Hat Display" pitchFamily="34" charset="-122"/>
+                <a:cs typeface="Red Hat Display" pitchFamily="34" charset="-120"/>
               </a:rPr>
               <a:t>CORE CONCEPTS · ARCHITECTURE</a:t>
             </a:r>
@@ -22013,9 +22013,9 @@
                 <a:solidFill>
                   <a:srgbClr val="151515"/>
                 </a:solidFill>
-                <a:latin typeface="Overpass" pitchFamily="34" charset="0"/>
-                <a:ea typeface="Overpass" pitchFamily="34" charset="-122"/>
-                <a:cs typeface="Overpass" pitchFamily="34" charset="-120"/>
+                <a:latin typeface="Red Hat Display" pitchFamily="34" charset="0"/>
+                <a:ea typeface="Red Hat Display" pitchFamily="34" charset="-122"/>
+                <a:cs typeface="Red Hat Display" pitchFamily="34" charset="-120"/>
               </a:rPr>
               <a:t>Client-only architecture</a:t>
             </a:r>

--- a/presentation/helm-101/Helm-101-r1.0.pptx
+++ b/presentation/helm-101/Helm-101-r1.0.pptx
@@ -1241,7 +1241,7 @@
           <a:p>
             <a:r>
               <a:rPr lang="en-US" dirty="0"/>
-              <a:t>What it shows: the five ways to set a value from the command line and how each types its input. --set guesses, so a comma in a value breaks it (--set config.defaultCarrier=ACME,Post fails with key Post has no value). --set-string forces a string, which matters for an image tag such as 12345. --set-json passes structured data. --set-file reads a file. --set-literal keeps commas and special characters verbatim. What to show: run the first command from examples/05-values and then the --set-string variant with the unquoted --set, to see the schema reject the number. Fallback: chapter 05, section Precedence, which lists the five variants with the observed error text. For repeatable deployments, prefer -f files committed to Git and treat --set as the exception.</a:t>
+              <a:t>What it shows: the five ways to set a value from the command line and how each types its input. The commands assume the working directory examples/05-values, so the chart is ./shipping-service. --set guesses, so a comma in a value breaks it (--set config.defaultCarrier=ACME,Post fails with key Post has no value). --set-string forces a string, which matters for an image tag such as 12345. --set-json passes structured data. --set-file reads a file. --set-literal keeps commas and special characters verbatim. What to show: run the first command and then the --set-string variant with the unquoted --set, to see the schema reject the number. Fallback: chapter 05, section Precedence, which lists the five variants with the observed error text. For repeatable deployments, prefer -f files committed to Git and treat --set as the exception.</a:t>
             </a:r>
             <a:endParaRPr lang="en-US" dirty="0"/>
           </a:p>
@@ -1505,7 +1505,7 @@
           <a:p>
             <a:r>
               <a:rPr lang="en-US" dirty="0"/>
-              <a:t>What it shows: the seven sections of the 101 in order. Each section maps to one to three tutorial chapters: Why Helm and Core concepts to chapters 02 and 03, First chart to chapter 04, Values to chapter 05, Templates to chapters 06 and 07, Config, data, hooks to chapters 08 through 11, and Safe releases to chapter 12. What to show: nothing live in this slide. Fallback: the chapter list in _docs/00-outline.md carries the same structure with durations. The running example throughout is the shipping service, a FastAPI application that every chart in the tutorial packages. The 101 ends with a flag map for readers migrating scripts from Helm 3.</a:t>
+              <a:t>What it shows: the seven sections of the 101 in order. Each section maps to one to three tutorial chapters: Why Helm and Core concepts to chapters 02 and 03, First chart to chapter 04, Values to chapter 05, Templates to chapters 06 and 07, Config, data, hooks to chapters 08 through 11, and Safe releases to chapter 12. What to show: nothing live in this slide. Fallback: the chapter list in the outline (chapter 00) carries the same structure with durations. The running example throughout is the shipping service, a FastAPI application that every chart in the tutorial packages. The 101 ends with a flag map for readers migrating scripts from Helm 3.</a:t>
             </a:r>
             <a:endParaRPr lang="en-US" dirty="0"/>
           </a:p>
@@ -1945,7 +1945,7 @@
           <a:p>
             <a:r>
               <a:rPr lang="en-US" dirty="0"/>
-              <a:t>What it shows: a NOTES.txt template. It renders with the same context as any template and is printed by helm install and helm upgrade; helm get notes reprints it later. This one branches on service.type so a NodePort release gets the minikube service command and every other type gets kubectl get svc. The file in templates/ is the place for the next command the reader needs. The same context gives access to .Files: .Files.Get returns a chart file as a string, and .Files.Glob with .AsConfig renders files as ConfigMap data. What to show: examples/07-helpers-notes, helm install with --dry-run=client prints the NOTES block, and helm get notes shipping -n hfd-07 after a live install. Fallback: the observed NOTES output in chapter 07. Note that helm template never prints notes.</a:t>
+              <a:t>What it shows: a NOTES.txt template. It renders with the same context as any template and is printed by helm install and helm upgrade; helm get notes reprints it later. This one branches on service.type so a NodePort release gets the minikube service command and every other type gets kubectl get svc. The file in templates/ is the place for the next command the reader needs. The same context gives access to .Files: .Files.Get returns a chart file as a string, and .Files.Glob with .AsConfig renders files as ConfigMap data. What to show: examples/07-helpers-notes, helm install with --dry-run=client prints the NOTES block, and helm get notes shipping -n hfd-07 after a live install. Fallback: the observed NOTES output in chapter 07. helm template never prints notes.</a:t>
             </a:r>
             <a:endParaRPr lang="en-US" dirty="0"/>
           </a:p>
@@ -2385,7 +2385,7 @@
           <a:p>
             <a:r>
               <a:rPr lang="en-US" dirty="0"/>
-              <a:t>What it shows: two placements of the migration Job and how each fails on a fresh install. Option A, pre-install, runs before the release resources, so the Job pod references a Secret that the same release has not created yet and waits until the timeout. Option B, post-install with --wait, runs only after the Deployment is ready, but the readiness probe on /healthz needs the tables, so the wait never ends. The chart's fix is the post-install hook with the readiness probe on /health, which does not touch the database. The golden umbrella build hit this deadlock and recorded it in _plans/evidence/golden-01-install-attempt1-deadlock.txt. What to show: examples/11-hooks-migrations, ./demo.sh deadlock and ./demo.sh preinstall each end with a timeout after 90 seconds. Fallback: the Error: release platform failed text in chapter 11. A pre-install hook is correct when the database already exists, for example an external one.</a:t>
+              <a:t>What it shows: two placements of the migration Job and how each fails on a fresh install. Option A, pre-install, runs before the release resources, so the Job pod references a Secret that the same release has not created yet and waits until the timeout. Option B, post-install with --wait, runs only after the Deployment is ready, but the readiness probe on /healthz needs the tables, so the wait never ends. The chart's fix is the post-install hook with the readiness probe on /health, which does not touch the database. The platform umbrella chart hit this deadlock on its first install attempt. What to show: examples/11-hooks-migrations, ./demo.sh deadlock and ./demo.sh preinstall each end with a timeout after 90 seconds. Fallback: the Error: release platform failed text in chapter 11. A pre-install hook is correct when the database already exists, for example an external one.</a:t>
             </a:r>
             <a:endParaRPr lang="en-US" dirty="0"/>
           </a:p>
@@ -2649,7 +2649,7 @@
           <a:p>
             <a:r>
               <a:rPr lang="en-US" dirty="0"/>
-              <a:t>What it shows: chapter 12 and the verification commands from earlier chapters. What to show: examples/12-release-lifecycle, ./demo.sh offline for the unit tests and ./demo.sh for the eleven live steps. Fallback: _plans/evidence/golden-08-negative-control.txt records a failed upgrade rolled back on the golden platform release.</a:t>
+              <a:t>What it shows: chapter 12 and the verification commands from earlier chapters. What to show: examples/12-release-lifecycle, ./demo.sh offline for the unit tests and ./demo.sh for the eleven live steps. Fallback: the observed failure path in chapter 12 shows a failed upgrade rolled back on the platform release.</a:t>
             </a:r>
             <a:endParaRPr lang="en-US" dirty="0"/>
           </a:p>
@@ -2737,7 +2737,7 @@
           <a:p>
             <a:r>
               <a:rPr lang="en-US" dirty="0"/>
-              <a:t>What it shows: a deliberate failure and the two recovery behaviors. Setting image.tag to a tag that does not exist makes the new pod fail to pull; with --wait the upgrade times out, the revision is marked failed, and --rollback-on-failure rolls back to the last successful revision as a new revision. The failed attempt keeps its own revision number, and the rollback is revision 5 with the description Rollback to 3, not a return to 3. The old ReplicaSet kept serving during the whole failure. --timeout bounds each wait and defaults to five minutes; --wait-for-jobs adds Jobs to the wait. What to show: examples/12-release-lifecycle, ./demo.sh steps 3 and 4, then kubectl describe pod, because Helm's message (Pending termination: 1) describes the Deployment and not the cause. Fallback: _plans/evidence/golden-08-negative-control.txt and the observed failure path in chapter 12.</a:t>
+              <a:t>What it shows: an induced failure and the two recovery behaviors. The commands assume the working directory examples/12-release-lifecycle. Setting image.tag to a tag that does not exist makes the new pod fail to pull; with --wait the upgrade times out, the revision is marked failed, and --rollback-on-failure rolls back to the last successful revision as a new revision. The failed attempt keeps its own revision number, and the rollback is revision 5 with the description Rollback to 3, not a return to 3. The old ReplicaSet kept serving during the whole failure. --timeout bounds each wait and defaults to five minutes; --wait-for-jobs adds Jobs to the wait. What to show: examples/12-release-lifecycle, ./demo.sh steps 3 and 4, then kubectl describe pod, because Helm's message (Pending termination: 1) describes the Deployment and not the cause. Fallback: the observed failure path in chapter 12.</a:t>
             </a:r>
             <a:endParaRPr lang="en-US" dirty="0"/>
           </a:p>
@@ -2913,7 +2913,7 @@
           <a:p>
             <a:r>
               <a:rPr lang="en-US" dirty="0"/>
-              <a:t>What it shows: four levels of checking before anything changes in the cluster. helm lint renders every template and checks structure and the schema. helm template renders locally and, piped through kubeconform -strict, validates each object against the Kubernetes schemas; custom resources without a schema in the default catalog are skipped and reported in the summary. --dry-run=client renders and prints notes with no cluster connection. --dry-run=server connects, so kinds resolve against the API server, lookup returns live objects and .Capabilities.APIVersions reflects the real cluster. On Helm 4.3.0 it does not schema-validate fields: a string containerPort, an unknown field or a Pod Security violation all pass, so use kubeconform, or kubectl apply --server-side --dry-run=server on helm template output, for that. In Helm 4, --dry-run takes none, client or server. What to show: ./demo.sh offline in examples/05-values and examples/10-crds-operators; the second expects the postgres render to fail without the operator and shows the guard message. Fallback: chapter 10, the operator guard section, and chapter 13 in the 201 for the full debugging ladder. Remember that lint does not resolve import-values.</a:t>
+              <a:t>What it shows: four levels of checking before anything changes in the cluster. The commands assume the working directory examples/05-values. helm lint renders every template and checks structure and the schema. helm template renders locally and, piped through kubeconform -strict, validates each object against the Kubernetes schemas; custom resources without a schema in the default catalog are skipped and reported in the summary. --dry-run=client renders and prints notes with no cluster connection. --dry-run=server connects, so kinds resolve against the API server, lookup returns live objects and .Capabilities.APIVersions reflects the real cluster. On Helm 4.3.0 it does not schema-validate fields: a string containerPort, an unknown field or a Pod Security violation all pass, so use kubeconform, or kubectl apply --server-side --dry-run=server on helm template output, for that. In Helm 4, --dry-run takes none, client or server. What to show: ./demo.sh offline in examples/05-values and examples/10-crds-operators; the second expects the postgres render to fail without the operator and shows the guard message. Fallback: chapter 10, the operator guard section, and chapter 13 in the 201 for the full debugging ladder. Lint does not resolve import-values.</a:t>
             </a:r>
             <a:endParaRPr lang="en-US" dirty="0"/>
           </a:p>
@@ -3001,7 +3001,7 @@
           <a:p>
             <a:r>
               <a:rPr lang="en-US" dirty="0"/>
-              <a:t>What it shows: what the 201 adds, chapters 13 through 27. The 101 ends with a chart that installs, upgrades, rolls back and migrates its own database. The 201 treats that chart as a golden artifact: it is tested, packaged, signed, extended with plugins and promoted across environments. What to show: the golden charts under charts/ (shipping-service, notification-service, shipping-platform) and _plans/evidence/golden-01-install.txt for the umbrella install. Fallback: _docs/00-outline.md for the chapter list with durations. Keep the cheat sheet in appendix chapter 29 open during the 201; the flag map on the next slide is the 101 equivalent for scripts migrating from Helm 3.</a:t>
+              <a:t>What it shows: what the 201 adds, chapters 13 through 27. The 101 ends with a chart that installs, upgrades, rolls back and migrates its own database. The 201 treats that chart as the reference artifact: it is tested, packaged, signed, extended with plugins and promoted across environments. What to show: the reference charts under charts/ (shipping-service, notification-service, shipping-platform) and the umbrella install in chapter 22. Fallback: the outline (chapter 00) for the chapter list with durations. The cheat sheet in appendix chapter 29 accompanies the 201; the flag map on the next slide is the 101 equivalent for scripts migrating from Helm 3.</a:t>
             </a:r>
             <a:endParaRPr lang="en-US" dirty="0"/>
           </a:p>
@@ -3089,7 +3089,7 @@
           <a:p>
             <a:r>
               <a:rPr lang="en-US" dirty="0"/>
-              <a:t>What it shows: the renamed and changed flags for readers with existing scripts and CI. This is the only slide in the deck that writes Helm 3 flags, and each such line carries the repository's helm3-reference marker so the forbidden-syntax check accepts it. The old spellings of the rename pair still work in Helm 4 with a deprecation warning, which makes them easy to find in CI logs. Charts themselves are unchanged. What to show: helm install --help and helm upgrade --help from the project binary to confirm each Helm 4 flag. Fallback: chapter 28, the migration appendix, which lists the official source for each row (the Helm 4 overview, the changelog and the v4.0.0 release notes). New flags worth knowing: --server-side, --force-conflicts, --take-ownership, --wait-for-jobs, --skip-schema-validation and --history-max. The first step of a migration is to replace the renamed flags, make --wait explicit, wrap each post-renderer script in a plugin and drop oci:// from registry login.</a:t>
+              <a:t>What it shows: the renamed and changed flags for readers with existing scripts and CI. This is the only slide in the deck that writes Helm 3 flags, and each such line carries a helm3-reference marker in the source. The old spellings of the rename pair still work in Helm 4 with a deprecation warning, which makes them findable in CI logs. Charts themselves are unchanged. What to show: helm install --help and helm upgrade --help from the project binary to confirm each Helm 4 flag. Fallback: chapter 28, the migration appendix, which lists the official source for each row (the Helm 4 overview, the changelog and the v4.0.0 release notes). New flags worth knowing: --server-side, --force-conflicts, --take-ownership, --wait-for-jobs, --skip-schema-validation and --history-max. The first step of a migration is to replace the renamed flags, make --wait explicit, wrap each post-renderer script in a plugin and drop oci:// from registry login.</a:t>
             </a:r>
             <a:endParaRPr lang="en-US" dirty="0"/>
           </a:p>
@@ -3177,7 +3177,7 @@
           <a:p>
             <a:r>
               <a:rPr lang="en-US" dirty="0"/>
-              <a:t>What it shows: the shipping service as a ConfigMap, a Deployment and a Service. Deploying it to dev, stage and prod by copying and editing those three files gives nine files that must stay in step. A fix to the probe path has to be made in three places, and a typo in one copy produces a Service that selects nothing. The right half is the destination: one chart with templates and three small values files that hold only the differences. What to show: examples/03-raw-manifests, run ./demo.sh offline, which validates the manifests with kubeconform and needs no cluster. Fallback: the observed output block in chapter 03 and the evidence file _plans/evidence/03-raw-manifests.txt. The concrete list of things that differ per environment (replicas, log level, resources, image tag) becomes the values interface in the values section.</a:t>
+              <a:t>What it shows: the shipping service as a ConfigMap, a Deployment and a Service. Deploying it to dev, stage and prod by copying and editing those three files gives nine files that must stay in step. A fix to the probe path has to be made in three places, and a typo in one copy produces a Service that selects nothing. The right half is the destination: one chart with templates and three small values files that hold only the differences. What to show: examples/03-raw-manifests, run ./demo.sh offline, which validates the manifests with kubeconform and needs no cluster. Fallback: the observed output block in chapter 03. The concrete list of things that differ per environment (replicas, log level, resources, image tag) becomes the values interface in the values section.</a:t>
             </a:r>
             <a:endParaRPr lang="en-US" dirty="0"/>
           </a:p>
@@ -3265,7 +3265,7 @@
           <a:p>
             <a:r>
               <a:rPr lang="en-US" dirty="0"/>
-              <a:t>What it shows: the two jobs Helm does. As a package manager it versions, parameterizes and distributes a set of Kubernetes objects. As a release manager it tracks what was installed, with which values, and can return to an earlier state. What to show: examples/02-helm-tour, which installs the public podinfo chart from oci://ghcr.io/stefanprodan/charts/podinfo at the pinned version 6.15.0 and follows it through list, status, get values and uninstall. Fallback: the observed output in chapter 02 and _plans/evidence/02-helm-tour.txt, or ./demo.sh offline, which runs helm show chart and helm template without a cluster. Point out that the version is always pinned: without --version, Helm takes the newest tag and output stops matching the chapter.</a:t>
+              <a:t>What it shows: the two jobs Helm does. As a package manager it versions, parameterizes and distributes a set of Kubernetes objects. As a release manager it tracks what was installed, with which values, and can return to an earlier state. What to show: examples/02-helm-tour, which installs the public podinfo chart from oci://ghcr.io/stefanprodan/charts/podinfo at the pinned version 6.15.0 and follows it through list, status, get values and uninstall. Fallback: the observed output in chapter 02, or ./demo.sh offline, which runs helm show chart and helm template without a cluster. The version is always pinned: without --version, Helm takes the newest tag and output stops matching the chapter.</a:t>
             </a:r>
             <a:endParaRPr lang="en-US" dirty="0"/>
           </a:p>
@@ -4622,7 +4622,7 @@
         <p:spPr>
           <a:xfrm>
             <a:off x="566928" y="1691640"/>
-            <a:ext cx="6400800" cy="2390242"/>
+            <a:ext cx="6949440" cy="2704795"/>
           </a:xfrm>
           <a:prstGeom prst="rect">
             <a:avLst/>
@@ -4647,7 +4647,7 @@
         <p:spPr>
           <a:xfrm>
             <a:off x="749808" y="1783080"/>
-            <a:ext cx="6035040" cy="2207362"/>
+            <a:ext cx="6583680" cy="2521915"/>
           </a:xfrm>
           <a:prstGeom prst="rect">
             <a:avLst/>
@@ -4666,7 +4666,7 @@
               <a:buNone/>
             </a:pPr>
             <a:r>
-              <a:rPr lang="en-US" sz="1200" dirty="0">
+              <a:rPr lang="en-US" sz="1400" dirty="0">
                 <a:solidFill>
                   <a:srgbClr val="E6E6E6"/>
                 </a:solidFill>
@@ -4684,7 +4684,7 @@
               <a:buNone/>
             </a:pPr>
             <a:r>
-              <a:rPr lang="en-US" sz="1200" dirty="0">
+              <a:rPr lang="en-US" sz="1400" dirty="0">
                 <a:solidFill>
                   <a:srgbClr val="E6E6E6"/>
                 </a:solidFill>
@@ -4692,7 +4692,7 @@
                 <a:ea typeface="Red Hat Mono" pitchFamily="34" charset="-122"/>
                 <a:cs typeface="Red Hat Mono" pitchFamily="34" charset="-120"/>
               </a:rPr>
-              <a:t>  Chart.yaml        # required: name, version, appVersion
+              <a:t>  Chart.yaml     # required: name, version, appVersion
 </a:t>
             </a:r>
             <a:pPr algn="l" indent="0" marL="0">
@@ -4702,7 +4702,7 @@
               <a:buNone/>
             </a:pPr>
             <a:r>
-              <a:rPr lang="en-US" sz="1200" dirty="0">
+              <a:rPr lang="en-US" sz="1400" dirty="0">
                 <a:solidFill>
                   <a:srgbClr val="E6E6E6"/>
                 </a:solidFill>
@@ -4710,7 +4710,7 @@
                 <a:ea typeface="Red Hat Mono" pitchFamily="34" charset="-122"/>
                 <a:cs typeface="Red Hat Mono" pitchFamily="34" charset="-120"/>
               </a:rPr>
-              <a:t>  values.yaml       # defaults read through .Values
+              <a:t>  values.yaml    # defaults read through .Values
 </a:t>
             </a:r>
             <a:pPr algn="l" indent="0" marL="0">
@@ -4720,7 +4720,7 @@
               <a:buNone/>
             </a:pPr>
             <a:r>
-              <a:rPr lang="en-US" sz="1200" dirty="0">
+              <a:rPr lang="en-US" sz="1400" dirty="0">
                 <a:solidFill>
                   <a:srgbClr val="E6E6E6"/>
                 </a:solidFill>
@@ -4728,7 +4728,7 @@
                 <a:ea typeface="Red Hat Mono" pitchFamily="34" charset="-122"/>
                 <a:cs typeface="Red Hat Mono" pitchFamily="34" charset="-120"/>
               </a:rPr>
-              <a:t>  .helmignore       # files left out of the package
+              <a:t>  .helmignore    # files left out of the package
 </a:t>
             </a:r>
             <a:pPr algn="l" indent="0" marL="0">
@@ -4738,7 +4738,7 @@
               <a:buNone/>
             </a:pPr>
             <a:r>
-              <a:rPr lang="en-US" sz="1200" dirty="0">
+              <a:rPr lang="en-US" sz="1400" dirty="0">
                 <a:solidFill>
                   <a:srgbClr val="E6E6E6"/>
                 </a:solidFill>
@@ -4756,7 +4756,7 @@
               <a:buNone/>
             </a:pPr>
             <a:r>
-              <a:rPr lang="en-US" sz="1200" dirty="0">
+              <a:rPr lang="en-US" sz="1400" dirty="0">
                 <a:solidFill>
                   <a:srgbClr val="E6E6E6"/>
                 </a:solidFill>
@@ -4774,7 +4774,7 @@
               <a:buNone/>
             </a:pPr>
             <a:r>
-              <a:rPr lang="en-US" sz="1200" dirty="0">
+              <a:rPr lang="en-US" sz="1400" dirty="0">
                 <a:solidFill>
                   <a:srgbClr val="E6E6E6"/>
                 </a:solidFill>
@@ -4792,7 +4792,7 @@
               <a:buNone/>
             </a:pPr>
             <a:r>
-              <a:rPr lang="en-US" sz="1200" dirty="0">
+              <a:rPr lang="en-US" sz="1400" dirty="0">
                 <a:solidFill>
                   <a:srgbClr val="E6E6E6"/>
                 </a:solidFill>
@@ -4803,7 +4803,7 @@
               <a:t>    service.yaml
 </a:t>
             </a:r>
-            <a:endParaRPr lang="en-US" sz="1200" dirty="0"/>
+            <a:endParaRPr lang="en-US" sz="1400" dirty="0"/>
           </a:p>
         </p:txBody>
       </p:sp>
@@ -4815,8 +4815,8 @@
         </p:nvSpPr>
         <p:spPr>
           <a:xfrm>
-            <a:off x="566928" y="4155034"/>
-            <a:ext cx="11055096" cy="310896"/>
+            <a:off x="566928" y="4469587"/>
+            <a:ext cx="6949440" cy="310896"/>
           </a:xfrm>
           <a:prstGeom prst="rect">
             <a:avLst/>
@@ -4854,8 +4854,8 @@
         </p:nvSpPr>
         <p:spPr>
           <a:xfrm>
-            <a:off x="7287768" y="1783080"/>
-            <a:ext cx="4336999" cy="4114800"/>
+            <a:off x="7836408" y="1783080"/>
+            <a:ext cx="3788359" cy="4114800"/>
           </a:xfrm>
           <a:prstGeom prst="rect">
             <a:avLst/>
@@ -4875,13 +4875,13 @@
                 <a:spcPts val="400"/>
               </a:spcBef>
               <a:spcAft>
-                <a:spcPts val="1300"/>
+                <a:spcPts val="1600"/>
               </a:spcAft>
               <a:buSzPct val="100000"/>
               <a:buChar char="●"/>
             </a:pPr>
             <a:r>
-              <a:rPr lang="en-US" sz="1400" b="1" dirty="0">
+              <a:rPr lang="en-US" sz="1500" b="1" dirty="0">
                 <a:solidFill>
                   <a:srgbClr val="151515"/>
                 </a:solidFill>
@@ -4898,7 +4898,7 @@
               <a:buNone/>
             </a:pPr>
             <a:r>
-              <a:rPr lang="en-US" sz="1400" dirty="0">
+              <a:rPr lang="en-US" sz="1500" dirty="0">
                 <a:solidFill>
                   <a:srgbClr val="242424"/>
                 </a:solidFill>
@@ -4908,7 +4908,7 @@
               </a:rPr>
               <a:t>: the only required file besides templates/.</a:t>
             </a:r>
-            <a:endParaRPr lang="en-US" sz="1400" dirty="0"/>
+            <a:endParaRPr lang="en-US" sz="1500" dirty="0"/>
           </a:p>
           <a:p>
             <a:pPr marL="228600" indent="-228600">
@@ -4919,13 +4919,13 @@
                 <a:spcPts val="400"/>
               </a:spcBef>
               <a:spcAft>
-                <a:spcPts val="1300"/>
+                <a:spcPts val="1600"/>
               </a:spcAft>
               <a:buSzPct val="100000"/>
               <a:buChar char="●"/>
             </a:pPr>
             <a:r>
-              <a:rPr lang="en-US" sz="1400" b="1" dirty="0">
+              <a:rPr lang="en-US" sz="1500" b="1" dirty="0">
                 <a:solidFill>
                   <a:srgbClr val="151515"/>
                 </a:solidFill>
@@ -4942,7 +4942,7 @@
               <a:buNone/>
             </a:pPr>
             <a:r>
-              <a:rPr lang="en-US" sz="1400" dirty="0">
+              <a:rPr lang="en-US" sz="1500" dirty="0">
                 <a:solidFill>
                   <a:srgbClr val="242424"/>
                 </a:solidFill>
@@ -4952,7 +4952,7 @@
               </a:rPr>
               <a:t>: defaults, read by templates as .Values.</a:t>
             </a:r>
-            <a:endParaRPr lang="en-US" sz="1400" dirty="0"/>
+            <a:endParaRPr lang="en-US" sz="1500" dirty="0"/>
           </a:p>
           <a:p>
             <a:pPr marL="228600" indent="-228600">
@@ -4963,13 +4963,13 @@
                 <a:spcPts val="400"/>
               </a:spcBef>
               <a:spcAft>
-                <a:spcPts val="1300"/>
+                <a:spcPts val="1600"/>
               </a:spcAft>
               <a:buSzPct val="100000"/>
               <a:buChar char="●"/>
             </a:pPr>
             <a:r>
-              <a:rPr lang="en-US" sz="1400" b="1" dirty="0">
+              <a:rPr lang="en-US" sz="1500" b="1" dirty="0">
                 <a:solidFill>
                   <a:srgbClr val="151515"/>
                 </a:solidFill>
@@ -4986,7 +4986,7 @@
               <a:buNone/>
             </a:pPr>
             <a:r>
-              <a:rPr lang="en-US" sz="1400" dirty="0">
+              <a:rPr lang="en-US" sz="1500" dirty="0">
                 <a:solidFill>
                   <a:srgbClr val="242424"/>
                 </a:solidFill>
@@ -4996,7 +4996,7 @@
               </a:rPr>
               <a:t>: Go templates; Helm renders each file to YAML.</a:t>
             </a:r>
-            <a:endParaRPr lang="en-US" sz="1400" dirty="0"/>
+            <a:endParaRPr lang="en-US" sz="1500" dirty="0"/>
           </a:p>
           <a:p>
             <a:pPr marL="228600" indent="-228600">
@@ -5007,13 +5007,13 @@
                 <a:spcPts val="400"/>
               </a:spcBef>
               <a:spcAft>
-                <a:spcPts val="1300"/>
+                <a:spcPts val="1600"/>
               </a:spcAft>
               <a:buSzPct val="100000"/>
               <a:buChar char="●"/>
             </a:pPr>
             <a:r>
-              <a:rPr lang="en-US" sz="1400" b="1" dirty="0">
+              <a:rPr lang="en-US" sz="1500" b="1" dirty="0">
                 <a:solidFill>
                   <a:srgbClr val="151515"/>
                 </a:solidFill>
@@ -5030,7 +5030,7 @@
               <a:buNone/>
             </a:pPr>
             <a:r>
-              <a:rPr lang="en-US" sz="1400" dirty="0">
+              <a:rPr lang="en-US" sz="1500" dirty="0">
                 <a:solidFill>
                   <a:srgbClr val="242424"/>
                 </a:solidFill>
@@ -5040,7 +5040,7 @@
               </a:rPr>
               <a:t>: gitignore syntax; /tests/ with a leading slash matches only the top-level directory.</a:t>
             </a:r>
-            <a:endParaRPr lang="en-US" sz="1400" dirty="0"/>
+            <a:endParaRPr lang="en-US" sz="1500" dirty="0"/>
           </a:p>
         </p:txBody>
       </p:sp>
@@ -5258,7 +5258,7 @@
         <p:spPr>
           <a:xfrm>
             <a:off x="566928" y="1691640"/>
-            <a:ext cx="6400800" cy="1879092"/>
+            <a:ext cx="6400800" cy="2468880"/>
           </a:xfrm>
           <a:prstGeom prst="rect">
             <a:avLst/>
@@ -5283,7 +5283,7 @@
         <p:spPr>
           <a:xfrm>
             <a:off x="749808" y="1783080"/>
-            <a:ext cx="6035040" cy="1696212"/>
+            <a:ext cx="6035040" cy="2286000"/>
           </a:xfrm>
           <a:prstGeom prst="rect">
             <a:avLst/>
@@ -5302,7 +5302,7 @@
               <a:buNone/>
             </a:pPr>
             <a:r>
-              <a:rPr lang="en-US" sz="1400" dirty="0">
+              <a:rPr lang="en-US" sz="2000" dirty="0">
                 <a:solidFill>
                   <a:srgbClr val="E6E6E6"/>
                 </a:solidFill>
@@ -5320,7 +5320,7 @@
               <a:buNone/>
             </a:pPr>
             <a:r>
-              <a:rPr lang="en-US" sz="1400" dirty="0">
+              <a:rPr lang="en-US" sz="2000" dirty="0">
                 <a:solidFill>
                   <a:srgbClr val="E6E6E6"/>
                 </a:solidFill>
@@ -5338,7 +5338,7 @@
               <a:buNone/>
             </a:pPr>
             <a:r>
-              <a:rPr lang="en-US" sz="1400" dirty="0">
+              <a:rPr lang="en-US" sz="2000" dirty="0">
                 <a:solidFill>
                   <a:srgbClr val="E6E6E6"/>
                 </a:solidFill>
@@ -5356,7 +5356,7 @@
               <a:buNone/>
             </a:pPr>
             <a:r>
-              <a:rPr lang="en-US" sz="1400" dirty="0">
+              <a:rPr lang="en-US" sz="2000" dirty="0">
                 <a:solidFill>
                   <a:srgbClr val="E6E6E6"/>
                 </a:solidFill>
@@ -5374,7 +5374,7 @@
               <a:buNone/>
             </a:pPr>
             <a:r>
-              <a:rPr lang="en-US" sz="1400" dirty="0">
+              <a:rPr lang="en-US" sz="2000" dirty="0">
                 <a:solidFill>
                   <a:srgbClr val="E6E6E6"/>
                 </a:solidFill>
@@ -5385,7 +5385,7 @@
               <a:t>appVersion: "0.1.0"
 </a:t>
             </a:r>
-            <a:endParaRPr lang="en-US" sz="1400" dirty="0"/>
+            <a:endParaRPr lang="en-US" sz="2000" dirty="0"/>
           </a:p>
         </p:txBody>
       </p:sp>
@@ -5397,8 +5397,8 @@
         </p:nvSpPr>
         <p:spPr>
           <a:xfrm>
-            <a:off x="566928" y="3643884"/>
-            <a:ext cx="11055096" cy="310896"/>
+            <a:off x="566928" y="4233672"/>
+            <a:ext cx="6400800" cy="310896"/>
           </a:xfrm>
           <a:prstGeom prst="rect">
             <a:avLst/>
@@ -5457,13 +5457,13 @@
                 <a:spcPts val="400"/>
               </a:spcBef>
               <a:spcAft>
-                <a:spcPts val="1300"/>
+                <a:spcPts val="1600"/>
               </a:spcAft>
               <a:buSzPct val="100000"/>
               <a:buChar char="●"/>
             </a:pPr>
             <a:r>
-              <a:rPr lang="en-US" sz="1400" b="1" dirty="0">
+              <a:rPr lang="en-US" sz="1500" b="1" dirty="0">
                 <a:solidFill>
                   <a:srgbClr val="151515"/>
                 </a:solidFill>
@@ -5480,7 +5480,7 @@
               <a:buNone/>
             </a:pPr>
             <a:r>
-              <a:rPr lang="en-US" sz="1400" dirty="0">
+              <a:rPr lang="en-US" sz="1500" dirty="0">
                 <a:solidFill>
                   <a:srgbClr val="242424"/>
                 </a:solidFill>
@@ -5490,7 +5490,7 @@
               </a:rPr>
               <a:t>: the chart format Helm 4 uses; v3 is not released.</a:t>
             </a:r>
-            <a:endParaRPr lang="en-US" sz="1400" dirty="0"/>
+            <a:endParaRPr lang="en-US" sz="1500" dirty="0"/>
           </a:p>
           <a:p>
             <a:pPr marL="228600" indent="-228600">
@@ -5501,13 +5501,13 @@
                 <a:spcPts val="400"/>
               </a:spcBef>
               <a:spcAft>
-                <a:spcPts val="1300"/>
+                <a:spcPts val="1600"/>
               </a:spcAft>
               <a:buSzPct val="100000"/>
               <a:buChar char="●"/>
             </a:pPr>
             <a:r>
-              <a:rPr lang="en-US" sz="1400" b="1" dirty="0">
+              <a:rPr lang="en-US" sz="1500" b="1" dirty="0">
                 <a:solidFill>
                   <a:srgbClr val="151515"/>
                 </a:solidFill>
@@ -5524,7 +5524,7 @@
               <a:buNone/>
             </a:pPr>
             <a:r>
-              <a:rPr lang="en-US" sz="1400" dirty="0">
+              <a:rPr lang="en-US" sz="1500" dirty="0">
                 <a:solidFill>
                   <a:srgbClr val="242424"/>
                 </a:solidFill>
@@ -5534,7 +5534,7 @@
               </a:rPr>
               <a:t>: application is installable; library is not (201).</a:t>
             </a:r>
-            <a:endParaRPr lang="en-US" sz="1400" dirty="0"/>
+            <a:endParaRPr lang="en-US" sz="1500" dirty="0"/>
           </a:p>
           <a:p>
             <a:pPr marL="228600" indent="-228600">
@@ -5545,13 +5545,13 @@
                 <a:spcPts val="400"/>
               </a:spcBef>
               <a:spcAft>
-                <a:spcPts val="1300"/>
+                <a:spcPts val="1600"/>
               </a:spcAft>
               <a:buSzPct val="100000"/>
               <a:buChar char="●"/>
             </a:pPr>
             <a:r>
-              <a:rPr lang="en-US" sz="1400" b="1" dirty="0">
+              <a:rPr lang="en-US" sz="1500" b="1" dirty="0">
                 <a:solidFill>
                   <a:srgbClr val="151515"/>
                 </a:solidFill>
@@ -5568,7 +5568,7 @@
               <a:buNone/>
             </a:pPr>
             <a:r>
-              <a:rPr lang="en-US" sz="1400" dirty="0">
+              <a:rPr lang="en-US" sz="1500" dirty="0">
                 <a:solidFill>
                   <a:srgbClr val="242424"/>
                 </a:solidFill>
@@ -5578,7 +5578,7 @@
               </a:rPr>
               <a:t>: identifies the chart package, SemVer. A template fix bumps it.</a:t>
             </a:r>
-            <a:endParaRPr lang="en-US" sz="1400" dirty="0"/>
+            <a:endParaRPr lang="en-US" sz="1500" dirty="0"/>
           </a:p>
           <a:p>
             <a:pPr marL="228600" indent="-228600">
@@ -5589,13 +5589,13 @@
                 <a:spcPts val="400"/>
               </a:spcBef>
               <a:spcAft>
-                <a:spcPts val="1300"/>
+                <a:spcPts val="1600"/>
               </a:spcAft>
               <a:buSzPct val="100000"/>
               <a:buChar char="●"/>
             </a:pPr>
             <a:r>
-              <a:rPr lang="en-US" sz="1400" b="1" dirty="0">
+              <a:rPr lang="en-US" sz="1500" b="1" dirty="0">
                 <a:solidFill>
                   <a:srgbClr val="151515"/>
                 </a:solidFill>
@@ -5612,7 +5612,7 @@
               <a:buNone/>
             </a:pPr>
             <a:r>
-              <a:rPr lang="en-US" sz="1400" dirty="0">
+              <a:rPr lang="en-US" sz="1500" dirty="0">
                 <a:solidFill>
                   <a:srgbClr val="242424"/>
                 </a:solidFill>
@@ -5622,7 +5622,7 @@
               </a:rPr>
               <a:t>: identifies the application. A new image bumps it. Quoted, so 1.10 stays a string.</a:t>
             </a:r>
-            <a:endParaRPr lang="en-US" sz="1400" dirty="0"/>
+            <a:endParaRPr lang="en-US" sz="1500" dirty="0"/>
           </a:p>
         </p:txBody>
       </p:sp>
@@ -6112,7 +6112,7 @@
               <a:buNone/>
             </a:pPr>
             <a:r>
-              <a:rPr lang="en-US" sz="1100" dirty="0">
+              <a:rPr lang="en-US" sz="1800" dirty="0">
                 <a:solidFill>
                   <a:srgbClr val="E6E6E6"/>
                 </a:solidFill>
@@ -6130,7 +6130,7 @@
               <a:buNone/>
             </a:pPr>
             <a:r>
-              <a:rPr lang="en-US" sz="1100" dirty="0">
+              <a:rPr lang="en-US" sz="1800" dirty="0">
                 <a:solidFill>
                   <a:srgbClr val="E6E6E6"/>
                 </a:solidFill>
@@ -6148,7 +6148,7 @@
               <a:buNone/>
             </a:pPr>
             <a:r>
-              <a:rPr lang="en-US" sz="1100" dirty="0">
+              <a:rPr lang="en-US" sz="1800" dirty="0">
                 <a:solidFill>
                   <a:srgbClr val="E6E6E6"/>
                 </a:solidFill>
@@ -6166,7 +6166,7 @@
               <a:buNone/>
             </a:pPr>
             <a:r>
-              <a:rPr lang="en-US" sz="1100" dirty="0">
+              <a:rPr lang="en-US" sz="1800" dirty="0">
                 <a:solidFill>
                   <a:srgbClr val="E6E6E6"/>
                 </a:solidFill>
@@ -6184,7 +6184,7 @@
               <a:buNone/>
             </a:pPr>
             <a:r>
-              <a:rPr lang="en-US" sz="1100" dirty="0">
+              <a:rPr lang="en-US" sz="1800" dirty="0">
                 <a:solidFill>
                   <a:srgbClr val="8FB98F"/>
                 </a:solidFill>
@@ -6202,7 +6202,7 @@
               <a:buNone/>
             </a:pPr>
             <a:r>
-              <a:rPr lang="en-US" sz="1100" dirty="0">
+              <a:rPr lang="en-US" sz="1800" dirty="0">
                 <a:solidFill>
                   <a:srgbClr val="8FB98F"/>
                 </a:solidFill>
@@ -6220,7 +6220,7 @@
               <a:buNone/>
             </a:pPr>
             <a:r>
-              <a:rPr lang="en-US" sz="1100" dirty="0">
+              <a:rPr lang="en-US" sz="1800" dirty="0">
                 <a:solidFill>
                   <a:srgbClr val="E6E6E6"/>
                 </a:solidFill>
@@ -6238,7 +6238,7 @@
               <a:buNone/>
             </a:pPr>
             <a:r>
-              <a:rPr lang="en-US" sz="1100" dirty="0">
+              <a:rPr lang="en-US" sz="1800" dirty="0">
                 <a:solidFill>
                   <a:srgbClr val="E6E6E6"/>
                 </a:solidFill>
@@ -6256,7 +6256,7 @@
               <a:buNone/>
             </a:pPr>
             <a:r>
-              <a:rPr lang="en-US" sz="1100" dirty="0">
+              <a:rPr lang="en-US" sz="1800" dirty="0">
                 <a:solidFill>
                   <a:srgbClr val="8FB98F"/>
                 </a:solidFill>
@@ -6267,7 +6267,7 @@
               <a:t># --history-max (default 10) prunes the oldest revisions on upgrade
 </a:t>
             </a:r>
-            <a:endParaRPr lang="en-US" sz="1100" dirty="0"/>
+            <a:endParaRPr lang="en-US" sz="1800" dirty="0"/>
           </a:p>
         </p:txBody>
       </p:sp>
@@ -6993,7 +6993,7 @@
               <a:buNone/>
             </a:pPr>
             <a:r>
-              <a:rPr lang="en-US" sz="1000" dirty="0">
+              <a:rPr lang="en-US" sz="1300" dirty="0">
                 <a:solidFill>
                   <a:srgbClr val="E6E6E6"/>
                 </a:solidFill>
@@ -7001,7 +7001,7 @@
                 <a:ea typeface="Red Hat Mono" pitchFamily="34" charset="-122"/>
                 <a:cs typeface="Red Hat Mono" pitchFamily="34" charset="-120"/>
               </a:rPr>
-              <a:t>[host]$ helm template shipping examples/05-values/shipping-service -f examples/05-values/values-prod.yaml --set replicaCount=5
+              <a:t>[host]$ cd examples/05-values
 </a:t>
             </a:r>
             <a:pPr algn="l" indent="0" marL="0">
@@ -7011,15 +7011,15 @@
               <a:buNone/>
             </a:pPr>
             <a:r>
-              <a:rPr lang="en-US" sz="1000" dirty="0">
-                <a:solidFill>
-                  <a:srgbClr val="8FB98F"/>
+              <a:rPr lang="en-US" sz="1300" dirty="0">
+                <a:solidFill>
+                  <a:srgbClr val="E6E6E6"/>
                 </a:solidFill>
                 <a:latin typeface="Red Hat Mono" pitchFamily="34" charset="0"/>
                 <a:ea typeface="Red Hat Mono" pitchFamily="34" charset="-122"/>
                 <a:cs typeface="Red Hat Mono" pitchFamily="34" charset="-120"/>
               </a:rPr>
-              <a:t># --set guesses types: true, integers and null convert; commas separate keys
+              <a:t>[host]$ helm template shipping ./shipping-service \
 </a:t>
             </a:r>
             <a:pPr algn="l" indent="0" marL="0">
@@ -7029,7 +7029,7 @@
               <a:buNone/>
             </a:pPr>
             <a:r>
-              <a:rPr lang="en-US" sz="1000" dirty="0">
+              <a:rPr lang="en-US" sz="1300" dirty="0">
                 <a:solidFill>
                   <a:srgbClr val="E6E6E6"/>
                 </a:solidFill>
@@ -7037,7 +7037,7 @@
                 <a:ea typeface="Red Hat Mono" pitchFamily="34" charset="-122"/>
                 <a:cs typeface="Red Hat Mono" pitchFamily="34" charset="-120"/>
               </a:rPr>
-              <a:t>[host]$ helm template shipping examples/05-values/shipping-service --set-string image.tag=12345
+              <a:t>          -f values-prod.yaml --set replicaCount=5
 </a:t>
             </a:r>
             <a:pPr algn="l" indent="0" marL="0">
@@ -7047,7 +7047,7 @@
               <a:buNone/>
             </a:pPr>
             <a:r>
-              <a:rPr lang="en-US" sz="1000" dirty="0">
+              <a:rPr lang="en-US" sz="1300" dirty="0">
                 <a:solidFill>
                   <a:srgbClr val="8FB98F"/>
                 </a:solidFill>
@@ -7055,7 +7055,7 @@
                 <a:ea typeface="Red Hat Mono" pitchFamily="34" charset="-122"/>
                 <a:cs typeface="Red Hat Mono" pitchFamily="34" charset="-120"/>
               </a:rPr>
-              <a:t># --set-string forces a string; --set image.tag=12345 fails the schema (got number, want string)
+              <a:t># --set guesses types: true, integers and null convert; commas separate keys
 </a:t>
             </a:r>
             <a:pPr algn="l" indent="0" marL="0">
@@ -7065,7 +7065,7 @@
               <a:buNone/>
             </a:pPr>
             <a:r>
-              <a:rPr lang="en-US" sz="1000" dirty="0">
+              <a:rPr lang="en-US" sz="1300" dirty="0">
                 <a:solidFill>
                   <a:srgbClr val="E6E6E6"/>
                 </a:solidFill>
@@ -7073,7 +7073,7 @@
                 <a:ea typeface="Red Hat Mono" pitchFamily="34" charset="-122"/>
                 <a:cs typeface="Red Hat Mono" pitchFamily="34" charset="-120"/>
               </a:rPr>
-              <a:t>[host]$ helm template shipping examples/05-values/shipping-service --set-json 'resources={"limits":{"memory":"1Gi"}}'
+              <a:t>[host]$ helm template shipping ./shipping-service --set-string image.tag=12345
 </a:t>
             </a:r>
             <a:pPr algn="l" indent="0" marL="0">
@@ -7083,7 +7083,7 @@
               <a:buNone/>
             </a:pPr>
             <a:r>
-              <a:rPr lang="en-US" sz="1000" dirty="0">
+              <a:rPr lang="en-US" sz="1300" dirty="0">
                 <a:solidFill>
                   <a:srgbClr val="8FB98F"/>
                 </a:solidFill>
@@ -7091,7 +7091,7 @@
                 <a:ea typeface="Red Hat Mono" pitchFamily="34" charset="-122"/>
                 <a:cs typeface="Red Hat Mono" pitchFamily="34" charset="-120"/>
               </a:rPr>
-              <a:t># --set-json takes a JSON value for a map or list
+              <a:t># --set-string forces a string; --set image.tag=12345 fails the schema (number, want string)
 </a:t>
             </a:r>
             <a:pPr algn="l" indent="0" marL="0">
@@ -7101,7 +7101,7 @@
               <a:buNone/>
             </a:pPr>
             <a:r>
-              <a:rPr lang="en-US" sz="1000" dirty="0">
+              <a:rPr lang="en-US" sz="1300" dirty="0">
                 <a:solidFill>
                   <a:srgbClr val="E6E6E6"/>
                 </a:solidFill>
@@ -7109,7 +7109,7 @@
                 <a:ea typeface="Red Hat Mono" pitchFamily="34" charset="-122"/>
                 <a:cs typeface="Red Hat Mono" pitchFamily="34" charset="-120"/>
               </a:rPr>
-              <a:t>[host]$ helm template shipping examples/05-values/shipping-service --set-file config.defaultCarrier=carrier.txt
+              <a:t>[host]$ helm template shipping ./shipping-service \
 </a:t>
             </a:r>
             <a:pPr algn="l" indent="0" marL="0">
@@ -7119,15 +7119,15 @@
               <a:buNone/>
             </a:pPr>
             <a:r>
-              <a:rPr lang="en-US" sz="1000" dirty="0">
-                <a:solidFill>
-                  <a:srgbClr val="8FB98F"/>
+              <a:rPr lang="en-US" sz="1300" dirty="0">
+                <a:solidFill>
+                  <a:srgbClr val="E6E6E6"/>
                 </a:solidFill>
                 <a:latin typeface="Red Hat Mono" pitchFamily="34" charset="0"/>
                 <a:ea typeface="Red Hat Mono" pitchFamily="34" charset="-122"/>
                 <a:cs typeface="Red Hat Mono" pitchFamily="34" charset="-120"/>
               </a:rPr>
-              <a:t># --set-file uses the file content, trailing newline included
+              <a:t>          --set-json 'resources={"limits":{"memory":"1Gi"}}'
 </a:t>
             </a:r>
             <a:pPr algn="l" indent="0" marL="0">
@@ -7137,15 +7137,15 @@
               <a:buNone/>
             </a:pPr>
             <a:r>
-              <a:rPr lang="en-US" sz="1000" dirty="0">
-                <a:solidFill>
-                  <a:srgbClr val="E6E6E6"/>
+              <a:rPr lang="en-US" sz="1300" dirty="0">
+                <a:solidFill>
+                  <a:srgbClr val="8FB98F"/>
                 </a:solidFill>
                 <a:latin typeface="Red Hat Mono" pitchFamily="34" charset="0"/>
                 <a:ea typeface="Red Hat Mono" pitchFamily="34" charset="-122"/>
                 <a:cs typeface="Red Hat Mono" pitchFamily="34" charset="-120"/>
               </a:rPr>
-              <a:t>[host]$ helm template shipping examples/05-values/shipping-service --set-literal config.defaultCarrier=ACME,Post
+              <a:t># --set-json takes a JSON value for a map or list
 </a:t>
             </a:r>
             <a:pPr algn="l" indent="0" marL="0">
@@ -7155,18 +7155,108 @@
               <a:buNone/>
             </a:pPr>
             <a:r>
-              <a:rPr lang="en-US" sz="1000" dirty="0">
-                <a:solidFill>
-                  <a:srgbClr val="8FB98F"/>
+              <a:rPr lang="en-US" sz="1300" dirty="0">
+                <a:solidFill>
+                  <a:srgbClr val="E6E6E6"/>
                 </a:solidFill>
                 <a:latin typeface="Red Hat Mono" pitchFamily="34" charset="0"/>
                 <a:ea typeface="Red Hat Mono" pitchFamily="34" charset="-122"/>
                 <a:cs typeface="Red Hat Mono" pitchFamily="34" charset="-120"/>
               </a:rPr>
+              <a:t>[host]$ helm template shipping ./shipping-service \
+</a:t>
+            </a:r>
+            <a:pPr algn="l" indent="0" marL="0">
+              <a:lnSpc>
+                <a:spcPct val="110000"/>
+              </a:lnSpc>
+              <a:buNone/>
+            </a:pPr>
+            <a:r>
+              <a:rPr lang="en-US" sz="1300" dirty="0">
+                <a:solidFill>
+                  <a:srgbClr val="E6E6E6"/>
+                </a:solidFill>
+                <a:latin typeface="Red Hat Mono" pitchFamily="34" charset="0"/>
+                <a:ea typeface="Red Hat Mono" pitchFamily="34" charset="-122"/>
+                <a:cs typeface="Red Hat Mono" pitchFamily="34" charset="-120"/>
+              </a:rPr>
+              <a:t>          --set-file config.defaultCarrier=carrier.txt
+</a:t>
+            </a:r>
+            <a:pPr algn="l" indent="0" marL="0">
+              <a:lnSpc>
+                <a:spcPct val="110000"/>
+              </a:lnSpc>
+              <a:buNone/>
+            </a:pPr>
+            <a:r>
+              <a:rPr lang="en-US" sz="1300" dirty="0">
+                <a:solidFill>
+                  <a:srgbClr val="8FB98F"/>
+                </a:solidFill>
+                <a:latin typeface="Red Hat Mono" pitchFamily="34" charset="0"/>
+                <a:ea typeface="Red Hat Mono" pitchFamily="34" charset="-122"/>
+                <a:cs typeface="Red Hat Mono" pitchFamily="34" charset="-120"/>
+              </a:rPr>
+              <a:t># --set-file uses the file content, trailing newline included
+</a:t>
+            </a:r>
+            <a:pPr algn="l" indent="0" marL="0">
+              <a:lnSpc>
+                <a:spcPct val="110000"/>
+              </a:lnSpc>
+              <a:buNone/>
+            </a:pPr>
+            <a:r>
+              <a:rPr lang="en-US" sz="1300" dirty="0">
+                <a:solidFill>
+                  <a:srgbClr val="E6E6E6"/>
+                </a:solidFill>
+                <a:latin typeface="Red Hat Mono" pitchFamily="34" charset="0"/>
+                <a:ea typeface="Red Hat Mono" pitchFamily="34" charset="-122"/>
+                <a:cs typeface="Red Hat Mono" pitchFamily="34" charset="-120"/>
+              </a:rPr>
+              <a:t>[host]$ helm template shipping ./shipping-service \
+</a:t>
+            </a:r>
+            <a:pPr algn="l" indent="0" marL="0">
+              <a:lnSpc>
+                <a:spcPct val="110000"/>
+              </a:lnSpc>
+              <a:buNone/>
+            </a:pPr>
+            <a:r>
+              <a:rPr lang="en-US" sz="1300" dirty="0">
+                <a:solidFill>
+                  <a:srgbClr val="E6E6E6"/>
+                </a:solidFill>
+                <a:latin typeface="Red Hat Mono" pitchFamily="34" charset="0"/>
+                <a:ea typeface="Red Hat Mono" pitchFamily="34" charset="-122"/>
+                <a:cs typeface="Red Hat Mono" pitchFamily="34" charset="-120"/>
+              </a:rPr>
+              <a:t>          --set-literal config.defaultCarrier=ACME,Post
+</a:t>
+            </a:r>
+            <a:pPr algn="l" indent="0" marL="0">
+              <a:lnSpc>
+                <a:spcPct val="110000"/>
+              </a:lnSpc>
+              <a:buNone/>
+            </a:pPr>
+            <a:r>
+              <a:rPr lang="en-US" sz="1300" dirty="0">
+                <a:solidFill>
+                  <a:srgbClr val="8FB98F"/>
+                </a:solidFill>
+                <a:latin typeface="Red Hat Mono" pitchFamily="34" charset="0"/>
+                <a:ea typeface="Red Hat Mono" pitchFamily="34" charset="-122"/>
+                <a:cs typeface="Red Hat Mono" pitchFamily="34" charset="-120"/>
+              </a:rPr>
               <a:t># --set-literal keeps commas: renders "ACME,Post"
 </a:t>
             </a:r>
-            <a:endParaRPr lang="en-US" sz="1000" dirty="0"/>
+            <a:endParaRPr lang="en-US" sz="1300" dirty="0"/>
           </a:p>
         </p:txBody>
       </p:sp>
@@ -7203,7 +7293,7 @@
                 <a:ea typeface="Red Hat Text" pitchFamily="34" charset="-122"/>
                 <a:cs typeface="Red Hat Text" pitchFamily="34" charset="-120"/>
               </a:rPr>
-              <a:t>examples/05-values/demo.sh</a:t>
+              <a:t>Run from examples/05-values; demo.sh in the same directory</a:t>
             </a:r>
             <a:endParaRPr lang="en-US" sz="1300" dirty="0"/>
           </a:p>
@@ -7423,7 +7513,7 @@
         <p:spPr>
           <a:xfrm>
             <a:off x="566928" y="1691640"/>
-            <a:ext cx="6583680" cy="4251960"/>
+            <a:ext cx="7132320" cy="4251960"/>
           </a:xfrm>
           <a:prstGeom prst="rect">
             <a:avLst/>
@@ -7448,7 +7538,7 @@
         <p:spPr>
           <a:xfrm>
             <a:off x="749808" y="1783080"/>
-            <a:ext cx="6217920" cy="4069080"/>
+            <a:ext cx="6766560" cy="4069080"/>
           </a:xfrm>
           <a:prstGeom prst="rect">
             <a:avLst/>
@@ -7467,7 +7557,7 @@
               <a:buNone/>
             </a:pPr>
             <a:r>
-              <a:rPr lang="en-US" sz="1100" dirty="0">
+              <a:rPr lang="en-US" sz="1200" dirty="0">
                 <a:solidFill>
                   <a:srgbClr val="E6E6E6"/>
                 </a:solidFill>
@@ -7485,7 +7575,7 @@
               <a:buNone/>
             </a:pPr>
             <a:r>
-              <a:rPr lang="en-US" sz="1100" dirty="0">
+              <a:rPr lang="en-US" sz="1200" dirty="0">
                 <a:solidFill>
                   <a:srgbClr val="E6E6E6"/>
                 </a:solidFill>
@@ -7503,7 +7593,7 @@
               <a:buNone/>
             </a:pPr>
             <a:r>
-              <a:rPr lang="en-US" sz="1100" dirty="0">
+              <a:rPr lang="en-US" sz="1200" dirty="0">
                 <a:solidFill>
                   <a:srgbClr val="E6E6E6"/>
                 </a:solidFill>
@@ -7521,7 +7611,7 @@
               <a:buNone/>
             </a:pPr>
             <a:r>
-              <a:rPr lang="en-US" sz="1100" dirty="0">
+              <a:rPr lang="en-US" sz="1200" dirty="0">
                 <a:solidFill>
                   <a:srgbClr val="E6E6E6"/>
                 </a:solidFill>
@@ -7539,7 +7629,7 @@
               <a:buNone/>
             </a:pPr>
             <a:r>
-              <a:rPr lang="en-US" sz="1100" dirty="0">
+              <a:rPr lang="en-US" sz="1200" dirty="0">
                 <a:solidFill>
                   <a:srgbClr val="E6E6E6"/>
                 </a:solidFill>
@@ -7557,7 +7647,7 @@
               <a:buNone/>
             </a:pPr>
             <a:r>
-              <a:rPr lang="en-US" sz="1100" dirty="0">
+              <a:rPr lang="en-US" sz="1200" dirty="0">
                 <a:solidFill>
                   <a:srgbClr val="E6E6E6"/>
                 </a:solidFill>
@@ -7575,7 +7665,7 @@
               <a:buNone/>
             </a:pPr>
             <a:r>
-              <a:rPr lang="en-US" sz="1100" dirty="0">
+              <a:rPr lang="en-US" sz="1200" dirty="0">
                 <a:solidFill>
                   <a:srgbClr val="E6E6E6"/>
                 </a:solidFill>
@@ -7593,7 +7683,7 @@
               <a:buNone/>
             </a:pPr>
             <a:r>
-              <a:rPr lang="en-US" sz="1100" dirty="0">
+              <a:rPr lang="en-US" sz="1200" dirty="0">
                 <a:solidFill>
                   <a:srgbClr val="E6E6E6"/>
                 </a:solidFill>
@@ -7611,7 +7701,7 @@
               <a:buNone/>
             </a:pPr>
             <a:r>
-              <a:rPr lang="en-US" sz="1100" dirty="0">
+              <a:rPr lang="en-US" sz="1200" dirty="0">
                 <a:solidFill>
                   <a:srgbClr val="E6E6E6"/>
                 </a:solidFill>
@@ -7629,7 +7719,7 @@
               <a:buNone/>
             </a:pPr>
             <a:r>
-              <a:rPr lang="en-US" sz="1100" dirty="0">
+              <a:rPr lang="en-US" sz="1200" dirty="0">
                 <a:solidFill>
                   <a:srgbClr val="E6E6E6"/>
                 </a:solidFill>
@@ -7647,7 +7737,7 @@
               <a:buNone/>
             </a:pPr>
             <a:r>
-              <a:rPr lang="en-US" sz="1100" dirty="0">
+              <a:rPr lang="en-US" sz="1200" dirty="0">
                 <a:solidFill>
                   <a:srgbClr val="E6E6E6"/>
                 </a:solidFill>
@@ -7665,7 +7755,7 @@
               <a:buNone/>
             </a:pPr>
             <a:r>
-              <a:rPr lang="en-US" sz="1100" dirty="0">
+              <a:rPr lang="en-US" sz="1200" dirty="0">
                 <a:solidFill>
                   <a:srgbClr val="E6E6E6"/>
                 </a:solidFill>
@@ -7683,7 +7773,7 @@
               <a:buNone/>
             </a:pPr>
             <a:r>
-              <a:rPr lang="en-US" sz="1100" dirty="0">
+              <a:rPr lang="en-US" sz="1200" dirty="0">
                 <a:solidFill>
                   <a:srgbClr val="E6E6E6"/>
                 </a:solidFill>
@@ -7701,7 +7791,7 @@
               <a:buNone/>
             </a:pPr>
             <a:r>
-              <a:rPr lang="en-US" sz="1100" dirty="0">
+              <a:rPr lang="en-US" sz="1200" dirty="0">
                 <a:solidFill>
                   <a:srgbClr val="E6E6E6"/>
                 </a:solidFill>
@@ -7719,7 +7809,7 @@
               <a:buNone/>
             </a:pPr>
             <a:r>
-              <a:rPr lang="en-US" sz="1100" dirty="0">
+              <a:rPr lang="en-US" sz="1200" dirty="0">
                 <a:solidFill>
                   <a:srgbClr val="E6E6E6"/>
                 </a:solidFill>
@@ -7737,7 +7827,7 @@
               <a:buNone/>
             </a:pPr>
             <a:r>
-              <a:rPr lang="en-US" sz="1100" dirty="0">
+              <a:rPr lang="en-US" sz="1200" dirty="0">
                 <a:solidFill>
                   <a:srgbClr val="E6E6E6"/>
                 </a:solidFill>
@@ -7755,7 +7845,7 @@
               <a:buNone/>
             </a:pPr>
             <a:r>
-              <a:rPr lang="en-US" sz="1100" dirty="0">
+              <a:rPr lang="en-US" sz="1200" dirty="0">
                 <a:solidFill>
                   <a:srgbClr val="E6E6E6"/>
                 </a:solidFill>
@@ -7773,7 +7863,7 @@
               <a:buNone/>
             </a:pPr>
             <a:r>
-              <a:rPr lang="en-US" sz="1100" dirty="0">
+              <a:rPr lang="en-US" sz="1200" dirty="0">
                 <a:solidFill>
                   <a:srgbClr val="E6E6E6"/>
                 </a:solidFill>
@@ -7791,7 +7881,7 @@
               <a:buNone/>
             </a:pPr>
             <a:r>
-              <a:rPr lang="en-US" sz="1100" dirty="0">
+              <a:rPr lang="en-US" sz="1200" dirty="0">
                 <a:solidFill>
                   <a:srgbClr val="E6E6E6"/>
                 </a:solidFill>
@@ -7809,7 +7899,7 @@
               <a:buNone/>
             </a:pPr>
             <a:r>
-              <a:rPr lang="en-US" sz="1100" dirty="0">
+              <a:rPr lang="en-US" sz="1200" dirty="0">
                 <a:solidFill>
                   <a:srgbClr val="E6E6E6"/>
                 </a:solidFill>
@@ -7820,7 +7910,7 @@
               <a:t>}
 </a:t>
             </a:r>
-            <a:endParaRPr lang="en-US" sz="1100" dirty="0"/>
+            <a:endParaRPr lang="en-US" sz="1200" dirty="0"/>
           </a:p>
         </p:txBody>
       </p:sp>
@@ -7833,7 +7923,7 @@
         <p:spPr>
           <a:xfrm>
             <a:off x="566928" y="5943600"/>
-            <a:ext cx="11055096" cy="310896"/>
+            <a:ext cx="7132320" cy="310896"/>
           </a:xfrm>
           <a:prstGeom prst="rect">
             <a:avLst/>
@@ -7871,8 +7961,8 @@
         </p:nvSpPr>
         <p:spPr>
           <a:xfrm>
-            <a:off x="7470648" y="1783080"/>
-            <a:ext cx="4154119" cy="4114800"/>
+            <a:off x="8019288" y="1783080"/>
+            <a:ext cx="3605479" cy="4114800"/>
           </a:xfrm>
           <a:prstGeom prst="rect">
             <a:avLst/>
@@ -7892,13 +7982,13 @@
                 <a:spcPts val="400"/>
               </a:spcBef>
               <a:spcAft>
-                <a:spcPts val="1300"/>
+                <a:spcPts val="1600"/>
               </a:spcAft>
               <a:buSzPct val="100000"/>
               <a:buChar char="●"/>
             </a:pPr>
             <a:r>
-              <a:rPr lang="en-US" sz="1400" b="1" dirty="0">
+              <a:rPr lang="en-US" sz="1500" b="1" dirty="0">
                 <a:solidFill>
                   <a:srgbClr val="151515"/>
                 </a:solidFill>
@@ -7915,7 +8005,7 @@
               <a:buNone/>
             </a:pPr>
             <a:r>
-              <a:rPr lang="en-US" sz="1400" dirty="0">
+              <a:rPr lang="en-US" sz="1500" dirty="0">
                 <a:solidFill>
                   <a:srgbClr val="242424"/>
                 </a:solidFill>
@@ -7925,7 +8015,7 @@
               </a:rPr>
               <a:t>: install, upgrade, template and lint, before any template renders.</a:t>
             </a:r>
-            <a:endParaRPr lang="en-US" sz="1400" dirty="0"/>
+            <a:endParaRPr lang="en-US" sz="1500" dirty="0"/>
           </a:p>
           <a:p>
             <a:pPr marL="228600" indent="-228600">
@@ -7936,13 +8026,13 @@
                 <a:spcPts val="400"/>
               </a:spcBef>
               <a:spcAft>
-                <a:spcPts val="1300"/>
+                <a:spcPts val="1600"/>
               </a:spcAft>
               <a:buSzPct val="100000"/>
               <a:buChar char="●"/>
             </a:pPr>
             <a:r>
-              <a:rPr lang="en-US" sz="1400" b="1" dirty="0">
+              <a:rPr lang="en-US" sz="1500" b="1" dirty="0">
                 <a:solidFill>
                   <a:srgbClr val="151515"/>
                 </a:solidFill>
@@ -7959,7 +8049,7 @@
               <a:buNone/>
             </a:pPr>
             <a:r>
-              <a:rPr lang="en-US" sz="1400" dirty="0">
+              <a:rPr lang="en-US" sz="1500" dirty="0">
                 <a:solidFill>
                   <a:srgbClr val="242424"/>
                 </a:solidFill>
@@ -7969,7 +8059,7 @@
               </a:rPr>
               <a:t>: a misspelled key fails instead of being ignored.</a:t>
             </a:r>
-            <a:endParaRPr lang="en-US" sz="1400" dirty="0"/>
+            <a:endParaRPr lang="en-US" sz="1500" dirty="0"/>
           </a:p>
           <a:p>
             <a:pPr marL="228600" indent="-228600">
@@ -7980,13 +8070,13 @@
                 <a:spcPts val="400"/>
               </a:spcBef>
               <a:spcAft>
-                <a:spcPts val="1300"/>
+                <a:spcPts val="1600"/>
               </a:spcAft>
               <a:buSzPct val="100000"/>
               <a:buChar char="●"/>
             </a:pPr>
             <a:r>
-              <a:rPr lang="en-US" sz="1400" b="1" dirty="0">
+              <a:rPr lang="en-US" sz="1500" b="1" dirty="0">
                 <a:solidFill>
                   <a:srgbClr val="151515"/>
                 </a:solidFill>
@@ -8003,7 +8093,7 @@
               <a:buNone/>
             </a:pPr>
             <a:r>
-              <a:rPr lang="en-US" sz="1400" dirty="0">
+              <a:rPr lang="en-US" sz="1500" dirty="0">
                 <a:solidFill>
                   <a:srgbClr val="242424"/>
                 </a:solidFill>
@@ -8013,7 +8103,7 @@
               </a:rPr>
               <a:t>: close sets and ranges, such as the NodePort range.</a:t>
             </a:r>
-            <a:endParaRPr lang="en-US" sz="1400" dirty="0"/>
+            <a:endParaRPr lang="en-US" sz="1500" dirty="0"/>
           </a:p>
           <a:p>
             <a:pPr marL="228600" indent="-228600">
@@ -8024,13 +8114,13 @@
                 <a:spcPts val="400"/>
               </a:spcBef>
               <a:spcAft>
-                <a:spcPts val="1300"/>
+                <a:spcPts val="1600"/>
               </a:spcAft>
               <a:buSzPct val="100000"/>
               <a:buChar char="●"/>
             </a:pPr>
             <a:r>
-              <a:rPr lang="en-US" sz="1400" b="1" dirty="0">
+              <a:rPr lang="en-US" sz="1500" b="1" dirty="0">
                 <a:solidFill>
                   <a:srgbClr val="151515"/>
                 </a:solidFill>
@@ -8047,7 +8137,7 @@
               <a:buNone/>
             </a:pPr>
             <a:r>
-              <a:rPr lang="en-US" sz="1400" dirty="0">
+              <a:rPr lang="en-US" sz="1500" dirty="0">
                 <a:solidFill>
                   <a:srgbClr val="242424"/>
                 </a:solidFill>
@@ -8057,7 +8147,7 @@
               </a:rPr>
               <a:t>: a new value needs a schema entry in the same commit.</a:t>
             </a:r>
-            <a:endParaRPr lang="en-US" sz="1400" dirty="0"/>
+            <a:endParaRPr lang="en-US" sz="1500" dirty="0"/>
           </a:p>
         </p:txBody>
       </p:sp>
@@ -8456,7 +8546,7 @@
               <a:buChar char="●"/>
             </a:pPr>
             <a:r>
-              <a:rPr lang="en-US" sz="1700" dirty="0">
+              <a:rPr lang="en-US" sz="2000" dirty="0">
                 <a:solidFill>
                   <a:srgbClr val="242424"/>
                 </a:solidFill>
@@ -8466,7 +8556,7 @@
               </a:rPr>
               <a:t>Why Helm: YAML sprawl, and what Helm 4 changed</a:t>
             </a:r>
-            <a:endParaRPr lang="en-US" sz="1700" dirty="0"/>
+            <a:endParaRPr lang="en-US" sz="2000" dirty="0"/>
           </a:p>
           <a:p>
             <a:pPr algn="l" marL="342900" indent="-342900">
@@ -8480,7 +8570,7 @@
               <a:buChar char="●"/>
             </a:pPr>
             <a:r>
-              <a:rPr lang="en-US" sz="1700" dirty="0">
+              <a:rPr lang="en-US" sz="2000" dirty="0">
                 <a:solidFill>
                   <a:srgbClr val="242424"/>
                 </a:solidFill>
@@ -8490,7 +8580,7 @@
               </a:rPr>
               <a:t>Core concepts: chart, release, repository, values</a:t>
             </a:r>
-            <a:endParaRPr lang="en-US" sz="1700" dirty="0"/>
+            <a:endParaRPr lang="en-US" sz="2000" dirty="0"/>
           </a:p>
           <a:p>
             <a:pPr algn="l" marL="342900" indent="-342900">
@@ -8504,7 +8594,7 @@
               <a:buChar char="●"/>
             </a:pPr>
             <a:r>
-              <a:rPr lang="en-US" sz="1700" dirty="0">
+              <a:rPr lang="en-US" sz="2000" dirty="0">
                 <a:solidFill>
                   <a:srgbClr val="242424"/>
                 </a:solidFill>
@@ -8514,7 +8604,7 @@
               </a:rPr>
               <a:t>First chart: anatomy, install, upgrade, rollback</a:t>
             </a:r>
-            <a:endParaRPr lang="en-US" sz="1700" dirty="0"/>
+            <a:endParaRPr lang="en-US" sz="2000" dirty="0"/>
           </a:p>
           <a:p>
             <a:pPr algn="l" marL="342900" indent="-342900">
@@ -8528,7 +8618,7 @@
               <a:buChar char="●"/>
             </a:pPr>
             <a:r>
-              <a:rPr lang="en-US" sz="1700" dirty="0">
+              <a:rPr lang="en-US" sz="2000" dirty="0">
                 <a:solidFill>
                   <a:srgbClr val="242424"/>
                 </a:solidFill>
@@ -8538,7 +8628,7 @@
               </a:rPr>
               <a:t>Values: precedence, override flags, schema</a:t>
             </a:r>
-            <a:endParaRPr lang="en-US" sz="1700" dirty="0"/>
+            <a:endParaRPr lang="en-US" sz="2000" dirty="0"/>
           </a:p>
         </p:txBody>
       </p:sp>
@@ -8574,7 +8664,7 @@
               <a:buChar char="●"/>
             </a:pPr>
             <a:r>
-              <a:rPr lang="en-US" sz="1700" dirty="0">
+              <a:rPr lang="en-US" sz="2000" dirty="0">
                 <a:solidFill>
                   <a:srgbClr val="242424"/>
                 </a:solidFill>
@@ -8584,7 +8674,7 @@
               </a:rPr>
               <a:t>Templates: Sprig, flow control, named templates</a:t>
             </a:r>
-            <a:endParaRPr lang="en-US" sz="1700" dirty="0"/>
+            <a:endParaRPr lang="en-US" sz="2000" dirty="0"/>
           </a:p>
           <a:p>
             <a:pPr algn="l" marL="342900" indent="-342900">
@@ -8598,7 +8688,7 @@
               <a:buChar char="●"/>
             </a:pPr>
             <a:r>
-              <a:rPr lang="en-US" sz="1700" dirty="0">
+              <a:rPr lang="en-US" sz="2000" dirty="0">
                 <a:solidFill>
                   <a:srgbClr val="242424"/>
                 </a:solidFill>
@@ -8608,7 +8698,7 @@
               </a:rPr>
               <a:t>Config, data, hooks: checksums, secrets, Postgres, migrations</a:t>
             </a:r>
-            <a:endParaRPr lang="en-US" sz="1700" dirty="0"/>
+            <a:endParaRPr lang="en-US" sz="2000" dirty="0"/>
           </a:p>
           <a:p>
             <a:pPr algn="l" marL="342900" indent="-342900">
@@ -8622,7 +8712,7 @@
               <a:buChar char="●"/>
             </a:pPr>
             <a:r>
-              <a:rPr lang="en-US" sz="1700" dirty="0">
+              <a:rPr lang="en-US" sz="2000" dirty="0">
                 <a:solidFill>
                   <a:srgbClr val="242424"/>
                 </a:solidFill>
@@ -8632,7 +8722,7 @@
               </a:rPr>
               <a:t>Safe releases: wait, rollback, server-side apply</a:t>
             </a:r>
-            <a:endParaRPr lang="en-US" sz="1700" dirty="0"/>
+            <a:endParaRPr lang="en-US" sz="2000" dirty="0"/>
           </a:p>
           <a:p>
             <a:pPr algn="l" marL="342900" indent="-342900">
@@ -8646,7 +8736,7 @@
               <a:buChar char="●"/>
             </a:pPr>
             <a:r>
-              <a:rPr lang="en-US" sz="1700" dirty="0">
+              <a:rPr lang="en-US" sz="2000" dirty="0">
                 <a:solidFill>
                   <a:srgbClr val="242424"/>
                 </a:solidFill>
@@ -8656,7 +8746,7 @@
               </a:rPr>
               <a:t>Verification: lint, template, dry-run</a:t>
             </a:r>
-            <a:endParaRPr lang="en-US" sz="1700" dirty="0"/>
+            <a:endParaRPr lang="en-US" sz="2000" dirty="0"/>
           </a:p>
         </p:txBody>
       </p:sp>
@@ -8874,7 +8964,7 @@
         <p:spPr>
           <a:xfrm>
             <a:off x="566928" y="1691640"/>
-            <a:ext cx="6583680" cy="4251960"/>
+            <a:ext cx="7498080" cy="2862072"/>
           </a:xfrm>
           <a:prstGeom prst="rect">
             <a:avLst/>
@@ -8899,7 +8989,7 @@
         <p:spPr>
           <a:xfrm>
             <a:off x="749808" y="1783080"/>
-            <a:ext cx="6217920" cy="4069080"/>
+            <a:ext cx="7132320" cy="2679192"/>
           </a:xfrm>
           <a:prstGeom prst="rect">
             <a:avLst/>
@@ -8918,7 +9008,7 @@
               <a:buNone/>
             </a:pPr>
             <a:r>
-              <a:rPr lang="en-US" sz="1100" dirty="0">
+              <a:rPr lang="en-US" sz="1200" dirty="0">
                 <a:solidFill>
                   <a:srgbClr val="E6E6E6"/>
                 </a:solidFill>
@@ -8936,7 +9026,7 @@
               <a:buNone/>
             </a:pPr>
             <a:r>
-              <a:rPr lang="en-US" sz="1100" dirty="0">
+              <a:rPr lang="en-US" sz="1200" dirty="0">
                 <a:solidFill>
                   <a:srgbClr val="E6E6E6"/>
                 </a:solidFill>
@@ -8954,7 +9044,7 @@
               <a:buNone/>
             </a:pPr>
             <a:r>
-              <a:rPr lang="en-US" sz="1100" dirty="0">
+              <a:rPr lang="en-US" sz="1200" dirty="0">
                 <a:solidFill>
                   <a:srgbClr val="E6E6E6"/>
                 </a:solidFill>
@@ -8972,7 +9062,7 @@
               <a:buNone/>
             </a:pPr>
             <a:r>
-              <a:rPr lang="en-US" sz="1100" dirty="0">
+              <a:rPr lang="en-US" sz="1200" dirty="0">
                 <a:solidFill>
                   <a:srgbClr val="E6E6E6"/>
                 </a:solidFill>
@@ -8990,7 +9080,7 @@
               <a:buNone/>
             </a:pPr>
             <a:r>
-              <a:rPr lang="en-US" sz="1100" dirty="0">
+              <a:rPr lang="en-US" sz="1200" dirty="0">
                 <a:solidFill>
                   <a:srgbClr val="E6E6E6"/>
                 </a:solidFill>
@@ -9008,7 +9098,7 @@
               <a:buNone/>
             </a:pPr>
             <a:r>
-              <a:rPr lang="en-US" sz="1100" dirty="0">
+              <a:rPr lang="en-US" sz="1200" dirty="0">
                 <a:solidFill>
                   <a:srgbClr val="E6E6E6"/>
                 </a:solidFill>
@@ -9026,7 +9116,7 @@
               <a:buNone/>
             </a:pPr>
             <a:r>
-              <a:rPr lang="en-US" sz="1100" dirty="0">
+              <a:rPr lang="en-US" sz="1200" dirty="0">
                 <a:solidFill>
                   <a:srgbClr val="E6E6E6"/>
                 </a:solidFill>
@@ -9044,7 +9134,7 @@
               <a:buNone/>
             </a:pPr>
             <a:r>
-              <a:rPr lang="en-US" sz="1100" dirty="0">
+              <a:rPr lang="en-US" sz="1200" dirty="0">
                 <a:solidFill>
                   <a:srgbClr val="E6E6E6"/>
                 </a:solidFill>
@@ -9062,7 +9152,7 @@
               <a:buNone/>
             </a:pPr>
             <a:r>
-              <a:rPr lang="en-US" sz="1100" dirty="0">
+              <a:rPr lang="en-US" sz="1200" dirty="0">
                 <a:solidFill>
                   <a:srgbClr val="E6E6E6"/>
                 </a:solidFill>
@@ -9080,7 +9170,7 @@
               <a:buNone/>
             </a:pPr>
             <a:r>
-              <a:rPr lang="en-US" sz="1100" dirty="0">
+              <a:rPr lang="en-US" sz="1200" dirty="0">
                 <a:solidFill>
                   <a:srgbClr val="E6E6E6"/>
                 </a:solidFill>
@@ -9091,7 +9181,7 @@
               <a:t>    log-level: {{ .Values.config.logLevel | quote }}
 </a:t>
             </a:r>
-            <a:endParaRPr lang="en-US" sz="1100" dirty="0"/>
+            <a:endParaRPr lang="en-US" sz="1200" dirty="0"/>
           </a:p>
         </p:txBody>
       </p:sp>
@@ -9103,8 +9193,8 @@
         </p:nvSpPr>
         <p:spPr>
           <a:xfrm>
-            <a:off x="566928" y="5943600"/>
-            <a:ext cx="11055096" cy="310896"/>
+            <a:off x="566928" y="4626864"/>
+            <a:ext cx="7498080" cy="310896"/>
           </a:xfrm>
           <a:prstGeom prst="rect">
             <a:avLst/>
@@ -9142,8 +9232,8 @@
         </p:nvSpPr>
         <p:spPr>
           <a:xfrm>
-            <a:off x="7470648" y="1783080"/>
-            <a:ext cx="4154119" cy="4114800"/>
+            <a:off x="8385048" y="1783080"/>
+            <a:ext cx="3239719" cy="4114800"/>
           </a:xfrm>
           <a:prstGeom prst="rect">
             <a:avLst/>
@@ -9163,13 +9253,13 @@
                 <a:spcPts val="400"/>
               </a:spcBef>
               <a:spcAft>
-                <a:spcPts val="1300"/>
+                <a:spcPts val="1600"/>
               </a:spcAft>
               <a:buSzPct val="100000"/>
               <a:buChar char="●"/>
             </a:pPr>
             <a:r>
-              <a:rPr lang="en-US" sz="1400" b="1" dirty="0">
+              <a:rPr lang="en-US" sz="1500" b="1" dirty="0">
                 <a:solidFill>
                   <a:srgbClr val="151515"/>
                 </a:solidFill>
@@ -9186,7 +9276,7 @@
               <a:buNone/>
             </a:pPr>
             <a:r>
-              <a:rPr lang="en-US" sz="1400" dirty="0">
+              <a:rPr lang="en-US" sz="1500" dirty="0">
                 <a:solidFill>
                   <a:srgbClr val="242424"/>
                 </a:solidFill>
@@ -9196,7 +9286,7 @@
               </a:rPr>
               <a:t>: built-in objects; also .Capabilities, .Template and .Files.</a:t>
             </a:r>
-            <a:endParaRPr lang="en-US" sz="1400" dirty="0"/>
+            <a:endParaRPr lang="en-US" sz="1500" dirty="0"/>
           </a:p>
           <a:p>
             <a:pPr marL="228600" indent="-228600">
@@ -9207,13 +9297,13 @@
                 <a:spcPts val="400"/>
               </a:spcBef>
               <a:spcAft>
-                <a:spcPts val="1300"/>
+                <a:spcPts val="1600"/>
               </a:spcAft>
               <a:buSzPct val="100000"/>
               <a:buChar char="●"/>
             </a:pPr>
             <a:r>
-              <a:rPr lang="en-US" sz="1400" b="1" dirty="0">
+              <a:rPr lang="en-US" sz="1500" b="1" dirty="0">
                 <a:solidFill>
                   <a:srgbClr val="151515"/>
                 </a:solidFill>
@@ -9230,7 +9320,7 @@
               <a:buNone/>
             </a:pPr>
             <a:r>
-              <a:rPr lang="en-US" sz="1400" dirty="0">
+              <a:rPr lang="en-US" sz="1500" dirty="0">
                 <a:solidFill>
                   <a:srgbClr val="242424"/>
                 </a:solidFill>
@@ -9240,7 +9330,7 @@
               </a:rPr>
               <a:t>: a | f is f applied to a; quote, default and printf come from Sprig.</a:t>
             </a:r>
-            <a:endParaRPr lang="en-US" sz="1400" dirty="0"/>
+            <a:endParaRPr lang="en-US" sz="1500" dirty="0"/>
           </a:p>
           <a:p>
             <a:pPr marL="228600" indent="-228600">
@@ -9251,13 +9341,13 @@
                 <a:spcPts val="400"/>
               </a:spcBef>
               <a:spcAft>
-                <a:spcPts val="1300"/>
+                <a:spcPts val="1600"/>
               </a:spcAft>
               <a:buSzPct val="100000"/>
               <a:buChar char="●"/>
             </a:pPr>
             <a:r>
-              <a:rPr lang="en-US" sz="1400" b="1" dirty="0">
+              <a:rPr lang="en-US" sz="1500" b="1" dirty="0">
                 <a:solidFill>
                   <a:srgbClr val="151515"/>
                 </a:solidFill>
@@ -9274,7 +9364,7 @@
               <a:buNone/>
             </a:pPr>
             <a:r>
-              <a:rPr lang="en-US" sz="1400" dirty="0">
+              <a:rPr lang="en-US" sz="1500" dirty="0">
                 <a:solidFill>
                   <a:srgbClr val="242424"/>
                 </a:solidFill>
@@ -9284,7 +9374,7 @@
               </a:rPr>
               <a:t>: declared with := and read as $name.</a:t>
             </a:r>
-            <a:endParaRPr lang="en-US" sz="1400" dirty="0"/>
+            <a:endParaRPr lang="en-US" sz="1500" dirty="0"/>
           </a:p>
           <a:p>
             <a:pPr marL="228600" indent="-228600">
@@ -9295,13 +9385,13 @@
                 <a:spcPts val="400"/>
               </a:spcBef>
               <a:spcAft>
-                <a:spcPts val="1300"/>
+                <a:spcPts val="1600"/>
               </a:spcAft>
               <a:buSzPct val="100000"/>
               <a:buChar char="●"/>
             </a:pPr>
             <a:r>
-              <a:rPr lang="en-US" sz="1400" b="1" dirty="0">
+              <a:rPr lang="en-US" sz="1500" b="1" dirty="0">
                 <a:solidFill>
                   <a:srgbClr val="151515"/>
                 </a:solidFill>
@@ -9318,7 +9408,7 @@
               <a:buNone/>
             </a:pPr>
             <a:r>
-              <a:rPr lang="en-US" sz="1400" dirty="0">
+              <a:rPr lang="en-US" sz="1500" dirty="0">
                 <a:solidFill>
                   <a:srgbClr val="242424"/>
                 </a:solidFill>
@@ -9328,7 +9418,7 @@
               </a:rPr>
               <a:t>: {{- and -}} trim newlines; the file still starts with apiVersion.</a:t>
             </a:r>
-            <a:endParaRPr lang="en-US" sz="1400" dirty="0"/>
+            <a:endParaRPr lang="en-US" sz="1500" dirty="0"/>
           </a:p>
         </p:txBody>
       </p:sp>
@@ -9590,7 +9680,7 @@
               <a:buNone/>
             </a:pPr>
             <a:r>
-              <a:rPr lang="en-US" sz="1400" dirty="0">
+              <a:rPr lang="en-US" sz="1600" dirty="0">
                 <a:solidFill>
                   <a:srgbClr val="E6E6E6"/>
                 </a:solidFill>
@@ -9608,7 +9698,7 @@
               <a:buNone/>
             </a:pPr>
             <a:r>
-              <a:rPr lang="en-US" sz="1400" dirty="0">
+              <a:rPr lang="en-US" sz="1600" dirty="0">
                 <a:solidFill>
                   <a:srgbClr val="E6E6E6"/>
                 </a:solidFill>
@@ -9626,7 +9716,7 @@
               <a:buNone/>
             </a:pPr>
             <a:r>
-              <a:rPr lang="en-US" sz="1400" dirty="0">
+              <a:rPr lang="en-US" sz="1600" dirty="0">
                 <a:solidFill>
                   <a:srgbClr val="E6E6E6"/>
                 </a:solidFill>
@@ -9644,7 +9734,7 @@
               <a:buNone/>
             </a:pPr>
             <a:r>
-              <a:rPr lang="en-US" sz="1400" dirty="0">
+              <a:rPr lang="en-US" sz="1600" dirty="0">
                 <a:solidFill>
                   <a:srgbClr val="E6E6E6"/>
                 </a:solidFill>
@@ -9662,7 +9752,7 @@
               <a:buNone/>
             </a:pPr>
             <a:r>
-              <a:rPr lang="en-US" sz="1400" dirty="0">
+              <a:rPr lang="en-US" sz="1600" dirty="0">
                 <a:solidFill>
                   <a:srgbClr val="E6E6E6"/>
                 </a:solidFill>
@@ -9680,7 +9770,7 @@
               <a:buNone/>
             </a:pPr>
             <a:r>
-              <a:rPr lang="en-US" sz="1400" dirty="0">
+              <a:rPr lang="en-US" sz="1600" dirty="0">
                 <a:solidFill>
                   <a:srgbClr val="E6E6E6"/>
                 </a:solidFill>
@@ -9698,7 +9788,7 @@
               <a:buNone/>
             </a:pPr>
             <a:r>
-              <a:rPr lang="en-US" sz="1400" dirty="0">
+              <a:rPr lang="en-US" sz="1600" dirty="0">
                 <a:solidFill>
                   <a:srgbClr val="E6E6E6"/>
                 </a:solidFill>
@@ -9716,7 +9806,7 @@
               <a:buNone/>
             </a:pPr>
             <a:r>
-              <a:rPr lang="en-US" sz="1400" dirty="0">
+              <a:rPr lang="en-US" sz="1600" dirty="0">
                 <a:solidFill>
                   <a:srgbClr val="E6E6E6"/>
                 </a:solidFill>
@@ -9734,7 +9824,7 @@
               <a:buNone/>
             </a:pPr>
             <a:r>
-              <a:rPr lang="en-US" sz="1400" dirty="0">
+              <a:rPr lang="en-US" sz="1600" dirty="0">
                 <a:solidFill>
                   <a:srgbClr val="E6E6E6"/>
                 </a:solidFill>
@@ -9752,7 +9842,7 @@
               <a:buNone/>
             </a:pPr>
             <a:r>
-              <a:rPr lang="en-US" sz="1400" dirty="0">
+              <a:rPr lang="en-US" sz="1600" dirty="0">
                 <a:solidFill>
                   <a:srgbClr val="E6E6E6"/>
                 </a:solidFill>
@@ -9770,7 +9860,7 @@
               <a:buNone/>
             </a:pPr>
             <a:r>
-              <a:rPr lang="en-US" sz="1400" dirty="0">
+              <a:rPr lang="en-US" sz="1600" dirty="0">
                 <a:solidFill>
                   <a:srgbClr val="E6E6E6"/>
                 </a:solidFill>
@@ -9788,7 +9878,7 @@
               <a:buNone/>
             </a:pPr>
             <a:r>
-              <a:rPr lang="en-US" sz="1400" dirty="0">
+              <a:rPr lang="en-US" sz="1600" dirty="0">
                 <a:solidFill>
                   <a:srgbClr val="E6E6E6"/>
                 </a:solidFill>
@@ -9806,7 +9896,7 @@
               <a:buNone/>
             </a:pPr>
             <a:r>
-              <a:rPr lang="en-US" sz="1400" dirty="0">
+              <a:rPr lang="en-US" sz="1600" dirty="0">
                 <a:solidFill>
                   <a:srgbClr val="E6E6E6"/>
                 </a:solidFill>
@@ -9824,7 +9914,7 @@
               <a:buNone/>
             </a:pPr>
             <a:r>
-              <a:rPr lang="en-US" sz="1400" dirty="0">
+              <a:rPr lang="en-US" sz="1600" dirty="0">
                 <a:solidFill>
                   <a:srgbClr val="E6E6E6"/>
                 </a:solidFill>
@@ -9842,7 +9932,7 @@
               <a:buNone/>
             </a:pPr>
             <a:r>
-              <a:rPr lang="en-US" sz="1400" dirty="0">
+              <a:rPr lang="en-US" sz="1600" dirty="0">
                 <a:solidFill>
                   <a:srgbClr val="E6E6E6"/>
                 </a:solidFill>
@@ -9853,7 +9943,7 @@
               <a:t>{{- end }}
 </a:t>
             </a:r>
-            <a:endParaRPr lang="en-US" sz="1400" dirty="0"/>
+            <a:endParaRPr lang="en-US" sz="1600" dirty="0"/>
           </a:p>
         </p:txBody>
       </p:sp>
@@ -10110,7 +10200,7 @@
         <p:spPr>
           <a:xfrm>
             <a:off x="566928" y="1691640"/>
-            <a:ext cx="6675120" cy="4251960"/>
+            <a:ext cx="7680960" cy="4251960"/>
           </a:xfrm>
           <a:prstGeom prst="rect">
             <a:avLst/>
@@ -10135,7 +10225,7 @@
         <p:spPr>
           <a:xfrm>
             <a:off x="749808" y="1783080"/>
-            <a:ext cx="6309360" cy="4069080"/>
+            <a:ext cx="7315200" cy="4069080"/>
           </a:xfrm>
           <a:prstGeom prst="rect">
             <a:avLst/>
@@ -10154,7 +10244,7 @@
               <a:buNone/>
             </a:pPr>
             <a:r>
-              <a:rPr lang="en-US" sz="1100" dirty="0">
+              <a:rPr lang="en-US" sz="1200" dirty="0">
                 <a:solidFill>
                   <a:srgbClr val="E6E6E6"/>
                 </a:solidFill>
@@ -10172,7 +10262,7 @@
               <a:buNone/>
             </a:pPr>
             <a:r>
-              <a:rPr lang="en-US" sz="1100" dirty="0">
+              <a:rPr lang="en-US" sz="1200" dirty="0">
                 <a:solidFill>
                   <a:srgbClr val="E6E6E6"/>
                 </a:solidFill>
@@ -10190,7 +10280,7 @@
               <a:buNone/>
             </a:pPr>
             <a:r>
-              <a:rPr lang="en-US" sz="1100" dirty="0">
+              <a:rPr lang="en-US" sz="1200" dirty="0">
                 <a:solidFill>
                   <a:srgbClr val="E6E6E6"/>
                 </a:solidFill>
@@ -10208,7 +10298,7 @@
               <a:buNone/>
             </a:pPr>
             <a:r>
-              <a:rPr lang="en-US" sz="1100" dirty="0">
+              <a:rPr lang="en-US" sz="1200" dirty="0">
                 <a:solidFill>
                   <a:srgbClr val="E6E6E6"/>
                 </a:solidFill>
@@ -10226,7 +10316,7 @@
               <a:buNone/>
             </a:pPr>
             <a:r>
-              <a:rPr lang="en-US" sz="1100" dirty="0">
+              <a:rPr lang="en-US" sz="1200" dirty="0">
                 <a:solidFill>
                   <a:srgbClr val="E6E6E6"/>
                 </a:solidFill>
@@ -10244,7 +10334,7 @@
               <a:buNone/>
             </a:pPr>
             <a:r>
-              <a:rPr lang="en-US" sz="1100" dirty="0">
+              <a:rPr lang="en-US" sz="1200" dirty="0">
                 <a:solidFill>
                   <a:srgbClr val="E6E6E6"/>
                 </a:solidFill>
@@ -10262,7 +10352,7 @@
               <a:buNone/>
             </a:pPr>
             <a:r>
-              <a:rPr lang="en-US" sz="1100" dirty="0">
+              <a:rPr lang="en-US" sz="1200" dirty="0">
                 <a:solidFill>
                   <a:srgbClr val="E6E6E6"/>
                 </a:solidFill>
@@ -10280,7 +10370,7 @@
               <a:buNone/>
             </a:pPr>
             <a:r>
-              <a:rPr lang="en-US" sz="1100" dirty="0">
+              <a:rPr lang="en-US" sz="1200" dirty="0">
                 <a:solidFill>
                   <a:srgbClr val="E6E6E6"/>
                 </a:solidFill>
@@ -10298,7 +10388,7 @@
               <a:buNone/>
             </a:pPr>
             <a:r>
-              <a:rPr lang="en-US" sz="1100" dirty="0">
+              <a:rPr lang="en-US" sz="1200" dirty="0">
                 <a:solidFill>
                   <a:srgbClr val="E6E6E6"/>
                 </a:solidFill>
@@ -10316,7 +10406,7 @@
               <a:buNone/>
             </a:pPr>
             <a:r>
-              <a:rPr lang="en-US" sz="1100" dirty="0">
+              <a:rPr lang="en-US" sz="1200" dirty="0">
                 <a:solidFill>
                   <a:srgbClr val="E6E6E6"/>
                 </a:solidFill>
@@ -10334,7 +10424,7 @@
               <a:buNone/>
             </a:pPr>
             <a:r>
-              <a:rPr lang="en-US" sz="1100" dirty="0">
+              <a:rPr lang="en-US" sz="1200" dirty="0">
                 <a:solidFill>
                   <a:srgbClr val="E6E6E6"/>
                 </a:solidFill>
@@ -10352,7 +10442,7 @@
               <a:buNone/>
             </a:pPr>
             <a:r>
-              <a:rPr lang="en-US" sz="1100" dirty="0">
+              <a:rPr lang="en-US" sz="1200" dirty="0">
                 <a:solidFill>
                   <a:srgbClr val="E6E6E6"/>
                 </a:solidFill>
@@ -10370,7 +10460,7 @@
               <a:buNone/>
             </a:pPr>
             <a:r>
-              <a:rPr lang="en-US" sz="1100" dirty="0">
+              <a:rPr lang="en-US" sz="1200" dirty="0">
                 <a:solidFill>
                   <a:srgbClr val="E6E6E6"/>
                 </a:solidFill>
@@ -10381,7 +10471,7 @@
               <a:t>    {{- include "shipping-service.labels" . | nindent 4 }}
 </a:t>
             </a:r>
-            <a:endParaRPr lang="en-US" sz="1100" dirty="0"/>
+            <a:endParaRPr lang="en-US" sz="1200" dirty="0"/>
           </a:p>
         </p:txBody>
       </p:sp>
@@ -10394,7 +10484,7 @@
         <p:spPr>
           <a:xfrm>
             <a:off x="566928" y="5943600"/>
-            <a:ext cx="11055096" cy="310896"/>
+            <a:ext cx="7680960" cy="310896"/>
           </a:xfrm>
           <a:prstGeom prst="rect">
             <a:avLst/>
@@ -10432,8 +10522,8 @@
         </p:nvSpPr>
         <p:spPr>
           <a:xfrm>
-            <a:off x="7562088" y="1783080"/>
-            <a:ext cx="4062679" cy="4114800"/>
+            <a:off x="8567928" y="1783080"/>
+            <a:ext cx="3056839" cy="4114800"/>
           </a:xfrm>
           <a:prstGeom prst="rect">
             <a:avLst/>
@@ -10453,13 +10543,13 @@
                 <a:spcPts val="400"/>
               </a:spcBef>
               <a:spcAft>
-                <a:spcPts val="1300"/>
+                <a:spcPts val="1600"/>
               </a:spcAft>
               <a:buSzPct val="100000"/>
               <a:buChar char="●"/>
             </a:pPr>
             <a:r>
-              <a:rPr lang="en-US" sz="1400" b="1" dirty="0">
+              <a:rPr lang="en-US" sz="1500" b="1" dirty="0">
                 <a:solidFill>
                   <a:srgbClr val="151515"/>
                 </a:solidFill>
@@ -10476,7 +10566,7 @@
               <a:buNone/>
             </a:pPr>
             <a:r>
-              <a:rPr lang="en-US" sz="1400" dirty="0">
+              <a:rPr lang="en-US" sz="1500" dirty="0">
                 <a:solidFill>
                   <a:srgbClr val="242424"/>
                 </a:solidFill>
@@ -10486,7 +10576,7 @@
               </a:rPr>
               <a:t>: a global name; prefix it with the chart name.</a:t>
             </a:r>
-            <a:endParaRPr lang="en-US" sz="1400" dirty="0"/>
+            <a:endParaRPr lang="en-US" sz="1500" dirty="0"/>
           </a:p>
           <a:p>
             <a:pPr marL="228600" indent="-228600">
@@ -10497,13 +10587,13 @@
                 <a:spcPts val="400"/>
               </a:spcBef>
               <a:spcAft>
-                <a:spcPts val="1300"/>
+                <a:spcPts val="1600"/>
               </a:spcAft>
               <a:buSzPct val="100000"/>
               <a:buChar char="●"/>
             </a:pPr>
             <a:r>
-              <a:rPr lang="en-US" sz="1400" b="1" dirty="0">
+              <a:rPr lang="en-US" sz="1500" b="1" dirty="0">
                 <a:solidFill>
                   <a:srgbClr val="151515"/>
                 </a:solidFill>
@@ -10520,7 +10610,7 @@
               <a:buNone/>
             </a:pPr>
             <a:r>
-              <a:rPr lang="en-US" sz="1400" dirty="0">
+              <a:rPr lang="en-US" sz="1500" dirty="0">
                 <a:solidFill>
                   <a:srgbClr val="242424"/>
                 </a:solidFill>
@@ -10530,7 +10620,7 @@
               </a:rPr>
               <a:t>: returns a string, so it pipes to nindent, quote or trunc.</a:t>
             </a:r>
-            <a:endParaRPr lang="en-US" sz="1400" dirty="0"/>
+            <a:endParaRPr lang="en-US" sz="1500" dirty="0"/>
           </a:p>
           <a:p>
             <a:pPr marL="228600" indent="-228600">
@@ -10541,13 +10631,13 @@
                 <a:spcPts val="400"/>
               </a:spcBef>
               <a:spcAft>
-                <a:spcPts val="1300"/>
+                <a:spcPts val="1600"/>
               </a:spcAft>
               <a:buSzPct val="100000"/>
               <a:buChar char="●"/>
             </a:pPr>
             <a:r>
-              <a:rPr lang="en-US" sz="1400" b="1" dirty="0">
+              <a:rPr lang="en-US" sz="1500" b="1" dirty="0">
                 <a:solidFill>
                   <a:srgbClr val="151515"/>
                 </a:solidFill>
@@ -10564,7 +10654,7 @@
               <a:buNone/>
             </a:pPr>
             <a:r>
-              <a:rPr lang="en-US" sz="1400" dirty="0">
+              <a:rPr lang="en-US" sz="1500" dirty="0">
                 <a:solidFill>
                   <a:srgbClr val="242424"/>
                 </a:solidFill>
@@ -10574,7 +10664,7 @@
               </a:rPr>
               <a:t>: inserts output directly and cannot be piped; use include.</a:t>
             </a:r>
-            <a:endParaRPr lang="en-US" sz="1400" dirty="0"/>
+            <a:endParaRPr lang="en-US" sz="1500" dirty="0"/>
           </a:p>
           <a:p>
             <a:pPr marL="228600" indent="-228600">
@@ -10585,13 +10675,13 @@
                 <a:spcPts val="400"/>
               </a:spcBef>
               <a:spcAft>
-                <a:spcPts val="1300"/>
+                <a:spcPts val="1600"/>
               </a:spcAft>
               <a:buSzPct val="100000"/>
               <a:buChar char="●"/>
             </a:pPr>
             <a:r>
-              <a:rPr lang="en-US" sz="1400" b="1" dirty="0">
+              <a:rPr lang="en-US" sz="1500" b="1" dirty="0">
                 <a:solidFill>
                   <a:srgbClr val="151515"/>
                 </a:solidFill>
@@ -10608,7 +10698,7 @@
               <a:buNone/>
             </a:pPr>
             <a:r>
-              <a:rPr lang="en-US" sz="1400" dirty="0">
+              <a:rPr lang="en-US" sz="1500" dirty="0">
                 <a:solidFill>
                   <a:srgbClr val="242424"/>
                 </a:solidFill>
@@ -10618,7 +10708,7 @@
               </a:rPr>
               <a:t>: the trailing dot; omit it and .Release fails.</a:t>
             </a:r>
-            <a:endParaRPr lang="en-US" sz="1400" dirty="0"/>
+            <a:endParaRPr lang="en-US" sz="1500" dirty="0"/>
           </a:p>
         </p:txBody>
       </p:sp>
@@ -10804,7 +10894,7 @@
         </p:nvGraphicFramePr>
         <p:xfrm>
           <a:off x="566928" y="1691640"/>
-          <a:ext cx="11055096" cy="2852928"/>
+          <a:ext cx="11055096" cy="3072384"/>
         </p:xfrm>
         <a:graphic>
           <a:graphicData uri="http://schemas.openxmlformats.org/drawingml/2006/table">
@@ -10815,7 +10905,7 @@
                 <a:gridCol w="2560320"/>
                 <a:gridCol w="6757416"/>
               </a:tblGrid>
-              <a:tr h="713232">
+              <a:tr h="768096">
                 <a:tc>
                   <a:txBody>
                     <a:bodyPr/>
@@ -10825,7 +10915,7 @@
                         <a:buNone/>
                       </a:pPr>
                       <a:r>
-                        <a:rPr lang="en-US" sz="1500" b="1" dirty="0">
+                        <a:rPr lang="en-US" sz="1600" b="1" dirty="0">
                           <a:solidFill>
                             <a:srgbClr val="EE0000"/>
                           </a:solidFill>
@@ -10835,7 +10925,7 @@
                         </a:rPr>
                         <a:t>tpl</a:t>
                       </a:r>
-                      <a:endParaRPr lang="en-US" sz="1500" dirty="0">
+                      <a:endParaRPr lang="en-US" sz="1600" dirty="0">
                         <a:latin typeface="Red Hat Mono" charset="0"/>
                         <a:ea typeface="Red Hat Mono" charset="0"/>
                         <a:cs typeface="Red Hat Mono" charset="0"/>
@@ -10890,7 +10980,7 @@
                         <a:buNone/>
                       </a:pPr>
                       <a:r>
-                        <a:rPr lang="en-US" sz="1400" b="1" dirty="0">
+                        <a:rPr lang="en-US" sz="1600" b="1" dirty="0">
                           <a:solidFill>
                             <a:srgbClr val="151515"/>
                           </a:solidFill>
@@ -10900,7 +10990,7 @@
                         </a:rPr>
                         <a:t>Render a string</a:t>
                       </a:r>
-                      <a:endParaRPr lang="en-US" sz="1400" dirty="0">
+                      <a:endParaRPr lang="en-US" sz="1600" dirty="0">
                         <a:latin typeface="Red Hat Text" charset="0"/>
                         <a:ea typeface="Red Hat Text" charset="0"/>
                         <a:cs typeface="Red Hat Text" charset="0"/>
@@ -10955,7 +11045,7 @@
                         <a:buNone/>
                       </a:pPr>
                       <a:r>
-                        <a:rPr lang="en-US" sz="1300" dirty="0">
+                        <a:rPr lang="en-US" sz="1500" dirty="0">
                           <a:solidFill>
                             <a:srgbClr val="242424"/>
                           </a:solidFill>
@@ -10965,7 +11055,7 @@
                         </a:rPr>
                         <a:t>tpl $value $ evaluates a value as a template; apply it only to values the operator controls</a:t>
                       </a:r>
-                      <a:endParaRPr lang="en-US" sz="1300" dirty="0">
+                      <a:endParaRPr lang="en-US" sz="1500" dirty="0">
                         <a:latin typeface="Red Hat Text" charset="0"/>
                         <a:ea typeface="Red Hat Text" charset="0"/>
                         <a:cs typeface="Red Hat Text" charset="0"/>
@@ -11012,7 +11102,7 @@
                   </a:tcPr>
                 </a:tc>
               </a:tr>
-              <a:tr h="713232">
+              <a:tr h="768096">
                 <a:tc>
                   <a:txBody>
                     <a:bodyPr/>
@@ -11022,7 +11112,7 @@
                         <a:buNone/>
                       </a:pPr>
                       <a:r>
-                        <a:rPr lang="en-US" sz="1500" b="1" dirty="0">
+                        <a:rPr lang="en-US" sz="1600" b="1" dirty="0">
                           <a:solidFill>
                             <a:srgbClr val="EE0000"/>
                           </a:solidFill>
@@ -11032,7 +11122,7 @@
                         </a:rPr>
                         <a:t>required</a:t>
                       </a:r>
-                      <a:endParaRPr lang="en-US" sz="1500" dirty="0">
+                      <a:endParaRPr lang="en-US" sz="1600" dirty="0">
                         <a:latin typeface="Red Hat Mono" charset="0"/>
                         <a:ea typeface="Red Hat Mono" charset="0"/>
                         <a:cs typeface="Red Hat Mono" charset="0"/>
@@ -11087,7 +11177,7 @@
                         <a:buNone/>
                       </a:pPr>
                       <a:r>
-                        <a:rPr lang="en-US" sz="1400" b="1" dirty="0">
+                        <a:rPr lang="en-US" sz="1600" b="1" dirty="0">
                           <a:solidFill>
                             <a:srgbClr val="151515"/>
                           </a:solidFill>
@@ -11097,7 +11187,7 @@
                         </a:rPr>
                         <a:t>Stop on empty</a:t>
                       </a:r>
-                      <a:endParaRPr lang="en-US" sz="1400" dirty="0">
+                      <a:endParaRPr lang="en-US" sz="1600" dirty="0">
                         <a:latin typeface="Red Hat Text" charset="0"/>
                         <a:ea typeface="Red Hat Text" charset="0"/>
                         <a:cs typeface="Red Hat Text" charset="0"/>
@@ -11152,7 +11242,7 @@
                         <a:buNone/>
                       </a:pPr>
                       <a:r>
-                        <a:rPr lang="en-US" sz="1300" dirty="0">
+                        <a:rPr lang="en-US" sz="1500" dirty="0">
                           <a:solidFill>
                             <a:srgbClr val="242424"/>
                           </a:solidFill>
@@ -11162,7 +11252,7 @@
                         </a:rPr>
                         <a:t>required "image.repository is required" .Values.image.repository aborts with your message</a:t>
                       </a:r>
-                      <a:endParaRPr lang="en-US" sz="1300" dirty="0">
+                      <a:endParaRPr lang="en-US" sz="1500" dirty="0">
                         <a:latin typeface="Red Hat Text" charset="0"/>
                         <a:ea typeface="Red Hat Text" charset="0"/>
                         <a:cs typeface="Red Hat Text" charset="0"/>
@@ -11209,7 +11299,7 @@
                   </a:tcPr>
                 </a:tc>
               </a:tr>
-              <a:tr h="713232">
+              <a:tr h="768096">
                 <a:tc>
                   <a:txBody>
                     <a:bodyPr/>
@@ -11219,7 +11309,7 @@
                         <a:buNone/>
                       </a:pPr>
                       <a:r>
-                        <a:rPr lang="en-US" sz="1500" b="1" dirty="0">
+                        <a:rPr lang="en-US" sz="1600" b="1" dirty="0">
                           <a:solidFill>
                             <a:srgbClr val="EE0000"/>
                           </a:solidFill>
@@ -11229,7 +11319,7 @@
                         </a:rPr>
                         <a:t>fail</a:t>
                       </a:r>
-                      <a:endParaRPr lang="en-US" sz="1500" dirty="0">
+                      <a:endParaRPr lang="en-US" sz="1600" dirty="0">
                         <a:latin typeface="Red Hat Mono" charset="0"/>
                         <a:ea typeface="Red Hat Mono" charset="0"/>
                         <a:cs typeface="Red Hat Mono" charset="0"/>
@@ -11284,7 +11374,7 @@
                         <a:buNone/>
                       </a:pPr>
                       <a:r>
-                        <a:rPr lang="en-US" sz="1400" b="1" dirty="0">
+                        <a:rPr lang="en-US" sz="1600" b="1" dirty="0">
                           <a:solidFill>
                             <a:srgbClr val="151515"/>
                           </a:solidFill>
@@ -11294,7 +11384,7 @@
                         </a:rPr>
                         <a:t>Reject a combination</a:t>
                       </a:r>
-                      <a:endParaRPr lang="en-US" sz="1400" dirty="0">
+                      <a:endParaRPr lang="en-US" sz="1600" dirty="0">
                         <a:latin typeface="Red Hat Text" charset="0"/>
                         <a:ea typeface="Red Hat Text" charset="0"/>
                         <a:cs typeface="Red Hat Text" charset="0"/>
@@ -11349,7 +11439,7 @@
                         <a:buNone/>
                       </a:pPr>
                       <a:r>
-                        <a:rPr lang="en-US" sz="1300" dirty="0">
+                        <a:rPr lang="en-US" sz="1500" dirty="0">
                           <a:solidFill>
                             <a:srgbClr val="242424"/>
                           </a:solidFill>
@@ -11359,7 +11449,7 @@
                         </a:rPr>
                         <a:t>Unconditional abort, used inside an if to reject invalid combinations of values</a:t>
                       </a:r>
-                      <a:endParaRPr lang="en-US" sz="1300" dirty="0">
+                      <a:endParaRPr lang="en-US" sz="1500" dirty="0">
                         <a:latin typeface="Red Hat Text" charset="0"/>
                         <a:ea typeface="Red Hat Text" charset="0"/>
                         <a:cs typeface="Red Hat Text" charset="0"/>
@@ -11406,7 +11496,7 @@
                   </a:tcPr>
                 </a:tc>
               </a:tr>
-              <a:tr h="713232">
+              <a:tr h="768096">
                 <a:tc>
                   <a:txBody>
                     <a:bodyPr/>
@@ -11416,7 +11506,7 @@
                         <a:buNone/>
                       </a:pPr>
                       <a:r>
-                        <a:rPr lang="en-US" sz="1500" b="1" dirty="0">
+                        <a:rPr lang="en-US" sz="1600" b="1" dirty="0">
                           <a:solidFill>
                             <a:srgbClr val="EE0000"/>
                           </a:solidFill>
@@ -11426,7 +11516,7 @@
                         </a:rPr>
                         <a:t>lookup</a:t>
                       </a:r>
-                      <a:endParaRPr lang="en-US" sz="1500" dirty="0">
+                      <a:endParaRPr lang="en-US" sz="1600" dirty="0">
                         <a:latin typeface="Red Hat Mono" charset="0"/>
                         <a:ea typeface="Red Hat Mono" charset="0"/>
                         <a:cs typeface="Red Hat Mono" charset="0"/>
@@ -11481,7 +11571,7 @@
                         <a:buNone/>
                       </a:pPr>
                       <a:r>
-                        <a:rPr lang="en-US" sz="1400" b="1" dirty="0">
+                        <a:rPr lang="en-US" sz="1600" b="1" dirty="0">
                           <a:solidFill>
                             <a:srgbClr val="151515"/>
                           </a:solidFill>
@@ -11491,7 +11581,7 @@
                         </a:rPr>
                         <a:t>Read the cluster</a:t>
                       </a:r>
-                      <a:endParaRPr lang="en-US" sz="1400" dirty="0">
+                      <a:endParaRPr lang="en-US" sz="1600" dirty="0">
                         <a:latin typeface="Red Hat Text" charset="0"/>
                         <a:ea typeface="Red Hat Text" charset="0"/>
                         <a:cs typeface="Red Hat Text" charset="0"/>
@@ -11546,7 +11636,7 @@
                         <a:buNone/>
                       </a:pPr>
                       <a:r>
-                        <a:rPr lang="en-US" sz="1300" dirty="0">
+                        <a:rPr lang="en-US" sz="1500" dirty="0">
                           <a:solidFill>
                             <a:srgbClr val="242424"/>
                           </a:solidFill>
@@ -11556,7 +11646,7 @@
                         </a:rPr>
                         <a:t>Returns an empty map under helm template and --dry-run=client; works with --dry-run=server</a:t>
                       </a:r>
-                      <a:endParaRPr lang="en-US" sz="1300" dirty="0">
+                      <a:endParaRPr lang="en-US" sz="1500" dirty="0">
                         <a:latin typeface="Red Hat Text" charset="0"/>
                         <a:ea typeface="Red Hat Text" charset="0"/>
                         <a:cs typeface="Red Hat Text" charset="0"/>
@@ -11865,7 +11955,7 @@
               <a:buNone/>
             </a:pPr>
             <a:r>
-              <a:rPr lang="en-US" sz="1000" dirty="0">
+              <a:rPr lang="en-US" sz="1300" dirty="0">
                 <a:solidFill>
                   <a:srgbClr val="E6E6E6"/>
                 </a:solidFill>
@@ -11883,7 +11973,7 @@
               <a:buNone/>
             </a:pPr>
             <a:r>
-              <a:rPr lang="en-US" sz="1000" dirty="0">
+              <a:rPr lang="en-US" sz="1300" dirty="0">
                 <a:solidFill>
                   <a:srgbClr val="E6E6E6"/>
                 </a:solidFill>
@@ -11901,7 +11991,7 @@
               <a:buNone/>
             </a:pPr>
             <a:r>
-              <a:rPr lang="en-US" sz="1000" dirty="0">
+              <a:rPr lang="en-US" sz="1300" dirty="0">
                 <a:solidFill>
                   <a:srgbClr val="E6E6E6"/>
                 </a:solidFill>
@@ -11919,7 +12009,7 @@
               <a:buNone/>
             </a:pPr>
             <a:r>
-              <a:rPr lang="en-US" sz="1000" dirty="0">
+              <a:rPr lang="en-US" sz="1300" dirty="0">
                 <a:solidFill>
                   <a:srgbClr val="E6E6E6"/>
                 </a:solidFill>
@@ -11937,7 +12027,7 @@
               <a:buNone/>
             </a:pPr>
             <a:r>
-              <a:rPr lang="en-US" sz="1000" dirty="0">
+              <a:rPr lang="en-US" sz="1300" dirty="0">
                 <a:solidFill>
                   <a:srgbClr val="E6E6E6"/>
                 </a:solidFill>
@@ -11955,7 +12045,7 @@
               <a:buNone/>
             </a:pPr>
             <a:r>
-              <a:rPr lang="en-US" sz="1000" dirty="0">
+              <a:rPr lang="en-US" sz="1300" dirty="0">
                 <a:solidFill>
                   <a:srgbClr val="E6E6E6"/>
                 </a:solidFill>
@@ -11973,7 +12063,7 @@
               <a:buNone/>
             </a:pPr>
             <a:r>
-              <a:rPr lang="en-US" sz="1000" dirty="0">
+              <a:rPr lang="en-US" sz="1300" dirty="0">
                 <a:solidFill>
                   <a:srgbClr val="E6E6E6"/>
                 </a:solidFill>
@@ -11991,7 +12081,7 @@
               <a:buNone/>
             </a:pPr>
             <a:r>
-              <a:rPr lang="en-US" sz="1000" dirty="0">
+              <a:rPr lang="en-US" sz="1300" dirty="0">
                 <a:solidFill>
                   <a:srgbClr val="E6E6E6"/>
                 </a:solidFill>
@@ -12009,7 +12099,7 @@
               <a:buNone/>
             </a:pPr>
             <a:r>
-              <a:rPr lang="en-US" sz="1000" dirty="0">
+              <a:rPr lang="en-US" sz="1300" dirty="0">
                 <a:solidFill>
                   <a:srgbClr val="E6E6E6"/>
                 </a:solidFill>
@@ -12027,7 +12117,7 @@
               <a:buNone/>
             </a:pPr>
             <a:r>
-              <a:rPr lang="en-US" sz="1000" dirty="0">
+              <a:rPr lang="en-US" sz="1300" dirty="0">
                 <a:solidFill>
                   <a:srgbClr val="E6E6E6"/>
                 </a:solidFill>
@@ -12045,7 +12135,7 @@
               <a:buNone/>
             </a:pPr>
             <a:r>
-              <a:rPr lang="en-US" sz="1000" dirty="0">
+              <a:rPr lang="en-US" sz="1300" dirty="0">
                 <a:solidFill>
                   <a:srgbClr val="E6E6E6"/>
                 </a:solidFill>
@@ -12063,7 +12153,7 @@
               <a:buNone/>
             </a:pPr>
             <a:r>
-              <a:rPr lang="en-US" sz="1000" dirty="0">
+              <a:rPr lang="en-US" sz="1300" dirty="0">
                 <a:solidFill>
                   <a:srgbClr val="E6E6E6"/>
                 </a:solidFill>
@@ -12074,7 +12164,7 @@
               <a:t>  [host]$ helm test {{ .Release.Name }} -n {{ .Release.Namespace }}
 </a:t>
             </a:r>
-            <a:endParaRPr lang="en-US" sz="1000" dirty="0"/>
+            <a:endParaRPr lang="en-US" sz="1300" dirty="0"/>
           </a:p>
         </p:txBody>
       </p:sp>
@@ -12528,7 +12618,7 @@
         <p:spPr>
           <a:xfrm>
             <a:off x="566928" y="1691640"/>
-            <a:ext cx="6583680" cy="4251960"/>
+            <a:ext cx="7315200" cy="1828800"/>
           </a:xfrm>
           <a:prstGeom prst="rect">
             <a:avLst/>
@@ -12553,7 +12643,7 @@
         <p:spPr>
           <a:xfrm>
             <a:off x="749808" y="1783080"/>
-            <a:ext cx="6217920" cy="4069080"/>
+            <a:ext cx="6949440" cy="1645920"/>
           </a:xfrm>
           <a:prstGeom prst="rect">
             <a:avLst/>
@@ -12572,7 +12662,7 @@
               <a:buNone/>
             </a:pPr>
             <a:r>
-              <a:rPr lang="en-US" sz="1100" dirty="0">
+              <a:rPr lang="en-US" sz="1200" dirty="0">
                 <a:solidFill>
                   <a:srgbClr val="E6E6E6"/>
                 </a:solidFill>
@@ -12590,7 +12680,7 @@
               <a:buNone/>
             </a:pPr>
             <a:r>
-              <a:rPr lang="en-US" sz="1100" dirty="0">
+              <a:rPr lang="en-US" sz="1200" dirty="0">
                 <a:solidFill>
                   <a:srgbClr val="E6E6E6"/>
                 </a:solidFill>
@@ -12608,7 +12698,7 @@
               <a:buNone/>
             </a:pPr>
             <a:r>
-              <a:rPr lang="en-US" sz="1100" dirty="0">
+              <a:rPr lang="en-US" sz="1200" dirty="0">
                 <a:solidFill>
                   <a:srgbClr val="E6E6E6"/>
                 </a:solidFill>
@@ -12626,7 +12716,7 @@
               <a:buNone/>
             </a:pPr>
             <a:r>
-              <a:rPr lang="en-US" sz="1100" dirty="0">
+              <a:rPr lang="en-US" sz="1200" dirty="0">
                 <a:solidFill>
                   <a:srgbClr val="E6E6E6"/>
                 </a:solidFill>
@@ -12634,10 +12724,28 @@
                 <a:ea typeface="Red Hat Mono" pitchFamily="34" charset="-122"/>
                 <a:cs typeface="Red Hat Mono" pitchFamily="34" charset="-120"/>
               </a:rPr>
-              <a:t>        checksum/config: {{ include (print $.Template.BasePath "/configmap.yaml") . | sha256sum }}
+              <a:t>        checksum/config: {{ include
 </a:t>
             </a:r>
-            <a:endParaRPr lang="en-US" sz="1100" dirty="0"/>
+            <a:pPr algn="l" indent="0" marL="0">
+              <a:lnSpc>
+                <a:spcPct val="110000"/>
+              </a:lnSpc>
+              <a:buNone/>
+            </a:pPr>
+            <a:r>
+              <a:rPr lang="en-US" sz="1200" dirty="0">
+                <a:solidFill>
+                  <a:srgbClr val="E6E6E6"/>
+                </a:solidFill>
+                <a:latin typeface="Red Hat Mono" pitchFamily="34" charset="0"/>
+                <a:ea typeface="Red Hat Mono" pitchFamily="34" charset="-122"/>
+                <a:cs typeface="Red Hat Mono" pitchFamily="34" charset="-120"/>
+              </a:rPr>
+              <a:t>          (print $.Template.BasePath "/configmap.yaml") . | sha256sum }}
+</a:t>
+            </a:r>
+            <a:endParaRPr lang="en-US" sz="1200" dirty="0"/>
           </a:p>
         </p:txBody>
       </p:sp>
@@ -12649,8 +12757,8 @@
         </p:nvSpPr>
         <p:spPr>
           <a:xfrm>
-            <a:off x="566928" y="5943600"/>
-            <a:ext cx="11055096" cy="310896"/>
+            <a:off x="566928" y="3593592"/>
+            <a:ext cx="7315200" cy="310896"/>
           </a:xfrm>
           <a:prstGeom prst="rect">
             <a:avLst/>
@@ -12688,8 +12796,8 @@
         </p:nvSpPr>
         <p:spPr>
           <a:xfrm>
-            <a:off x="7470648" y="1783080"/>
-            <a:ext cx="4154119" cy="4114800"/>
+            <a:off x="8202168" y="1783080"/>
+            <a:ext cx="3422599" cy="4114800"/>
           </a:xfrm>
           <a:prstGeom prst="rect">
             <a:avLst/>
@@ -12709,13 +12817,13 @@
                 <a:spcPts val="400"/>
               </a:spcBef>
               <a:spcAft>
-                <a:spcPts val="1300"/>
+                <a:spcPts val="1600"/>
               </a:spcAft>
               <a:buSzPct val="100000"/>
               <a:buChar char="●"/>
             </a:pPr>
             <a:r>
-              <a:rPr lang="en-US" sz="1400" b="1" dirty="0">
+              <a:rPr lang="en-US" sz="1500" b="1" dirty="0">
                 <a:solidFill>
                   <a:srgbClr val="151515"/>
                 </a:solidFill>
@@ -12732,7 +12840,7 @@
               <a:buNone/>
             </a:pPr>
             <a:r>
-              <a:rPr lang="en-US" sz="1400" dirty="0">
+              <a:rPr lang="en-US" sz="1500" dirty="0">
                 <a:solidFill>
                   <a:srgbClr val="242424"/>
                 </a:solidFill>
@@ -12742,7 +12850,7 @@
               </a:rPr>
               <a:t>: a ConfigMap change alters no Deployment field, so pods keep the old environment.</a:t>
             </a:r>
-            <a:endParaRPr lang="en-US" sz="1400" dirty="0"/>
+            <a:endParaRPr lang="en-US" sz="1500" dirty="0"/>
           </a:p>
           <a:p>
             <a:pPr marL="228600" indent="-228600">
@@ -12753,13 +12861,13 @@
                 <a:spcPts val="400"/>
               </a:spcBef>
               <a:spcAft>
-                <a:spcPts val="1300"/>
+                <a:spcPts val="1600"/>
               </a:spcAft>
               <a:buSzPct val="100000"/>
               <a:buChar char="●"/>
             </a:pPr>
             <a:r>
-              <a:rPr lang="en-US" sz="1400" b="1" dirty="0">
+              <a:rPr lang="en-US" sz="1500" b="1" dirty="0">
                 <a:solidFill>
                   <a:srgbClr val="151515"/>
                 </a:solidFill>
@@ -12776,7 +12884,7 @@
               <a:buNone/>
             </a:pPr>
             <a:r>
-              <a:rPr lang="en-US" sz="1400" dirty="0">
+              <a:rPr lang="en-US" sz="1500" dirty="0">
                 <a:solidFill>
                   <a:srgbClr val="242424"/>
                 </a:solidFill>
@@ -12786,7 +12894,7 @@
               </a:rPr>
               <a:t>: hash the rendered ConfigMap into a pod-template annotation; a new hash rolls the pods.</a:t>
             </a:r>
-            <a:endParaRPr lang="en-US" sz="1400" dirty="0"/>
+            <a:endParaRPr lang="en-US" sz="1500" dirty="0"/>
           </a:p>
           <a:p>
             <a:pPr marL="228600" indent="-228600">
@@ -12797,13 +12905,13 @@
                 <a:spcPts val="400"/>
               </a:spcBef>
               <a:spcAft>
-                <a:spcPts val="1300"/>
+                <a:spcPts val="1600"/>
               </a:spcAft>
               <a:buSzPct val="100000"/>
               <a:buChar char="●"/>
             </a:pPr>
             <a:r>
-              <a:rPr lang="en-US" sz="1400" b="1" dirty="0">
+              <a:rPr lang="en-US" sz="1500" b="1" dirty="0">
                 <a:solidFill>
                   <a:srgbClr val="151515"/>
                 </a:solidFill>
@@ -12820,7 +12928,7 @@
               <a:buNone/>
             </a:pPr>
             <a:r>
-              <a:rPr lang="en-US" sz="1400" dirty="0">
+              <a:rPr lang="en-US" sz="1500" dirty="0">
                 <a:solidFill>
                   <a:srgbClr val="242424"/>
                 </a:solidFill>
@@ -12830,7 +12938,7 @@
               </a:rPr>
               <a:t>: hashing a Secret built with randAlphaNum would roll pods on every render.</a:t>
             </a:r>
-            <a:endParaRPr lang="en-US" sz="1400" dirty="0"/>
+            <a:endParaRPr lang="en-US" sz="1500" dirty="0"/>
           </a:p>
           <a:p>
             <a:pPr marL="228600" indent="-228600">
@@ -12841,13 +12949,13 @@
                 <a:spcPts val="400"/>
               </a:spcBef>
               <a:spcAft>
-                <a:spcPts val="1300"/>
+                <a:spcPts val="1600"/>
               </a:spcAft>
               <a:buSzPct val="100000"/>
               <a:buChar char="●"/>
             </a:pPr>
             <a:r>
-              <a:rPr lang="en-US" sz="1400" b="1" dirty="0">
+              <a:rPr lang="en-US" sz="1500" b="1" dirty="0">
                 <a:solidFill>
                   <a:srgbClr val="151515"/>
                 </a:solidFill>
@@ -12864,7 +12972,7 @@
               <a:buNone/>
             </a:pPr>
             <a:r>
-              <a:rPr lang="en-US" sz="1400" dirty="0">
+              <a:rPr lang="en-US" sz="1500" dirty="0">
                 <a:solidFill>
                   <a:srgbClr val="242424"/>
                 </a:solidFill>
@@ -12874,7 +12982,7 @@
               </a:rPr>
               <a:t>: immutable ConfigMap with a content hash in its name.</a:t>
             </a:r>
-            <a:endParaRPr lang="en-US" sz="1400" dirty="0"/>
+            <a:endParaRPr lang="en-US" sz="1500" dirty="0"/>
           </a:p>
         </p:txBody>
       </p:sp>
@@ -13060,7 +13168,7 @@
         </p:nvGraphicFramePr>
         <p:xfrm>
           <a:off x="566928" y="1691640"/>
-          <a:ext cx="11055096" cy="3566160"/>
+          <a:ext cx="11055096" cy="3840480"/>
         </p:xfrm>
         <a:graphic>
           <a:graphicData uri="http://schemas.openxmlformats.org/drawingml/2006/table">
@@ -13071,7 +13179,7 @@
                 <a:gridCol w="2377440"/>
                 <a:gridCol w="6483096"/>
               </a:tblGrid>
-              <a:tr h="713232">
+              <a:tr h="768096">
                 <a:tc>
                   <a:txBody>
                     <a:bodyPr/>
@@ -13081,7 +13189,7 @@
                         <a:buNone/>
                       </a:pPr>
                       <a:r>
-                        <a:rPr lang="en-US" sz="1500" b="1" dirty="0">
+                        <a:rPr lang="en-US" sz="1600" b="1" dirty="0">
                           <a:solidFill>
                             <a:srgbClr val="EE0000"/>
                           </a:solidFill>
@@ -13091,7 +13199,7 @@
                         </a:rPr>
                         <a:t>existingSecret</a:t>
                       </a:r>
-                      <a:endParaRPr lang="en-US" sz="1500" dirty="0">
+                      <a:endParaRPr lang="en-US" sz="1600" dirty="0">
                         <a:latin typeface="Red Hat Mono" charset="0"/>
                         <a:ea typeface="Red Hat Mono" charset="0"/>
                         <a:cs typeface="Red Hat Mono" charset="0"/>
@@ -13146,7 +13254,7 @@
                         <a:buNone/>
                       </a:pPr>
                       <a:r>
-                        <a:rPr lang="en-US" sz="1400" b="1" dirty="0">
+                        <a:rPr lang="en-US" sz="1600" b="1" dirty="0">
                           <a:solidFill>
                             <a:srgbClr val="151515"/>
                           </a:solidFill>
@@ -13156,7 +13264,7 @@
                         </a:rPr>
                         <a:t>Nothing in Git</a:t>
                       </a:r>
-                      <a:endParaRPr lang="en-US" sz="1400" dirty="0">
+                      <a:endParaRPr lang="en-US" sz="1600" dirty="0">
                         <a:latin typeface="Red Hat Text" charset="0"/>
                         <a:ea typeface="Red Hat Text" charset="0"/>
                         <a:cs typeface="Red Hat Text" charset="0"/>
@@ -13211,7 +13319,7 @@
                         <a:buNone/>
                       </a:pPr>
                       <a:r>
-                        <a:rPr lang="en-US" sz="1300" dirty="0">
+                        <a:rPr lang="en-US" sz="1500" dirty="0">
                           <a:solidFill>
                             <a:srgbClr val="242424"/>
                           </a:solidFill>
@@ -13221,7 +13329,7 @@
                         </a:rPr>
                         <a:t>Secret created out of band; the chart references the name through secretKeyRef</a:t>
                       </a:r>
-                      <a:endParaRPr lang="en-US" sz="1300" dirty="0">
+                      <a:endParaRPr lang="en-US" sz="1500" dirty="0">
                         <a:latin typeface="Red Hat Text" charset="0"/>
                         <a:ea typeface="Red Hat Text" charset="0"/>
                         <a:cs typeface="Red Hat Text" charset="0"/>
@@ -13268,7 +13376,7 @@
                   </a:tcPr>
                 </a:tc>
               </a:tr>
-              <a:tr h="713232">
+              <a:tr h="768096">
                 <a:tc>
                   <a:txBody>
                     <a:bodyPr/>
@@ -13278,7 +13386,7 @@
                         <a:buNone/>
                       </a:pPr>
                       <a:r>
-                        <a:rPr lang="en-US" sz="1500" b="1" dirty="0">
+                        <a:rPr lang="en-US" sz="1600" b="1" dirty="0">
                           <a:solidFill>
                             <a:srgbClr val="EE0000"/>
                           </a:solidFill>
@@ -13288,7 +13396,7 @@
                         </a:rPr>
                         <a:t>External Secrets</a:t>
                       </a:r>
-                      <a:endParaRPr lang="en-US" sz="1500" dirty="0">
+                      <a:endParaRPr lang="en-US" sz="1600" dirty="0">
                         <a:latin typeface="Red Hat Mono" charset="0"/>
                         <a:ea typeface="Red Hat Mono" charset="0"/>
                         <a:cs typeface="Red Hat Mono" charset="0"/>
@@ -13343,7 +13451,7 @@
                         <a:buNone/>
                       </a:pPr>
                       <a:r>
-                        <a:rPr lang="en-US" sz="1400" b="1" dirty="0">
+                        <a:rPr lang="en-US" sz="1600" b="1" dirty="0">
                           <a:solidFill>
                             <a:srgbClr val="151515"/>
                           </a:solidFill>
@@ -13353,7 +13461,7 @@
                         </a:rPr>
                         <a:t>ExternalSecret in Git</a:t>
                       </a:r>
-                      <a:endParaRPr lang="en-US" sz="1400" dirty="0">
+                      <a:endParaRPr lang="en-US" sz="1600" dirty="0">
                         <a:latin typeface="Red Hat Text" charset="0"/>
                         <a:ea typeface="Red Hat Text" charset="0"/>
                         <a:cs typeface="Red Hat Text" charset="0"/>
@@ -13408,7 +13516,7 @@
                         <a:buNone/>
                       </a:pPr>
                       <a:r>
-                        <a:rPr lang="en-US" sz="1300" dirty="0">
+                        <a:rPr lang="en-US" sz="1500" dirty="0">
                           <a:solidFill>
                             <a:srgbClr val="242424"/>
                           </a:solidFill>
@@ -13418,7 +13526,7 @@
                         </a:rPr>
                         <a:t>The operator copies from a vault in the cluster; point existingSecret at its target</a:t>
                       </a:r>
-                      <a:endParaRPr lang="en-US" sz="1300" dirty="0">
+                      <a:endParaRPr lang="en-US" sz="1500" dirty="0">
                         <a:latin typeface="Red Hat Text" charset="0"/>
                         <a:ea typeface="Red Hat Text" charset="0"/>
                         <a:cs typeface="Red Hat Text" charset="0"/>
@@ -13465,7 +13573,7 @@
                   </a:tcPr>
                 </a:tc>
               </a:tr>
-              <a:tr h="713232">
+              <a:tr h="768096">
                 <a:tc>
                   <a:txBody>
                     <a:bodyPr/>
@@ -13475,7 +13583,7 @@
                         <a:buNone/>
                       </a:pPr>
                       <a:r>
-                        <a:rPr lang="en-US" sz="1500" b="1" dirty="0">
+                        <a:rPr lang="en-US" sz="1600" b="1" dirty="0">
                           <a:solidFill>
                             <a:srgbClr val="EE0000"/>
                           </a:solidFill>
@@ -13485,7 +13593,7 @@
                         </a:rPr>
                         <a:t>Sealed Secrets</a:t>
                       </a:r>
-                      <a:endParaRPr lang="en-US" sz="1500" dirty="0">
+                      <a:endParaRPr lang="en-US" sz="1600" dirty="0">
                         <a:latin typeface="Red Hat Mono" charset="0"/>
                         <a:ea typeface="Red Hat Mono" charset="0"/>
                         <a:cs typeface="Red Hat Mono" charset="0"/>
@@ -13540,7 +13648,7 @@
                         <a:buNone/>
                       </a:pPr>
                       <a:r>
-                        <a:rPr lang="en-US" sz="1400" b="1" dirty="0">
+                        <a:rPr lang="en-US" sz="1600" b="1" dirty="0">
                           <a:solidFill>
                             <a:srgbClr val="151515"/>
                           </a:solidFill>
@@ -13550,7 +13658,7 @@
                         </a:rPr>
                         <a:t>Encrypted in Git</a:t>
                       </a:r>
-                      <a:endParaRPr lang="en-US" sz="1400" dirty="0">
+                      <a:endParaRPr lang="en-US" sz="1600" dirty="0">
                         <a:latin typeface="Red Hat Text" charset="0"/>
                         <a:ea typeface="Red Hat Text" charset="0"/>
                         <a:cs typeface="Red Hat Text" charset="0"/>
@@ -13605,7 +13713,7 @@
                         <a:buNone/>
                       </a:pPr>
                       <a:r>
-                        <a:rPr lang="en-US" sz="1300" dirty="0">
+                        <a:rPr lang="en-US" sz="1500" dirty="0">
                           <a:solidFill>
                             <a:srgbClr val="242424"/>
                           </a:solidFill>
@@ -13615,7 +13723,7 @@
                         </a:rPr>
                         <a:t>The controller decrypts in the cluster and produces a Secret the chart references</a:t>
                       </a:r>
-                      <a:endParaRPr lang="en-US" sz="1300" dirty="0">
+                      <a:endParaRPr lang="en-US" sz="1500" dirty="0">
                         <a:latin typeface="Red Hat Text" charset="0"/>
                         <a:ea typeface="Red Hat Text" charset="0"/>
                         <a:cs typeface="Red Hat Text" charset="0"/>
@@ -13662,7 +13770,7 @@
                   </a:tcPr>
                 </a:tc>
               </a:tr>
-              <a:tr h="713232">
+              <a:tr h="768096">
                 <a:tc>
                   <a:txBody>
                     <a:bodyPr/>
@@ -13672,7 +13780,7 @@
                         <a:buNone/>
                       </a:pPr>
                       <a:r>
-                        <a:rPr lang="en-US" sz="1500" b="1" dirty="0">
+                        <a:rPr lang="en-US" sz="1600" b="1" dirty="0">
                           <a:solidFill>
                             <a:srgbClr val="EE0000"/>
                           </a:solidFill>
@@ -13682,7 +13790,7 @@
                         </a:rPr>
                         <a:t>SOPS</a:t>
                       </a:r>
-                      <a:endParaRPr lang="en-US" sz="1500" dirty="0">
+                      <a:endParaRPr lang="en-US" sz="1600" dirty="0">
                         <a:latin typeface="Red Hat Mono" charset="0"/>
                         <a:ea typeface="Red Hat Mono" charset="0"/>
                         <a:cs typeface="Red Hat Mono" charset="0"/>
@@ -13737,7 +13845,7 @@
                         <a:buNone/>
                       </a:pPr>
                       <a:r>
-                        <a:rPr lang="en-US" sz="1400" b="1" dirty="0">
+                        <a:rPr lang="en-US" sz="1600" b="1" dirty="0">
                           <a:solidFill>
                             <a:srgbClr val="151515"/>
                           </a:solidFill>
@@ -13747,7 +13855,7 @@
                         </a:rPr>
                         <a:t>Encrypted values</a:t>
                       </a:r>
-                      <a:endParaRPr lang="en-US" sz="1400" dirty="0">
+                      <a:endParaRPr lang="en-US" sz="1600" dirty="0">
                         <a:latin typeface="Red Hat Text" charset="0"/>
                         <a:ea typeface="Red Hat Text" charset="0"/>
                         <a:cs typeface="Red Hat Text" charset="0"/>
@@ -13802,7 +13910,7 @@
                         <a:buNone/>
                       </a:pPr>
                       <a:r>
-                        <a:rPr lang="en-US" sz="1300" dirty="0">
+                        <a:rPr lang="en-US" sz="1500" dirty="0">
                           <a:solidFill>
                             <a:srgbClr val="242424"/>
                           </a:solidFill>
@@ -13812,7 +13920,7 @@
                         </a:rPr>
                         <a:t>Client-side helm-secrets plugin; Helm 4 support is not verified in the tutorial</a:t>
                       </a:r>
-                      <a:endParaRPr lang="en-US" sz="1300" dirty="0">
+                      <a:endParaRPr lang="en-US" sz="1500" dirty="0">
                         <a:latin typeface="Red Hat Text" charset="0"/>
                         <a:ea typeface="Red Hat Text" charset="0"/>
                         <a:cs typeface="Red Hat Text" charset="0"/>
@@ -13859,7 +13967,7 @@
                   </a:tcPr>
                 </a:tc>
               </a:tr>
-              <a:tr h="713232">
+              <a:tr h="768096">
                 <a:tc>
                   <a:txBody>
                     <a:bodyPr/>
@@ -13869,7 +13977,7 @@
                         <a:buNone/>
                       </a:pPr>
                       <a:r>
-                        <a:rPr lang="en-US" sz="1500" b="1" dirty="0">
+                        <a:rPr lang="en-US" sz="1600" b="1" dirty="0">
                           <a:solidFill>
                             <a:srgbClr val="EE0000"/>
                           </a:solidFill>
@@ -13879,7 +13987,7 @@
                         </a:rPr>
                         <a:t>auth.token</a:t>
                       </a:r>
-                      <a:endParaRPr lang="en-US" sz="1500" dirty="0">
+                      <a:endParaRPr lang="en-US" sz="1600" dirty="0">
                         <a:latin typeface="Red Hat Mono" charset="0"/>
                         <a:ea typeface="Red Hat Mono" charset="0"/>
                         <a:cs typeface="Red Hat Mono" charset="0"/>
@@ -13934,7 +14042,7 @@
                         <a:buNone/>
                       </a:pPr>
                       <a:r>
-                        <a:rPr lang="en-US" sz="1400" b="1" dirty="0">
+                        <a:rPr lang="en-US" sz="1600" b="1" dirty="0">
                           <a:solidFill>
                             <a:srgbClr val="151515"/>
                           </a:solidFill>
@@ -13944,7 +14052,7 @@
                         </a:rPr>
                         <a:t>Plain in values</a:t>
                       </a:r>
-                      <a:endParaRPr lang="en-US" sz="1400" dirty="0">
+                      <a:endParaRPr lang="en-US" sz="1600" dirty="0">
                         <a:latin typeface="Red Hat Text" charset="0"/>
                         <a:ea typeface="Red Hat Text" charset="0"/>
                         <a:cs typeface="Red Hat Text" charset="0"/>
@@ -13999,7 +14107,7 @@
                         <a:buNone/>
                       </a:pPr>
                       <a:r>
-                        <a:rPr lang="en-US" sz="1300" dirty="0">
+                        <a:rPr lang="en-US" sz="1500" dirty="0">
                           <a:solidFill>
                             <a:srgbClr val="242424"/>
                           </a:solidFill>
@@ -14009,7 +14117,7 @@
                         </a:rPr>
                         <a:t>Stored in the release record and printed by helm get values; development only</a:t>
                       </a:r>
-                      <a:endParaRPr lang="en-US" sz="1300" dirty="0">
+                      <a:endParaRPr lang="en-US" sz="1500" dirty="0">
                         <a:latin typeface="Red Hat Text" charset="0"/>
                         <a:ea typeface="Red Hat Text" charset="0"/>
                         <a:cs typeface="Red Hat Text" charset="0"/>
@@ -14895,7 +15003,7 @@
         </p:nvGraphicFramePr>
         <p:xfrm>
           <a:off x="566928" y="1691640"/>
-          <a:ext cx="11055096" cy="3566160"/>
+          <a:ext cx="11055096" cy="3840480"/>
         </p:xfrm>
         <a:graphic>
           <a:graphicData uri="http://schemas.openxmlformats.org/drawingml/2006/table">
@@ -14906,7 +15014,7 @@
                 <a:gridCol w="2103120"/>
                 <a:gridCol w="6208776"/>
               </a:tblGrid>
-              <a:tr h="713232">
+              <a:tr h="768096">
                 <a:tc>
                   <a:txBody>
                     <a:bodyPr/>
@@ -14916,7 +15024,7 @@
                         <a:buNone/>
                       </a:pPr>
                       <a:r>
-                        <a:rPr lang="en-US" sz="1500" b="1" dirty="0">
+                        <a:rPr lang="en-US" sz="1600" b="1" dirty="0">
                           <a:solidFill>
                             <a:srgbClr val="EE0000"/>
                           </a:solidFill>
@@ -14926,7 +15034,7 @@
                         </a:rPr>
                         <a:t>helm.sh/hook</a:t>
                       </a:r>
-                      <a:endParaRPr lang="en-US" sz="1500" dirty="0">
+                      <a:endParaRPr lang="en-US" sz="1600" dirty="0">
                         <a:latin typeface="Red Hat Mono" charset="0"/>
                         <a:ea typeface="Red Hat Mono" charset="0"/>
                         <a:cs typeface="Red Hat Mono" charset="0"/>
@@ -14981,7 +15089,7 @@
                         <a:buNone/>
                       </a:pPr>
                       <a:r>
-                        <a:rPr lang="en-US" sz="1400" b="1" dirty="0">
+                        <a:rPr lang="en-US" sz="1600" b="1" dirty="0">
                           <a:solidFill>
                             <a:srgbClr val="151515"/>
                           </a:solidFill>
@@ -14991,7 +15099,7 @@
                         </a:rPr>
                         <a:t>Phase</a:t>
                       </a:r>
-                      <a:endParaRPr lang="en-US" sz="1400" dirty="0">
+                      <a:endParaRPr lang="en-US" sz="1600" dirty="0">
                         <a:latin typeface="Red Hat Text" charset="0"/>
                         <a:ea typeface="Red Hat Text" charset="0"/>
                         <a:cs typeface="Red Hat Text" charset="0"/>
@@ -15046,7 +15154,7 @@
                         <a:buNone/>
                       </a:pPr>
                       <a:r>
-                        <a:rPr lang="en-US" sz="1300" dirty="0">
+                        <a:rPr lang="en-US" sz="1500" dirty="0">
                           <a:solidFill>
                             <a:srgbClr val="242424"/>
                           </a:solidFill>
@@ -15056,7 +15164,7 @@
                         </a:rPr>
                         <a:t>pre-install, post-install, pre-upgrade, post-upgrade and more; several phases separated by commas</a:t>
                       </a:r>
-                      <a:endParaRPr lang="en-US" sz="1300" dirty="0">
+                      <a:endParaRPr lang="en-US" sz="1500" dirty="0">
                         <a:latin typeface="Red Hat Text" charset="0"/>
                         <a:ea typeface="Red Hat Text" charset="0"/>
                         <a:cs typeface="Red Hat Text" charset="0"/>
@@ -15103,7 +15211,7 @@
                   </a:tcPr>
                 </a:tc>
               </a:tr>
-              <a:tr h="713232">
+              <a:tr h="768096">
                 <a:tc>
                   <a:txBody>
                     <a:bodyPr/>
@@ -15113,7 +15221,7 @@
                         <a:buNone/>
                       </a:pPr>
                       <a:r>
-                        <a:rPr lang="en-US" sz="1500" b="1" dirty="0">
+                        <a:rPr lang="en-US" sz="1600" b="1" dirty="0">
                           <a:solidFill>
                             <a:srgbClr val="EE0000"/>
                           </a:solidFill>
@@ -15123,7 +15231,7 @@
                         </a:rPr>
                         <a:t>hook-weight</a:t>
                       </a:r>
-                      <a:endParaRPr lang="en-US" sz="1500" dirty="0">
+                      <a:endParaRPr lang="en-US" sz="1600" dirty="0">
                         <a:latin typeface="Red Hat Mono" charset="0"/>
                         <a:ea typeface="Red Hat Mono" charset="0"/>
                         <a:cs typeface="Red Hat Mono" charset="0"/>
@@ -15178,7 +15286,7 @@
                         <a:buNone/>
                       </a:pPr>
                       <a:r>
-                        <a:rPr lang="en-US" sz="1400" b="1" dirty="0">
+                        <a:rPr lang="en-US" sz="1600" b="1" dirty="0">
                           <a:solidFill>
                             <a:srgbClr val="151515"/>
                           </a:solidFill>
@@ -15188,7 +15296,7 @@
                         </a:rPr>
                         <a:t>Order</a:t>
                       </a:r>
-                      <a:endParaRPr lang="en-US" sz="1400" dirty="0">
+                      <a:endParaRPr lang="en-US" sz="1600" dirty="0">
                         <a:latin typeface="Red Hat Text" charset="0"/>
                         <a:ea typeface="Red Hat Text" charset="0"/>
                         <a:cs typeface="Red Hat Text" charset="0"/>
@@ -15243,7 +15351,7 @@
                         <a:buNone/>
                       </a:pPr>
                       <a:r>
-                        <a:rPr lang="en-US" sz="1300" dirty="0">
+                        <a:rPr lang="en-US" sz="1500" dirty="0">
                           <a:solidFill>
                             <a:srgbClr val="242424"/>
                           </a:solidFill>
@@ -15253,7 +15361,7 @@
                         </a:rPr>
                         <a:t>A string holding an integer, ascending within a phase; ties sort by kind, then name</a:t>
                       </a:r>
-                      <a:endParaRPr lang="en-US" sz="1300" dirty="0">
+                      <a:endParaRPr lang="en-US" sz="1500" dirty="0">
                         <a:latin typeface="Red Hat Text" charset="0"/>
                         <a:ea typeface="Red Hat Text" charset="0"/>
                         <a:cs typeface="Red Hat Text" charset="0"/>
@@ -15300,7 +15408,7 @@
                   </a:tcPr>
                 </a:tc>
               </a:tr>
-              <a:tr h="713232">
+              <a:tr h="768096">
                 <a:tc>
                   <a:txBody>
                     <a:bodyPr/>
@@ -15310,7 +15418,7 @@
                         <a:buNone/>
                       </a:pPr>
                       <a:r>
-                        <a:rPr lang="en-US" sz="1500" b="1" dirty="0">
+                        <a:rPr lang="en-US" sz="1600" b="1" dirty="0">
                           <a:solidFill>
                             <a:srgbClr val="EE0000"/>
                           </a:solidFill>
@@ -15320,7 +15428,7 @@
                         </a:rPr>
                         <a:t>hook-delete-policy</a:t>
                       </a:r>
-                      <a:endParaRPr lang="en-US" sz="1500" dirty="0">
+                      <a:endParaRPr lang="en-US" sz="1600" dirty="0">
                         <a:latin typeface="Red Hat Mono" charset="0"/>
                         <a:ea typeface="Red Hat Mono" charset="0"/>
                         <a:cs typeface="Red Hat Mono" charset="0"/>
@@ -15375,7 +15483,7 @@
                         <a:buNone/>
                       </a:pPr>
                       <a:r>
-                        <a:rPr lang="en-US" sz="1400" b="1" dirty="0">
+                        <a:rPr lang="en-US" sz="1600" b="1" dirty="0">
                           <a:solidFill>
                             <a:srgbClr val="151515"/>
                           </a:solidFill>
@@ -15385,7 +15493,7 @@
                         </a:rPr>
                         <a:t>Cleanup</a:t>
                       </a:r>
-                      <a:endParaRPr lang="en-US" sz="1400" dirty="0">
+                      <a:endParaRPr lang="en-US" sz="1600" dirty="0">
                         <a:latin typeface="Red Hat Text" charset="0"/>
                         <a:ea typeface="Red Hat Text" charset="0"/>
                         <a:cs typeface="Red Hat Text" charset="0"/>
@@ -15440,7 +15548,7 @@
                         <a:buNone/>
                       </a:pPr>
                       <a:r>
-                        <a:rPr lang="en-US" sz="1300" dirty="0">
+                        <a:rPr lang="en-US" sz="1500" dirty="0">
                           <a:solidFill>
                             <a:srgbClr val="242424"/>
                           </a:solidFill>
@@ -15450,7 +15558,7 @@
                         </a:rPr>
                         <a:t>before-hook-creation (default), hook-succeeded, hook-failed</a:t>
                       </a:r>
-                      <a:endParaRPr lang="en-US" sz="1300" dirty="0">
+                      <a:endParaRPr lang="en-US" sz="1500" dirty="0">
                         <a:latin typeface="Red Hat Text" charset="0"/>
                         <a:ea typeface="Red Hat Text" charset="0"/>
                         <a:cs typeface="Red Hat Text" charset="0"/>
@@ -15497,7 +15605,7 @@
                   </a:tcPr>
                 </a:tc>
               </a:tr>
-              <a:tr h="713232">
+              <a:tr h="768096">
                 <a:tc>
                   <a:txBody>
                     <a:bodyPr/>
@@ -15507,7 +15615,7 @@
                         <a:buNone/>
                       </a:pPr>
                       <a:r>
-                        <a:rPr lang="en-US" sz="1500" b="1" dirty="0">
+                        <a:rPr lang="en-US" sz="1600" b="1" dirty="0">
                           <a:solidFill>
                             <a:srgbClr val="EE0000"/>
                           </a:solidFill>
@@ -15517,7 +15625,7 @@
                         </a:rPr>
                         <a:t>pre-install</a:t>
                       </a:r>
-                      <a:endParaRPr lang="en-US" sz="1500" dirty="0">
+                      <a:endParaRPr lang="en-US" sz="1600" dirty="0">
                         <a:latin typeface="Red Hat Mono" charset="0"/>
                         <a:ea typeface="Red Hat Mono" charset="0"/>
                         <a:cs typeface="Red Hat Mono" charset="0"/>
@@ -15572,7 +15680,7 @@
                         <a:buNone/>
                       </a:pPr>
                       <a:r>
-                        <a:rPr lang="en-US" sz="1400" b="1" dirty="0">
+                        <a:rPr lang="en-US" sz="1600" b="1" dirty="0">
                           <a:solidFill>
                             <a:srgbClr val="151515"/>
                           </a:solidFill>
@@ -15582,7 +15690,7 @@
                         </a:rPr>
                         <a:t>Database exists</a:t>
                       </a:r>
-                      <a:endParaRPr lang="en-US" sz="1400" dirty="0">
+                      <a:endParaRPr lang="en-US" sz="1600" dirty="0">
                         <a:latin typeface="Red Hat Text" charset="0"/>
                         <a:ea typeface="Red Hat Text" charset="0"/>
                         <a:cs typeface="Red Hat Text" charset="0"/>
@@ -15637,7 +15745,7 @@
                         <a:buNone/>
                       </a:pPr>
                       <a:r>
-                        <a:rPr lang="en-US" sz="1300" dirty="0">
+                        <a:rPr lang="en-US" sz="1500" dirty="0">
                           <a:solidFill>
                             <a:srgbClr val="242424"/>
                           </a:solidFill>
@@ -15647,7 +15755,7 @@
                         </a:rPr>
                         <a:t>Runs before the resources; fails when the same release creates the database</a:t>
                       </a:r>
-                      <a:endParaRPr lang="en-US" sz="1300" dirty="0">
+                      <a:endParaRPr lang="en-US" sz="1500" dirty="0">
                         <a:latin typeface="Red Hat Text" charset="0"/>
                         <a:ea typeface="Red Hat Text" charset="0"/>
                         <a:cs typeface="Red Hat Text" charset="0"/>
@@ -15694,7 +15802,7 @@
                   </a:tcPr>
                 </a:tc>
               </a:tr>
-              <a:tr h="713232">
+              <a:tr h="768096">
                 <a:tc>
                   <a:txBody>
                     <a:bodyPr/>
@@ -15704,7 +15812,7 @@
                         <a:buNone/>
                       </a:pPr>
                       <a:r>
-                        <a:rPr lang="en-US" sz="1500" b="1" dirty="0">
+                        <a:rPr lang="en-US" sz="1600" b="1" dirty="0">
                           <a:solidFill>
                             <a:srgbClr val="EE0000"/>
                           </a:solidFill>
@@ -15714,7 +15822,7 @@
                         </a:rPr>
                         <a:t>post-install</a:t>
                       </a:r>
-                      <a:endParaRPr lang="en-US" sz="1500" dirty="0">
+                      <a:endParaRPr lang="en-US" sz="1600" dirty="0">
                         <a:latin typeface="Red Hat Mono" charset="0"/>
                         <a:ea typeface="Red Hat Mono" charset="0"/>
                         <a:cs typeface="Red Hat Mono" charset="0"/>
@@ -15769,7 +15877,7 @@
                         <a:buNone/>
                       </a:pPr>
                       <a:r>
-                        <a:rPr lang="en-US" sz="1400" b="1" dirty="0">
+                        <a:rPr lang="en-US" sz="1600" b="1" dirty="0">
                           <a:solidFill>
                             <a:srgbClr val="151515"/>
                           </a:solidFill>
@@ -15779,7 +15887,7 @@
                         </a:rPr>
                         <a:t>Needs readiness</a:t>
                       </a:r>
-                      <a:endParaRPr lang="en-US" sz="1400" dirty="0">
+                      <a:endParaRPr lang="en-US" sz="1600" dirty="0">
                         <a:latin typeface="Red Hat Text" charset="0"/>
                         <a:ea typeface="Red Hat Text" charset="0"/>
                         <a:cs typeface="Red Hat Text" charset="0"/>
@@ -15834,7 +15942,7 @@
                         <a:buNone/>
                       </a:pPr>
                       <a:r>
-                        <a:rPr lang="en-US" sz="1300" dirty="0">
+                        <a:rPr lang="en-US" sz="1500" dirty="0">
                           <a:solidFill>
                             <a:srgbClr val="242424"/>
                           </a:solidFill>
@@ -15844,7 +15952,7 @@
                         </a:rPr>
                         <a:t>Runs after --wait; deadlocks when readiness depends on the migration</a:t>
                       </a:r>
-                      <a:endParaRPr lang="en-US" sz="1300" dirty="0">
+                      <a:endParaRPr lang="en-US" sz="1500" dirty="0">
                         <a:latin typeface="Red Hat Text" charset="0"/>
                         <a:ea typeface="Red Hat Text" charset="0"/>
                         <a:cs typeface="Red Hat Text" charset="0"/>
@@ -16306,7 +16414,7 @@
         <p:spPr>
           <a:xfrm>
             <a:off x="566928" y="1691640"/>
-            <a:ext cx="6675120" cy="4251960"/>
+            <a:ext cx="7223760" cy="3097987"/>
           </a:xfrm>
           <a:prstGeom prst="rect">
             <a:avLst/>
@@ -16331,7 +16439,7 @@
         <p:spPr>
           <a:xfrm>
             <a:off x="749808" y="1783080"/>
-            <a:ext cx="6309360" cy="4069080"/>
+            <a:ext cx="6858000" cy="2915107"/>
           </a:xfrm>
           <a:prstGeom prst="rect">
             <a:avLst/>
@@ -16350,7 +16458,7 @@
               <a:buNone/>
             </a:pPr>
             <a:r>
-              <a:rPr lang="en-US" sz="1000" dirty="0">
+              <a:rPr lang="en-US" sz="1200" dirty="0">
                 <a:solidFill>
                   <a:srgbClr val="E6E6E6"/>
                 </a:solidFill>
@@ -16358,7 +16466,7 @@
                 <a:ea typeface="Red Hat Mono" pitchFamily="34" charset="-122"/>
                 <a:cs typeface="Red Hat Mono" pitchFamily="34" charset="-120"/>
               </a:rPr>
-              <a:t>[host]$ helm upgrade shipping examples/12-release-lifecycle/shipping-service -n hfd-12 --set image.tag=doesnotexist --wait --timeout 60s --rollback-on-failure
+              <a:t>[host]$ cd examples/12-release-lifecycle
 </a:t>
             </a:r>
             <a:pPr algn="l" indent="0" marL="0">
@@ -16368,7 +16476,7 @@
               <a:buNone/>
             </a:pPr>
             <a:r>
-              <a:rPr lang="en-US" sz="1000" dirty="0">
+              <a:rPr lang="en-US" sz="1200" dirty="0">
                 <a:solidFill>
                   <a:srgbClr val="E6E6E6"/>
                 </a:solidFill>
@@ -16376,7 +16484,7 @@
                 <a:ea typeface="Red Hat Mono" pitchFamily="34" charset="-122"/>
                 <a:cs typeface="Red Hat Mono" pitchFamily="34" charset="-120"/>
               </a:rPr>
-              <a:t>Error: UPGRADE FAILED: release shipping failed, and has been rolled back
+              <a:t>[host]$ helm upgrade shipping ./shipping-service -n hfd-12 \
 </a:t>
             </a:r>
             <a:pPr algn="l" indent="0" marL="0">
@@ -16386,7 +16494,7 @@
               <a:buNone/>
             </a:pPr>
             <a:r>
-              <a:rPr lang="en-US" sz="1000" dirty="0">
+              <a:rPr lang="en-US" sz="1200" dirty="0">
                 <a:solidFill>
                   <a:srgbClr val="E6E6E6"/>
                 </a:solidFill>
@@ -16394,7 +16502,7 @@
                 <a:ea typeface="Red Hat Mono" pitchFamily="34" charset="-122"/>
                 <a:cs typeface="Red Hat Mono" pitchFamily="34" charset="-120"/>
               </a:rPr>
-              <a:t>due to rollback-on-failure being set: ... not ready. status: InProgress
+              <a:t>          --set image.tag=doesnotexist --wait --timeout 60s \
 </a:t>
             </a:r>
             <a:pPr algn="l" indent="0" marL="0">
@@ -16404,7 +16512,7 @@
               <a:buNone/>
             </a:pPr>
             <a:r>
-              <a:rPr lang="en-US" sz="1000" dirty="0">
+              <a:rPr lang="en-US" sz="1200" dirty="0">
                 <a:solidFill>
                   <a:srgbClr val="E6E6E6"/>
                 </a:solidFill>
@@ -16412,7 +16520,7 @@
                 <a:ea typeface="Red Hat Mono" pitchFamily="34" charset="-122"/>
                 <a:cs typeface="Red Hat Mono" pitchFamily="34" charset="-120"/>
               </a:rPr>
-              <a:t>[host]$ helm history shipping -n hfd-12
+              <a:t>          --rollback-on-failure
 </a:t>
             </a:r>
             <a:pPr algn="l" indent="0" marL="0">
@@ -16422,15 +16530,15 @@
               <a:buNone/>
             </a:pPr>
             <a:r>
-              <a:rPr lang="en-US" sz="1000" dirty="0">
-                <a:solidFill>
-                  <a:srgbClr val="8FB98F"/>
+              <a:rPr lang="en-US" sz="1200" dirty="0">
+                <a:solidFill>
+                  <a:srgbClr val="E6E6E6"/>
                 </a:solidFill>
                 <a:latin typeface="Red Hat Mono" pitchFamily="34" charset="0"/>
                 <a:ea typeface="Red Hat Mono" pitchFamily="34" charset="-122"/>
                 <a:cs typeface="Red Hat Mono" pitchFamily="34" charset="-120"/>
               </a:rPr>
-              <a:t># 4 failed     Upgrade "shipping" failed
+              <a:t>Error: UPGRADE FAILED: release shipping failed, and has been rolled back
 </a:t>
             </a:r>
             <a:pPr algn="l" indent="0" marL="0">
@@ -16440,15 +16548,15 @@
               <a:buNone/>
             </a:pPr>
             <a:r>
-              <a:rPr lang="en-US" sz="1000" dirty="0">
-                <a:solidFill>
-                  <a:srgbClr val="8FB98F"/>
+              <a:rPr lang="en-US" sz="1200" dirty="0">
+                <a:solidFill>
+                  <a:srgbClr val="E6E6E6"/>
                 </a:solidFill>
                 <a:latin typeface="Red Hat Mono" pitchFamily="34" charset="0"/>
                 <a:ea typeface="Red Hat Mono" pitchFamily="34" charset="-122"/>
                 <a:cs typeface="Red Hat Mono" pitchFamily="34" charset="-120"/>
               </a:rPr>
-              <a:t># 5 deployed   Rollback to 3
+              <a:t>due to rollback-on-failure being set: ... not ready. status: InProgress
 </a:t>
             </a:r>
             <a:pPr algn="l" indent="0" marL="0">
@@ -16458,7 +16566,7 @@
               <a:buNone/>
             </a:pPr>
             <a:r>
-              <a:rPr lang="en-US" sz="1000" dirty="0">
+              <a:rPr lang="en-US" sz="1200" dirty="0">
                 <a:solidFill>
                   <a:srgbClr val="E6E6E6"/>
                 </a:solidFill>
@@ -16466,10 +16574,82 @@
                 <a:ea typeface="Red Hat Mono" pitchFamily="34" charset="-122"/>
                 <a:cs typeface="Red Hat Mono" pitchFamily="34" charset="-120"/>
               </a:rPr>
-              <a:t>[host]$ helm upgrade shipping examples/12-release-lifecycle/shipping-service -n hfd-12 --cleanup-on-fail --wait
+              <a:t>[host]$ helm history shipping -n hfd-12
 </a:t>
             </a:r>
-            <a:endParaRPr lang="en-US" sz="1000" dirty="0"/>
+            <a:pPr algn="l" indent="0" marL="0">
+              <a:lnSpc>
+                <a:spcPct val="110000"/>
+              </a:lnSpc>
+              <a:buNone/>
+            </a:pPr>
+            <a:r>
+              <a:rPr lang="en-US" sz="1200" dirty="0">
+                <a:solidFill>
+                  <a:srgbClr val="8FB98F"/>
+                </a:solidFill>
+                <a:latin typeface="Red Hat Mono" pitchFamily="34" charset="0"/>
+                <a:ea typeface="Red Hat Mono" pitchFamily="34" charset="-122"/>
+                <a:cs typeface="Red Hat Mono" pitchFamily="34" charset="-120"/>
+              </a:rPr>
+              <a:t># 4 failed     Upgrade "shipping" failed
+</a:t>
+            </a:r>
+            <a:pPr algn="l" indent="0" marL="0">
+              <a:lnSpc>
+                <a:spcPct val="110000"/>
+              </a:lnSpc>
+              <a:buNone/>
+            </a:pPr>
+            <a:r>
+              <a:rPr lang="en-US" sz="1200" dirty="0">
+                <a:solidFill>
+                  <a:srgbClr val="8FB98F"/>
+                </a:solidFill>
+                <a:latin typeface="Red Hat Mono" pitchFamily="34" charset="0"/>
+                <a:ea typeface="Red Hat Mono" pitchFamily="34" charset="-122"/>
+                <a:cs typeface="Red Hat Mono" pitchFamily="34" charset="-120"/>
+              </a:rPr>
+              <a:t># 5 deployed   Rollback to 3
+</a:t>
+            </a:r>
+            <a:pPr algn="l" indent="0" marL="0">
+              <a:lnSpc>
+                <a:spcPct val="110000"/>
+              </a:lnSpc>
+              <a:buNone/>
+            </a:pPr>
+            <a:r>
+              <a:rPr lang="en-US" sz="1200" dirty="0">
+                <a:solidFill>
+                  <a:srgbClr val="E6E6E6"/>
+                </a:solidFill>
+                <a:latin typeface="Red Hat Mono" pitchFamily="34" charset="0"/>
+                <a:ea typeface="Red Hat Mono" pitchFamily="34" charset="-122"/>
+                <a:cs typeface="Red Hat Mono" pitchFamily="34" charset="-120"/>
+              </a:rPr>
+              <a:t>[host]$ helm upgrade shipping ./shipping-service -n hfd-12 \
+</a:t>
+            </a:r>
+            <a:pPr algn="l" indent="0" marL="0">
+              <a:lnSpc>
+                <a:spcPct val="110000"/>
+              </a:lnSpc>
+              <a:buNone/>
+            </a:pPr>
+            <a:r>
+              <a:rPr lang="en-US" sz="1200" dirty="0">
+                <a:solidFill>
+                  <a:srgbClr val="E6E6E6"/>
+                </a:solidFill>
+                <a:latin typeface="Red Hat Mono" pitchFamily="34" charset="0"/>
+                <a:ea typeface="Red Hat Mono" pitchFamily="34" charset="-122"/>
+                <a:cs typeface="Red Hat Mono" pitchFamily="34" charset="-120"/>
+              </a:rPr>
+              <a:t>          --cleanup-on-fail --wait
+</a:t>
+            </a:r>
+            <a:endParaRPr lang="en-US" sz="1200" dirty="0"/>
           </a:p>
         </p:txBody>
       </p:sp>
@@ -16481,8 +16661,8 @@
         </p:nvSpPr>
         <p:spPr>
           <a:xfrm>
-            <a:off x="566928" y="5943600"/>
-            <a:ext cx="11055096" cy="310896"/>
+            <a:off x="566928" y="4862779"/>
+            <a:ext cx="7223760" cy="310896"/>
           </a:xfrm>
           <a:prstGeom prst="rect">
             <a:avLst/>
@@ -16506,7 +16686,7 @@
                 <a:ea typeface="Red Hat Text" pitchFamily="34" charset="-122"/>
                 <a:cs typeface="Red Hat Text" pitchFamily="34" charset="-120"/>
               </a:rPr>
-              <a:t>examples/12-release-lifecycle/demo.sh, steps 3 and 4</a:t>
+              <a:t>Run from examples/12-release-lifecycle; demo.sh steps 3 and 4</a:t>
             </a:r>
             <a:endParaRPr lang="en-US" sz="1300" dirty="0"/>
           </a:p>
@@ -16520,8 +16700,8 @@
         </p:nvSpPr>
         <p:spPr>
           <a:xfrm>
-            <a:off x="7562088" y="1783080"/>
-            <a:ext cx="4062679" cy="4114800"/>
+            <a:off x="8110728" y="1783080"/>
+            <a:ext cx="3514039" cy="4114800"/>
           </a:xfrm>
           <a:prstGeom prst="rect">
             <a:avLst/>
@@ -16541,7 +16721,7 @@
                 <a:spcPts val="400"/>
               </a:spcBef>
               <a:spcAft>
-                <a:spcPts val="1300"/>
+                <a:spcPts val="1600"/>
               </a:spcAft>
               <a:buSzPct val="100000"/>
               <a:buChar char="●"/>
@@ -16585,7 +16765,7 @@
                 <a:spcPts val="400"/>
               </a:spcBef>
               <a:spcAft>
-                <a:spcPts val="1300"/>
+                <a:spcPts val="1600"/>
               </a:spcAft>
               <a:buSzPct val="100000"/>
               <a:buChar char="●"/>
@@ -16629,7 +16809,7 @@
                 <a:spcPts val="400"/>
               </a:spcBef>
               <a:spcAft>
-                <a:spcPts val="1300"/>
+                <a:spcPts val="1600"/>
               </a:spcAft>
               <a:buSzPct val="100000"/>
               <a:buChar char="●"/>
@@ -16673,7 +16853,7 @@
                 <a:spcPts val="400"/>
               </a:spcBef>
               <a:spcAft>
-                <a:spcPts val="1300"/>
+                <a:spcPts val="1600"/>
               </a:spcAft>
               <a:buSzPct val="100000"/>
               <a:buChar char="●"/>
@@ -16905,13 +17085,13 @@
                 <a:spcPts val="400"/>
               </a:spcBef>
               <a:spcAft>
-                <a:spcPts val="1300"/>
+                <a:spcPts val="1600"/>
               </a:spcAft>
               <a:buSzPct val="100000"/>
               <a:buChar char="●"/>
             </a:pPr>
             <a:r>
-              <a:rPr lang="en-US" sz="1700" b="1" dirty="0">
+              <a:rPr lang="en-US" sz="2000" b="1" dirty="0">
                 <a:solidFill>
                   <a:srgbClr val="151515"/>
                 </a:solidFill>
@@ -16928,7 +17108,7 @@
               <a:buNone/>
             </a:pPr>
             <a:r>
-              <a:rPr lang="en-US" sz="1700" dirty="0">
+              <a:rPr lang="en-US" sz="2000" dirty="0">
                 <a:solidFill>
                   <a:srgbClr val="242424"/>
                 </a:solidFill>
@@ -16936,9 +17116,43 @@
                 <a:ea typeface="Red Hat Text" pitchFamily="34" charset="-122"/>
                 <a:cs typeface="Red Hat Text" pitchFamily="34" charset="-120"/>
               </a:rPr>
-              <a:t>: helm install --server-side is true; upgrade defaults to auto and follows the previous revision's method.</a:t>
-            </a:r>
-            <a:endParaRPr lang="en-US" sz="1700" dirty="0"/>
+              <a:t>: helm install </a:t>
+            </a:r>
+            <a:pPr indent="0" marL="0">
+              <a:lnSpc>
+                <a:spcPct val="112000"/>
+              </a:lnSpc>
+              <a:buNone/>
+            </a:pPr>
+            <a:r>
+              <a:rPr lang="en-US" sz="1900" dirty="0">
+                <a:solidFill>
+                  <a:srgbClr val="151515"/>
+                </a:solidFill>
+                <a:latin typeface="Red Hat Mono" pitchFamily="34" charset="0"/>
+                <a:ea typeface="Red Hat Mono" pitchFamily="34" charset="-122"/>
+                <a:cs typeface="Red Hat Mono" pitchFamily="34" charset="-120"/>
+              </a:rPr>
+              <a:t>--server-side</a:t>
+            </a:r>
+            <a:pPr indent="0" marL="0">
+              <a:lnSpc>
+                <a:spcPct val="112000"/>
+              </a:lnSpc>
+              <a:buNone/>
+            </a:pPr>
+            <a:r>
+              <a:rPr lang="en-US" sz="2000" dirty="0">
+                <a:solidFill>
+                  <a:srgbClr val="242424"/>
+                </a:solidFill>
+                <a:latin typeface="Red Hat Text" pitchFamily="34" charset="0"/>
+                <a:ea typeface="Red Hat Text" pitchFamily="34" charset="-122"/>
+                <a:cs typeface="Red Hat Text" pitchFamily="34" charset="-120"/>
+              </a:rPr>
+              <a:t> is true; upgrade defaults to auto and follows the previous revision's method.</a:t>
+            </a:r>
+            <a:endParaRPr lang="en-US" sz="2000" dirty="0"/>
           </a:p>
           <a:p>
             <a:pPr marL="228600" indent="-228600">
@@ -16949,13 +17163,13 @@
                 <a:spcPts val="400"/>
               </a:spcBef>
               <a:spcAft>
-                <a:spcPts val="1300"/>
+                <a:spcPts val="1600"/>
               </a:spcAft>
               <a:buSzPct val="100000"/>
               <a:buChar char="●"/>
             </a:pPr>
             <a:r>
-              <a:rPr lang="en-US" sz="1700" b="1" dirty="0">
+              <a:rPr lang="en-US" sz="2000" b="1" dirty="0">
                 <a:solidFill>
                   <a:srgbClr val="151515"/>
                 </a:solidFill>
@@ -16972,7 +17186,7 @@
               <a:buNone/>
             </a:pPr>
             <a:r>
-              <a:rPr lang="en-US" sz="1700" dirty="0">
+              <a:rPr lang="en-US" sz="2000" dirty="0">
                 <a:solidFill>
                   <a:srgbClr val="242424"/>
                 </a:solidFill>
@@ -16982,7 +17196,7 @@
               </a:rPr>
               <a:t>: the API server tracks which manager owns each field, so a kubectl scale or an autoscaler can conflict with Helm.</a:t>
             </a:r>
-            <a:endParaRPr lang="en-US" sz="1700" dirty="0"/>
+            <a:endParaRPr lang="en-US" sz="2000" dirty="0"/>
           </a:p>
           <a:p>
             <a:pPr marL="228600" indent="-228600">
@@ -16993,13 +17207,13 @@
                 <a:spcPts val="400"/>
               </a:spcBef>
               <a:spcAft>
-                <a:spcPts val="1300"/>
+                <a:spcPts val="1600"/>
               </a:spcAft>
               <a:buSzPct val="100000"/>
               <a:buChar char="●"/>
             </a:pPr>
             <a:r>
-              <a:rPr lang="en-US" sz="1700" b="1" dirty="0">
+              <a:rPr lang="en-US" sz="2000" b="1" dirty="0">
                 <a:solidFill>
                   <a:srgbClr val="151515"/>
                 </a:solidFill>
@@ -17016,7 +17230,7 @@
               <a:buNone/>
             </a:pPr>
             <a:r>
-              <a:rPr lang="en-US" sz="1700" dirty="0">
+              <a:rPr lang="en-US" sz="2000" dirty="0">
                 <a:solidFill>
                   <a:srgbClr val="242424"/>
                 </a:solidFill>
@@ -17026,7 +17240,7 @@
               </a:rPr>
               <a:t>: takes over fields owned by another manager.</a:t>
             </a:r>
-            <a:endParaRPr lang="en-US" sz="1700" dirty="0"/>
+            <a:endParaRPr lang="en-US" sz="2000" dirty="0"/>
           </a:p>
           <a:p>
             <a:pPr marL="228600" indent="-228600">
@@ -17037,13 +17251,13 @@
                 <a:spcPts val="400"/>
               </a:spcBef>
               <a:spcAft>
-                <a:spcPts val="1300"/>
+                <a:spcPts val="1600"/>
               </a:spcAft>
               <a:buSzPct val="100000"/>
               <a:buChar char="●"/>
             </a:pPr>
             <a:r>
-              <a:rPr lang="en-US" sz="1700" b="1" dirty="0">
+              <a:rPr lang="en-US" sz="2000" b="1" dirty="0">
                 <a:solidFill>
                   <a:srgbClr val="151515"/>
                 </a:solidFill>
@@ -17060,7 +17274,7 @@
               <a:buNone/>
             </a:pPr>
             <a:r>
-              <a:rPr lang="en-US" sz="1700" dirty="0">
+              <a:rPr lang="en-US" sz="2000" dirty="0">
                 <a:solidFill>
                   <a:srgbClr val="242424"/>
                 </a:solidFill>
@@ -17068,9 +17282,43 @@
                 <a:ea typeface="Red Hat Text" pitchFamily="34" charset="-122"/>
                 <a:cs typeface="Red Hat Text" pitchFamily="34" charset="-120"/>
               </a:rPr>
-              <a:t>: lets an upgrade adopt resources that lack Helm's ownership annotations; add --force-conflicts when another manager owns differing fields.</a:t>
-            </a:r>
-            <a:endParaRPr lang="en-US" sz="1700" dirty="0"/>
+              <a:t>: with </a:t>
+            </a:r>
+            <a:pPr indent="0" marL="0">
+              <a:lnSpc>
+                <a:spcPct val="112000"/>
+              </a:lnSpc>
+              <a:buNone/>
+            </a:pPr>
+            <a:r>
+              <a:rPr lang="en-US" sz="1900" dirty="0">
+                <a:solidFill>
+                  <a:srgbClr val="151515"/>
+                </a:solidFill>
+                <a:latin typeface="Red Hat Mono" pitchFamily="34" charset="0"/>
+                <a:ea typeface="Red Hat Mono" pitchFamily="34" charset="-122"/>
+                <a:cs typeface="Red Hat Mono" pitchFamily="34" charset="-120"/>
+              </a:rPr>
+              <a:t>--force-conflicts</a:t>
+            </a:r>
+            <a:pPr indent="0" marL="0">
+              <a:lnSpc>
+                <a:spcPct val="112000"/>
+              </a:lnSpc>
+              <a:buNone/>
+            </a:pPr>
+            <a:r>
+              <a:rPr lang="en-US" sz="2000" dirty="0">
+                <a:solidFill>
+                  <a:srgbClr val="242424"/>
+                </a:solidFill>
+                <a:latin typeface="Red Hat Text" pitchFamily="34" charset="0"/>
+                <a:ea typeface="Red Hat Text" pitchFamily="34" charset="-122"/>
+                <a:cs typeface="Red Hat Text" pitchFamily="34" charset="-120"/>
+              </a:rPr>
+              <a:t>, lets an upgrade adopt resources that lack Helm's ownership annotations and belong to another manager.</a:t>
+            </a:r>
+            <a:endParaRPr lang="en-US" sz="2000" dirty="0"/>
           </a:p>
           <a:p>
             <a:pPr marL="228600" indent="-228600">
@@ -17081,13 +17329,13 @@
                 <a:spcPts val="400"/>
               </a:spcBef>
               <a:spcAft>
-                <a:spcPts val="1300"/>
+                <a:spcPts val="1600"/>
               </a:spcAft>
               <a:buSzPct val="100000"/>
               <a:buChar char="●"/>
             </a:pPr>
             <a:r>
-              <a:rPr lang="en-US" sz="1700" b="1" dirty="0">
+              <a:rPr lang="en-US" sz="2000" b="1" dirty="0">
                 <a:solidFill>
                   <a:srgbClr val="151515"/>
                 </a:solidFill>
@@ -17104,7 +17352,7 @@
               <a:buNone/>
             </a:pPr>
             <a:r>
-              <a:rPr lang="en-US" sz="1700" dirty="0">
+              <a:rPr lang="en-US" sz="2000" dirty="0">
                 <a:solidFill>
                   <a:srgbClr val="242424"/>
                 </a:solidFill>
@@ -17112,9 +17360,43 @@
                 <a:ea typeface="Red Hat Text" pitchFamily="34" charset="-122"/>
                 <a:cs typeface="Red Hat Text" pitchFamily="34" charset="-120"/>
               </a:rPr>
-              <a:t>: replaces objects client-side; Helm 4.3.0 rejects it with server-side apply, so add --server-side=false.</a:t>
-            </a:r>
-            <a:endParaRPr lang="en-US" sz="1700" dirty="0"/>
+              <a:t>: client-side replace; on Helm 4.3.0 it needs </a:t>
+            </a:r>
+            <a:pPr indent="0" marL="0">
+              <a:lnSpc>
+                <a:spcPct val="112000"/>
+              </a:lnSpc>
+              <a:buNone/>
+            </a:pPr>
+            <a:r>
+              <a:rPr lang="en-US" sz="1900" dirty="0">
+                <a:solidFill>
+                  <a:srgbClr val="151515"/>
+                </a:solidFill>
+                <a:latin typeface="Red Hat Mono" pitchFamily="34" charset="0"/>
+                <a:ea typeface="Red Hat Mono" pitchFamily="34" charset="-122"/>
+                <a:cs typeface="Red Hat Mono" pitchFamily="34" charset="-120"/>
+              </a:rPr>
+              <a:t>--server-side=false</a:t>
+            </a:r>
+            <a:pPr indent="0" marL="0">
+              <a:lnSpc>
+                <a:spcPct val="112000"/>
+              </a:lnSpc>
+              <a:buNone/>
+            </a:pPr>
+            <a:r>
+              <a:rPr lang="en-US" sz="2000" dirty="0">
+                <a:solidFill>
+                  <a:srgbClr val="242424"/>
+                </a:solidFill>
+                <a:latin typeface="Red Hat Text" pitchFamily="34" charset="0"/>
+                <a:ea typeface="Red Hat Text" pitchFamily="34" charset="-122"/>
+                <a:cs typeface="Red Hat Text" pitchFamily="34" charset="-120"/>
+              </a:rPr>
+              <a:t>.</a:t>
+            </a:r>
+            <a:endParaRPr lang="en-US" sz="2000" dirty="0"/>
           </a:p>
         </p:txBody>
       </p:sp>
@@ -17376,7 +17658,7 @@
               <a:buNone/>
             </a:pPr>
             <a:r>
-              <a:rPr lang="en-US" sz="1000" dirty="0">
+              <a:rPr lang="en-US" sz="1400" dirty="0">
                 <a:solidFill>
                   <a:srgbClr val="E6E6E6"/>
                 </a:solidFill>
@@ -17384,7 +17666,7 @@
                 <a:ea typeface="Red Hat Mono" pitchFamily="34" charset="-122"/>
                 <a:cs typeface="Red Hat Mono" pitchFamily="34" charset="-120"/>
               </a:rPr>
-              <a:t>[host]$ helm lint examples/05-values/shipping-service -f examples/05-values/values-prod.yaml
+              <a:t>[host]$ cd examples/05-values
 </a:t>
             </a:r>
             <a:pPr algn="l" indent="0" marL="0">
@@ -17394,7 +17676,7 @@
               <a:buNone/>
             </a:pPr>
             <a:r>
-              <a:rPr lang="en-US" sz="1000" dirty="0">
+              <a:rPr lang="en-US" sz="1400" dirty="0">
                 <a:solidFill>
                   <a:srgbClr val="E6E6E6"/>
                 </a:solidFill>
@@ -17402,7 +17684,7 @@
                 <a:ea typeface="Red Hat Mono" pitchFamily="34" charset="-122"/>
                 <a:cs typeface="Red Hat Mono" pitchFamily="34" charset="-120"/>
               </a:rPr>
-              <a:t>[host]$ helm template shipping examples/05-values/shipping-service -n hfd-05 --show-only templates/deployment.yaml
+              <a:t>[host]$ helm lint ./shipping-service -f values-prod.yaml
 </a:t>
             </a:r>
             <a:pPr algn="l" indent="0" marL="0">
@@ -17412,7 +17694,7 @@
               <a:buNone/>
             </a:pPr>
             <a:r>
-              <a:rPr lang="en-US" sz="1000" dirty="0">
+              <a:rPr lang="en-US" sz="1400" dirty="0">
                 <a:solidFill>
                   <a:srgbClr val="E6E6E6"/>
                 </a:solidFill>
@@ -17420,7 +17702,7 @@
                 <a:ea typeface="Red Hat Mono" pitchFamily="34" charset="-122"/>
                 <a:cs typeface="Red Hat Mono" pitchFamily="34" charset="-120"/>
               </a:rPr>
-              <a:t>[host]$ helm template shipping examples/05-values/shipping-service | kubeconform -strict -summary -
+              <a:t>[host]$ helm template shipping ./shipping-service -n hfd-05 \
 </a:t>
             </a:r>
             <a:pPr algn="l" indent="0" marL="0">
@@ -17430,15 +17712,15 @@
               <a:buNone/>
             </a:pPr>
             <a:r>
-              <a:rPr lang="en-US" sz="1000" dirty="0">
-                <a:solidFill>
-                  <a:srgbClr val="8FB98F"/>
+              <a:rPr lang="en-US" sz="1400" dirty="0">
+                <a:solidFill>
+                  <a:srgbClr val="E6E6E6"/>
                 </a:solidFill>
                 <a:latin typeface="Red Hat Mono" pitchFamily="34" charset="0"/>
                 <a:ea typeface="Red Hat Mono" pitchFamily="34" charset="-122"/>
                 <a:cs typeface="Red Hat Mono" pitchFamily="34" charset="-120"/>
               </a:rPr>
-              <a:t># client-side: no cluster, so lookup returns an empty map and the API list is the built-in one
+              <a:t>          --show-only templates/deployment.yaml
 </a:t>
             </a:r>
             <a:pPr algn="l" indent="0" marL="0">
@@ -17448,7 +17730,7 @@
               <a:buNone/>
             </a:pPr>
             <a:r>
-              <a:rPr lang="en-US" sz="1000" dirty="0">
+              <a:rPr lang="en-US" sz="1400" dirty="0">
                 <a:solidFill>
                   <a:srgbClr val="E6E6E6"/>
                 </a:solidFill>
@@ -17456,7 +17738,7 @@
                 <a:ea typeface="Red Hat Mono" pitchFamily="34" charset="-122"/>
                 <a:cs typeface="Red Hat Mono" pitchFamily="34" charset="-120"/>
               </a:rPr>
-              <a:t>[host]$ helm upgrade --install shipping examples/05-values/shipping-service -n hfd-05 --dry-run=client
+              <a:t>[host]$ helm template shipping ./shipping-service | kubeconform -strict -summary -
 </a:t>
             </a:r>
             <a:pPr algn="l" indent="0" marL="0">
@@ -17466,7 +17748,7 @@
               <a:buNone/>
             </a:pPr>
             <a:r>
-              <a:rPr lang="en-US" sz="1000" dirty="0">
+              <a:rPr lang="en-US" sz="1400" dirty="0">
                 <a:solidFill>
                   <a:srgbClr val="8FB98F"/>
                 </a:solidFill>
@@ -17474,7 +17756,7 @@
                 <a:ea typeface="Red Hat Mono" pitchFamily="34" charset="-122"/>
                 <a:cs typeface="Red Hat Mono" pitchFamily="34" charset="-120"/>
               </a:rPr>
-              <a:t># server-side: connects to the cluster, runs lookup and checks CRDs through .Capabilities
+              <a:t># client-side: no cluster, so lookup returns an empty map and the API list is the built-in one
 </a:t>
             </a:r>
             <a:pPr algn="l" indent="0" marL="0">
@@ -17484,7 +17766,7 @@
               <a:buNone/>
             </a:pPr>
             <a:r>
-              <a:rPr lang="en-US" sz="1000" dirty="0">
+              <a:rPr lang="en-US" sz="1400" dirty="0">
                 <a:solidFill>
                   <a:srgbClr val="E6E6E6"/>
                 </a:solidFill>
@@ -17492,10 +17774,46 @@
                 <a:ea typeface="Red Hat Mono" pitchFamily="34" charset="-122"/>
                 <a:cs typeface="Red Hat Mono" pitchFamily="34" charset="-120"/>
               </a:rPr>
-              <a:t>[host]$ helm upgrade --install shipping examples/05-values/shipping-service -n hfd-05 --dry-run=server
+              <a:t>[host]$ helm upgrade --install shipping ./shipping-service -n hfd-05 --dry-run=client
 </a:t>
             </a:r>
-            <a:endParaRPr lang="en-US" sz="1000" dirty="0"/>
+            <a:pPr algn="l" indent="0" marL="0">
+              <a:lnSpc>
+                <a:spcPct val="110000"/>
+              </a:lnSpc>
+              <a:buNone/>
+            </a:pPr>
+            <a:r>
+              <a:rPr lang="en-US" sz="1400" dirty="0">
+                <a:solidFill>
+                  <a:srgbClr val="8FB98F"/>
+                </a:solidFill>
+                <a:latin typeface="Red Hat Mono" pitchFamily="34" charset="0"/>
+                <a:ea typeface="Red Hat Mono" pitchFamily="34" charset="-122"/>
+                <a:cs typeface="Red Hat Mono" pitchFamily="34" charset="-120"/>
+              </a:rPr>
+              <a:t># server-side: connects to the cluster, runs lookup and checks CRDs through .Capabilities
+</a:t>
+            </a:r>
+            <a:pPr algn="l" indent="0" marL="0">
+              <a:lnSpc>
+                <a:spcPct val="110000"/>
+              </a:lnSpc>
+              <a:buNone/>
+            </a:pPr>
+            <a:r>
+              <a:rPr lang="en-US" sz="1400" dirty="0">
+                <a:solidFill>
+                  <a:srgbClr val="E6E6E6"/>
+                </a:solidFill>
+                <a:latin typeface="Red Hat Mono" pitchFamily="34" charset="0"/>
+                <a:ea typeface="Red Hat Mono" pitchFamily="34" charset="-122"/>
+                <a:cs typeface="Red Hat Mono" pitchFamily="34" charset="-120"/>
+              </a:rPr>
+              <a:t>[host]$ helm upgrade --install shipping ./shipping-service -n hfd-05 --dry-run=server
+</a:t>
+            </a:r>
+            <a:endParaRPr lang="en-US" sz="1400" dirty="0"/>
           </a:p>
         </p:txBody>
       </p:sp>
@@ -17532,7 +17850,7 @@
                 <a:ea typeface="Red Hat Text" pitchFamily="34" charset="-122"/>
                 <a:cs typeface="Red Hat Text" pitchFamily="34" charset="-120"/>
               </a:rPr>
-              <a:t>examples/05-values/demo.sh, examples/10-crds-operators/demo.sh</a:t>
+              <a:t>Run from examples/05-values; demo.sh in the same directory</a:t>
             </a:r>
             <a:endParaRPr lang="en-US" sz="1300" dirty="0"/>
           </a:p>
@@ -17733,13 +18051,13 @@
                 <a:spcPts val="400"/>
               </a:spcBef>
               <a:spcAft>
-                <a:spcPts val="1300"/>
+                <a:spcPts val="1600"/>
               </a:spcAft>
               <a:buSzPct val="100000"/>
               <a:buChar char="●"/>
             </a:pPr>
             <a:r>
-              <a:rPr lang="en-US" sz="1700" b="1" dirty="0">
+              <a:rPr lang="en-US" sz="2000" b="1" dirty="0">
                 <a:solidFill>
                   <a:srgbClr val="151515"/>
                 </a:solidFill>
@@ -17756,7 +18074,7 @@
               <a:buNone/>
             </a:pPr>
             <a:r>
-              <a:rPr lang="en-US" sz="1700" dirty="0">
+              <a:rPr lang="en-US" sz="2000" dirty="0">
                 <a:solidFill>
                   <a:srgbClr val="242424"/>
                 </a:solidFill>
@@ -17766,7 +18084,7 @@
               </a:rPr>
               <a:t>: the debug ladder, helm diff, helm-unittest, chart-testing, kubeconform and a chart CI pipeline.</a:t>
             </a:r>
-            <a:endParaRPr lang="en-US" sz="1700" dirty="0"/>
+            <a:endParaRPr lang="en-US" sz="2000" dirty="0"/>
           </a:p>
           <a:p>
             <a:pPr marL="228600" indent="-228600">
@@ -17777,13 +18095,13 @@
                 <a:spcPts val="400"/>
               </a:spcBef>
               <a:spcAft>
-                <a:spcPts val="1300"/>
+                <a:spcPts val="1600"/>
               </a:spcAft>
               <a:buSzPct val="100000"/>
               <a:buChar char="●"/>
             </a:pPr>
             <a:r>
-              <a:rPr lang="en-US" sz="1700" b="1" dirty="0">
+              <a:rPr lang="en-US" sz="2000" b="1" dirty="0">
                 <a:solidFill>
                   <a:srgbClr val="151515"/>
                 </a:solidFill>
@@ -17800,7 +18118,7 @@
               <a:buNone/>
             </a:pPr>
             <a:r>
-              <a:rPr lang="en-US" sz="1700" dirty="0">
+              <a:rPr lang="en-US" sz="2000" dirty="0">
                 <a:solidFill>
                   <a:srgbClr val="242424"/>
                 </a:solidFill>
@@ -17810,7 +18128,7 @@
               </a:rPr>
               <a:t>: Kafka via Strimzi, umbrella charts, globals, library charts and starters.</a:t>
             </a:r>
-            <a:endParaRPr lang="en-US" sz="1700" dirty="0"/>
+            <a:endParaRPr lang="en-US" sz="2000" dirty="0"/>
           </a:p>
           <a:p>
             <a:pPr marL="228600" indent="-228600">
@@ -17821,13 +18139,13 @@
                 <a:spcPts val="400"/>
               </a:spcBef>
               <a:spcAft>
-                <a:spcPts val="1300"/>
+                <a:spcPts val="1600"/>
               </a:spcAft>
               <a:buSzPct val="100000"/>
               <a:buChar char="●"/>
             </a:pPr>
             <a:r>
-              <a:rPr lang="en-US" sz="1700" b="1" dirty="0">
+              <a:rPr lang="en-US" sz="2000" b="1" dirty="0">
                 <a:solidFill>
                   <a:srgbClr val="151515"/>
                 </a:solidFill>
@@ -17844,7 +18162,7 @@
               <a:buNone/>
             </a:pPr>
             <a:r>
-              <a:rPr lang="en-US" sz="1700" dirty="0">
+              <a:rPr lang="en-US" sz="2000" dirty="0">
                 <a:solidFill>
                   <a:srgbClr val="242424"/>
                 </a:solidFill>
@@ -17854,7 +18172,7 @@
               </a:rPr>
               <a:t>: SemVer for charts, OCI registries, provenance and cosign.</a:t>
             </a:r>
-            <a:endParaRPr lang="en-US" sz="1700" dirty="0"/>
+            <a:endParaRPr lang="en-US" sz="2000" dirty="0"/>
           </a:p>
           <a:p>
             <a:pPr marL="228600" indent="-228600">
@@ -17865,13 +18183,13 @@
                 <a:spcPts val="400"/>
               </a:spcBef>
               <a:spcAft>
-                <a:spcPts val="1300"/>
+                <a:spcPts val="1600"/>
               </a:spcAft>
               <a:buSzPct val="100000"/>
               <a:buChar char="●"/>
             </a:pPr>
             <a:r>
-              <a:rPr lang="en-US" sz="1700" b="1" dirty="0">
+              <a:rPr lang="en-US" sz="2000" b="1" dirty="0">
                 <a:solidFill>
                   <a:srgbClr val="151515"/>
                 </a:solidFill>
@@ -17888,7 +18206,7 @@
               <a:buNone/>
             </a:pPr>
             <a:r>
-              <a:rPr lang="en-US" sz="1700" dirty="0">
+              <a:rPr lang="en-US" sz="2000" dirty="0">
                 <a:solidFill>
                   <a:srgbClr val="242424"/>
                 </a:solidFill>
@@ -17898,7 +18216,7 @@
               </a:rPr>
               <a:t>: Helm 4 plugins, Wasm, post-renderer plugins, environment promotion and Argo CD.</a:t>
             </a:r>
-            <a:endParaRPr lang="en-US" sz="1700" dirty="0"/>
+            <a:endParaRPr lang="en-US" sz="2000" dirty="0"/>
           </a:p>
           <a:p>
             <a:pPr marL="228600" indent="-228600">
@@ -17909,13 +18227,13 @@
                 <a:spcPts val="400"/>
               </a:spcBef>
               <a:spcAft>
-                <a:spcPts val="1300"/>
+                <a:spcPts val="1600"/>
               </a:spcAft>
               <a:buSzPct val="100000"/>
               <a:buChar char="●"/>
             </a:pPr>
             <a:r>
-              <a:rPr lang="en-US" sz="1700" b="1" dirty="0">
+              <a:rPr lang="en-US" sz="2000" b="1" dirty="0">
                 <a:solidFill>
                   <a:srgbClr val="151515"/>
                 </a:solidFill>
@@ -17932,7 +18250,7 @@
               <a:buNone/>
             </a:pPr>
             <a:r>
-              <a:rPr lang="en-US" sz="1700" dirty="0">
+              <a:rPr lang="en-US" sz="2000" dirty="0">
                 <a:solidFill>
                   <a:srgbClr val="242424"/>
                 </a:solidFill>
@@ -17942,7 +18260,7 @@
               </a:rPr>
               <a:t>: security context constraints, arbitrary UIDs, Routes and the Helm console.</a:t>
             </a:r>
-            <a:endParaRPr lang="en-US" sz="1700" dirty="0"/>
+            <a:endParaRPr lang="en-US" sz="2000" dirty="0"/>
           </a:p>
         </p:txBody>
       </p:sp>
@@ -18128,7 +18446,7 @@
         </p:nvGraphicFramePr>
         <p:xfrm>
           <a:off x="566928" y="1691640"/>
-          <a:ext cx="11055096" cy="3621024"/>
+          <a:ext cx="11055096" cy="4059936"/>
         </p:xfrm>
         <a:graphic>
           <a:graphicData uri="http://schemas.openxmlformats.org/drawingml/2006/table">
@@ -18139,7 +18457,7 @@
                 <a:gridCol w="3931920"/>
                 <a:gridCol w="4105656"/>
               </a:tblGrid>
-              <a:tr h="603504">
+              <a:tr h="676656">
                 <a:tc>
                   <a:txBody>
                     <a:bodyPr/>
@@ -18149,7 +18467,7 @@
                         <a:buNone/>
                       </a:pPr>
                       <a:r>
-                        <a:rPr lang="en-US" sz="1500" b="1" dirty="0">
+                        <a:rPr lang="en-US" sz="1600" b="1" dirty="0">
                           <a:solidFill>
                             <a:srgbClr val="EE0000"/>
                           </a:solidFill>
@@ -18159,7 +18477,7 @@
                         </a:rPr>
                         <a:t>--atomic</a:t>
                       </a:r>
-                      <a:endParaRPr lang="en-US" sz="1500" dirty="0">
+                      <a:endParaRPr lang="en-US" sz="1600" dirty="0">
                         <a:latin typeface="Red Hat Mono" charset="0"/>
                         <a:ea typeface="Red Hat Mono" charset="0"/>
                         <a:cs typeface="Red Hat Mono" charset="0"/>
@@ -18214,7 +18532,7 @@
                         <a:buNone/>
                       </a:pPr>
                       <a:r>
-                        <a:rPr lang="en-US" sz="1400" b="1" dirty="0">
+                        <a:rPr lang="en-US" sz="1600" b="1" dirty="0">
                           <a:solidFill>
                             <a:srgbClr val="151515"/>
                           </a:solidFill>
@@ -18224,7 +18542,7 @@
                         </a:rPr>
                         <a:t>--rollback-on-failure</a:t>
                       </a:r>
-                      <a:endParaRPr lang="en-US" sz="1400" dirty="0">
+                      <a:endParaRPr lang="en-US" sz="1600" dirty="0">
                         <a:latin typeface="Red Hat Text" charset="0"/>
                         <a:ea typeface="Red Hat Text" charset="0"/>
                         <a:cs typeface="Red Hat Text" charset="0"/>
@@ -18279,7 +18597,7 @@
                         <a:buNone/>
                       </a:pPr>
                       <a:r>
-                        <a:rPr lang="en-US" sz="1300" dirty="0">
+                        <a:rPr lang="en-US" sz="1500" dirty="0">
                           <a:solidFill>
                             <a:srgbClr val="242424"/>
                           </a:solidFill>
@@ -18289,7 +18607,7 @@
                         </a:rPr>
                         <a:t>install and upgrade; implies --wait=watcher</a:t>
                       </a:r>
-                      <a:endParaRPr lang="en-US" sz="1300" dirty="0">
+                      <a:endParaRPr lang="en-US" sz="1500" dirty="0">
                         <a:latin typeface="Red Hat Text" charset="0"/>
                         <a:ea typeface="Red Hat Text" charset="0"/>
                         <a:cs typeface="Red Hat Text" charset="0"/>
@@ -18336,7 +18654,7 @@
                   </a:tcPr>
                 </a:tc>
               </a:tr>
-              <a:tr h="603504">
+              <a:tr h="676656">
                 <a:tc>
                   <a:txBody>
                     <a:bodyPr/>
@@ -18346,7 +18664,7 @@
                         <a:buNone/>
                       </a:pPr>
                       <a:r>
-                        <a:rPr lang="en-US" sz="1500" b="1" dirty="0">
+                        <a:rPr lang="en-US" sz="1600" b="1" dirty="0">
                           <a:solidFill>
                             <a:srgbClr val="EE0000"/>
                           </a:solidFill>
@@ -18356,7 +18674,7 @@
                         </a:rPr>
                         <a:t>--force</a:t>
                       </a:r>
-                      <a:endParaRPr lang="en-US" sz="1500" dirty="0">
+                      <a:endParaRPr lang="en-US" sz="1600" dirty="0">
                         <a:latin typeface="Red Hat Mono" charset="0"/>
                         <a:ea typeface="Red Hat Mono" charset="0"/>
                         <a:cs typeface="Red Hat Mono" charset="0"/>
@@ -18411,7 +18729,7 @@
                         <a:buNone/>
                       </a:pPr>
                       <a:r>
-                        <a:rPr lang="en-US" sz="1400" b="1" dirty="0">
+                        <a:rPr lang="en-US" sz="1600" b="1" dirty="0">
                           <a:solidFill>
                             <a:srgbClr val="151515"/>
                           </a:solidFill>
@@ -18421,7 +18739,7 @@
                         </a:rPr>
                         <a:t>--force-replace</a:t>
                       </a:r>
-                      <a:endParaRPr lang="en-US" sz="1400" dirty="0">
+                      <a:endParaRPr lang="en-US" sz="1600" dirty="0">
                         <a:latin typeface="Red Hat Text" charset="0"/>
                         <a:ea typeface="Red Hat Text" charset="0"/>
                         <a:cs typeface="Red Hat Text" charset="0"/>
@@ -18476,7 +18794,7 @@
                         <a:buNone/>
                       </a:pPr>
                       <a:r>
-                        <a:rPr lang="en-US" sz="1300" dirty="0">
+                        <a:rPr lang="en-US" sz="1500" dirty="0">
                           <a:solidFill>
                             <a:srgbClr val="242424"/>
                           </a:solidFill>
@@ -18486,7 +18804,7 @@
                         </a:rPr>
                         <a:t>client-side only: needs --server-side=false; both spellings warn</a:t>
                       </a:r>
-                      <a:endParaRPr lang="en-US" sz="1300" dirty="0">
+                      <a:endParaRPr lang="en-US" sz="1500" dirty="0">
                         <a:latin typeface="Red Hat Text" charset="0"/>
                         <a:ea typeface="Red Hat Text" charset="0"/>
                         <a:cs typeface="Red Hat Text" charset="0"/>
@@ -18533,7 +18851,7 @@
                   </a:tcPr>
                 </a:tc>
               </a:tr>
-              <a:tr h="603504">
+              <a:tr h="676656">
                 <a:tc>
                   <a:txBody>
                     <a:bodyPr/>
@@ -18543,7 +18861,7 @@
                         <a:buNone/>
                       </a:pPr>
                       <a:r>
-                        <a:rPr lang="en-US" sz="1500" b="1" dirty="0">
+                        <a:rPr lang="en-US" sz="1600" b="1" dirty="0">
                           <a:solidFill>
                             <a:srgbClr val="EE0000"/>
                           </a:solidFill>
@@ -18553,7 +18871,7 @@
                         </a:rPr>
                         <a:t>--wait (boolean)</a:t>
                       </a:r>
-                      <a:endParaRPr lang="en-US" sz="1500" dirty="0">
+                      <a:endParaRPr lang="en-US" sz="1600" dirty="0">
                         <a:latin typeface="Red Hat Mono" charset="0"/>
                         <a:ea typeface="Red Hat Mono" charset="0"/>
                         <a:cs typeface="Red Hat Mono" charset="0"/>
@@ -18608,7 +18926,7 @@
                         <a:buNone/>
                       </a:pPr>
                       <a:r>
-                        <a:rPr lang="en-US" sz="1400" b="1" dirty="0">
+                        <a:rPr lang="en-US" sz="1600" b="1" dirty="0">
                           <a:solidFill>
                             <a:srgbClr val="151515"/>
                           </a:solidFill>
@@ -18618,7 +18936,7 @@
                         </a:rPr>
                         <a:t>--wait=watcher|hookOnly|legacy</a:t>
                       </a:r>
-                      <a:endParaRPr lang="en-US" sz="1400" dirty="0">
+                      <a:endParaRPr lang="en-US" sz="1600" dirty="0">
                         <a:latin typeface="Red Hat Text" charset="0"/>
                         <a:ea typeface="Red Hat Text" charset="0"/>
                         <a:cs typeface="Red Hat Text" charset="0"/>
@@ -18673,7 +18991,7 @@
                         <a:buNone/>
                       </a:pPr>
                       <a:r>
-                        <a:rPr lang="en-US" sz="1300" dirty="0">
+                        <a:rPr lang="en-US" sz="1500" dirty="0">
                           <a:solidFill>
                             <a:srgbClr val="242424"/>
                           </a:solidFill>
@@ -18683,7 +19001,7 @@
                         </a:rPr>
                         <a:t>A bare --wait means watcher; no flag means hookOnly</a:t>
                       </a:r>
-                      <a:endParaRPr lang="en-US" sz="1300" dirty="0">
+                      <a:endParaRPr lang="en-US" sz="1500" dirty="0">
                         <a:latin typeface="Red Hat Text" charset="0"/>
                         <a:ea typeface="Red Hat Text" charset="0"/>
                         <a:cs typeface="Red Hat Text" charset="0"/>
@@ -18730,7 +19048,7 @@
                   </a:tcPr>
                 </a:tc>
               </a:tr>
-              <a:tr h="603504">
+              <a:tr h="676656">
                 <a:tc>
                   <a:txBody>
                     <a:bodyPr/>
@@ -18740,7 +19058,7 @@
                         <a:buNone/>
                       </a:pPr>
                       <a:r>
-                        <a:rPr lang="en-US" sz="1500" b="1" dirty="0">
+                        <a:rPr lang="en-US" sz="1600" b="1" dirty="0">
                           <a:solidFill>
                             <a:srgbClr val="EE0000"/>
                           </a:solidFill>
@@ -18750,7 +19068,7 @@
                         </a:rPr>
                         <a:t>--dry-run (boolean)</a:t>
                       </a:r>
-                      <a:endParaRPr lang="en-US" sz="1500" dirty="0">
+                      <a:endParaRPr lang="en-US" sz="1600" dirty="0">
                         <a:latin typeface="Red Hat Mono" charset="0"/>
                         <a:ea typeface="Red Hat Mono" charset="0"/>
                         <a:cs typeface="Red Hat Mono" charset="0"/>
@@ -18805,7 +19123,7 @@
                         <a:buNone/>
                       </a:pPr>
                       <a:r>
-                        <a:rPr lang="en-US" sz="1400" b="1" dirty="0">
+                        <a:rPr lang="en-US" sz="1600" b="1" dirty="0">
                           <a:solidFill>
                             <a:srgbClr val="151515"/>
                           </a:solidFill>
@@ -18815,7 +19133,7 @@
                         </a:rPr>
                         <a:t>--dry-run=none|client|server</a:t>
                       </a:r>
-                      <a:endParaRPr lang="en-US" sz="1400" dirty="0">
+                      <a:endParaRPr lang="en-US" sz="1600" dirty="0">
                         <a:latin typeface="Red Hat Text" charset="0"/>
                         <a:ea typeface="Red Hat Text" charset="0"/>
                         <a:cs typeface="Red Hat Text" charset="0"/>
@@ -18870,7 +19188,7 @@
                         <a:buNone/>
                       </a:pPr>
                       <a:r>
-                        <a:rPr lang="en-US" sz="1300" dirty="0">
+                        <a:rPr lang="en-US" sz="1500" dirty="0">
                           <a:solidFill>
                             <a:srgbClr val="242424"/>
                           </a:solidFill>
@@ -18880,7 +19198,7 @@
                         </a:rPr>
                         <a:t>template takes client or server and defaults to client</a:t>
                       </a:r>
-                      <a:endParaRPr lang="en-US" sz="1300" dirty="0">
+                      <a:endParaRPr lang="en-US" sz="1500" dirty="0">
                         <a:latin typeface="Red Hat Text" charset="0"/>
                         <a:ea typeface="Red Hat Text" charset="0"/>
                         <a:cs typeface="Red Hat Text" charset="0"/>
@@ -18927,7 +19245,7 @@
                   </a:tcPr>
                 </a:tc>
               </a:tr>
-              <a:tr h="603504">
+              <a:tr h="676656">
                 <a:tc>
                   <a:txBody>
                     <a:bodyPr/>
@@ -18937,7 +19255,7 @@
                         <a:buNone/>
                       </a:pPr>
                       <a:r>
-                        <a:rPr lang="en-US" sz="1500" b="1" dirty="0">
+                        <a:rPr lang="en-US" sz="1600" b="1" dirty="0">
                           <a:solidFill>
                             <a:srgbClr val="EE0000"/>
                           </a:solidFill>
@@ -18947,7 +19265,7 @@
                         </a:rPr>
                         <a:t>--post-renderer &lt;exe&gt;</a:t>
                       </a:r>
-                      <a:endParaRPr lang="en-US" sz="1500" dirty="0">
+                      <a:endParaRPr lang="en-US" sz="1600" dirty="0">
                         <a:latin typeface="Red Hat Mono" charset="0"/>
                         <a:ea typeface="Red Hat Mono" charset="0"/>
                         <a:cs typeface="Red Hat Mono" charset="0"/>
@@ -19002,7 +19320,7 @@
                         <a:buNone/>
                       </a:pPr>
                       <a:r>
-                        <a:rPr lang="en-US" sz="1400" b="1" dirty="0">
+                        <a:rPr lang="en-US" sz="1600" b="1" dirty="0">
                           <a:solidFill>
                             <a:srgbClr val="151515"/>
                           </a:solidFill>
@@ -19012,7 +19330,7 @@
                         </a:rPr>
                         <a:t>--post-renderer &lt;plugin&gt;</a:t>
                       </a:r>
-                      <a:endParaRPr lang="en-US" sz="1400" dirty="0">
+                      <a:endParaRPr lang="en-US" sz="1600" dirty="0">
                         <a:latin typeface="Red Hat Text" charset="0"/>
                         <a:ea typeface="Red Hat Text" charset="0"/>
                         <a:cs typeface="Red Hat Text" charset="0"/>
@@ -19067,7 +19385,7 @@
                         <a:buNone/>
                       </a:pPr>
                       <a:r>
-                        <a:rPr lang="en-US" sz="1300" dirty="0">
+                        <a:rPr lang="en-US" sz="1500" dirty="0">
                           <a:solidFill>
                             <a:srgbClr val="242424"/>
                           </a:solidFill>
@@ -19077,7 +19395,7 @@
                         </a:rPr>
                         <a:t>A path is rejected; pass a postrenderer/v1 plugin name</a:t>
                       </a:r>
-                      <a:endParaRPr lang="en-US" sz="1300" dirty="0">
+                      <a:endParaRPr lang="en-US" sz="1500" dirty="0">
                         <a:latin typeface="Red Hat Text" charset="0"/>
                         <a:ea typeface="Red Hat Text" charset="0"/>
                         <a:cs typeface="Red Hat Text" charset="0"/>
@@ -19124,7 +19442,7 @@
                   </a:tcPr>
                 </a:tc>
               </a:tr>
-              <a:tr h="603504">
+              <a:tr h="676656">
                 <a:tc>
                   <a:txBody>
                     <a:bodyPr/>
@@ -19134,7 +19452,7 @@
                         <a:buNone/>
                       </a:pPr>
                       <a:r>
-                        <a:rPr lang="en-US" sz="1500" b="1" dirty="0">
+                        <a:rPr lang="en-US" sz="1600" b="1" dirty="0">
                           <a:solidFill>
                             <a:srgbClr val="EE0000"/>
                           </a:solidFill>
@@ -19144,7 +19462,7 @@
                         </a:rPr>
                         <a:t>registry login oci://host</a:t>
                       </a:r>
-                      <a:endParaRPr lang="en-US" sz="1500" dirty="0">
+                      <a:endParaRPr lang="en-US" sz="1600" dirty="0">
                         <a:latin typeface="Red Hat Mono" charset="0"/>
                         <a:ea typeface="Red Hat Mono" charset="0"/>
                         <a:cs typeface="Red Hat Mono" charset="0"/>
@@ -19199,7 +19517,7 @@
                         <a:buNone/>
                       </a:pPr>
                       <a:r>
-                        <a:rPr lang="en-US" sz="1400" b="1" dirty="0">
+                        <a:rPr lang="en-US" sz="1600" b="1" dirty="0">
                           <a:solidFill>
                             <a:srgbClr val="151515"/>
                           </a:solidFill>
@@ -19209,7 +19527,7 @@
                         </a:rPr>
                         <a:t>registry login host</a:t>
                       </a:r>
-                      <a:endParaRPr lang="en-US" sz="1400" dirty="0">
+                      <a:endParaRPr lang="en-US" sz="1600" dirty="0">
                         <a:latin typeface="Red Hat Text" charset="0"/>
                         <a:ea typeface="Red Hat Text" charset="0"/>
                         <a:cs typeface="Red Hat Text" charset="0"/>
@@ -19264,7 +19582,7 @@
                         <a:buNone/>
                       </a:pPr>
                       <a:r>
-                        <a:rPr lang="en-US" sz="1300" dirty="0">
+                        <a:rPr lang="en-US" sz="1500" dirty="0">
                           <a:solidFill>
                             <a:srgbClr val="242424"/>
                           </a:solidFill>
@@ -19274,7 +19592,7 @@
                         </a:rPr>
                         <a:t>Domain name only</a:t>
                       </a:r>
-                      <a:endParaRPr lang="en-US" sz="1300" dirty="0">
+                      <a:endParaRPr lang="en-US" sz="1500" dirty="0">
                         <a:latin typeface="Red Hat Text" charset="0"/>
                         <a:ea typeface="Red Hat Text" charset="0"/>
                         <a:cs typeface="Red Hat Text" charset="0"/>
@@ -19748,13 +20066,13 @@
                 <a:spcPts val="400"/>
               </a:spcBef>
               <a:spcAft>
-                <a:spcPts val="1300"/>
+                <a:spcPts val="1600"/>
               </a:spcAft>
               <a:buSzPct val="100000"/>
               <a:buChar char="●"/>
             </a:pPr>
             <a:r>
-              <a:rPr lang="en-US" sz="1700" b="1" dirty="0">
+              <a:rPr lang="en-US" sz="2000" b="1" dirty="0">
                 <a:solidFill>
                   <a:srgbClr val="151515"/>
                 </a:solidFill>
@@ -19771,7 +20089,7 @@
               <a:buNone/>
             </a:pPr>
             <a:r>
-              <a:rPr lang="en-US" sz="1700" dirty="0">
+              <a:rPr lang="en-US" sz="2000" dirty="0">
                 <a:solidFill>
                   <a:srgbClr val="242424"/>
                 </a:solidFill>
@@ -19781,7 +20099,7 @@
               </a:rPr>
               <a:t>: Chart.yaml metadata, default values.yaml and a templates/ directory of Go templates that render to Kubernetes manifests.</a:t>
             </a:r>
-            <a:endParaRPr lang="en-US" sz="1700" dirty="0"/>
+            <a:endParaRPr lang="en-US" sz="2000" dirty="0"/>
           </a:p>
           <a:p>
             <a:pPr marL="228600" indent="-228600">
@@ -19792,13 +20110,13 @@
                 <a:spcPts val="400"/>
               </a:spcBef>
               <a:spcAft>
-                <a:spcPts val="1300"/>
+                <a:spcPts val="1600"/>
               </a:spcAft>
               <a:buSzPct val="100000"/>
               <a:buChar char="●"/>
             </a:pPr>
             <a:r>
-              <a:rPr lang="en-US" sz="1700" b="1" dirty="0">
+              <a:rPr lang="en-US" sz="2000" b="1" dirty="0">
                 <a:solidFill>
                   <a:srgbClr val="151515"/>
                 </a:solidFill>
@@ -19815,7 +20133,7 @@
               <a:buNone/>
             </a:pPr>
             <a:r>
-              <a:rPr lang="en-US" sz="1700" dirty="0">
+              <a:rPr lang="en-US" sz="2000" dirty="0">
                 <a:solidFill>
                   <a:srgbClr val="242424"/>
                 </a:solidFill>
@@ -19825,7 +20143,7 @@
               </a:rPr>
               <a:t>: one chart installed into one namespace under a name you choose; the same chart installed twice is two releases.</a:t>
             </a:r>
-            <a:endParaRPr lang="en-US" sz="1700" dirty="0"/>
+            <a:endParaRPr lang="en-US" sz="2000" dirty="0"/>
           </a:p>
           <a:p>
             <a:pPr marL="228600" indent="-228600">
@@ -19836,13 +20154,13 @@
                 <a:spcPts val="400"/>
               </a:spcBef>
               <a:spcAft>
-                <a:spcPts val="1300"/>
+                <a:spcPts val="1600"/>
               </a:spcAft>
               <a:buSzPct val="100000"/>
               <a:buChar char="●"/>
             </a:pPr>
             <a:r>
-              <a:rPr lang="en-US" sz="1700" b="1" dirty="0">
+              <a:rPr lang="en-US" sz="2000" b="1" dirty="0">
                 <a:solidFill>
                   <a:srgbClr val="151515"/>
                 </a:solidFill>
@@ -19859,7 +20177,7 @@
               <a:buNone/>
             </a:pPr>
             <a:r>
-              <a:rPr lang="en-US" sz="1700" dirty="0">
+              <a:rPr lang="en-US" sz="2000" dirty="0">
                 <a:solidFill>
                   <a:srgbClr val="242424"/>
                 </a:solidFill>
@@ -19869,7 +20187,7 @@
               </a:rPr>
               <a:t>: each install, upgrade and rollback writes a revision, which is what makes history and rollback possible.</a:t>
             </a:r>
-            <a:endParaRPr lang="en-US" sz="1700" dirty="0"/>
+            <a:endParaRPr lang="en-US" sz="2000" dirty="0"/>
           </a:p>
           <a:p>
             <a:pPr marL="228600" indent="-228600">
@@ -19880,13 +20198,13 @@
                 <a:spcPts val="400"/>
               </a:spcBef>
               <a:spcAft>
-                <a:spcPts val="1300"/>
+                <a:spcPts val="1600"/>
               </a:spcAft>
               <a:buSzPct val="100000"/>
               <a:buChar char="●"/>
             </a:pPr>
             <a:r>
-              <a:rPr lang="en-US" sz="1700" b="1" dirty="0">
+              <a:rPr lang="en-US" sz="2000" b="1" dirty="0">
                 <a:solidFill>
                   <a:srgbClr val="151515"/>
                 </a:solidFill>
@@ -19903,7 +20221,7 @@
               <a:buNone/>
             </a:pPr>
             <a:r>
-              <a:rPr lang="en-US" sz="1700" dirty="0">
+              <a:rPr lang="en-US" sz="2000" dirty="0">
                 <a:solidFill>
                   <a:srgbClr val="242424"/>
                 </a:solidFill>
@@ -19913,7 +20231,7 @@
               </a:rPr>
               <a:t>: nothing runs in the cluster on its behalf; the client renders locally and talks to the API server.</a:t>
             </a:r>
-            <a:endParaRPr lang="en-US" sz="1700" dirty="0"/>
+            <a:endParaRPr lang="en-US" sz="2000" dirty="0"/>
           </a:p>
         </p:txBody>
       </p:sp>
@@ -20099,7 +20417,7 @@
         </p:nvGraphicFramePr>
         <p:xfrm>
           <a:off x="566928" y="1691640"/>
-          <a:ext cx="11055096" cy="3401568"/>
+          <a:ext cx="11055096" cy="3950208"/>
         </p:xfrm>
         <a:graphic>
           <a:graphicData uri="http://schemas.openxmlformats.org/drawingml/2006/table">
@@ -20110,7 +20428,7 @@
                 <a:gridCol w="2743200"/>
                 <a:gridCol w="6117336"/>
               </a:tblGrid>
-              <a:tr h="566928">
+              <a:tr h="658368">
                 <a:tc>
                   <a:txBody>
                     <a:bodyPr/>
@@ -20120,7 +20438,7 @@
                         <a:buNone/>
                       </a:pPr>
                       <a:r>
-                        <a:rPr lang="en-US" sz="1500" b="1" dirty="0">
+                        <a:rPr lang="en-US" sz="1600" b="1" dirty="0">
                           <a:solidFill>
                             <a:srgbClr val="EE0000"/>
                           </a:solidFill>
@@ -20130,7 +20448,7 @@
                         </a:rPr>
                         <a:t>Apply</a:t>
                       </a:r>
-                      <a:endParaRPr lang="en-US" sz="1500" dirty="0">
+                      <a:endParaRPr lang="en-US" sz="1600" dirty="0">
                         <a:latin typeface="Red Hat Mono" charset="0"/>
                         <a:ea typeface="Red Hat Mono" charset="0"/>
                         <a:cs typeface="Red Hat Mono" charset="0"/>
@@ -20185,7 +20503,7 @@
                         <a:buNone/>
                       </a:pPr>
                       <a:r>
-                        <a:rPr lang="en-US" sz="1400" b="1" dirty="0">
+                        <a:rPr lang="en-US" sz="1600" b="1" dirty="0">
                           <a:solidFill>
                             <a:srgbClr val="151515"/>
                           </a:solidFill>
@@ -20195,7 +20513,7 @@
                         </a:rPr>
                         <a:t>Server-side apply</a:t>
                       </a:r>
-                      <a:endParaRPr lang="en-US" sz="1400" dirty="0">
+                      <a:endParaRPr lang="en-US" sz="1600" dirty="0">
                         <a:latin typeface="Red Hat Text" charset="0"/>
                         <a:ea typeface="Red Hat Text" charset="0"/>
                         <a:cs typeface="Red Hat Text" charset="0"/>
@@ -20250,7 +20568,7 @@
                         <a:buNone/>
                       </a:pPr>
                       <a:r>
-                        <a:rPr lang="en-US" sz="1300" dirty="0">
+                        <a:rPr lang="en-US" sz="1500" dirty="0">
                           <a:solidFill>
                             <a:srgbClr val="242424"/>
                           </a:solidFill>
@@ -20260,7 +20578,7 @@
                         </a:rPr>
                         <a:t>Default for new releases; upgrades follow the method the previous revision used</a:t>
                       </a:r>
-                      <a:endParaRPr lang="en-US" sz="1300" dirty="0">
+                      <a:endParaRPr lang="en-US" sz="1500" dirty="0">
                         <a:latin typeface="Red Hat Text" charset="0"/>
                         <a:ea typeface="Red Hat Text" charset="0"/>
                         <a:cs typeface="Red Hat Text" charset="0"/>
@@ -20307,7 +20625,7 @@
                   </a:tcPr>
                 </a:tc>
               </a:tr>
-              <a:tr h="566928">
+              <a:tr h="658368">
                 <a:tc>
                   <a:txBody>
                     <a:bodyPr/>
@@ -20317,7 +20635,7 @@
                         <a:buNone/>
                       </a:pPr>
                       <a:r>
-                        <a:rPr lang="en-US" sz="1500" b="1" dirty="0">
+                        <a:rPr lang="en-US" sz="1600" b="1" dirty="0">
                           <a:solidFill>
                             <a:srgbClr val="EE0000"/>
                           </a:solidFill>
@@ -20327,7 +20645,7 @@
                         </a:rPr>
                         <a:t>Failure</a:t>
                       </a:r>
-                      <a:endParaRPr lang="en-US" sz="1500" dirty="0">
+                      <a:endParaRPr lang="en-US" sz="1600" dirty="0">
                         <a:latin typeface="Red Hat Mono" charset="0"/>
                         <a:ea typeface="Red Hat Mono" charset="0"/>
                         <a:cs typeface="Red Hat Mono" charset="0"/>
@@ -20382,7 +20700,7 @@
                         <a:buNone/>
                       </a:pPr>
                       <a:r>
-                        <a:rPr lang="en-US" sz="1400" b="1" dirty="0">
+                        <a:rPr lang="en-US" sz="1600" b="1" dirty="0">
                           <a:solidFill>
                             <a:srgbClr val="151515"/>
                           </a:solidFill>
@@ -20392,7 +20710,7 @@
                         </a:rPr>
                         <a:t>--rollback-on-failure</a:t>
                       </a:r>
-                      <a:endParaRPr lang="en-US" sz="1400" dirty="0">
+                      <a:endParaRPr lang="en-US" sz="1600" dirty="0">
                         <a:latin typeface="Red Hat Text" charset="0"/>
                         <a:ea typeface="Red Hat Text" charset="0"/>
                         <a:cs typeface="Red Hat Text" charset="0"/>
@@ -20447,7 +20765,7 @@
                         <a:buNone/>
                       </a:pPr>
                       <a:r>
-                        <a:rPr lang="en-US" sz="1300" dirty="0">
+                        <a:rPr lang="en-US" sz="1500" dirty="0">
                           <a:solidFill>
                             <a:srgbClr val="242424"/>
                           </a:solidFill>
@@ -20457,7 +20775,7 @@
                         </a:rPr>
                         <a:t>Replaces Helm 3's atomic flag; implies --wait=watcher</a:t>
                       </a:r>
-                      <a:endParaRPr lang="en-US" sz="1300" dirty="0">
+                      <a:endParaRPr lang="en-US" sz="1500" dirty="0">
                         <a:latin typeface="Red Hat Text" charset="0"/>
                         <a:ea typeface="Red Hat Text" charset="0"/>
                         <a:cs typeface="Red Hat Text" charset="0"/>
@@ -20504,7 +20822,7 @@
                   </a:tcPr>
                 </a:tc>
               </a:tr>
-              <a:tr h="566928">
+              <a:tr h="658368">
                 <a:tc>
                   <a:txBody>
                     <a:bodyPr/>
@@ -20514,7 +20832,7 @@
                         <a:buNone/>
                       </a:pPr>
                       <a:r>
-                        <a:rPr lang="en-US" sz="1500" b="1" dirty="0">
+                        <a:rPr lang="en-US" sz="1600" b="1" dirty="0">
                           <a:solidFill>
                             <a:srgbClr val="EE0000"/>
                           </a:solidFill>
@@ -20524,7 +20842,7 @@
                         </a:rPr>
                         <a:t>Wait</a:t>
                       </a:r>
-                      <a:endParaRPr lang="en-US" sz="1500" dirty="0">
+                      <a:endParaRPr lang="en-US" sz="1600" dirty="0">
                         <a:latin typeface="Red Hat Mono" charset="0"/>
                         <a:ea typeface="Red Hat Mono" charset="0"/>
                         <a:cs typeface="Red Hat Mono" charset="0"/>
@@ -20579,7 +20897,7 @@
                         <a:buNone/>
                       </a:pPr>
                       <a:r>
-                        <a:rPr lang="en-US" sz="1400" b="1" dirty="0">
+                        <a:rPr lang="en-US" sz="1600" b="1" dirty="0">
                           <a:solidFill>
                             <a:srgbClr val="151515"/>
                           </a:solidFill>
@@ -20589,7 +20907,7 @@
                         </a:rPr>
                         <a:t>kstatus watcher</a:t>
                       </a:r>
-                      <a:endParaRPr lang="en-US" sz="1400" dirty="0">
+                      <a:endParaRPr lang="en-US" sz="1600" dirty="0">
                         <a:latin typeface="Red Hat Text" charset="0"/>
                         <a:ea typeface="Red Hat Text" charset="0"/>
                         <a:cs typeface="Red Hat Text" charset="0"/>
@@ -20644,7 +20962,7 @@
                         <a:buNone/>
                       </a:pPr>
                       <a:r>
-                        <a:rPr lang="en-US" sz="1300" dirty="0">
+                        <a:rPr lang="en-US" sz="1500" dirty="0">
                           <a:solidFill>
                             <a:srgbClr val="242424"/>
                           </a:solidFill>
@@ -20654,7 +20972,7 @@
                         </a:rPr>
                         <a:t>--wait takes watcher, hookOnly or legacy; a bare --wait means watcher</a:t>
                       </a:r>
-                      <a:endParaRPr lang="en-US" sz="1300" dirty="0">
+                      <a:endParaRPr lang="en-US" sz="1500" dirty="0">
                         <a:latin typeface="Red Hat Text" charset="0"/>
                         <a:ea typeface="Red Hat Text" charset="0"/>
                         <a:cs typeface="Red Hat Text" charset="0"/>
@@ -20701,7 +21019,7 @@
                   </a:tcPr>
                 </a:tc>
               </a:tr>
-              <a:tr h="566928">
+              <a:tr h="658368">
                 <a:tc>
                   <a:txBody>
                     <a:bodyPr/>
@@ -20711,7 +21029,7 @@
                         <a:buNone/>
                       </a:pPr>
                       <a:r>
-                        <a:rPr lang="en-US" sz="1500" b="1" dirty="0">
+                        <a:rPr lang="en-US" sz="1600" b="1" dirty="0">
                           <a:solidFill>
                             <a:srgbClr val="EE0000"/>
                           </a:solidFill>
@@ -20721,7 +21039,7 @@
                         </a:rPr>
                         <a:t>Plugins</a:t>
                       </a:r>
-                      <a:endParaRPr lang="en-US" sz="1500" dirty="0">
+                      <a:endParaRPr lang="en-US" sz="1600" dirty="0">
                         <a:latin typeface="Red Hat Mono" charset="0"/>
                         <a:ea typeface="Red Hat Mono" charset="0"/>
                         <a:cs typeface="Red Hat Mono" charset="0"/>
@@ -20776,7 +21094,7 @@
                         <a:buNone/>
                       </a:pPr>
                       <a:r>
-                        <a:rPr lang="en-US" sz="1400" b="1" dirty="0">
+                        <a:rPr lang="en-US" sz="1600" b="1" dirty="0">
                           <a:solidFill>
                             <a:srgbClr val="151515"/>
                           </a:solidFill>
@@ -20786,7 +21104,7 @@
                         </a:rPr>
                         <a:t>Typed, optional Wasm</a:t>
                       </a:r>
-                      <a:endParaRPr lang="en-US" sz="1400" dirty="0">
+                      <a:endParaRPr lang="en-US" sz="1600" dirty="0">
                         <a:latin typeface="Red Hat Text" charset="0"/>
                         <a:ea typeface="Red Hat Text" charset="0"/>
                         <a:cs typeface="Red Hat Text" charset="0"/>
@@ -20841,7 +21159,7 @@
                         <a:buNone/>
                       </a:pPr>
                       <a:r>
-                        <a:rPr lang="en-US" sz="1300" dirty="0">
+                        <a:rPr lang="en-US" sz="1500" dirty="0">
                           <a:solidFill>
                             <a:srgbClr val="242424"/>
                           </a:solidFill>
@@ -20851,7 +21169,7 @@
                         </a:rPr>
                         <a:t>cli/v1, getter/v1 and postrenderer/v1; subprocess or Wasm runtime</a:t>
                       </a:r>
-                      <a:endParaRPr lang="en-US" sz="1300" dirty="0">
+                      <a:endParaRPr lang="en-US" sz="1500" dirty="0">
                         <a:latin typeface="Red Hat Text" charset="0"/>
                         <a:ea typeface="Red Hat Text" charset="0"/>
                         <a:cs typeface="Red Hat Text" charset="0"/>
@@ -20898,7 +21216,7 @@
                   </a:tcPr>
                 </a:tc>
               </a:tr>
-              <a:tr h="566928">
+              <a:tr h="658368">
                 <a:tc>
                   <a:txBody>
                     <a:bodyPr/>
@@ -20908,7 +21226,7 @@
                         <a:buNone/>
                       </a:pPr>
                       <a:r>
-                        <a:rPr lang="en-US" sz="1500" b="1" dirty="0">
+                        <a:rPr lang="en-US" sz="1600" b="1" dirty="0">
                           <a:solidFill>
                             <a:srgbClr val="EE0000"/>
                           </a:solidFill>
@@ -20918,7 +21236,7 @@
                         </a:rPr>
                         <a:t>Post-renderers</a:t>
                       </a:r>
-                      <a:endParaRPr lang="en-US" sz="1500" dirty="0">
+                      <a:endParaRPr lang="en-US" sz="1600" dirty="0">
                         <a:latin typeface="Red Hat Mono" charset="0"/>
                         <a:ea typeface="Red Hat Mono" charset="0"/>
                         <a:cs typeface="Red Hat Mono" charset="0"/>
@@ -20973,7 +21291,7 @@
                         <a:buNone/>
                       </a:pPr>
                       <a:r>
-                        <a:rPr lang="en-US" sz="1400" b="1" dirty="0">
+                        <a:rPr lang="en-US" sz="1600" b="1" dirty="0">
                           <a:solidFill>
                             <a:srgbClr val="151515"/>
                           </a:solidFill>
@@ -20983,7 +21301,7 @@
                         </a:rPr>
                         <a:t>Plugins only</a:t>
                       </a:r>
-                      <a:endParaRPr lang="en-US" sz="1400" dirty="0">
+                      <a:endParaRPr lang="en-US" sz="1600" dirty="0">
                         <a:latin typeface="Red Hat Text" charset="0"/>
                         <a:ea typeface="Red Hat Text" charset="0"/>
                         <a:cs typeface="Red Hat Text" charset="0"/>
@@ -21038,7 +21356,7 @@
                         <a:buNone/>
                       </a:pPr>
                       <a:r>
-                        <a:rPr lang="en-US" sz="1300" dirty="0">
+                        <a:rPr lang="en-US" sz="1500" dirty="0">
                           <a:solidFill>
                             <a:srgbClr val="242424"/>
                           </a:solidFill>
@@ -21048,7 +21366,7 @@
                         </a:rPr>
                         <a:t>The flag takes a plugin name; a bare executable path is rejected</a:t>
                       </a:r>
-                      <a:endParaRPr lang="en-US" sz="1300" dirty="0">
+                      <a:endParaRPr lang="en-US" sz="1500" dirty="0">
                         <a:latin typeface="Red Hat Text" charset="0"/>
                         <a:ea typeface="Red Hat Text" charset="0"/>
                         <a:cs typeface="Red Hat Text" charset="0"/>
@@ -21095,7 +21413,7 @@
                   </a:tcPr>
                 </a:tc>
               </a:tr>
-              <a:tr h="566928">
+              <a:tr h="658368">
                 <a:tc>
                   <a:txBody>
                     <a:bodyPr/>
@@ -21105,7 +21423,7 @@
                         <a:buNone/>
                       </a:pPr>
                       <a:r>
-                        <a:rPr lang="en-US" sz="1500" b="1" dirty="0">
+                        <a:rPr lang="en-US" sz="1600" b="1" dirty="0">
                           <a:solidFill>
                             <a:srgbClr val="EE0000"/>
                           </a:solidFill>
@@ -21115,7 +21433,7 @@
                         </a:rPr>
                         <a:t>Charts</a:t>
                       </a:r>
-                      <a:endParaRPr lang="en-US" sz="1500" dirty="0">
+                      <a:endParaRPr lang="en-US" sz="1600" dirty="0">
                         <a:latin typeface="Red Hat Mono" charset="0"/>
                         <a:ea typeface="Red Hat Mono" charset="0"/>
                         <a:cs typeface="Red Hat Mono" charset="0"/>
@@ -21170,7 +21488,7 @@
                         <a:buNone/>
                       </a:pPr>
                       <a:r>
-                        <a:rPr lang="en-US" sz="1400" b="1" dirty="0">
+                        <a:rPr lang="en-US" sz="1600" b="1" dirty="0">
                           <a:solidFill>
                             <a:srgbClr val="151515"/>
                           </a:solidFill>
@@ -21180,7 +21498,7 @@
                         </a:rPr>
                         <a:t>apiVersion v2 unchanged</a:t>
                       </a:r>
-                      <a:endParaRPr lang="en-US" sz="1400" dirty="0">
+                      <a:endParaRPr lang="en-US" sz="1600" dirty="0">
                         <a:latin typeface="Red Hat Text" charset="0"/>
                         <a:ea typeface="Red Hat Text" charset="0"/>
                         <a:cs typeface="Red Hat Text" charset="0"/>
@@ -21235,7 +21553,7 @@
                         <a:buNone/>
                       </a:pPr>
                       <a:r>
-                        <a:rPr lang="en-US" sz="1300" dirty="0">
+                        <a:rPr lang="en-US" sz="1500" dirty="0">
                           <a:solidFill>
                             <a:srgbClr val="242424"/>
                           </a:solidFill>
@@ -21245,7 +21563,7 @@
                         </a:rPr>
                         <a:t>Chart API v3 is experimental; existing charts install without edits</a:t>
                       </a:r>
-                      <a:endParaRPr lang="en-US" sz="1300" dirty="0">
+                      <a:endParaRPr lang="en-US" sz="1500" dirty="0">
                         <a:latin typeface="Red Hat Text" charset="0"/>
                         <a:ea typeface="Red Hat Text" charset="0"/>
                         <a:cs typeface="Red Hat Text" charset="0"/>
@@ -21688,13 +22006,13 @@
                 <a:spcPts val="400"/>
               </a:spcBef>
               <a:spcAft>
-                <a:spcPts val="1300"/>
+                <a:spcPts val="1600"/>
               </a:spcAft>
               <a:buSzPct val="100000"/>
               <a:buChar char="●"/>
             </a:pPr>
             <a:r>
-              <a:rPr lang="en-US" sz="1700" b="1" dirty="0">
+              <a:rPr lang="en-US" sz="2000" b="1" dirty="0">
                 <a:solidFill>
                   <a:srgbClr val="151515"/>
                 </a:solidFill>
@@ -21711,7 +22029,7 @@
               <a:buNone/>
             </a:pPr>
             <a:r>
-              <a:rPr lang="en-US" sz="1700" dirty="0">
+              <a:rPr lang="en-US" sz="2000" dirty="0">
                 <a:solidFill>
                   <a:srgbClr val="242424"/>
                 </a:solidFill>
@@ -21721,7 +22039,7 @@
               </a:rPr>
               <a:t>: the package: metadata, defaults and templates. Identified by a name and a SemVer version.</a:t>
             </a:r>
-            <a:endParaRPr lang="en-US" sz="1700" dirty="0"/>
+            <a:endParaRPr lang="en-US" sz="2000" dirty="0"/>
           </a:p>
           <a:p>
             <a:pPr marL="228600" indent="-228600">
@@ -21732,13 +22050,13 @@
                 <a:spcPts val="400"/>
               </a:spcBef>
               <a:spcAft>
-                <a:spcPts val="1300"/>
+                <a:spcPts val="1600"/>
               </a:spcAft>
               <a:buSzPct val="100000"/>
               <a:buChar char="●"/>
             </a:pPr>
             <a:r>
-              <a:rPr lang="en-US" sz="1700" b="1" dirty="0">
+              <a:rPr lang="en-US" sz="2000" b="1" dirty="0">
                 <a:solidFill>
                   <a:srgbClr val="151515"/>
                 </a:solidFill>
@@ -21755,7 +22073,7 @@
               <a:buNone/>
             </a:pPr>
             <a:r>
-              <a:rPr lang="en-US" sz="1700" dirty="0">
+              <a:rPr lang="en-US" sz="2000" dirty="0">
                 <a:solidFill>
                   <a:srgbClr val="242424"/>
                 </a:solidFill>
@@ -21765,7 +22083,7 @@
               </a:rPr>
               <a:t>: one installation of a chart in one namespace. Release names are limited to 53 characters.</a:t>
             </a:r>
-            <a:endParaRPr lang="en-US" sz="1700" dirty="0"/>
+            <a:endParaRPr lang="en-US" sz="2000" dirty="0"/>
           </a:p>
           <a:p>
             <a:pPr marL="228600" indent="-228600">
@@ -21776,13 +22094,13 @@
                 <a:spcPts val="400"/>
               </a:spcBef>
               <a:spcAft>
-                <a:spcPts val="1300"/>
+                <a:spcPts val="1600"/>
               </a:spcAft>
               <a:buSzPct val="100000"/>
               <a:buChar char="●"/>
             </a:pPr>
             <a:r>
-              <a:rPr lang="en-US" sz="1700" b="1" dirty="0">
+              <a:rPr lang="en-US" sz="2000" b="1" dirty="0">
                 <a:solidFill>
                   <a:srgbClr val="151515"/>
                 </a:solidFill>
@@ -21799,7 +22117,7 @@
               <a:buNone/>
             </a:pPr>
             <a:r>
-              <a:rPr lang="en-US" sz="1700" dirty="0">
+              <a:rPr lang="en-US" sz="2000" dirty="0">
                 <a:solidFill>
                   <a:srgbClr val="242424"/>
                 </a:solidFill>
@@ -21809,7 +22127,7 @@
               </a:rPr>
               <a:t>: where charts are stored. Classic repositories serve an index.yaml over HTTP; OCI registries store a chart as an artifact.</a:t>
             </a:r>
-            <a:endParaRPr lang="en-US" sz="1700" dirty="0"/>
+            <a:endParaRPr lang="en-US" sz="2000" dirty="0"/>
           </a:p>
           <a:p>
             <a:pPr marL="228600" indent="-228600">
@@ -21820,13 +22138,13 @@
                 <a:spcPts val="400"/>
               </a:spcBef>
               <a:spcAft>
-                <a:spcPts val="1300"/>
+                <a:spcPts val="1600"/>
               </a:spcAft>
               <a:buSzPct val="100000"/>
               <a:buChar char="●"/>
             </a:pPr>
             <a:r>
-              <a:rPr lang="en-US" sz="1700" b="1" dirty="0">
+              <a:rPr lang="en-US" sz="2000" b="1" dirty="0">
                 <a:solidFill>
                   <a:srgbClr val="151515"/>
                 </a:solidFill>
@@ -21843,7 +22161,7 @@
               <a:buNone/>
             </a:pPr>
             <a:r>
-              <a:rPr lang="en-US" sz="1700" dirty="0">
+              <a:rPr lang="en-US" sz="2000" dirty="0">
                 <a:solidFill>
                   <a:srgbClr val="242424"/>
                 </a:solidFill>
@@ -21853,7 +22171,7 @@
               </a:rPr>
               <a:t>: the inputs that customize a chart. Defaults ship in values.yaml; you override them per release.</a:t>
             </a:r>
-            <a:endParaRPr lang="en-US" sz="1700" dirty="0"/>
+            <a:endParaRPr lang="en-US" sz="2000" dirty="0"/>
           </a:p>
         </p:txBody>
       </p:sp>

--- a/presentation/helm-101/Helm-101-r1.0.pptx
+++ b/presentation/helm-101/Helm-101-r1.0.pptx
@@ -4621,8 +4621,8 @@
         </p:nvSpPr>
         <p:spPr>
           <a:xfrm>
-            <a:off x="566928" y="1691640"/>
-            <a:ext cx="6949440" cy="2704795"/>
+            <a:off x="566928" y="1417320"/>
+            <a:ext cx="6949440" cy="2406396"/>
           </a:xfrm>
           <a:prstGeom prst="rect">
             <a:avLst/>
@@ -4646,8 +4646,8 @@
         </p:nvSpPr>
         <p:spPr>
           <a:xfrm>
-            <a:off x="749808" y="1783080"/>
-            <a:ext cx="6583680" cy="2521915"/>
+            <a:off x="749808" y="1508760"/>
+            <a:ext cx="6583680" cy="2223516"/>
           </a:xfrm>
           <a:prstGeom prst="rect">
             <a:avLst/>
@@ -4666,7 +4666,7 @@
               <a:buNone/>
             </a:pPr>
             <a:r>
-              <a:rPr lang="en-US" sz="1400" dirty="0">
+              <a:rPr lang="en-US" sz="1500" dirty="0">
                 <a:solidFill>
                   <a:srgbClr val="E6E6E6"/>
                 </a:solidFill>
@@ -4677,14 +4677,8 @@
               <a:t>shipping-service/
 </a:t>
             </a:r>
-            <a:pPr algn="l" indent="0" marL="0">
-              <a:lnSpc>
-                <a:spcPct val="110000"/>
-              </a:lnSpc>
-              <a:buNone/>
-            </a:pPr>
-            <a:r>
-              <a:rPr lang="en-US" sz="1400" dirty="0">
+            <a:r>
+              <a:rPr lang="en-US" sz="1500" dirty="0">
                 <a:solidFill>
                   <a:srgbClr val="E6E6E6"/>
                 </a:solidFill>
@@ -4695,14 +4689,8 @@
               <a:t>  Chart.yaml     # required: name, version, appVersion
 </a:t>
             </a:r>
-            <a:pPr algn="l" indent="0" marL="0">
-              <a:lnSpc>
-                <a:spcPct val="110000"/>
-              </a:lnSpc>
-              <a:buNone/>
-            </a:pPr>
-            <a:r>
-              <a:rPr lang="en-US" sz="1400" dirty="0">
+            <a:r>
+              <a:rPr lang="en-US" sz="1500" dirty="0">
                 <a:solidFill>
                   <a:srgbClr val="E6E6E6"/>
                 </a:solidFill>
@@ -4713,14 +4701,8 @@
               <a:t>  values.yaml    # defaults read through .Values
 </a:t>
             </a:r>
-            <a:pPr algn="l" indent="0" marL="0">
-              <a:lnSpc>
-                <a:spcPct val="110000"/>
-              </a:lnSpc>
-              <a:buNone/>
-            </a:pPr>
-            <a:r>
-              <a:rPr lang="en-US" sz="1400" dirty="0">
+            <a:r>
+              <a:rPr lang="en-US" sz="1500" dirty="0">
                 <a:solidFill>
                   <a:srgbClr val="E6E6E6"/>
                 </a:solidFill>
@@ -4731,14 +4713,8 @@
               <a:t>  .helmignore    # files left out of the package
 </a:t>
             </a:r>
-            <a:pPr algn="l" indent="0" marL="0">
-              <a:lnSpc>
-                <a:spcPct val="110000"/>
-              </a:lnSpc>
-              <a:buNone/>
-            </a:pPr>
-            <a:r>
-              <a:rPr lang="en-US" sz="1400" dirty="0">
+            <a:r>
+              <a:rPr lang="en-US" sz="1500" dirty="0">
                 <a:solidFill>
                   <a:srgbClr val="E6E6E6"/>
                 </a:solidFill>
@@ -4749,14 +4725,8 @@
               <a:t>  templates/
 </a:t>
             </a:r>
-            <a:pPr algn="l" indent="0" marL="0">
-              <a:lnSpc>
-                <a:spcPct val="110000"/>
-              </a:lnSpc>
-              <a:buNone/>
-            </a:pPr>
-            <a:r>
-              <a:rPr lang="en-US" sz="1400" dirty="0">
+            <a:r>
+              <a:rPr lang="en-US" sz="1500" dirty="0">
                 <a:solidFill>
                   <a:srgbClr val="E6E6E6"/>
                 </a:solidFill>
@@ -4767,14 +4737,8 @@
               <a:t>    configmap.yaml
 </a:t>
             </a:r>
-            <a:pPr algn="l" indent="0" marL="0">
-              <a:lnSpc>
-                <a:spcPct val="110000"/>
-              </a:lnSpc>
-              <a:buNone/>
-            </a:pPr>
-            <a:r>
-              <a:rPr lang="en-US" sz="1400" dirty="0">
+            <a:r>
+              <a:rPr lang="en-US" sz="1500" dirty="0">
                 <a:solidFill>
                   <a:srgbClr val="E6E6E6"/>
                 </a:solidFill>
@@ -4785,14 +4749,8 @@
               <a:t>    deployment.yaml
 </a:t>
             </a:r>
-            <a:pPr algn="l" indent="0" marL="0">
-              <a:lnSpc>
-                <a:spcPct val="110000"/>
-              </a:lnSpc>
-              <a:buNone/>
-            </a:pPr>
-            <a:r>
-              <a:rPr lang="en-US" sz="1400" dirty="0">
+            <a:r>
+              <a:rPr lang="en-US" sz="1500" dirty="0">
                 <a:solidFill>
                   <a:srgbClr val="E6E6E6"/>
                 </a:solidFill>
@@ -4803,7 +4761,7 @@
               <a:t>    service.yaml
 </a:t>
             </a:r>
-            <a:endParaRPr lang="en-US" sz="1400" dirty="0"/>
+            <a:endParaRPr lang="en-US" sz="1500" dirty="0"/>
           </a:p>
         </p:txBody>
       </p:sp>
@@ -4815,7 +4773,7 @@
         </p:nvSpPr>
         <p:spPr>
           <a:xfrm>
-            <a:off x="566928" y="4469587"/>
+            <a:off x="566928" y="3915156"/>
             <a:ext cx="6949440" cy="310896"/>
           </a:xfrm>
           <a:prstGeom prst="rect">
@@ -4854,8 +4812,8 @@
         </p:nvSpPr>
         <p:spPr>
           <a:xfrm>
-            <a:off x="7836408" y="1783080"/>
-            <a:ext cx="3788359" cy="4114800"/>
+            <a:off x="7836408" y="1600200"/>
+            <a:ext cx="3788359" cy="4297680"/>
           </a:xfrm>
           <a:prstGeom prst="rect">
             <a:avLst/>
@@ -4867,7 +4825,7 @@
           <a:bodyPr wrap="square" lIns="0" tIns="0" rIns="0" bIns="0" rtlCol="0" anchor="t"/>
           <a:lstStyle/>
           <a:p>
-            <a:pPr marL="228600" indent="-228600">
+            <a:pPr marL="304800" indent="-304800">
               <a:lnSpc>
                 <a:spcPct val="112000"/>
               </a:lnSpc>
@@ -4891,12 +4849,6 @@
               </a:rPr>
               <a:t>Chart.yaml</a:t>
             </a:r>
-            <a:pPr indent="0" marL="0">
-              <a:lnSpc>
-                <a:spcPct val="112000"/>
-              </a:lnSpc>
-              <a:buNone/>
-            </a:pPr>
             <a:r>
               <a:rPr lang="en-US" sz="1500" dirty="0">
                 <a:solidFill>
@@ -4911,7 +4863,7 @@
             <a:endParaRPr lang="en-US" sz="1500" dirty="0"/>
           </a:p>
           <a:p>
-            <a:pPr marL="228600" indent="-228600">
+            <a:pPr marL="304800" indent="-304800">
               <a:lnSpc>
                 <a:spcPct val="112000"/>
               </a:lnSpc>
@@ -4935,12 +4887,6 @@
               </a:rPr>
               <a:t>values.yaml</a:t>
             </a:r>
-            <a:pPr indent="0" marL="0">
-              <a:lnSpc>
-                <a:spcPct val="112000"/>
-              </a:lnSpc>
-              <a:buNone/>
-            </a:pPr>
             <a:r>
               <a:rPr lang="en-US" sz="1500" dirty="0">
                 <a:solidFill>
@@ -4955,7 +4901,7 @@
             <a:endParaRPr lang="en-US" sz="1500" dirty="0"/>
           </a:p>
           <a:p>
-            <a:pPr marL="228600" indent="-228600">
+            <a:pPr marL="304800" indent="-304800">
               <a:lnSpc>
                 <a:spcPct val="112000"/>
               </a:lnSpc>
@@ -4979,12 +4925,6 @@
               </a:rPr>
               <a:t>templates/</a:t>
             </a:r>
-            <a:pPr indent="0" marL="0">
-              <a:lnSpc>
-                <a:spcPct val="112000"/>
-              </a:lnSpc>
-              <a:buNone/>
-            </a:pPr>
             <a:r>
               <a:rPr lang="en-US" sz="1500" dirty="0">
                 <a:solidFill>
@@ -4999,7 +4939,7 @@
             <a:endParaRPr lang="en-US" sz="1500" dirty="0"/>
           </a:p>
           <a:p>
-            <a:pPr marL="228600" indent="-228600">
+            <a:pPr marL="304800" indent="-304800">
               <a:lnSpc>
                 <a:spcPct val="112000"/>
               </a:lnSpc>
@@ -5023,12 +4963,6 @@
               </a:rPr>
               <a:t>.helmignore</a:t>
             </a:r>
-            <a:pPr indent="0" marL="0">
-              <a:lnSpc>
-                <a:spcPct val="112000"/>
-              </a:lnSpc>
-              <a:buNone/>
-            </a:pPr>
             <a:r>
               <a:rPr lang="en-US" sz="1500" dirty="0">
                 <a:solidFill>
@@ -5257,8 +5191,8 @@
         </p:nvSpPr>
         <p:spPr>
           <a:xfrm>
-            <a:off x="566928" y="1691640"/>
-            <a:ext cx="6400800" cy="2468880"/>
+            <a:off x="566928" y="1417320"/>
+            <a:ext cx="6400800" cy="2377440"/>
           </a:xfrm>
           <a:prstGeom prst="rect">
             <a:avLst/>
@@ -5282,8 +5216,8 @@
         </p:nvSpPr>
         <p:spPr>
           <a:xfrm>
-            <a:off x="749808" y="1783080"/>
-            <a:ext cx="6035040" cy="2286000"/>
+            <a:off x="749808" y="1508760"/>
+            <a:ext cx="6035040" cy="2194560"/>
           </a:xfrm>
           <a:prstGeom prst="rect">
             <a:avLst/>
@@ -5313,12 +5247,6 @@
               <a:t>apiVersion: v2
 </a:t>
             </a:r>
-            <a:pPr algn="l" indent="0" marL="0">
-              <a:lnSpc>
-                <a:spcPct val="110000"/>
-              </a:lnSpc>
-              <a:buNone/>
-            </a:pPr>
             <a:r>
               <a:rPr lang="en-US" sz="2000" dirty="0">
                 <a:solidFill>
@@ -5331,12 +5259,6 @@
               <a:t>name: shipping-service
 </a:t>
             </a:r>
-            <a:pPr algn="l" indent="0" marL="0">
-              <a:lnSpc>
-                <a:spcPct val="110000"/>
-              </a:lnSpc>
-              <a:buNone/>
-            </a:pPr>
             <a:r>
               <a:rPr lang="en-US" sz="2000" dirty="0">
                 <a:solidFill>
@@ -5349,12 +5271,6 @@
               <a:t>type: application
 </a:t>
             </a:r>
-            <a:pPr algn="l" indent="0" marL="0">
-              <a:lnSpc>
-                <a:spcPct val="110000"/>
-              </a:lnSpc>
-              <a:buNone/>
-            </a:pPr>
             <a:r>
               <a:rPr lang="en-US" sz="2000" dirty="0">
                 <a:solidFill>
@@ -5367,12 +5283,6 @@
               <a:t>version: 0.4.0
 </a:t>
             </a:r>
-            <a:pPr algn="l" indent="0" marL="0">
-              <a:lnSpc>
-                <a:spcPct val="110000"/>
-              </a:lnSpc>
-              <a:buNone/>
-            </a:pPr>
             <a:r>
               <a:rPr lang="en-US" sz="2000" dirty="0">
                 <a:solidFill>
@@ -5397,7 +5307,7 @@
         </p:nvSpPr>
         <p:spPr>
           <a:xfrm>
-            <a:off x="566928" y="4233672"/>
+            <a:off x="566928" y="3886200"/>
             <a:ext cx="6400800" cy="310896"/>
           </a:xfrm>
           <a:prstGeom prst="rect">
@@ -5436,8 +5346,8 @@
         </p:nvSpPr>
         <p:spPr>
           <a:xfrm>
-            <a:off x="7287768" y="1783080"/>
-            <a:ext cx="4336999" cy="4114800"/>
+            <a:off x="7287768" y="1600200"/>
+            <a:ext cx="4336999" cy="4297680"/>
           </a:xfrm>
           <a:prstGeom prst="rect">
             <a:avLst/>
@@ -5449,7 +5359,7 @@
           <a:bodyPr wrap="square" lIns="0" tIns="0" rIns="0" bIns="0" rtlCol="0" anchor="t"/>
           <a:lstStyle/>
           <a:p>
-            <a:pPr marL="228600" indent="-228600">
+            <a:pPr marL="304800" indent="-304800">
               <a:lnSpc>
                 <a:spcPct val="112000"/>
               </a:lnSpc>
@@ -5473,12 +5383,6 @@
               </a:rPr>
               <a:t>apiVersion: v2</a:t>
             </a:r>
-            <a:pPr indent="0" marL="0">
-              <a:lnSpc>
-                <a:spcPct val="112000"/>
-              </a:lnSpc>
-              <a:buNone/>
-            </a:pPr>
             <a:r>
               <a:rPr lang="en-US" sz="1500" dirty="0">
                 <a:solidFill>
@@ -5493,7 +5397,7 @@
             <a:endParaRPr lang="en-US" sz="1500" dirty="0"/>
           </a:p>
           <a:p>
-            <a:pPr marL="228600" indent="-228600">
+            <a:pPr marL="304800" indent="-304800">
               <a:lnSpc>
                 <a:spcPct val="112000"/>
               </a:lnSpc>
@@ -5517,12 +5421,6 @@
               </a:rPr>
               <a:t>type</a:t>
             </a:r>
-            <a:pPr indent="0" marL="0">
-              <a:lnSpc>
-                <a:spcPct val="112000"/>
-              </a:lnSpc>
-              <a:buNone/>
-            </a:pPr>
             <a:r>
               <a:rPr lang="en-US" sz="1500" dirty="0">
                 <a:solidFill>
@@ -5537,7 +5435,7 @@
             <a:endParaRPr lang="en-US" sz="1500" dirty="0"/>
           </a:p>
           <a:p>
-            <a:pPr marL="228600" indent="-228600">
+            <a:pPr marL="304800" indent="-304800">
               <a:lnSpc>
                 <a:spcPct val="112000"/>
               </a:lnSpc>
@@ -5561,12 +5459,6 @@
               </a:rPr>
               <a:t>version</a:t>
             </a:r>
-            <a:pPr indent="0" marL="0">
-              <a:lnSpc>
-                <a:spcPct val="112000"/>
-              </a:lnSpc>
-              <a:buNone/>
-            </a:pPr>
             <a:r>
               <a:rPr lang="en-US" sz="1500" dirty="0">
                 <a:solidFill>
@@ -5581,7 +5473,7 @@
             <a:endParaRPr lang="en-US" sz="1500" dirty="0"/>
           </a:p>
           <a:p>
-            <a:pPr marL="228600" indent="-228600">
+            <a:pPr marL="304800" indent="-304800">
               <a:lnSpc>
                 <a:spcPct val="112000"/>
               </a:lnSpc>
@@ -5605,12 +5497,6 @@
               </a:rPr>
               <a:t>appVersion</a:t>
             </a:r>
-            <a:pPr indent="0" marL="0">
-              <a:lnSpc>
-                <a:spcPct val="112000"/>
-              </a:lnSpc>
-              <a:buNone/>
-            </a:pPr>
             <a:r>
               <a:rPr lang="en-US" sz="1500" dirty="0">
                 <a:solidFill>
@@ -5807,8 +5693,8 @@
         </p:blipFill>
         <p:spPr>
           <a:xfrm>
-            <a:off x="566928" y="1691640"/>
-            <a:ext cx="11055096" cy="4160520"/>
+            <a:off x="566928" y="1417320"/>
+            <a:ext cx="11055096" cy="4480560"/>
           </a:xfrm>
           <a:prstGeom prst="rect">
             <a:avLst/>
@@ -6067,8 +5953,8 @@
         </p:nvSpPr>
         <p:spPr>
           <a:xfrm>
-            <a:off x="566928" y="1691640"/>
-            <a:ext cx="11055096" cy="4251960"/>
+            <a:off x="566928" y="1417320"/>
+            <a:ext cx="11055096" cy="3403854"/>
           </a:xfrm>
           <a:prstGeom prst="rect">
             <a:avLst/>
@@ -6092,8 +5978,8 @@
         </p:nvSpPr>
         <p:spPr>
           <a:xfrm>
-            <a:off x="749808" y="1783080"/>
-            <a:ext cx="10689336" cy="4069080"/>
+            <a:off x="749808" y="1508760"/>
+            <a:ext cx="10689336" cy="3220974"/>
           </a:xfrm>
           <a:prstGeom prst="rect">
             <a:avLst/>
@@ -6112,7 +5998,7 @@
               <a:buNone/>
             </a:pPr>
             <a:r>
-              <a:rPr lang="en-US" sz="1800" dirty="0">
+              <a:rPr lang="en-US" sz="2000" dirty="0">
                 <a:solidFill>
                   <a:srgbClr val="E6E6E6"/>
                 </a:solidFill>
@@ -6123,14 +6009,8 @@
               <a:t>[host]$ helm history shipping -n hfd-04
 </a:t>
             </a:r>
-            <a:pPr algn="l" indent="0" marL="0">
-              <a:lnSpc>
-                <a:spcPct val="110000"/>
-              </a:lnSpc>
-              <a:buNone/>
-            </a:pPr>
-            <a:r>
-              <a:rPr lang="en-US" sz="1800" dirty="0">
+            <a:r>
+              <a:rPr lang="en-US" sz="2000" dirty="0">
                 <a:solidFill>
                   <a:srgbClr val="E6E6E6"/>
                 </a:solidFill>
@@ -6141,14 +6021,8 @@
               <a:t>[host]$ helm get values shipping -n hfd-04 --all
 </a:t>
             </a:r>
-            <a:pPr algn="l" indent="0" marL="0">
-              <a:lnSpc>
-                <a:spcPct val="110000"/>
-              </a:lnSpc>
-              <a:buNone/>
-            </a:pPr>
-            <a:r>
-              <a:rPr lang="en-US" sz="1800" dirty="0">
+            <a:r>
+              <a:rPr lang="en-US" sz="2000" dirty="0">
                 <a:solidFill>
                   <a:srgbClr val="E6E6E6"/>
                 </a:solidFill>
@@ -6159,14 +6033,8 @@
               <a:t>[host]$ helm get manifest shipping -n hfd-04
 </a:t>
             </a:r>
-            <a:pPr algn="l" indent="0" marL="0">
-              <a:lnSpc>
-                <a:spcPct val="110000"/>
-              </a:lnSpc>
-              <a:buNone/>
-            </a:pPr>
-            <a:r>
-              <a:rPr lang="en-US" sz="1800" dirty="0">
+            <a:r>
+              <a:rPr lang="en-US" sz="2000" dirty="0">
                 <a:solidFill>
                   <a:srgbClr val="E6E6E6"/>
                 </a:solidFill>
@@ -6177,14 +6045,8 @@
               <a:t>[host]$ kubectl -n hfd-04 get secrets -l owner=helm
 </a:t>
             </a:r>
-            <a:pPr algn="l" indent="0" marL="0">
-              <a:lnSpc>
-                <a:spcPct val="110000"/>
-              </a:lnSpc>
-              <a:buNone/>
-            </a:pPr>
-            <a:r>
-              <a:rPr lang="en-US" sz="1800" dirty="0">
+            <a:r>
+              <a:rPr lang="en-US" sz="2000" dirty="0">
                 <a:solidFill>
                   <a:srgbClr val="8FB98F"/>
                 </a:solidFill>
@@ -6195,14 +6057,8 @@
               <a:t># one Secret per revision, type helm.sh/release.v1
 </a:t>
             </a:r>
-            <a:pPr algn="l" indent="0" marL="0">
-              <a:lnSpc>
-                <a:spcPct val="110000"/>
-              </a:lnSpc>
-              <a:buNone/>
-            </a:pPr>
-            <a:r>
-              <a:rPr lang="en-US" sz="1800" dirty="0">
+            <a:r>
+              <a:rPr lang="en-US" sz="2000" dirty="0">
                 <a:solidFill>
                   <a:srgbClr val="8FB98F"/>
                 </a:solidFill>
@@ -6213,14 +6069,8 @@
               <a:t># sh.helm.release.v1.shipping.v1, .v2, .v3
 </a:t>
             </a:r>
-            <a:pPr algn="l" indent="0" marL="0">
-              <a:lnSpc>
-                <a:spcPct val="110000"/>
-              </a:lnSpc>
-              <a:buNone/>
-            </a:pPr>
-            <a:r>
-              <a:rPr lang="en-US" sz="1800" dirty="0">
+            <a:r>
+              <a:rPr lang="en-US" sz="2000" dirty="0">
                 <a:solidFill>
                   <a:srgbClr val="E6E6E6"/>
                 </a:solidFill>
@@ -6231,14 +6081,8 @@
               <a:t>[host]$ helm uninstall shipping -n hfd-04 --keep-history
 </a:t>
             </a:r>
-            <a:pPr algn="l" indent="0" marL="0">
-              <a:lnSpc>
-                <a:spcPct val="110000"/>
-              </a:lnSpc>
-              <a:buNone/>
-            </a:pPr>
-            <a:r>
-              <a:rPr lang="en-US" sz="1800" dirty="0">
+            <a:r>
+              <a:rPr lang="en-US" sz="2000" dirty="0">
                 <a:solidFill>
                   <a:srgbClr val="E6E6E6"/>
                 </a:solidFill>
@@ -6249,14 +6093,8 @@
               <a:t>[host]$ helm list -n hfd-04 --uninstalled
 </a:t>
             </a:r>
-            <a:pPr algn="l" indent="0" marL="0">
-              <a:lnSpc>
-                <a:spcPct val="110000"/>
-              </a:lnSpc>
-              <a:buNone/>
-            </a:pPr>
-            <a:r>
-              <a:rPr lang="en-US" sz="1800" dirty="0">
+            <a:r>
+              <a:rPr lang="en-US" sz="2000" dirty="0">
                 <a:solidFill>
                   <a:srgbClr val="8FB98F"/>
                 </a:solidFill>
@@ -6267,7 +6105,7 @@
               <a:t># --history-max (default 10) prunes the oldest revisions on upgrade
 </a:t>
             </a:r>
-            <a:endParaRPr lang="en-US" sz="1800" dirty="0"/>
+            <a:endParaRPr lang="en-US" sz="2000" dirty="0"/>
           </a:p>
         </p:txBody>
       </p:sp>
@@ -6279,7 +6117,7 @@
         </p:nvSpPr>
         <p:spPr>
           <a:xfrm>
-            <a:off x="566928" y="5943600"/>
+            <a:off x="566928" y="4912614"/>
             <a:ext cx="11055096" cy="310896"/>
           </a:xfrm>
           <a:prstGeom prst="rect">
@@ -6688,8 +6526,8 @@
         </p:blipFill>
         <p:spPr>
           <a:xfrm>
-            <a:off x="566928" y="1691640"/>
-            <a:ext cx="11055096" cy="4160520"/>
+            <a:off x="566928" y="1417320"/>
+            <a:ext cx="11055096" cy="4480560"/>
           </a:xfrm>
           <a:prstGeom prst="rect">
             <a:avLst/>
@@ -6729,7 +6567,51 @@
                 <a:ea typeface="Red Hat Text" pitchFamily="34" charset="-122"/>
                 <a:cs typeface="Red Hat Text" pitchFamily="34" charset="-120"/>
               </a:rPr>
-              <a:t>Chart defaults, then each -f file in order, then --set flags; the schema validates the merged result.</a:t>
+              <a:t>Chart defaults, then each </a:t>
+            </a:r>
+            <a:r>
+              <a:rPr lang="en-US" sz="1200" i="1" dirty="0">
+                <a:solidFill>
+                  <a:srgbClr val="151515"/>
+                </a:solidFill>
+                <a:latin typeface="Red Hat Mono" pitchFamily="34" charset="0"/>
+                <a:ea typeface="Red Hat Mono" pitchFamily="34" charset="-122"/>
+                <a:cs typeface="Red Hat Mono" pitchFamily="34" charset="-120"/>
+              </a:rPr>
+              <a:t>-f</a:t>
+            </a:r>
+            <a:r>
+              <a:rPr lang="en-US" sz="1300" i="1" dirty="0">
+                <a:solidFill>
+                  <a:srgbClr val="5A5A5A"/>
+                </a:solidFill>
+                <a:latin typeface="Red Hat Text" pitchFamily="34" charset="0"/>
+                <a:ea typeface="Red Hat Text" pitchFamily="34" charset="-122"/>
+                <a:cs typeface="Red Hat Text" pitchFamily="34" charset="-120"/>
+              </a:rPr>
+              <a:t> file in order, then </a:t>
+            </a:r>
+            <a:r>
+              <a:rPr lang="en-US" sz="1200" i="1" dirty="0">
+                <a:solidFill>
+                  <a:srgbClr val="151515"/>
+                </a:solidFill>
+                <a:latin typeface="Red Hat Mono" pitchFamily="34" charset="0"/>
+                <a:ea typeface="Red Hat Mono" pitchFamily="34" charset="-122"/>
+                <a:cs typeface="Red Hat Mono" pitchFamily="34" charset="-120"/>
+              </a:rPr>
+              <a:t>--set</a:t>
+            </a:r>
+            <a:r>
+              <a:rPr lang="en-US" sz="1300" i="1" dirty="0">
+                <a:solidFill>
+                  <a:srgbClr val="5A5A5A"/>
+                </a:solidFill>
+                <a:latin typeface="Red Hat Text" pitchFamily="34" charset="0"/>
+                <a:ea typeface="Red Hat Text" pitchFamily="34" charset="-122"/>
+                <a:cs typeface="Red Hat Text" pitchFamily="34" charset="-120"/>
+              </a:rPr>
+              <a:t> flags; the schema validates the merged result.</a:t>
             </a:r>
             <a:endParaRPr lang="en-US" sz="1300" dirty="0"/>
           </a:p>
@@ -6948,8 +6830,8 @@
         </p:nvSpPr>
         <p:spPr>
           <a:xfrm>
-            <a:off x="566928" y="1691640"/>
-            <a:ext cx="11055096" cy="4251960"/>
+            <a:off x="566928" y="1417320"/>
+            <a:ext cx="11055096" cy="4027265"/>
           </a:xfrm>
           <a:prstGeom prst="rect">
             <a:avLst/>
@@ -6973,8 +6855,8 @@
         </p:nvSpPr>
         <p:spPr>
           <a:xfrm>
-            <a:off x="749808" y="1783080"/>
-            <a:ext cx="10689336" cy="4069080"/>
+            <a:off x="749808" y="1508760"/>
+            <a:ext cx="10689336" cy="3844385"/>
           </a:xfrm>
           <a:prstGeom prst="rect">
             <a:avLst/>
@@ -6993,7 +6875,7 @@
               <a:buNone/>
             </a:pPr>
             <a:r>
-              <a:rPr lang="en-US" sz="1300" dirty="0">
+              <a:rPr lang="en-US" sz="1450" dirty="0">
                 <a:solidFill>
                   <a:srgbClr val="E6E6E6"/>
                 </a:solidFill>
@@ -7004,14 +6886,8 @@
               <a:t>[host]$ cd examples/05-values
 </a:t>
             </a:r>
-            <a:pPr algn="l" indent="0" marL="0">
-              <a:lnSpc>
-                <a:spcPct val="110000"/>
-              </a:lnSpc>
-              <a:buNone/>
-            </a:pPr>
-            <a:r>
-              <a:rPr lang="en-US" sz="1300" dirty="0">
+            <a:r>
+              <a:rPr lang="en-US" sz="1450" dirty="0">
                 <a:solidFill>
                   <a:srgbClr val="E6E6E6"/>
                 </a:solidFill>
@@ -7022,14 +6898,8 @@
               <a:t>[host]$ helm template shipping ./shipping-service \
 </a:t>
             </a:r>
-            <a:pPr algn="l" indent="0" marL="0">
-              <a:lnSpc>
-                <a:spcPct val="110000"/>
-              </a:lnSpc>
-              <a:buNone/>
-            </a:pPr>
-            <a:r>
-              <a:rPr lang="en-US" sz="1300" dirty="0">
+            <a:r>
+              <a:rPr lang="en-US" sz="1450" dirty="0">
                 <a:solidFill>
                   <a:srgbClr val="E6E6E6"/>
                 </a:solidFill>
@@ -7040,14 +6910,8 @@
               <a:t>          -f values-prod.yaml --set replicaCount=5
 </a:t>
             </a:r>
-            <a:pPr algn="l" indent="0" marL="0">
-              <a:lnSpc>
-                <a:spcPct val="110000"/>
-              </a:lnSpc>
-              <a:buNone/>
-            </a:pPr>
-            <a:r>
-              <a:rPr lang="en-US" sz="1300" dirty="0">
+            <a:r>
+              <a:rPr lang="en-US" sz="1450" dirty="0">
                 <a:solidFill>
                   <a:srgbClr val="8FB98F"/>
                 </a:solidFill>
@@ -7058,14 +6922,8 @@
               <a:t># --set guesses types: true, integers and null convert; commas separate keys
 </a:t>
             </a:r>
-            <a:pPr algn="l" indent="0" marL="0">
-              <a:lnSpc>
-                <a:spcPct val="110000"/>
-              </a:lnSpc>
-              <a:buNone/>
-            </a:pPr>
-            <a:r>
-              <a:rPr lang="en-US" sz="1300" dirty="0">
+            <a:r>
+              <a:rPr lang="en-US" sz="1450" dirty="0">
                 <a:solidFill>
                   <a:srgbClr val="E6E6E6"/>
                 </a:solidFill>
@@ -7076,14 +6934,8 @@
               <a:t>[host]$ helm template shipping ./shipping-service --set-string image.tag=12345
 </a:t>
             </a:r>
-            <a:pPr algn="l" indent="0" marL="0">
-              <a:lnSpc>
-                <a:spcPct val="110000"/>
-              </a:lnSpc>
-              <a:buNone/>
-            </a:pPr>
-            <a:r>
-              <a:rPr lang="en-US" sz="1300" dirty="0">
+            <a:r>
+              <a:rPr lang="en-US" sz="1450" dirty="0">
                 <a:solidFill>
                   <a:srgbClr val="8FB98F"/>
                 </a:solidFill>
@@ -7094,14 +6946,8 @@
               <a:t># --set-string forces a string; --set image.tag=12345 fails the schema (number, want string)
 </a:t>
             </a:r>
-            <a:pPr algn="l" indent="0" marL="0">
-              <a:lnSpc>
-                <a:spcPct val="110000"/>
-              </a:lnSpc>
-              <a:buNone/>
-            </a:pPr>
-            <a:r>
-              <a:rPr lang="en-US" sz="1300" dirty="0">
+            <a:r>
+              <a:rPr lang="en-US" sz="1450" dirty="0">
                 <a:solidFill>
                   <a:srgbClr val="E6E6E6"/>
                 </a:solidFill>
@@ -7112,14 +6958,8 @@
               <a:t>[host]$ helm template shipping ./shipping-service \
 </a:t>
             </a:r>
-            <a:pPr algn="l" indent="0" marL="0">
-              <a:lnSpc>
-                <a:spcPct val="110000"/>
-              </a:lnSpc>
-              <a:buNone/>
-            </a:pPr>
-            <a:r>
-              <a:rPr lang="en-US" sz="1300" dirty="0">
+            <a:r>
+              <a:rPr lang="en-US" sz="1450" dirty="0">
                 <a:solidFill>
                   <a:srgbClr val="E6E6E6"/>
                 </a:solidFill>
@@ -7130,14 +6970,8 @@
               <a:t>          --set-json 'resources={"limits":{"memory":"1Gi"}}'
 </a:t>
             </a:r>
-            <a:pPr algn="l" indent="0" marL="0">
-              <a:lnSpc>
-                <a:spcPct val="110000"/>
-              </a:lnSpc>
-              <a:buNone/>
-            </a:pPr>
-            <a:r>
-              <a:rPr lang="en-US" sz="1300" dirty="0">
+            <a:r>
+              <a:rPr lang="en-US" sz="1450" dirty="0">
                 <a:solidFill>
                   <a:srgbClr val="8FB98F"/>
                 </a:solidFill>
@@ -7148,14 +6982,8 @@
               <a:t># --set-json takes a JSON value for a map or list
 </a:t>
             </a:r>
-            <a:pPr algn="l" indent="0" marL="0">
-              <a:lnSpc>
-                <a:spcPct val="110000"/>
-              </a:lnSpc>
-              <a:buNone/>
-            </a:pPr>
-            <a:r>
-              <a:rPr lang="en-US" sz="1300" dirty="0">
+            <a:r>
+              <a:rPr lang="en-US" sz="1450" dirty="0">
                 <a:solidFill>
                   <a:srgbClr val="E6E6E6"/>
                 </a:solidFill>
@@ -7166,14 +6994,8 @@
               <a:t>[host]$ helm template shipping ./shipping-service \
 </a:t>
             </a:r>
-            <a:pPr algn="l" indent="0" marL="0">
-              <a:lnSpc>
-                <a:spcPct val="110000"/>
-              </a:lnSpc>
-              <a:buNone/>
-            </a:pPr>
-            <a:r>
-              <a:rPr lang="en-US" sz="1300" dirty="0">
+            <a:r>
+              <a:rPr lang="en-US" sz="1450" dirty="0">
                 <a:solidFill>
                   <a:srgbClr val="E6E6E6"/>
                 </a:solidFill>
@@ -7184,14 +7006,8 @@
               <a:t>          --set-file config.defaultCarrier=carrier.txt
 </a:t>
             </a:r>
-            <a:pPr algn="l" indent="0" marL="0">
-              <a:lnSpc>
-                <a:spcPct val="110000"/>
-              </a:lnSpc>
-              <a:buNone/>
-            </a:pPr>
-            <a:r>
-              <a:rPr lang="en-US" sz="1300" dirty="0">
+            <a:r>
+              <a:rPr lang="en-US" sz="1450" dirty="0">
                 <a:solidFill>
                   <a:srgbClr val="8FB98F"/>
                 </a:solidFill>
@@ -7202,14 +7018,8 @@
               <a:t># --set-file uses the file content, trailing newline included
 </a:t>
             </a:r>
-            <a:pPr algn="l" indent="0" marL="0">
-              <a:lnSpc>
-                <a:spcPct val="110000"/>
-              </a:lnSpc>
-              <a:buNone/>
-            </a:pPr>
-            <a:r>
-              <a:rPr lang="en-US" sz="1300" dirty="0">
+            <a:r>
+              <a:rPr lang="en-US" sz="1450" dirty="0">
                 <a:solidFill>
                   <a:srgbClr val="E6E6E6"/>
                 </a:solidFill>
@@ -7220,14 +7030,8 @@
               <a:t>[host]$ helm template shipping ./shipping-service \
 </a:t>
             </a:r>
-            <a:pPr algn="l" indent="0" marL="0">
-              <a:lnSpc>
-                <a:spcPct val="110000"/>
-              </a:lnSpc>
-              <a:buNone/>
-            </a:pPr>
-            <a:r>
-              <a:rPr lang="en-US" sz="1300" dirty="0">
+            <a:r>
+              <a:rPr lang="en-US" sz="1450" dirty="0">
                 <a:solidFill>
                   <a:srgbClr val="E6E6E6"/>
                 </a:solidFill>
@@ -7238,14 +7042,8 @@
               <a:t>          --set-literal config.defaultCarrier=ACME,Post
 </a:t>
             </a:r>
-            <a:pPr algn="l" indent="0" marL="0">
-              <a:lnSpc>
-                <a:spcPct val="110000"/>
-              </a:lnSpc>
-              <a:buNone/>
-            </a:pPr>
-            <a:r>
-              <a:rPr lang="en-US" sz="1300" dirty="0">
+            <a:r>
+              <a:rPr lang="en-US" sz="1450" dirty="0">
                 <a:solidFill>
                   <a:srgbClr val="8FB98F"/>
                 </a:solidFill>
@@ -7256,7 +7054,7 @@
               <a:t># --set-literal keeps commas: renders "ACME,Post"
 </a:t>
             </a:r>
-            <a:endParaRPr lang="en-US" sz="1300" dirty="0"/>
+            <a:endParaRPr lang="en-US" sz="1450" dirty="0"/>
           </a:p>
         </p:txBody>
       </p:sp>
@@ -7268,7 +7066,7 @@
         </p:nvSpPr>
         <p:spPr>
           <a:xfrm>
-            <a:off x="566928" y="5943600"/>
+            <a:off x="566928" y="5536025"/>
             <a:ext cx="11055096" cy="310896"/>
           </a:xfrm>
           <a:prstGeom prst="rect">
@@ -7512,8 +7310,8 @@
         </p:nvSpPr>
         <p:spPr>
           <a:xfrm>
-            <a:off x="566928" y="1691640"/>
-            <a:ext cx="7132320" cy="4251960"/>
+            <a:off x="566928" y="1417320"/>
+            <a:ext cx="7680960" cy="3553473"/>
           </a:xfrm>
           <a:prstGeom prst="rect">
             <a:avLst/>
@@ -7537,8 +7335,8 @@
         </p:nvSpPr>
         <p:spPr>
           <a:xfrm>
-            <a:off x="749808" y="1783080"/>
-            <a:ext cx="6766560" cy="4069080"/>
+            <a:off x="749808" y="1508760"/>
+            <a:ext cx="7315200" cy="3370593"/>
           </a:xfrm>
           <a:prstGeom prst="rect">
             <a:avLst/>
@@ -7557,7 +7355,7 @@
               <a:buNone/>
             </a:pPr>
             <a:r>
-              <a:rPr lang="en-US" sz="1200" dirty="0">
+              <a:rPr lang="en-US" sz="1350" dirty="0">
                 <a:solidFill>
                   <a:srgbClr val="E6E6E6"/>
                 </a:solidFill>
@@ -7568,14 +7366,8 @@
               <a:t>{
 </a:t>
             </a:r>
-            <a:pPr algn="l" indent="0" marL="0">
-              <a:lnSpc>
-                <a:spcPct val="110000"/>
-              </a:lnSpc>
-              <a:buNone/>
-            </a:pPr>
-            <a:r>
-              <a:rPr lang="en-US" sz="1200" dirty="0">
+            <a:r>
+              <a:rPr lang="en-US" sz="1350" dirty="0">
                 <a:solidFill>
                   <a:srgbClr val="E6E6E6"/>
                 </a:solidFill>
@@ -7586,14 +7378,8 @@
               <a:t>  "$schema": "https://json-schema.org/draft-07/schema#",
 </a:t>
             </a:r>
-            <a:pPr algn="l" indent="0" marL="0">
-              <a:lnSpc>
-                <a:spcPct val="110000"/>
-              </a:lnSpc>
-              <a:buNone/>
-            </a:pPr>
-            <a:r>
-              <a:rPr lang="en-US" sz="1200" dirty="0">
+            <a:r>
+              <a:rPr lang="en-US" sz="1350" dirty="0">
                 <a:solidFill>
                   <a:srgbClr val="E6E6E6"/>
                 </a:solidFill>
@@ -7604,14 +7390,8 @@
               <a:t>  "type": "object",
 </a:t>
             </a:r>
-            <a:pPr algn="l" indent="0" marL="0">
-              <a:lnSpc>
-                <a:spcPct val="110000"/>
-              </a:lnSpc>
-              <a:buNone/>
-            </a:pPr>
-            <a:r>
-              <a:rPr lang="en-US" sz="1200" dirty="0">
+            <a:r>
+              <a:rPr lang="en-US" sz="1350" dirty="0">
                 <a:solidFill>
                   <a:srgbClr val="E6E6E6"/>
                 </a:solidFill>
@@ -7622,14 +7402,8 @@
               <a:t>  "additionalProperties": false,
 </a:t>
             </a:r>
-            <a:pPr algn="l" indent="0" marL="0">
-              <a:lnSpc>
-                <a:spcPct val="110000"/>
-              </a:lnSpc>
-              <a:buNone/>
-            </a:pPr>
-            <a:r>
-              <a:rPr lang="en-US" sz="1200" dirty="0">
+            <a:r>
+              <a:rPr lang="en-US" sz="1350" dirty="0">
                 <a:solidFill>
                   <a:srgbClr val="E6E6E6"/>
                 </a:solidFill>
@@ -7640,14 +7414,8 @@
               <a:t>  "properties": {
 </a:t>
             </a:r>
-            <a:pPr algn="l" indent="0" marL="0">
-              <a:lnSpc>
-                <a:spcPct val="110000"/>
-              </a:lnSpc>
-              <a:buNone/>
-            </a:pPr>
-            <a:r>
-              <a:rPr lang="en-US" sz="1200" dirty="0">
+            <a:r>
+              <a:rPr lang="en-US" sz="1350" dirty="0">
                 <a:solidFill>
                   <a:srgbClr val="E6E6E6"/>
                 </a:solidFill>
@@ -7658,14 +7426,8 @@
               <a:t>    "replicaCount": {"type": "integer", "minimum": 0},
 </a:t>
             </a:r>
-            <a:pPr algn="l" indent="0" marL="0">
-              <a:lnSpc>
-                <a:spcPct val="110000"/>
-              </a:lnSpc>
-              <a:buNone/>
-            </a:pPr>
-            <a:r>
-              <a:rPr lang="en-US" sz="1200" dirty="0">
+            <a:r>
+              <a:rPr lang="en-US" sz="1350" dirty="0">
                 <a:solidFill>
                   <a:srgbClr val="E6E6E6"/>
                 </a:solidFill>
@@ -7676,14 +7438,8 @@
               <a:t>    "image": {
 </a:t>
             </a:r>
-            <a:pPr algn="l" indent="0" marL="0">
-              <a:lnSpc>
-                <a:spcPct val="110000"/>
-              </a:lnSpc>
-              <a:buNone/>
-            </a:pPr>
-            <a:r>
-              <a:rPr lang="en-US" sz="1200" dirty="0">
+            <a:r>
+              <a:rPr lang="en-US" sz="1350" dirty="0">
                 <a:solidFill>
                   <a:srgbClr val="E6E6E6"/>
                 </a:solidFill>
@@ -7694,14 +7450,8 @@
               <a:t>      "type": "object",
 </a:t>
             </a:r>
-            <a:pPr algn="l" indent="0" marL="0">
-              <a:lnSpc>
-                <a:spcPct val="110000"/>
-              </a:lnSpc>
-              <a:buNone/>
-            </a:pPr>
-            <a:r>
-              <a:rPr lang="en-US" sz="1200" dirty="0">
+            <a:r>
+              <a:rPr lang="en-US" sz="1350" dirty="0">
                 <a:solidFill>
                   <a:srgbClr val="E6E6E6"/>
                 </a:solidFill>
@@ -7712,14 +7462,8 @@
               <a:t>      "properties": {
 </a:t>
             </a:r>
-            <a:pPr algn="l" indent="0" marL="0">
-              <a:lnSpc>
-                <a:spcPct val="110000"/>
-              </a:lnSpc>
-              <a:buNone/>
-            </a:pPr>
-            <a:r>
-              <a:rPr lang="en-US" sz="1200" dirty="0">
+            <a:r>
+              <a:rPr lang="en-US" sz="1350" dirty="0">
                 <a:solidFill>
                   <a:srgbClr val="E6E6E6"/>
                 </a:solidFill>
@@ -7730,14 +7474,8 @@
               <a:t>        "pullPolicy": {"enum": ["Always", "IfNotPresent", "Never"]}
 </a:t>
             </a:r>
-            <a:pPr algn="l" indent="0" marL="0">
-              <a:lnSpc>
-                <a:spcPct val="110000"/>
-              </a:lnSpc>
-              <a:buNone/>
-            </a:pPr>
-            <a:r>
-              <a:rPr lang="en-US" sz="1200" dirty="0">
+            <a:r>
+              <a:rPr lang="en-US" sz="1350" dirty="0">
                 <a:solidFill>
                   <a:srgbClr val="E6E6E6"/>
                 </a:solidFill>
@@ -7748,14 +7486,8 @@
               <a:t>      }
 </a:t>
             </a:r>
-            <a:pPr algn="l" indent="0" marL="0">
-              <a:lnSpc>
-                <a:spcPct val="110000"/>
-              </a:lnSpc>
-              <a:buNone/>
-            </a:pPr>
-            <a:r>
-              <a:rPr lang="en-US" sz="1200" dirty="0">
+            <a:r>
+              <a:rPr lang="en-US" sz="1350" dirty="0">
                 <a:solidFill>
                   <a:srgbClr val="E6E6E6"/>
                 </a:solidFill>
@@ -7763,17 +7495,11 @@
                 <a:ea typeface="Red Hat Mono" pitchFamily="34" charset="-122"/>
                 <a:cs typeface="Red Hat Mono" pitchFamily="34" charset="-120"/>
               </a:rPr>
-              <a:t>    },
+              <a:t>    }
 </a:t>
             </a:r>
-            <a:pPr algn="l" indent="0" marL="0">
-              <a:lnSpc>
-                <a:spcPct val="110000"/>
-              </a:lnSpc>
-              <a:buNone/>
-            </a:pPr>
-            <a:r>
-              <a:rPr lang="en-US" sz="1200" dirty="0">
+            <a:r>
+              <a:rPr lang="en-US" sz="1350" dirty="0">
                 <a:solidFill>
                   <a:srgbClr val="E6E6E6"/>
                 </a:solidFill>
@@ -7781,17 +7507,11 @@
                 <a:ea typeface="Red Hat Mono" pitchFamily="34" charset="-122"/>
                 <a:cs typeface="Red Hat Mono" pitchFamily="34" charset="-120"/>
               </a:rPr>
-              <a:t>    "service": {
+              <a:t>  }
 </a:t>
             </a:r>
-            <a:pPr algn="l" indent="0" marL="0">
-              <a:lnSpc>
-                <a:spcPct val="110000"/>
-              </a:lnSpc>
-              <a:buNone/>
-            </a:pPr>
-            <a:r>
-              <a:rPr lang="en-US" sz="1200" dirty="0">
+            <a:r>
+              <a:rPr lang="en-US" sz="1350" dirty="0">
                 <a:solidFill>
                   <a:srgbClr val="E6E6E6"/>
                 </a:solidFill>
@@ -7799,118 +7519,10 @@
                 <a:ea typeface="Red Hat Mono" pitchFamily="34" charset="-122"/>
                 <a:cs typeface="Red Hat Mono" pitchFamily="34" charset="-120"/>
               </a:rPr>
-              <a:t>      "properties": {
-</a:t>
-            </a:r>
-            <a:pPr algn="l" indent="0" marL="0">
-              <a:lnSpc>
-                <a:spcPct val="110000"/>
-              </a:lnSpc>
-              <a:buNone/>
-            </a:pPr>
-            <a:r>
-              <a:rPr lang="en-US" sz="1200" dirty="0">
-                <a:solidFill>
-                  <a:srgbClr val="E6E6E6"/>
-                </a:solidFill>
-                <a:latin typeface="Red Hat Mono" pitchFamily="34" charset="0"/>
-                <a:ea typeface="Red Hat Mono" pitchFamily="34" charset="-122"/>
-                <a:cs typeface="Red Hat Mono" pitchFamily="34" charset="-120"/>
-              </a:rPr>
-              <a:t>        "nodePort": {"type": ["integer", "null"],
-</a:t>
-            </a:r>
-            <a:pPr algn="l" indent="0" marL="0">
-              <a:lnSpc>
-                <a:spcPct val="110000"/>
-              </a:lnSpc>
-              <a:buNone/>
-            </a:pPr>
-            <a:r>
-              <a:rPr lang="en-US" sz="1200" dirty="0">
-                <a:solidFill>
-                  <a:srgbClr val="E6E6E6"/>
-                </a:solidFill>
-                <a:latin typeface="Red Hat Mono" pitchFamily="34" charset="0"/>
-                <a:ea typeface="Red Hat Mono" pitchFamily="34" charset="-122"/>
-                <a:cs typeface="Red Hat Mono" pitchFamily="34" charset="-120"/>
-              </a:rPr>
-              <a:t>                     "minimum": 30000, "maximum": 32767}
-</a:t>
-            </a:r>
-            <a:pPr algn="l" indent="0" marL="0">
-              <a:lnSpc>
-                <a:spcPct val="110000"/>
-              </a:lnSpc>
-              <a:buNone/>
-            </a:pPr>
-            <a:r>
-              <a:rPr lang="en-US" sz="1200" dirty="0">
-                <a:solidFill>
-                  <a:srgbClr val="E6E6E6"/>
-                </a:solidFill>
-                <a:latin typeface="Red Hat Mono" pitchFamily="34" charset="0"/>
-                <a:ea typeface="Red Hat Mono" pitchFamily="34" charset="-122"/>
-                <a:cs typeface="Red Hat Mono" pitchFamily="34" charset="-120"/>
-              </a:rPr>
-              <a:t>      }
-</a:t>
-            </a:r>
-            <a:pPr algn="l" indent="0" marL="0">
-              <a:lnSpc>
-                <a:spcPct val="110000"/>
-              </a:lnSpc>
-              <a:buNone/>
-            </a:pPr>
-            <a:r>
-              <a:rPr lang="en-US" sz="1200" dirty="0">
-                <a:solidFill>
-                  <a:srgbClr val="E6E6E6"/>
-                </a:solidFill>
-                <a:latin typeface="Red Hat Mono" pitchFamily="34" charset="0"/>
-                <a:ea typeface="Red Hat Mono" pitchFamily="34" charset="-122"/>
-                <a:cs typeface="Red Hat Mono" pitchFamily="34" charset="-120"/>
-              </a:rPr>
-              <a:t>    }
-</a:t>
-            </a:r>
-            <a:pPr algn="l" indent="0" marL="0">
-              <a:lnSpc>
-                <a:spcPct val="110000"/>
-              </a:lnSpc>
-              <a:buNone/>
-            </a:pPr>
-            <a:r>
-              <a:rPr lang="en-US" sz="1200" dirty="0">
-                <a:solidFill>
-                  <a:srgbClr val="E6E6E6"/>
-                </a:solidFill>
-                <a:latin typeface="Red Hat Mono" pitchFamily="34" charset="0"/>
-                <a:ea typeface="Red Hat Mono" pitchFamily="34" charset="-122"/>
-                <a:cs typeface="Red Hat Mono" pitchFamily="34" charset="-120"/>
-              </a:rPr>
-              <a:t>  }
-</a:t>
-            </a:r>
-            <a:pPr algn="l" indent="0" marL="0">
-              <a:lnSpc>
-                <a:spcPct val="110000"/>
-              </a:lnSpc>
-              <a:buNone/>
-            </a:pPr>
-            <a:r>
-              <a:rPr lang="en-US" sz="1200" dirty="0">
-                <a:solidFill>
-                  <a:srgbClr val="E6E6E6"/>
-                </a:solidFill>
-                <a:latin typeface="Red Hat Mono" pitchFamily="34" charset="0"/>
-                <a:ea typeface="Red Hat Mono" pitchFamily="34" charset="-122"/>
-                <a:cs typeface="Red Hat Mono" pitchFamily="34" charset="-120"/>
-              </a:rPr>
               <a:t>}
 </a:t>
             </a:r>
-            <a:endParaRPr lang="en-US" sz="1200" dirty="0"/>
+            <a:endParaRPr lang="en-US" sz="1350" dirty="0"/>
           </a:p>
         </p:txBody>
       </p:sp>
@@ -7922,8 +7534,8 @@
         </p:nvSpPr>
         <p:spPr>
           <a:xfrm>
-            <a:off x="566928" y="5943600"/>
-            <a:ext cx="7132320" cy="310896"/>
+            <a:off x="566928" y="5062233"/>
+            <a:ext cx="7680960" cy="310896"/>
           </a:xfrm>
           <a:prstGeom prst="rect">
             <a:avLst/>
@@ -7961,8 +7573,8 @@
         </p:nvSpPr>
         <p:spPr>
           <a:xfrm>
-            <a:off x="8019288" y="1783080"/>
-            <a:ext cx="3605479" cy="4114800"/>
+            <a:off x="8567928" y="1600200"/>
+            <a:ext cx="3056839" cy="4297680"/>
           </a:xfrm>
           <a:prstGeom prst="rect">
             <a:avLst/>
@@ -7974,7 +7586,7 @@
           <a:bodyPr wrap="square" lIns="0" tIns="0" rIns="0" bIns="0" rtlCol="0" anchor="t"/>
           <a:lstStyle/>
           <a:p>
-            <a:pPr marL="228600" indent="-228600">
+            <a:pPr marL="304800" indent="-304800">
               <a:lnSpc>
                 <a:spcPct val="112000"/>
               </a:lnSpc>
@@ -7988,7 +7600,7 @@
               <a:buChar char="●"/>
             </a:pPr>
             <a:r>
-              <a:rPr lang="en-US" sz="1500" b="1" dirty="0">
+              <a:rPr lang="en-US" sz="1400" b="1" dirty="0">
                 <a:solidFill>
                   <a:srgbClr val="151515"/>
                 </a:solidFill>
@@ -7998,14 +7610,8 @@
               </a:rPr>
               <a:t>Runs on the merged values</a:t>
             </a:r>
-            <a:pPr indent="0" marL="0">
-              <a:lnSpc>
-                <a:spcPct val="112000"/>
-              </a:lnSpc>
-              <a:buNone/>
-            </a:pPr>
-            <a:r>
-              <a:rPr lang="en-US" sz="1500" dirty="0">
+            <a:r>
+              <a:rPr lang="en-US" sz="1400" dirty="0">
                 <a:solidFill>
                   <a:srgbClr val="242424"/>
                 </a:solidFill>
@@ -8015,10 +7621,10 @@
               </a:rPr>
               <a:t>: install, upgrade, template and lint, before any template renders.</a:t>
             </a:r>
-            <a:endParaRPr lang="en-US" sz="1500" dirty="0"/>
-          </a:p>
-          <a:p>
-            <a:pPr marL="228600" indent="-228600">
+            <a:endParaRPr lang="en-US" sz="1400" dirty="0"/>
+          </a:p>
+          <a:p>
+            <a:pPr marL="304800" indent="-304800">
               <a:lnSpc>
                 <a:spcPct val="112000"/>
               </a:lnSpc>
@@ -8032,7 +7638,7 @@
               <a:buChar char="●"/>
             </a:pPr>
             <a:r>
-              <a:rPr lang="en-US" sz="1500" b="1" dirty="0">
+              <a:rPr lang="en-US" sz="1400" b="1" dirty="0">
                 <a:solidFill>
                   <a:srgbClr val="151515"/>
                 </a:solidFill>
@@ -8042,14 +7648,8 @@
               </a:rPr>
               <a:t>additionalProperties: false</a:t>
             </a:r>
-            <a:pPr indent="0" marL="0">
-              <a:lnSpc>
-                <a:spcPct val="112000"/>
-              </a:lnSpc>
-              <a:buNone/>
-            </a:pPr>
-            <a:r>
-              <a:rPr lang="en-US" sz="1500" dirty="0">
+            <a:r>
+              <a:rPr lang="en-US" sz="1400" dirty="0">
                 <a:solidFill>
                   <a:srgbClr val="242424"/>
                 </a:solidFill>
@@ -8059,10 +7659,10 @@
               </a:rPr>
               <a:t>: a misspelled key fails instead of being ignored.</a:t>
             </a:r>
-            <a:endParaRPr lang="en-US" sz="1500" dirty="0"/>
-          </a:p>
-          <a:p>
-            <a:pPr marL="228600" indent="-228600">
+            <a:endParaRPr lang="en-US" sz="1400" dirty="0"/>
+          </a:p>
+          <a:p>
+            <a:pPr marL="304800" indent="-304800">
               <a:lnSpc>
                 <a:spcPct val="112000"/>
               </a:lnSpc>
@@ -8076,7 +7676,7 @@
               <a:buChar char="●"/>
             </a:pPr>
             <a:r>
-              <a:rPr lang="en-US" sz="1500" b="1" dirty="0">
+              <a:rPr lang="en-US" sz="1400" b="1" dirty="0">
                 <a:solidFill>
                   <a:srgbClr val="151515"/>
                 </a:solidFill>
@@ -8086,14 +7686,8 @@
               </a:rPr>
               <a:t>enum, minimum, maximum</a:t>
             </a:r>
-            <a:pPr indent="0" marL="0">
-              <a:lnSpc>
-                <a:spcPct val="112000"/>
-              </a:lnSpc>
-              <a:buNone/>
-            </a:pPr>
-            <a:r>
-              <a:rPr lang="en-US" sz="1500" dirty="0">
+            <a:r>
+              <a:rPr lang="en-US" sz="1400" dirty="0">
                 <a:solidFill>
                   <a:srgbClr val="242424"/>
                 </a:solidFill>
@@ -8103,10 +7697,10 @@
               </a:rPr>
               <a:t>: close sets and ranges, such as the NodePort range.</a:t>
             </a:r>
-            <a:endParaRPr lang="en-US" sz="1500" dirty="0"/>
-          </a:p>
-          <a:p>
-            <a:pPr marL="228600" indent="-228600">
+            <a:endParaRPr lang="en-US" sz="1400" dirty="0"/>
+          </a:p>
+          <a:p>
+            <a:pPr marL="304800" indent="-304800">
               <a:lnSpc>
                 <a:spcPct val="112000"/>
               </a:lnSpc>
@@ -8120,7 +7714,7 @@
               <a:buChar char="●"/>
             </a:pPr>
             <a:r>
-              <a:rPr lang="en-US" sz="1500" b="1" dirty="0">
+              <a:rPr lang="en-US" sz="1400" b="1" dirty="0">
                 <a:solidFill>
                   <a:srgbClr val="151515"/>
                 </a:solidFill>
@@ -8130,14 +7724,8 @@
               </a:rPr>
               <a:t>Strict by design</a:t>
             </a:r>
-            <a:pPr indent="0" marL="0">
-              <a:lnSpc>
-                <a:spcPct val="112000"/>
-              </a:lnSpc>
-              <a:buNone/>
-            </a:pPr>
-            <a:r>
-              <a:rPr lang="en-US" sz="1500" dirty="0">
+            <a:r>
+              <a:rPr lang="en-US" sz="1400" dirty="0">
                 <a:solidFill>
                   <a:srgbClr val="242424"/>
                 </a:solidFill>
@@ -8147,7 +7735,7 @@
               </a:rPr>
               <a:t>: a new value needs a schema entry in the same commit.</a:t>
             </a:r>
-            <a:endParaRPr lang="en-US" sz="1500" dirty="0"/>
+            <a:endParaRPr lang="en-US" sz="1400" dirty="0"/>
           </a:p>
         </p:txBody>
       </p:sp>
@@ -8963,8 +8551,8 @@
         </p:nvSpPr>
         <p:spPr>
           <a:xfrm>
-            <a:off x="566928" y="1691640"/>
-            <a:ext cx="7498080" cy="2862072"/>
+            <a:off x="566928" y="1417320"/>
+            <a:ext cx="8046720" cy="2572639"/>
           </a:xfrm>
           <a:prstGeom prst="rect">
             <a:avLst/>
@@ -8988,8 +8576,8 @@
         </p:nvSpPr>
         <p:spPr>
           <a:xfrm>
-            <a:off x="749808" y="1783080"/>
-            <a:ext cx="7132320" cy="2679192"/>
+            <a:off x="749808" y="1508760"/>
+            <a:ext cx="7680960" cy="2389759"/>
           </a:xfrm>
           <a:prstGeom prst="rect">
             <a:avLst/>
@@ -9008,7 +8596,7 @@
               <a:buNone/>
             </a:pPr>
             <a:r>
-              <a:rPr lang="en-US" sz="1200" dirty="0">
+              <a:rPr lang="en-US" sz="1300" dirty="0">
                 <a:solidFill>
                   <a:srgbClr val="E6E6E6"/>
                 </a:solidFill>
@@ -9019,14 +8607,8 @@
               <a:t>{{- $fullname := printf "%s-%s" .Release.Name .Chart.Name -}}
 </a:t>
             </a:r>
-            <a:pPr algn="l" indent="0" marL="0">
-              <a:lnSpc>
-                <a:spcPct val="110000"/>
-              </a:lnSpc>
-              <a:buNone/>
-            </a:pPr>
-            <a:r>
-              <a:rPr lang="en-US" sz="1200" dirty="0">
+            <a:r>
+              <a:rPr lang="en-US" sz="1300" dirty="0">
                 <a:solidFill>
                   <a:srgbClr val="E6E6E6"/>
                 </a:solidFill>
@@ -9037,14 +8619,8 @@
               <a:t>{{- $image := printf "%s:%s"
 </a:t>
             </a:r>
-            <a:pPr algn="l" indent="0" marL="0">
-              <a:lnSpc>
-                <a:spcPct val="110000"/>
-              </a:lnSpc>
-              <a:buNone/>
-            </a:pPr>
-            <a:r>
-              <a:rPr lang="en-US" sz="1200" dirty="0">
+            <a:r>
+              <a:rPr lang="en-US" sz="1300" dirty="0">
                 <a:solidFill>
                   <a:srgbClr val="E6E6E6"/>
                 </a:solidFill>
@@ -9055,14 +8631,8 @@
               <a:t>      (required "image.repository is required" .Values.image.repository)
 </a:t>
             </a:r>
-            <a:pPr algn="l" indent="0" marL="0">
-              <a:lnSpc>
-                <a:spcPct val="110000"/>
-              </a:lnSpc>
-              <a:buNone/>
-            </a:pPr>
-            <a:r>
-              <a:rPr lang="en-US" sz="1200" dirty="0">
+            <a:r>
+              <a:rPr lang="en-US" sz="1300" dirty="0">
                 <a:solidFill>
                   <a:srgbClr val="E6E6E6"/>
                 </a:solidFill>
@@ -9073,14 +8643,8 @@
               <a:t>      (.Values.image.tag | default .Chart.AppVersion) -}}
 </a:t>
             </a:r>
-            <a:pPr algn="l" indent="0" marL="0">
-              <a:lnSpc>
-                <a:spcPct val="110000"/>
-              </a:lnSpc>
-              <a:buNone/>
-            </a:pPr>
-            <a:r>
-              <a:rPr lang="en-US" sz="1200" dirty="0">
+            <a:r>
+              <a:rPr lang="en-US" sz="1300" dirty="0">
                 <a:solidFill>
                   <a:srgbClr val="E6E6E6"/>
                 </a:solidFill>
@@ -9091,14 +8655,8 @@
               <a:t>apiVersion: apps/v1
 </a:t>
             </a:r>
-            <a:pPr algn="l" indent="0" marL="0">
-              <a:lnSpc>
-                <a:spcPct val="110000"/>
-              </a:lnSpc>
-              <a:buNone/>
-            </a:pPr>
-            <a:r>
-              <a:rPr lang="en-US" sz="1200" dirty="0">
+            <a:r>
+              <a:rPr lang="en-US" sz="1300" dirty="0">
                 <a:solidFill>
                   <a:srgbClr val="E6E6E6"/>
                 </a:solidFill>
@@ -9109,14 +8667,8 @@
               <a:t>kind: Deployment
 </a:t>
             </a:r>
-            <a:pPr algn="l" indent="0" marL="0">
-              <a:lnSpc>
-                <a:spcPct val="110000"/>
-              </a:lnSpc>
-              <a:buNone/>
-            </a:pPr>
-            <a:r>
-              <a:rPr lang="en-US" sz="1200" dirty="0">
+            <a:r>
+              <a:rPr lang="en-US" sz="1300" dirty="0">
                 <a:solidFill>
                   <a:srgbClr val="E6E6E6"/>
                 </a:solidFill>
@@ -9127,14 +8679,8 @@
               <a:t>metadata:
 </a:t>
             </a:r>
-            <a:pPr algn="l" indent="0" marL="0">
-              <a:lnSpc>
-                <a:spcPct val="110000"/>
-              </a:lnSpc>
-              <a:buNone/>
-            </a:pPr>
-            <a:r>
-              <a:rPr lang="en-US" sz="1200" dirty="0">
+            <a:r>
+              <a:rPr lang="en-US" sz="1300" dirty="0">
                 <a:solidFill>
                   <a:srgbClr val="E6E6E6"/>
                 </a:solidFill>
@@ -9145,14 +8691,8 @@
               <a:t>  name: {{ $fullname }}
 </a:t>
             </a:r>
-            <a:pPr algn="l" indent="0" marL="0">
-              <a:lnSpc>
-                <a:spcPct val="110000"/>
-              </a:lnSpc>
-              <a:buNone/>
-            </a:pPr>
-            <a:r>
-              <a:rPr lang="en-US" sz="1200" dirty="0">
+            <a:r>
+              <a:rPr lang="en-US" sz="1300" dirty="0">
                 <a:solidFill>
                   <a:srgbClr val="E6E6E6"/>
                 </a:solidFill>
@@ -9163,14 +8703,8 @@
               <a:t>  labels:
 </a:t>
             </a:r>
-            <a:pPr algn="l" indent="0" marL="0">
-              <a:lnSpc>
-                <a:spcPct val="110000"/>
-              </a:lnSpc>
-              <a:buNone/>
-            </a:pPr>
-            <a:r>
-              <a:rPr lang="en-US" sz="1200" dirty="0">
+            <a:r>
+              <a:rPr lang="en-US" sz="1300" dirty="0">
                 <a:solidFill>
                   <a:srgbClr val="E6E6E6"/>
                 </a:solidFill>
@@ -9181,7 +8715,7 @@
               <a:t>    log-level: {{ .Values.config.logLevel | quote }}
 </a:t>
             </a:r>
-            <a:endParaRPr lang="en-US" sz="1200" dirty="0"/>
+            <a:endParaRPr lang="en-US" sz="1300" dirty="0"/>
           </a:p>
         </p:txBody>
       </p:sp>
@@ -9193,8 +8727,8 @@
         </p:nvSpPr>
         <p:spPr>
           <a:xfrm>
-            <a:off x="566928" y="4626864"/>
-            <a:ext cx="7498080" cy="310896"/>
+            <a:off x="566928" y="4081399"/>
+            <a:ext cx="8046720" cy="310896"/>
           </a:xfrm>
           <a:prstGeom prst="rect">
             <a:avLst/>
@@ -9232,8 +8766,8 @@
         </p:nvSpPr>
         <p:spPr>
           <a:xfrm>
-            <a:off x="8385048" y="1783080"/>
-            <a:ext cx="3239719" cy="4114800"/>
+            <a:off x="8933688" y="1600200"/>
+            <a:ext cx="2691079" cy="4297680"/>
           </a:xfrm>
           <a:prstGeom prst="rect">
             <a:avLst/>
@@ -9245,7 +8779,7 @@
           <a:bodyPr wrap="square" lIns="0" tIns="0" rIns="0" bIns="0" rtlCol="0" anchor="t"/>
           <a:lstStyle/>
           <a:p>
-            <a:pPr marL="228600" indent="-228600">
+            <a:pPr marL="304800" indent="-304800">
               <a:lnSpc>
                 <a:spcPct val="112000"/>
               </a:lnSpc>
@@ -9259,7 +8793,7 @@
               <a:buChar char="●"/>
             </a:pPr>
             <a:r>
-              <a:rPr lang="en-US" sz="1500" b="1" dirty="0">
+              <a:rPr lang="en-US" sz="1400" b="1" dirty="0">
                 <a:solidFill>
                   <a:srgbClr val="151515"/>
                 </a:solidFill>
@@ -9269,14 +8803,8 @@
               </a:rPr>
               <a:t>.Values, .Release, .Chart</a:t>
             </a:r>
-            <a:pPr indent="0" marL="0">
-              <a:lnSpc>
-                <a:spcPct val="112000"/>
-              </a:lnSpc>
-              <a:buNone/>
-            </a:pPr>
-            <a:r>
-              <a:rPr lang="en-US" sz="1500" dirty="0">
+            <a:r>
+              <a:rPr lang="en-US" sz="1400" dirty="0">
                 <a:solidFill>
                   <a:srgbClr val="242424"/>
                 </a:solidFill>
@@ -9286,10 +8814,10 @@
               </a:rPr>
               <a:t>: built-in objects; also .Capabilities, .Template and .Files.</a:t>
             </a:r>
-            <a:endParaRPr lang="en-US" sz="1500" dirty="0"/>
-          </a:p>
-          <a:p>
-            <a:pPr marL="228600" indent="-228600">
+            <a:endParaRPr lang="en-US" sz="1400" dirty="0"/>
+          </a:p>
+          <a:p>
+            <a:pPr marL="304800" indent="-304800">
               <a:lnSpc>
                 <a:spcPct val="112000"/>
               </a:lnSpc>
@@ -9303,7 +8831,7 @@
               <a:buChar char="●"/>
             </a:pPr>
             <a:r>
-              <a:rPr lang="en-US" sz="1500" b="1" dirty="0">
+              <a:rPr lang="en-US" sz="1400" b="1" dirty="0">
                 <a:solidFill>
                   <a:srgbClr val="151515"/>
                 </a:solidFill>
@@ -9313,14 +8841,8 @@
               </a:rPr>
               <a:t>Pipelines</a:t>
             </a:r>
-            <a:pPr indent="0" marL="0">
-              <a:lnSpc>
-                <a:spcPct val="112000"/>
-              </a:lnSpc>
-              <a:buNone/>
-            </a:pPr>
-            <a:r>
-              <a:rPr lang="en-US" sz="1500" dirty="0">
+            <a:r>
+              <a:rPr lang="en-US" sz="1400" dirty="0">
                 <a:solidFill>
                   <a:srgbClr val="242424"/>
                 </a:solidFill>
@@ -9330,10 +8852,10 @@
               </a:rPr>
               <a:t>: a | f is f applied to a; quote, default and printf come from Sprig.</a:t>
             </a:r>
-            <a:endParaRPr lang="en-US" sz="1500" dirty="0"/>
-          </a:p>
-          <a:p>
-            <a:pPr marL="228600" indent="-228600">
+            <a:endParaRPr lang="en-US" sz="1400" dirty="0"/>
+          </a:p>
+          <a:p>
+            <a:pPr marL="304800" indent="-304800">
               <a:lnSpc>
                 <a:spcPct val="112000"/>
               </a:lnSpc>
@@ -9347,7 +8869,7 @@
               <a:buChar char="●"/>
             </a:pPr>
             <a:r>
-              <a:rPr lang="en-US" sz="1500" b="1" dirty="0">
+              <a:rPr lang="en-US" sz="1400" b="1" dirty="0">
                 <a:solidFill>
                   <a:srgbClr val="151515"/>
                 </a:solidFill>
@@ -9357,14 +8879,8 @@
               </a:rPr>
               <a:t>Variables</a:t>
             </a:r>
-            <a:pPr indent="0" marL="0">
-              <a:lnSpc>
-                <a:spcPct val="112000"/>
-              </a:lnSpc>
-              <a:buNone/>
-            </a:pPr>
-            <a:r>
-              <a:rPr lang="en-US" sz="1500" dirty="0">
+            <a:r>
+              <a:rPr lang="en-US" sz="1400" dirty="0">
                 <a:solidFill>
                   <a:srgbClr val="242424"/>
                 </a:solidFill>
@@ -9374,10 +8890,10 @@
               </a:rPr>
               <a:t>: declared with := and read as $name.</a:t>
             </a:r>
-            <a:endParaRPr lang="en-US" sz="1500" dirty="0"/>
-          </a:p>
-          <a:p>
-            <a:pPr marL="228600" indent="-228600">
+            <a:endParaRPr lang="en-US" sz="1400" dirty="0"/>
+          </a:p>
+          <a:p>
+            <a:pPr marL="304800" indent="-304800">
               <a:lnSpc>
                 <a:spcPct val="112000"/>
               </a:lnSpc>
@@ -9391,7 +8907,7 @@
               <a:buChar char="●"/>
             </a:pPr>
             <a:r>
-              <a:rPr lang="en-US" sz="1500" b="1" dirty="0">
+              <a:rPr lang="en-US" sz="1400" b="1" dirty="0">
                 <a:solidFill>
                   <a:srgbClr val="151515"/>
                 </a:solidFill>
@@ -9401,14 +8917,8 @@
               </a:rPr>
               <a:t>Whitespace</a:t>
             </a:r>
-            <a:pPr indent="0" marL="0">
-              <a:lnSpc>
-                <a:spcPct val="112000"/>
-              </a:lnSpc>
-              <a:buNone/>
-            </a:pPr>
-            <a:r>
-              <a:rPr lang="en-US" sz="1500" dirty="0">
+            <a:r>
+              <a:rPr lang="en-US" sz="1400" dirty="0">
                 <a:solidFill>
                   <a:srgbClr val="242424"/>
                 </a:solidFill>
@@ -9418,7 +8928,7 @@
               </a:rPr>
               <a:t>: {{- and -}} trim newlines; the file still starts with apiVersion.</a:t>
             </a:r>
-            <a:endParaRPr lang="en-US" sz="1500" dirty="0"/>
+            <a:endParaRPr lang="en-US" sz="1400" dirty="0"/>
           </a:p>
         </p:txBody>
       </p:sp>
@@ -9635,8 +9145,8 @@
         </p:nvSpPr>
         <p:spPr>
           <a:xfrm>
-            <a:off x="566928" y="1691640"/>
-            <a:ext cx="11055096" cy="4251960"/>
+            <a:off x="566928" y="1417320"/>
+            <a:ext cx="11055096" cy="4434840"/>
           </a:xfrm>
           <a:prstGeom prst="rect">
             <a:avLst/>
@@ -9660,8 +9170,8 @@
         </p:nvSpPr>
         <p:spPr>
           <a:xfrm>
-            <a:off x="749808" y="1783080"/>
-            <a:ext cx="10689336" cy="4069080"/>
+            <a:off x="749808" y="1508760"/>
+            <a:ext cx="10689336" cy="4251960"/>
           </a:xfrm>
           <a:prstGeom prst="rect">
             <a:avLst/>
@@ -9680,7 +9190,7 @@
               <a:buNone/>
             </a:pPr>
             <a:r>
-              <a:rPr lang="en-US" sz="1600" dirty="0">
+              <a:rPr lang="en-US" sz="1650" dirty="0">
                 <a:solidFill>
                   <a:srgbClr val="E6E6E6"/>
                 </a:solidFill>
@@ -9691,14 +9201,8 @@
               <a:t>{{- with .Values.imagePullSecrets }}
 </a:t>
             </a:r>
-            <a:pPr algn="l" indent="0" marL="0">
-              <a:lnSpc>
-                <a:spcPct val="110000"/>
-              </a:lnSpc>
-              <a:buNone/>
-            </a:pPr>
-            <a:r>
-              <a:rPr lang="en-US" sz="1600" dirty="0">
+            <a:r>
+              <a:rPr lang="en-US" sz="1650" dirty="0">
                 <a:solidFill>
                   <a:srgbClr val="E6E6E6"/>
                 </a:solidFill>
@@ -9709,14 +9213,8 @@
               <a:t>imagePullSecrets:
 </a:t>
             </a:r>
-            <a:pPr algn="l" indent="0" marL="0">
-              <a:lnSpc>
-                <a:spcPct val="110000"/>
-              </a:lnSpc>
-              <a:buNone/>
-            </a:pPr>
-            <a:r>
-              <a:rPr lang="en-US" sz="1600" dirty="0">
+            <a:r>
+              <a:rPr lang="en-US" sz="1650" dirty="0">
                 <a:solidFill>
                   <a:srgbClr val="E6E6E6"/>
                 </a:solidFill>
@@ -9727,14 +9225,8 @@
               <a:t>  {{- toYaml . | nindent 8 }}      # inside with, dot is the list
 </a:t>
             </a:r>
-            <a:pPr algn="l" indent="0" marL="0">
-              <a:lnSpc>
-                <a:spcPct val="110000"/>
-              </a:lnSpc>
-              <a:buNone/>
-            </a:pPr>
-            <a:r>
-              <a:rPr lang="en-US" sz="1600" dirty="0">
+            <a:r>
+              <a:rPr lang="en-US" sz="1650" dirty="0">
                 <a:solidFill>
                   <a:srgbClr val="E6E6E6"/>
                 </a:solidFill>
@@ -9745,14 +9237,8 @@
               <a:t>{{- end }}
 </a:t>
             </a:r>
-            <a:pPr algn="l" indent="0" marL="0">
-              <a:lnSpc>
-                <a:spcPct val="110000"/>
-              </a:lnSpc>
-              <a:buNone/>
-            </a:pPr>
-            <a:r>
-              <a:rPr lang="en-US" sz="1600" dirty="0">
+            <a:r>
+              <a:rPr lang="en-US" sz="1650" dirty="0">
                 <a:solidFill>
                   <a:srgbClr val="E6E6E6"/>
                 </a:solidFill>
@@ -9763,14 +9249,8 @@
               <a:t>
 </a:t>
             </a:r>
-            <a:pPr algn="l" indent="0" marL="0">
-              <a:lnSpc>
-                <a:spcPct val="110000"/>
-              </a:lnSpc>
-              <a:buNone/>
-            </a:pPr>
-            <a:r>
-              <a:rPr lang="en-US" sz="1600" dirty="0">
+            <a:r>
+              <a:rPr lang="en-US" sz="1650" dirty="0">
                 <a:solidFill>
                   <a:srgbClr val="E6E6E6"/>
                 </a:solidFill>
@@ -9781,14 +9261,8 @@
               <a:t>{{- with .Values.podAnnotations }}
 </a:t>
             </a:r>
-            <a:pPr algn="l" indent="0" marL="0">
-              <a:lnSpc>
-                <a:spcPct val="110000"/>
-              </a:lnSpc>
-              <a:buNone/>
-            </a:pPr>
-            <a:r>
-              <a:rPr lang="en-US" sz="1600" dirty="0">
+            <a:r>
+              <a:rPr lang="en-US" sz="1650" dirty="0">
                 <a:solidFill>
                   <a:srgbClr val="E6E6E6"/>
                 </a:solidFill>
@@ -9799,14 +9273,8 @@
               <a:t>annotations:
 </a:t>
             </a:r>
-            <a:pPr algn="l" indent="0" marL="0">
-              <a:lnSpc>
-                <a:spcPct val="110000"/>
-              </a:lnSpc>
-              <a:buNone/>
-            </a:pPr>
-            <a:r>
-              <a:rPr lang="en-US" sz="1600" dirty="0">
+            <a:r>
+              <a:rPr lang="en-US" sz="1650" dirty="0">
                 <a:solidFill>
                   <a:srgbClr val="E6E6E6"/>
                 </a:solidFill>
@@ -9817,14 +9285,8 @@
               <a:t>  {{- range $key, $value := . }}
 </a:t>
             </a:r>
-            <a:pPr algn="l" indent="0" marL="0">
-              <a:lnSpc>
-                <a:spcPct val="110000"/>
-              </a:lnSpc>
-              <a:buNone/>
-            </a:pPr>
-            <a:r>
-              <a:rPr lang="en-US" sz="1600" dirty="0">
+            <a:r>
+              <a:rPr lang="en-US" sz="1650" dirty="0">
                 <a:solidFill>
                   <a:srgbClr val="E6E6E6"/>
                 </a:solidFill>
@@ -9835,14 +9297,8 @@
               <a:t>  {{ $key | quote }}: {{ tpl $value $ | quote }}   # $ is always the root context
 </a:t>
             </a:r>
-            <a:pPr algn="l" indent="0" marL="0">
-              <a:lnSpc>
-                <a:spcPct val="110000"/>
-              </a:lnSpc>
-              <a:buNone/>
-            </a:pPr>
-            <a:r>
-              <a:rPr lang="en-US" sz="1600" dirty="0">
+            <a:r>
+              <a:rPr lang="en-US" sz="1650" dirty="0">
                 <a:solidFill>
                   <a:srgbClr val="E6E6E6"/>
                 </a:solidFill>
@@ -9853,14 +9309,8 @@
               <a:t>  {{- end }}
 </a:t>
             </a:r>
-            <a:pPr algn="l" indent="0" marL="0">
-              <a:lnSpc>
-                <a:spcPct val="110000"/>
-              </a:lnSpc>
-              <a:buNone/>
-            </a:pPr>
-            <a:r>
-              <a:rPr lang="en-US" sz="1600" dirty="0">
+            <a:r>
+              <a:rPr lang="en-US" sz="1650" dirty="0">
                 <a:solidFill>
                   <a:srgbClr val="E6E6E6"/>
                 </a:solidFill>
@@ -9871,14 +9321,8 @@
               <a:t>{{- end }}
 </a:t>
             </a:r>
-            <a:pPr algn="l" indent="0" marL="0">
-              <a:lnSpc>
-                <a:spcPct val="110000"/>
-              </a:lnSpc>
-              <a:buNone/>
-            </a:pPr>
-            <a:r>
-              <a:rPr lang="en-US" sz="1600" dirty="0">
+            <a:r>
+              <a:rPr lang="en-US" sz="1650" dirty="0">
                 <a:solidFill>
                   <a:srgbClr val="E6E6E6"/>
                 </a:solidFill>
@@ -9889,14 +9333,8 @@
               <a:t>
 </a:t>
             </a:r>
-            <a:pPr algn="l" indent="0" marL="0">
-              <a:lnSpc>
-                <a:spcPct val="110000"/>
-              </a:lnSpc>
-              <a:buNone/>
-            </a:pPr>
-            <a:r>
-              <a:rPr lang="en-US" sz="1600" dirty="0">
+            <a:r>
+              <a:rPr lang="en-US" sz="1650" dirty="0">
                 <a:solidFill>
                   <a:srgbClr val="E6E6E6"/>
                 </a:solidFill>
@@ -9907,14 +9345,8 @@
               <a:t>{{- if and (eq .Values.service.type "NodePort") .Values.service.nodePort }}
 </a:t>
             </a:r>
-            <a:pPr algn="l" indent="0" marL="0">
-              <a:lnSpc>
-                <a:spcPct val="110000"/>
-              </a:lnSpc>
-              <a:buNone/>
-            </a:pPr>
-            <a:r>
-              <a:rPr lang="en-US" sz="1600" dirty="0">
+            <a:r>
+              <a:rPr lang="en-US" sz="1650" dirty="0">
                 <a:solidFill>
                   <a:srgbClr val="E6E6E6"/>
                 </a:solidFill>
@@ -9925,14 +9357,8 @@
               <a:t>nodePort: {{ .Values.service.nodePort }}
 </a:t>
             </a:r>
-            <a:pPr algn="l" indent="0" marL="0">
-              <a:lnSpc>
-                <a:spcPct val="110000"/>
-              </a:lnSpc>
-              <a:buNone/>
-            </a:pPr>
-            <a:r>
-              <a:rPr lang="en-US" sz="1600" dirty="0">
+            <a:r>
+              <a:rPr lang="en-US" sz="1650" dirty="0">
                 <a:solidFill>
                   <a:srgbClr val="E6E6E6"/>
                 </a:solidFill>
@@ -9943,7 +9369,7 @@
               <a:t>{{- end }}
 </a:t>
             </a:r>
-            <a:endParaRPr lang="en-US" sz="1600" dirty="0"/>
+            <a:endParaRPr lang="en-US" sz="1650" dirty="0"/>
           </a:p>
         </p:txBody>
       </p:sp>
@@ -10199,8 +9625,8 @@
         </p:nvSpPr>
         <p:spPr>
           <a:xfrm>
-            <a:off x="566928" y="1691640"/>
-            <a:ext cx="7680960" cy="4251960"/>
+            <a:off x="566928" y="1417320"/>
+            <a:ext cx="8046720" cy="3112929"/>
           </a:xfrm>
           <a:prstGeom prst="rect">
             <a:avLst/>
@@ -10224,8 +9650,8 @@
         </p:nvSpPr>
         <p:spPr>
           <a:xfrm>
-            <a:off x="749808" y="1783080"/>
-            <a:ext cx="7315200" cy="4069080"/>
+            <a:off x="749808" y="1508760"/>
+            <a:ext cx="7680960" cy="2930049"/>
           </a:xfrm>
           <a:prstGeom prst="rect">
             <a:avLst/>
@@ -10244,7 +9670,7 @@
               <a:buNone/>
             </a:pPr>
             <a:r>
-              <a:rPr lang="en-US" sz="1200" dirty="0">
+              <a:rPr lang="en-US" sz="1250" dirty="0">
                 <a:solidFill>
                   <a:srgbClr val="E6E6E6"/>
                 </a:solidFill>
@@ -10255,14 +9681,8 @@
               <a:t>{{/* _helpers.tpl */}}
 </a:t>
             </a:r>
-            <a:pPr algn="l" indent="0" marL="0">
-              <a:lnSpc>
-                <a:spcPct val="110000"/>
-              </a:lnSpc>
-              <a:buNone/>
-            </a:pPr>
-            <a:r>
-              <a:rPr lang="en-US" sz="1200" dirty="0">
+            <a:r>
+              <a:rPr lang="en-US" sz="1250" dirty="0">
                 <a:solidFill>
                   <a:srgbClr val="E6E6E6"/>
                 </a:solidFill>
@@ -10273,14 +9693,8 @@
               <a:t>{{- define "shipping-service.name" -}}
 </a:t>
             </a:r>
-            <a:pPr algn="l" indent="0" marL="0">
-              <a:lnSpc>
-                <a:spcPct val="110000"/>
-              </a:lnSpc>
-              <a:buNone/>
-            </a:pPr>
-            <a:r>
-              <a:rPr lang="en-US" sz="1200" dirty="0">
+            <a:r>
+              <a:rPr lang="en-US" sz="1250" dirty="0">
                 <a:solidFill>
                   <a:srgbClr val="E6E6E6"/>
                 </a:solidFill>
@@ -10291,14 +9705,8 @@
               <a:t>{{- default .Chart.Name .Values.nameOverride | trunc 63 | trimSuffix "-" -}}
 </a:t>
             </a:r>
-            <a:pPr algn="l" indent="0" marL="0">
-              <a:lnSpc>
-                <a:spcPct val="110000"/>
-              </a:lnSpc>
-              <a:buNone/>
-            </a:pPr>
-            <a:r>
-              <a:rPr lang="en-US" sz="1200" dirty="0">
+            <a:r>
+              <a:rPr lang="en-US" sz="1250" dirty="0">
                 <a:solidFill>
                   <a:srgbClr val="E6E6E6"/>
                 </a:solidFill>
@@ -10309,14 +9717,8 @@
               <a:t>{{- end -}}
 </a:t>
             </a:r>
-            <a:pPr algn="l" indent="0" marL="0">
-              <a:lnSpc>
-                <a:spcPct val="110000"/>
-              </a:lnSpc>
-              <a:buNone/>
-            </a:pPr>
-            <a:r>
-              <a:rPr lang="en-US" sz="1200" dirty="0">
+            <a:r>
+              <a:rPr lang="en-US" sz="1250" dirty="0">
                 <a:solidFill>
                   <a:srgbClr val="E6E6E6"/>
                 </a:solidFill>
@@ -10327,14 +9729,8 @@
               <a:t>
 </a:t>
             </a:r>
-            <a:pPr algn="l" indent="0" marL="0">
-              <a:lnSpc>
-                <a:spcPct val="110000"/>
-              </a:lnSpc>
-              <a:buNone/>
-            </a:pPr>
-            <a:r>
-              <a:rPr lang="en-US" sz="1200" dirty="0">
+            <a:r>
+              <a:rPr lang="en-US" sz="1250" dirty="0">
                 <a:solidFill>
                   <a:srgbClr val="E6E6E6"/>
                 </a:solidFill>
@@ -10345,14 +9741,8 @@
               <a:t>{{- define "shipping-service.selectorLabels" -}}
 </a:t>
             </a:r>
-            <a:pPr algn="l" indent="0" marL="0">
-              <a:lnSpc>
-                <a:spcPct val="110000"/>
-              </a:lnSpc>
-              <a:buNone/>
-            </a:pPr>
-            <a:r>
-              <a:rPr lang="en-US" sz="1200" dirty="0">
+            <a:r>
+              <a:rPr lang="en-US" sz="1250" dirty="0">
                 <a:solidFill>
                   <a:srgbClr val="E6E6E6"/>
                 </a:solidFill>
@@ -10363,14 +9753,8 @@
               <a:t>app.kubernetes.io/name: {{ include "shipping-service.name" . }}
 </a:t>
             </a:r>
-            <a:pPr algn="l" indent="0" marL="0">
-              <a:lnSpc>
-                <a:spcPct val="110000"/>
-              </a:lnSpc>
-              <a:buNone/>
-            </a:pPr>
-            <a:r>
-              <a:rPr lang="en-US" sz="1200" dirty="0">
+            <a:r>
+              <a:rPr lang="en-US" sz="1250" dirty="0">
                 <a:solidFill>
                   <a:srgbClr val="E6E6E6"/>
                 </a:solidFill>
@@ -10381,14 +9765,8 @@
               <a:t>app.kubernetes.io/instance: {{ .Release.Name }}
 </a:t>
             </a:r>
-            <a:pPr algn="l" indent="0" marL="0">
-              <a:lnSpc>
-                <a:spcPct val="110000"/>
-              </a:lnSpc>
-              <a:buNone/>
-            </a:pPr>
-            <a:r>
-              <a:rPr lang="en-US" sz="1200" dirty="0">
+            <a:r>
+              <a:rPr lang="en-US" sz="1250" dirty="0">
                 <a:solidFill>
                   <a:srgbClr val="E6E6E6"/>
                 </a:solidFill>
@@ -10399,14 +9777,8 @@
               <a:t>{{- end -}}
 </a:t>
             </a:r>
-            <a:pPr algn="l" indent="0" marL="0">
-              <a:lnSpc>
-                <a:spcPct val="110000"/>
-              </a:lnSpc>
-              <a:buNone/>
-            </a:pPr>
-            <a:r>
-              <a:rPr lang="en-US" sz="1200" dirty="0">
+            <a:r>
+              <a:rPr lang="en-US" sz="1250" dirty="0">
                 <a:solidFill>
                   <a:srgbClr val="E6E6E6"/>
                 </a:solidFill>
@@ -10417,14 +9789,8 @@
               <a:t>
 </a:t>
             </a:r>
-            <a:pPr algn="l" indent="0" marL="0">
-              <a:lnSpc>
-                <a:spcPct val="110000"/>
-              </a:lnSpc>
-              <a:buNone/>
-            </a:pPr>
-            <a:r>
-              <a:rPr lang="en-US" sz="1200" dirty="0">
+            <a:r>
+              <a:rPr lang="en-US" sz="1250" dirty="0">
                 <a:solidFill>
                   <a:srgbClr val="E6E6E6"/>
                 </a:solidFill>
@@ -10435,14 +9801,8 @@
               <a:t>{{/* call site, in any template */}}
 </a:t>
             </a:r>
-            <a:pPr algn="l" indent="0" marL="0">
-              <a:lnSpc>
-                <a:spcPct val="110000"/>
-              </a:lnSpc>
-              <a:buNone/>
-            </a:pPr>
-            <a:r>
-              <a:rPr lang="en-US" sz="1200" dirty="0">
+            <a:r>
+              <a:rPr lang="en-US" sz="1250" dirty="0">
                 <a:solidFill>
                   <a:srgbClr val="E6E6E6"/>
                 </a:solidFill>
@@ -10453,14 +9813,8 @@
               <a:t>  labels:
 </a:t>
             </a:r>
-            <a:pPr algn="l" indent="0" marL="0">
-              <a:lnSpc>
-                <a:spcPct val="110000"/>
-              </a:lnSpc>
-              <a:buNone/>
-            </a:pPr>
-            <a:r>
-              <a:rPr lang="en-US" sz="1200" dirty="0">
+            <a:r>
+              <a:rPr lang="en-US" sz="1250" dirty="0">
                 <a:solidFill>
                   <a:srgbClr val="E6E6E6"/>
                 </a:solidFill>
@@ -10471,7 +9825,7 @@
               <a:t>    {{- include "shipping-service.labels" . | nindent 4 }}
 </a:t>
             </a:r>
-            <a:endParaRPr lang="en-US" sz="1200" dirty="0"/>
+            <a:endParaRPr lang="en-US" sz="1250" dirty="0"/>
           </a:p>
         </p:txBody>
       </p:sp>
@@ -10483,8 +9837,8 @@
         </p:nvSpPr>
         <p:spPr>
           <a:xfrm>
-            <a:off x="566928" y="5943600"/>
-            <a:ext cx="7680960" cy="310896"/>
+            <a:off x="566928" y="4621689"/>
+            <a:ext cx="8046720" cy="310896"/>
           </a:xfrm>
           <a:prstGeom prst="rect">
             <a:avLst/>
@@ -10522,8 +9876,8 @@
         </p:nvSpPr>
         <p:spPr>
           <a:xfrm>
-            <a:off x="8567928" y="1783080"/>
-            <a:ext cx="3056839" cy="4114800"/>
+            <a:off x="8933688" y="1600200"/>
+            <a:ext cx="2691079" cy="4297680"/>
           </a:xfrm>
           <a:prstGeom prst="rect">
             <a:avLst/>
@@ -10535,7 +9889,7 @@
           <a:bodyPr wrap="square" lIns="0" tIns="0" rIns="0" bIns="0" rtlCol="0" anchor="t"/>
           <a:lstStyle/>
           <a:p>
-            <a:pPr marL="228600" indent="-228600">
+            <a:pPr marL="304800" indent="-304800">
               <a:lnSpc>
                 <a:spcPct val="112000"/>
               </a:lnSpc>
@@ -10549,7 +9903,7 @@
               <a:buChar char="●"/>
             </a:pPr>
             <a:r>
-              <a:rPr lang="en-US" sz="1500" b="1" dirty="0">
+              <a:rPr lang="en-US" sz="1400" b="1" dirty="0">
                 <a:solidFill>
                   <a:srgbClr val="151515"/>
                 </a:solidFill>
@@ -10559,14 +9913,8 @@
               </a:rPr>
               <a:t>define ... end</a:t>
             </a:r>
-            <a:pPr indent="0" marL="0">
-              <a:lnSpc>
-                <a:spcPct val="112000"/>
-              </a:lnSpc>
-              <a:buNone/>
-            </a:pPr>
-            <a:r>
-              <a:rPr lang="en-US" sz="1500" dirty="0">
+            <a:r>
+              <a:rPr lang="en-US" sz="1400" dirty="0">
                 <a:solidFill>
                   <a:srgbClr val="242424"/>
                 </a:solidFill>
@@ -10576,10 +9924,10 @@
               </a:rPr>
               <a:t>: a global name; prefix it with the chart name.</a:t>
             </a:r>
-            <a:endParaRPr lang="en-US" sz="1500" dirty="0"/>
-          </a:p>
-          <a:p>
-            <a:pPr marL="228600" indent="-228600">
+            <a:endParaRPr lang="en-US" sz="1400" dirty="0"/>
+          </a:p>
+          <a:p>
+            <a:pPr marL="304800" indent="-304800">
               <a:lnSpc>
                 <a:spcPct val="112000"/>
               </a:lnSpc>
@@ -10593,7 +9941,7 @@
               <a:buChar char="●"/>
             </a:pPr>
             <a:r>
-              <a:rPr lang="en-US" sz="1500" b="1" dirty="0">
+              <a:rPr lang="en-US" sz="1400" b="1" dirty="0">
                 <a:solidFill>
                   <a:srgbClr val="151515"/>
                 </a:solidFill>
@@ -10603,14 +9951,8 @@
               </a:rPr>
               <a:t>include</a:t>
             </a:r>
-            <a:pPr indent="0" marL="0">
-              <a:lnSpc>
-                <a:spcPct val="112000"/>
-              </a:lnSpc>
-              <a:buNone/>
-            </a:pPr>
-            <a:r>
-              <a:rPr lang="en-US" sz="1500" dirty="0">
+            <a:r>
+              <a:rPr lang="en-US" sz="1400" dirty="0">
                 <a:solidFill>
                   <a:srgbClr val="242424"/>
                 </a:solidFill>
@@ -10620,10 +9962,10 @@
               </a:rPr>
               <a:t>: returns a string, so it pipes to nindent, quote or trunc.</a:t>
             </a:r>
-            <a:endParaRPr lang="en-US" sz="1500" dirty="0"/>
-          </a:p>
-          <a:p>
-            <a:pPr marL="228600" indent="-228600">
+            <a:endParaRPr lang="en-US" sz="1400" dirty="0"/>
+          </a:p>
+          <a:p>
+            <a:pPr marL="304800" indent="-304800">
               <a:lnSpc>
                 <a:spcPct val="112000"/>
               </a:lnSpc>
@@ -10637,7 +9979,7 @@
               <a:buChar char="●"/>
             </a:pPr>
             <a:r>
-              <a:rPr lang="en-US" sz="1500" b="1" dirty="0">
+              <a:rPr lang="en-US" sz="1400" b="1" dirty="0">
                 <a:solidFill>
                   <a:srgbClr val="151515"/>
                 </a:solidFill>
@@ -10647,14 +9989,8 @@
               </a:rPr>
               <a:t>template</a:t>
             </a:r>
-            <a:pPr indent="0" marL="0">
-              <a:lnSpc>
-                <a:spcPct val="112000"/>
-              </a:lnSpc>
-              <a:buNone/>
-            </a:pPr>
-            <a:r>
-              <a:rPr lang="en-US" sz="1500" dirty="0">
+            <a:r>
+              <a:rPr lang="en-US" sz="1400" dirty="0">
                 <a:solidFill>
                   <a:srgbClr val="242424"/>
                 </a:solidFill>
@@ -10664,10 +10000,10 @@
               </a:rPr>
               <a:t>: inserts output directly and cannot be piped; use include.</a:t>
             </a:r>
-            <a:endParaRPr lang="en-US" sz="1500" dirty="0"/>
-          </a:p>
-          <a:p>
-            <a:pPr marL="228600" indent="-228600">
+            <a:endParaRPr lang="en-US" sz="1400" dirty="0"/>
+          </a:p>
+          <a:p>
+            <a:pPr marL="304800" indent="-304800">
               <a:lnSpc>
                 <a:spcPct val="112000"/>
               </a:lnSpc>
@@ -10681,7 +10017,7 @@
               <a:buChar char="●"/>
             </a:pPr>
             <a:r>
-              <a:rPr lang="en-US" sz="1500" b="1" dirty="0">
+              <a:rPr lang="en-US" sz="1400" b="1" dirty="0">
                 <a:solidFill>
                   <a:srgbClr val="151515"/>
                 </a:solidFill>
@@ -10691,14 +10027,8 @@
               </a:rPr>
               <a:t>Pass the context</a:t>
             </a:r>
-            <a:pPr indent="0" marL="0">
-              <a:lnSpc>
-                <a:spcPct val="112000"/>
-              </a:lnSpc>
-              <a:buNone/>
-            </a:pPr>
-            <a:r>
-              <a:rPr lang="en-US" sz="1500" dirty="0">
+            <a:r>
+              <a:rPr lang="en-US" sz="1400" dirty="0">
                 <a:solidFill>
                   <a:srgbClr val="242424"/>
                 </a:solidFill>
@@ -10708,7 +10038,7 @@
               </a:rPr>
               <a:t>: the trailing dot; omit it and .Release fails.</a:t>
             </a:r>
-            <a:endParaRPr lang="en-US" sz="1500" dirty="0"/>
+            <a:endParaRPr lang="en-US" sz="1400" dirty="0"/>
           </a:p>
         </p:txBody>
       </p:sp>
@@ -10915,7 +10245,7 @@
                         <a:buNone/>
                       </a:pPr>
                       <a:r>
-                        <a:rPr lang="en-US" sz="1600" b="1" dirty="0">
+                        <a:rPr lang="en-US" sz="1500" b="1" dirty="0">
                           <a:solidFill>
                             <a:srgbClr val="EE0000"/>
                           </a:solidFill>
@@ -10925,7 +10255,7 @@
                         </a:rPr>
                         <a:t>tpl</a:t>
                       </a:r>
-                      <a:endParaRPr lang="en-US" sz="1600" dirty="0">
+                      <a:endParaRPr lang="en-US" sz="1500" dirty="0">
                         <a:latin typeface="Red Hat Mono" charset="0"/>
                         <a:ea typeface="Red Hat Mono" charset="0"/>
                         <a:cs typeface="Red Hat Mono" charset="0"/>
@@ -10980,7 +10310,7 @@
                         <a:buNone/>
                       </a:pPr>
                       <a:r>
-                        <a:rPr lang="en-US" sz="1600" b="1" dirty="0">
+                        <a:rPr lang="en-US" sz="1400" b="1" dirty="0">
                           <a:solidFill>
                             <a:srgbClr val="151515"/>
                           </a:solidFill>
@@ -10990,7 +10320,7 @@
                         </a:rPr>
                         <a:t>Render a string</a:t>
                       </a:r>
-                      <a:endParaRPr lang="en-US" sz="1600" dirty="0">
+                      <a:endParaRPr lang="en-US" sz="1400" dirty="0">
                         <a:latin typeface="Red Hat Text" charset="0"/>
                         <a:ea typeface="Red Hat Text" charset="0"/>
                         <a:cs typeface="Red Hat Text" charset="0"/>
@@ -11045,7 +10375,7 @@
                         <a:buNone/>
                       </a:pPr>
                       <a:r>
-                        <a:rPr lang="en-US" sz="1500" dirty="0">
+                        <a:rPr lang="en-US" sz="1300" dirty="0">
                           <a:solidFill>
                             <a:srgbClr val="242424"/>
                           </a:solidFill>
@@ -11055,7 +10385,7 @@
                         </a:rPr>
                         <a:t>tpl $value $ evaluates a value as a template; apply it only to values the operator controls</a:t>
                       </a:r>
-                      <a:endParaRPr lang="en-US" sz="1500" dirty="0">
+                      <a:endParaRPr lang="en-US" sz="1300" dirty="0">
                         <a:latin typeface="Red Hat Text" charset="0"/>
                         <a:ea typeface="Red Hat Text" charset="0"/>
                         <a:cs typeface="Red Hat Text" charset="0"/>
@@ -11112,7 +10442,7 @@
                         <a:buNone/>
                       </a:pPr>
                       <a:r>
-                        <a:rPr lang="en-US" sz="1600" b="1" dirty="0">
+                        <a:rPr lang="en-US" sz="1500" b="1" dirty="0">
                           <a:solidFill>
                             <a:srgbClr val="EE0000"/>
                           </a:solidFill>
@@ -11122,7 +10452,7 @@
                         </a:rPr>
                         <a:t>required</a:t>
                       </a:r>
-                      <a:endParaRPr lang="en-US" sz="1600" dirty="0">
+                      <a:endParaRPr lang="en-US" sz="1500" dirty="0">
                         <a:latin typeface="Red Hat Mono" charset="0"/>
                         <a:ea typeface="Red Hat Mono" charset="0"/>
                         <a:cs typeface="Red Hat Mono" charset="0"/>
@@ -11177,7 +10507,7 @@
                         <a:buNone/>
                       </a:pPr>
                       <a:r>
-                        <a:rPr lang="en-US" sz="1600" b="1" dirty="0">
+                        <a:rPr lang="en-US" sz="1400" b="1" dirty="0">
                           <a:solidFill>
                             <a:srgbClr val="151515"/>
                           </a:solidFill>
@@ -11187,7 +10517,7 @@
                         </a:rPr>
                         <a:t>Stop on empty</a:t>
                       </a:r>
-                      <a:endParaRPr lang="en-US" sz="1600" dirty="0">
+                      <a:endParaRPr lang="en-US" sz="1400" dirty="0">
                         <a:latin typeface="Red Hat Text" charset="0"/>
                         <a:ea typeface="Red Hat Text" charset="0"/>
                         <a:cs typeface="Red Hat Text" charset="0"/>
@@ -11242,7 +10572,7 @@
                         <a:buNone/>
                       </a:pPr>
                       <a:r>
-                        <a:rPr lang="en-US" sz="1500" dirty="0">
+                        <a:rPr lang="en-US" sz="1300" dirty="0">
                           <a:solidFill>
                             <a:srgbClr val="242424"/>
                           </a:solidFill>
@@ -11252,7 +10582,7 @@
                         </a:rPr>
                         <a:t>required "image.repository is required" .Values.image.repository aborts with your message</a:t>
                       </a:r>
-                      <a:endParaRPr lang="en-US" sz="1500" dirty="0">
+                      <a:endParaRPr lang="en-US" sz="1300" dirty="0">
                         <a:latin typeface="Red Hat Text" charset="0"/>
                         <a:ea typeface="Red Hat Text" charset="0"/>
                         <a:cs typeface="Red Hat Text" charset="0"/>
@@ -11309,7 +10639,7 @@
                         <a:buNone/>
                       </a:pPr>
                       <a:r>
-                        <a:rPr lang="en-US" sz="1600" b="1" dirty="0">
+                        <a:rPr lang="en-US" sz="1500" b="1" dirty="0">
                           <a:solidFill>
                             <a:srgbClr val="EE0000"/>
                           </a:solidFill>
@@ -11319,7 +10649,7 @@
                         </a:rPr>
                         <a:t>fail</a:t>
                       </a:r>
-                      <a:endParaRPr lang="en-US" sz="1600" dirty="0">
+                      <a:endParaRPr lang="en-US" sz="1500" dirty="0">
                         <a:latin typeface="Red Hat Mono" charset="0"/>
                         <a:ea typeface="Red Hat Mono" charset="0"/>
                         <a:cs typeface="Red Hat Mono" charset="0"/>
@@ -11374,7 +10704,7 @@
                         <a:buNone/>
                       </a:pPr>
                       <a:r>
-                        <a:rPr lang="en-US" sz="1600" b="1" dirty="0">
+                        <a:rPr lang="en-US" sz="1400" b="1" dirty="0">
                           <a:solidFill>
                             <a:srgbClr val="151515"/>
                           </a:solidFill>
@@ -11384,7 +10714,7 @@
                         </a:rPr>
                         <a:t>Reject a combination</a:t>
                       </a:r>
-                      <a:endParaRPr lang="en-US" sz="1600" dirty="0">
+                      <a:endParaRPr lang="en-US" sz="1400" dirty="0">
                         <a:latin typeface="Red Hat Text" charset="0"/>
                         <a:ea typeface="Red Hat Text" charset="0"/>
                         <a:cs typeface="Red Hat Text" charset="0"/>
@@ -11439,7 +10769,7 @@
                         <a:buNone/>
                       </a:pPr>
                       <a:r>
-                        <a:rPr lang="en-US" sz="1500" dirty="0">
+                        <a:rPr lang="en-US" sz="1300" dirty="0">
                           <a:solidFill>
                             <a:srgbClr val="242424"/>
                           </a:solidFill>
@@ -11449,7 +10779,7 @@
                         </a:rPr>
                         <a:t>Unconditional abort, used inside an if to reject invalid combinations of values</a:t>
                       </a:r>
-                      <a:endParaRPr lang="en-US" sz="1500" dirty="0">
+                      <a:endParaRPr lang="en-US" sz="1300" dirty="0">
                         <a:latin typeface="Red Hat Text" charset="0"/>
                         <a:ea typeface="Red Hat Text" charset="0"/>
                         <a:cs typeface="Red Hat Text" charset="0"/>
@@ -11506,7 +10836,7 @@
                         <a:buNone/>
                       </a:pPr>
                       <a:r>
-                        <a:rPr lang="en-US" sz="1600" b="1" dirty="0">
+                        <a:rPr lang="en-US" sz="1500" b="1" dirty="0">
                           <a:solidFill>
                             <a:srgbClr val="EE0000"/>
                           </a:solidFill>
@@ -11516,7 +10846,7 @@
                         </a:rPr>
                         <a:t>lookup</a:t>
                       </a:r>
-                      <a:endParaRPr lang="en-US" sz="1600" dirty="0">
+                      <a:endParaRPr lang="en-US" sz="1500" dirty="0">
                         <a:latin typeface="Red Hat Mono" charset="0"/>
                         <a:ea typeface="Red Hat Mono" charset="0"/>
                         <a:cs typeface="Red Hat Mono" charset="0"/>
@@ -11571,7 +10901,7 @@
                         <a:buNone/>
                       </a:pPr>
                       <a:r>
-                        <a:rPr lang="en-US" sz="1600" b="1" dirty="0">
+                        <a:rPr lang="en-US" sz="1400" b="1" dirty="0">
                           <a:solidFill>
                             <a:srgbClr val="151515"/>
                           </a:solidFill>
@@ -11581,7 +10911,7 @@
                         </a:rPr>
                         <a:t>Read the cluster</a:t>
                       </a:r>
-                      <a:endParaRPr lang="en-US" sz="1600" dirty="0">
+                      <a:endParaRPr lang="en-US" sz="1400" dirty="0">
                         <a:latin typeface="Red Hat Text" charset="0"/>
                         <a:ea typeface="Red Hat Text" charset="0"/>
                         <a:cs typeface="Red Hat Text" charset="0"/>
@@ -11636,7 +10966,7 @@
                         <a:buNone/>
                       </a:pPr>
                       <a:r>
-                        <a:rPr lang="en-US" sz="1500" dirty="0">
+                        <a:rPr lang="en-US" sz="1300" dirty="0">
                           <a:solidFill>
                             <a:srgbClr val="242424"/>
                           </a:solidFill>
@@ -11644,9 +10974,52 @@
                           <a:ea typeface="Red Hat Text" pitchFamily="34" charset="-122"/>
                           <a:cs typeface="Red Hat Text" pitchFamily="34" charset="-120"/>
                         </a:rPr>
-                        <a:t>Returns an empty map under helm template and --dry-run=client; works with --dry-run=server</a:t>
+                        <a:t>Returns an empty map under helm template and </a:t>
                       </a:r>
-                      <a:endParaRPr lang="en-US" sz="1500" dirty="0">
+                      <a:endParaRPr lang="en-US" sz="1300" dirty="0">
+                        <a:latin typeface="Red Hat Text" charset="0"/>
+                        <a:ea typeface="Red Hat Text" charset="0"/>
+                        <a:cs typeface="Red Hat Text" charset="0"/>
+                      </a:endParaRPr>
+                    </a:p>
+                    <a:p>
+                      <a:pPr algn="l" indent="0" marL="0">
+                        <a:buNone/>
+                      </a:pPr>
+                      <a:r>
+                        <a:rPr lang="en-US" sz="1200" dirty="0">
+                          <a:solidFill>
+                            <a:srgbClr val="151515"/>
+                          </a:solidFill>
+                          <a:latin typeface="Red Hat Mono" pitchFamily="34" charset="0"/>
+                          <a:ea typeface="Red Hat Mono" pitchFamily="34" charset="-122"/>
+                          <a:cs typeface="Red Hat Mono" pitchFamily="34" charset="-120"/>
+                        </a:rPr>
+                        <a:t>--dry-run=client</a:t>
+                      </a:r>
+                      <a:r>
+                        <a:rPr lang="en-US" sz="1300" dirty="0">
+                          <a:solidFill>
+                            <a:srgbClr val="242424"/>
+                          </a:solidFill>
+                          <a:latin typeface="Red Hat Text" pitchFamily="34" charset="0"/>
+                          <a:ea typeface="Red Hat Text" pitchFamily="34" charset="-122"/>
+                          <a:cs typeface="Red Hat Text" pitchFamily="34" charset="-120"/>
+                        </a:rPr>
+                        <a:t>; works with </a:t>
+                      </a:r>
+                      <a:r>
+                        <a:rPr lang="en-US" sz="1200" dirty="0">
+                          <a:solidFill>
+                            <a:srgbClr val="151515"/>
+                          </a:solidFill>
+                          <a:latin typeface="Red Hat Mono" pitchFamily="34" charset="0"/>
+                          <a:ea typeface="Red Hat Mono" pitchFamily="34" charset="-122"/>
+                          <a:cs typeface="Red Hat Mono" pitchFamily="34" charset="-120"/>
+                        </a:rPr>
+                        <a:t>--dry-run=server</a:t>
+                      </a:r>
+                      <a:endParaRPr lang="en-US" sz="1300" dirty="0">
                         <a:latin typeface="Red Hat Text" charset="0"/>
                         <a:ea typeface="Red Hat Text" charset="0"/>
                         <a:cs typeface="Red Hat Text" charset="0"/>
@@ -11910,8 +11283,8 @@
         </p:nvSpPr>
         <p:spPr>
           <a:xfrm>
-            <a:off x="566928" y="1691640"/>
-            <a:ext cx="11055096" cy="4251960"/>
+            <a:off x="566928" y="1417320"/>
+            <a:ext cx="11055096" cy="2377440"/>
           </a:xfrm>
           <a:prstGeom prst="rect">
             <a:avLst/>
@@ -11935,8 +11308,8 @@
         </p:nvSpPr>
         <p:spPr>
           <a:xfrm>
-            <a:off x="749808" y="1783080"/>
-            <a:ext cx="10689336" cy="4069080"/>
+            <a:off x="749808" y="1508760"/>
+            <a:ext cx="10689336" cy="2194560"/>
           </a:xfrm>
           <a:prstGeom prst="rect">
             <a:avLst/>
@@ -11955,7 +11328,7 @@
               <a:buNone/>
             </a:pPr>
             <a:r>
-              <a:rPr lang="en-US" sz="1300" dirty="0">
+              <a:rPr lang="en-US" sz="1250" dirty="0">
                 <a:solidFill>
                   <a:srgbClr val="E6E6E6"/>
                 </a:solidFill>
@@ -11963,17 +11336,11 @@
                 <a:ea typeface="Red Hat Mono" pitchFamily="34" charset="-122"/>
                 <a:cs typeface="Red Hat Mono" pitchFamily="34" charset="-120"/>
               </a:rPr>
-              <a:t>{{ include "pc-lib.fullname" . }} {{ .Chart.AppVersion }} installed as release "{{ .Release.Name }}" in namespace {{ .Release.Namespace }}.
+              <a:t>Reach the service:
 </a:t>
             </a:r>
-            <a:pPr algn="l" indent="0" marL="0">
-              <a:lnSpc>
-                <a:spcPct val="110000"/>
-              </a:lnSpc>
-              <a:buNone/>
-            </a:pPr>
-            <a:r>
-              <a:rPr lang="en-US" sz="1300" dirty="0">
+            <a:r>
+              <a:rPr lang="en-US" sz="1250" dirty="0">
                 <a:solidFill>
                   <a:srgbClr val="E6E6E6"/>
                 </a:solidFill>
@@ -11981,17 +11348,11 @@
                 <a:ea typeface="Red Hat Mono" pitchFamily="34" charset="-122"/>
                 <a:cs typeface="Red Hat Mono" pitchFamily="34" charset="-120"/>
               </a:rPr>
-              <a:t>Storage: {{ .Values.config.storage }}
+              <a:t>{{- if eq .Values.service.type "NodePort" }}
 </a:t>
             </a:r>
-            <a:pPr algn="l" indent="0" marL="0">
-              <a:lnSpc>
-                <a:spcPct val="110000"/>
-              </a:lnSpc>
-              <a:buNone/>
-            </a:pPr>
-            <a:r>
-              <a:rPr lang="en-US" sz="1300" dirty="0">
+            <a:r>
+              <a:rPr lang="en-US" sz="1250" dirty="0">
                 <a:solidFill>
                   <a:srgbClr val="E6E6E6"/>
                 </a:solidFill>
@@ -11999,17 +11360,11 @@
                 <a:ea typeface="Red Hat Mono" pitchFamily="34" charset="-122"/>
                 <a:cs typeface="Red Hat Mono" pitchFamily="34" charset="-120"/>
               </a:rPr>
-              <a:t>
+              <a:t>  [host]$ minikube -p helm4dev service {{ include "pc-lib.fullname" . }} -n {{ .Release.Namespace }} --url
 </a:t>
             </a:r>
-            <a:pPr algn="l" indent="0" marL="0">
-              <a:lnSpc>
-                <a:spcPct val="110000"/>
-              </a:lnSpc>
-              <a:buNone/>
-            </a:pPr>
-            <a:r>
-              <a:rPr lang="en-US" sz="1300" dirty="0">
+            <a:r>
+              <a:rPr lang="en-US" sz="1250" dirty="0">
                 <a:solidFill>
                   <a:srgbClr val="E6E6E6"/>
                 </a:solidFill>
@@ -12017,17 +11372,11 @@
                 <a:ea typeface="Red Hat Mono" pitchFamily="34" charset="-122"/>
                 <a:cs typeface="Red Hat Mono" pitchFamily="34" charset="-120"/>
               </a:rPr>
-              <a:t>Reach the service:
+              <a:t>{{- else }}
 </a:t>
             </a:r>
-            <a:pPr algn="l" indent="0" marL="0">
-              <a:lnSpc>
-                <a:spcPct val="110000"/>
-              </a:lnSpc>
-              <a:buNone/>
-            </a:pPr>
-            <a:r>
-              <a:rPr lang="en-US" sz="1300" dirty="0">
+            <a:r>
+              <a:rPr lang="en-US" sz="1250" dirty="0">
                 <a:solidFill>
                   <a:srgbClr val="E6E6E6"/>
                 </a:solidFill>
@@ -12035,17 +11384,11 @@
                 <a:ea typeface="Red Hat Mono" pitchFamily="34" charset="-122"/>
                 <a:cs typeface="Red Hat Mono" pitchFamily="34" charset="-120"/>
               </a:rPr>
-              <a:t>{{- if eq .Values.service.type "NodePort" }}
+              <a:t>  [host]$ kubectl -n {{ .Release.Namespace }} get svc {{ include "pc-lib.fullname" . }}
 </a:t>
             </a:r>
-            <a:pPr algn="l" indent="0" marL="0">
-              <a:lnSpc>
-                <a:spcPct val="110000"/>
-              </a:lnSpc>
-              <a:buNone/>
-            </a:pPr>
-            <a:r>
-              <a:rPr lang="en-US" sz="1300" dirty="0">
+            <a:r>
+              <a:rPr lang="en-US" sz="1250" dirty="0">
                 <a:solidFill>
                   <a:srgbClr val="E6E6E6"/>
                 </a:solidFill>
@@ -12053,17 +11396,11 @@
                 <a:ea typeface="Red Hat Mono" pitchFamily="34" charset="-122"/>
                 <a:cs typeface="Red Hat Mono" pitchFamily="34" charset="-120"/>
               </a:rPr>
-              <a:t>  [host]$ minikube -p helm4dev service {{ include "pc-lib.fullname" . }} -n {{ .Release.Namespace }} --url
+              <a:t>{{- end }}
 </a:t>
             </a:r>
-            <a:pPr algn="l" indent="0" marL="0">
-              <a:lnSpc>
-                <a:spcPct val="110000"/>
-              </a:lnSpc>
-              <a:buNone/>
-            </a:pPr>
-            <a:r>
-              <a:rPr lang="en-US" sz="1300" dirty="0">
+            <a:r>
+              <a:rPr lang="en-US" sz="1250" dirty="0">
                 <a:solidFill>
                   <a:srgbClr val="E6E6E6"/>
                 </a:solidFill>
@@ -12071,17 +11408,11 @@
                 <a:ea typeface="Red Hat Mono" pitchFamily="34" charset="-122"/>
                 <a:cs typeface="Red Hat Mono" pitchFamily="34" charset="-120"/>
               </a:rPr>
-              <a:t>{{- else }}
+              <a:t>
 </a:t>
             </a:r>
-            <a:pPr algn="l" indent="0" marL="0">
-              <a:lnSpc>
-                <a:spcPct val="110000"/>
-              </a:lnSpc>
-              <a:buNone/>
-            </a:pPr>
-            <a:r>
-              <a:rPr lang="en-US" sz="1300" dirty="0">
+            <a:r>
+              <a:rPr lang="en-US" sz="1250" dirty="0">
                 <a:solidFill>
                   <a:srgbClr val="E6E6E6"/>
                 </a:solidFill>
@@ -12089,17 +11420,11 @@
                 <a:ea typeface="Red Hat Mono" pitchFamily="34" charset="-122"/>
                 <a:cs typeface="Red Hat Mono" pitchFamily="34" charset="-120"/>
               </a:rPr>
-              <a:t>  [host]$ kubectl -n {{ .Release.Namespace }} get svc {{ include "pc-lib.fullname" . }}
+              <a:t>Run the chart test:
 </a:t>
             </a:r>
-            <a:pPr algn="l" indent="0" marL="0">
-              <a:lnSpc>
-                <a:spcPct val="110000"/>
-              </a:lnSpc>
-              <a:buNone/>
-            </a:pPr>
-            <a:r>
-              <a:rPr lang="en-US" sz="1300" dirty="0">
+            <a:r>
+              <a:rPr lang="en-US" sz="1250" dirty="0">
                 <a:solidFill>
                   <a:srgbClr val="E6E6E6"/>
                 </a:solidFill>
@@ -12107,64 +11432,10 @@
                 <a:ea typeface="Red Hat Mono" pitchFamily="34" charset="-122"/>
                 <a:cs typeface="Red Hat Mono" pitchFamily="34" charset="-120"/>
               </a:rPr>
-              <a:t>{{- end }}
-</a:t>
-            </a:r>
-            <a:pPr algn="l" indent="0" marL="0">
-              <a:lnSpc>
-                <a:spcPct val="110000"/>
-              </a:lnSpc>
-              <a:buNone/>
-            </a:pPr>
-            <a:r>
-              <a:rPr lang="en-US" sz="1300" dirty="0">
-                <a:solidFill>
-                  <a:srgbClr val="E6E6E6"/>
-                </a:solidFill>
-                <a:latin typeface="Red Hat Mono" pitchFamily="34" charset="0"/>
-                <a:ea typeface="Red Hat Mono" pitchFamily="34" charset="-122"/>
-                <a:cs typeface="Red Hat Mono" pitchFamily="34" charset="-120"/>
-              </a:rPr>
-              <a:t>
-</a:t>
-            </a:r>
-            <a:pPr algn="l" indent="0" marL="0">
-              <a:lnSpc>
-                <a:spcPct val="110000"/>
-              </a:lnSpc>
-              <a:buNone/>
-            </a:pPr>
-            <a:r>
-              <a:rPr lang="en-US" sz="1300" dirty="0">
-                <a:solidFill>
-                  <a:srgbClr val="E6E6E6"/>
-                </a:solidFill>
-                <a:latin typeface="Red Hat Mono" pitchFamily="34" charset="0"/>
-                <a:ea typeface="Red Hat Mono" pitchFamily="34" charset="-122"/>
-                <a:cs typeface="Red Hat Mono" pitchFamily="34" charset="-120"/>
-              </a:rPr>
-              <a:t>Run the chart test:
-</a:t>
-            </a:r>
-            <a:pPr algn="l" indent="0" marL="0">
-              <a:lnSpc>
-                <a:spcPct val="110000"/>
-              </a:lnSpc>
-              <a:buNone/>
-            </a:pPr>
-            <a:r>
-              <a:rPr lang="en-US" sz="1300" dirty="0">
-                <a:solidFill>
-                  <a:srgbClr val="E6E6E6"/>
-                </a:solidFill>
-                <a:latin typeface="Red Hat Mono" pitchFamily="34" charset="0"/>
-                <a:ea typeface="Red Hat Mono" pitchFamily="34" charset="-122"/>
-                <a:cs typeface="Red Hat Mono" pitchFamily="34" charset="-120"/>
-              </a:rPr>
               <a:t>  [host]$ helm test {{ .Release.Name }} -n {{ .Release.Namespace }}
 </a:t>
             </a:r>
-            <a:endParaRPr lang="en-US" sz="1300" dirty="0"/>
+            <a:endParaRPr lang="en-US" sz="1250" dirty="0"/>
           </a:p>
         </p:txBody>
       </p:sp>
@@ -12176,7 +11447,7 @@
         </p:nvSpPr>
         <p:spPr>
           <a:xfrm>
-            <a:off x="566928" y="5943600"/>
+            <a:off x="566928" y="3886200"/>
             <a:ext cx="11055096" cy="310896"/>
           </a:xfrm>
           <a:prstGeom prst="rect">
@@ -12201,7 +11472,7 @@
                 <a:ea typeface="Red Hat Text" pitchFamily="34" charset="-122"/>
                 <a:cs typeface="Red Hat Text" pitchFamily="34" charset="-120"/>
               </a:rPr>
-              <a:t>charts/shipping-service/templates/NOTES.txt</a:t>
+              <a:t>charts/shipping-service/templates/NOTES.txt (abridged: the header and storage lines are omitted)</a:t>
             </a:r>
             <a:endParaRPr lang="en-US" sz="1300" dirty="0"/>
           </a:p>
@@ -12617,8 +11888,8 @@
         </p:nvSpPr>
         <p:spPr>
           <a:xfrm>
-            <a:off x="566928" y="1691640"/>
-            <a:ext cx="7315200" cy="1828800"/>
+            <a:off x="566928" y="1417320"/>
+            <a:ext cx="8046720" cy="2377440"/>
           </a:xfrm>
           <a:prstGeom prst="rect">
             <a:avLst/>
@@ -12642,8 +11913,8 @@
         </p:nvSpPr>
         <p:spPr>
           <a:xfrm>
-            <a:off x="749808" y="1783080"/>
-            <a:ext cx="6949440" cy="1645920"/>
+            <a:off x="749808" y="1508760"/>
+            <a:ext cx="7680960" cy="2194560"/>
           </a:xfrm>
           <a:prstGeom prst="rect">
             <a:avLst/>
@@ -12662,7 +11933,7 @@
               <a:buNone/>
             </a:pPr>
             <a:r>
-              <a:rPr lang="en-US" sz="1200" dirty="0">
+              <a:rPr lang="en-US" sz="1300" dirty="0">
                 <a:solidFill>
                   <a:srgbClr val="E6E6E6"/>
                 </a:solidFill>
@@ -12673,14 +11944,8 @@
               <a:t>  template:
 </a:t>
             </a:r>
-            <a:pPr algn="l" indent="0" marL="0">
-              <a:lnSpc>
-                <a:spcPct val="110000"/>
-              </a:lnSpc>
-              <a:buNone/>
-            </a:pPr>
-            <a:r>
-              <a:rPr lang="en-US" sz="1200" dirty="0">
+            <a:r>
+              <a:rPr lang="en-US" sz="1300" dirty="0">
                 <a:solidFill>
                   <a:srgbClr val="E6E6E6"/>
                 </a:solidFill>
@@ -12691,14 +11956,8 @@
               <a:t>    metadata:
 </a:t>
             </a:r>
-            <a:pPr algn="l" indent="0" marL="0">
-              <a:lnSpc>
-                <a:spcPct val="110000"/>
-              </a:lnSpc>
-              <a:buNone/>
-            </a:pPr>
-            <a:r>
-              <a:rPr lang="en-US" sz="1200" dirty="0">
+            <a:r>
+              <a:rPr lang="en-US" sz="1300" dirty="0">
                 <a:solidFill>
                   <a:srgbClr val="E6E6E6"/>
                 </a:solidFill>
@@ -12709,14 +11968,8 @@
               <a:t>      annotations:
 </a:t>
             </a:r>
-            <a:pPr algn="l" indent="0" marL="0">
-              <a:lnSpc>
-                <a:spcPct val="110000"/>
-              </a:lnSpc>
-              <a:buNone/>
-            </a:pPr>
-            <a:r>
-              <a:rPr lang="en-US" sz="1200" dirty="0">
+            <a:r>
+              <a:rPr lang="en-US" sz="1300" dirty="0">
                 <a:solidFill>
                   <a:srgbClr val="E6E6E6"/>
                 </a:solidFill>
@@ -12727,14 +11980,8 @@
               <a:t>        checksum/config: {{ include
 </a:t>
             </a:r>
-            <a:pPr algn="l" indent="0" marL="0">
-              <a:lnSpc>
-                <a:spcPct val="110000"/>
-              </a:lnSpc>
-              <a:buNone/>
-            </a:pPr>
-            <a:r>
-              <a:rPr lang="en-US" sz="1200" dirty="0">
+            <a:r>
+              <a:rPr lang="en-US" sz="1300" dirty="0">
                 <a:solidFill>
                   <a:srgbClr val="E6E6E6"/>
                 </a:solidFill>
@@ -12745,7 +11992,7 @@
               <a:t>          (print $.Template.BasePath "/configmap.yaml") . | sha256sum }}
 </a:t>
             </a:r>
-            <a:endParaRPr lang="en-US" sz="1200" dirty="0"/>
+            <a:endParaRPr lang="en-US" sz="1300" dirty="0"/>
           </a:p>
         </p:txBody>
       </p:sp>
@@ -12757,8 +12004,8 @@
         </p:nvSpPr>
         <p:spPr>
           <a:xfrm>
-            <a:off x="566928" y="3593592"/>
-            <a:ext cx="7315200" cy="310896"/>
+            <a:off x="566928" y="3886200"/>
+            <a:ext cx="8046720" cy="310896"/>
           </a:xfrm>
           <a:prstGeom prst="rect">
             <a:avLst/>
@@ -12796,8 +12043,8 @@
         </p:nvSpPr>
         <p:spPr>
           <a:xfrm>
-            <a:off x="8202168" y="1783080"/>
-            <a:ext cx="3422599" cy="4114800"/>
+            <a:off x="8933688" y="1600200"/>
+            <a:ext cx="2691079" cy="4297680"/>
           </a:xfrm>
           <a:prstGeom prst="rect">
             <a:avLst/>
@@ -12809,7 +12056,7 @@
           <a:bodyPr wrap="square" lIns="0" tIns="0" rIns="0" bIns="0" rtlCol="0" anchor="t"/>
           <a:lstStyle/>
           <a:p>
-            <a:pPr marL="228600" indent="-228600">
+            <a:pPr marL="304800" indent="-304800">
               <a:lnSpc>
                 <a:spcPct val="112000"/>
               </a:lnSpc>
@@ -12823,7 +12070,7 @@
               <a:buChar char="●"/>
             </a:pPr>
             <a:r>
-              <a:rPr lang="en-US" sz="1500" b="1" dirty="0">
+              <a:rPr lang="en-US" sz="1400" b="1" dirty="0">
                 <a:solidFill>
                   <a:srgbClr val="151515"/>
                 </a:solidFill>
@@ -12833,14 +12080,8 @@
               </a:rPr>
               <a:t>The problem</a:t>
             </a:r>
-            <a:pPr indent="0" marL="0">
-              <a:lnSpc>
-                <a:spcPct val="112000"/>
-              </a:lnSpc>
-              <a:buNone/>
-            </a:pPr>
-            <a:r>
-              <a:rPr lang="en-US" sz="1500" dirty="0">
+            <a:r>
+              <a:rPr lang="en-US" sz="1400" dirty="0">
                 <a:solidFill>
                   <a:srgbClr val="242424"/>
                 </a:solidFill>
@@ -12850,10 +12091,10 @@
               </a:rPr>
               <a:t>: a ConfigMap change alters no Deployment field, so pods keep the old environment.</a:t>
             </a:r>
-            <a:endParaRPr lang="en-US" sz="1500" dirty="0"/>
-          </a:p>
-          <a:p>
-            <a:pPr marL="228600" indent="-228600">
+            <a:endParaRPr lang="en-US" sz="1400" dirty="0"/>
+          </a:p>
+          <a:p>
+            <a:pPr marL="304800" indent="-304800">
               <a:lnSpc>
                 <a:spcPct val="112000"/>
               </a:lnSpc>
@@ -12867,7 +12108,7 @@
               <a:buChar char="●"/>
             </a:pPr>
             <a:r>
-              <a:rPr lang="en-US" sz="1500" b="1" dirty="0">
+              <a:rPr lang="en-US" sz="1400" b="1" dirty="0">
                 <a:solidFill>
                   <a:srgbClr val="151515"/>
                 </a:solidFill>
@@ -12877,14 +12118,8 @@
               </a:rPr>
               <a:t>The fix</a:t>
             </a:r>
-            <a:pPr indent="0" marL="0">
-              <a:lnSpc>
-                <a:spcPct val="112000"/>
-              </a:lnSpc>
-              <a:buNone/>
-            </a:pPr>
-            <a:r>
-              <a:rPr lang="en-US" sz="1500" dirty="0">
+            <a:r>
+              <a:rPr lang="en-US" sz="1400" dirty="0">
                 <a:solidFill>
                   <a:srgbClr val="242424"/>
                 </a:solidFill>
@@ -12894,10 +12129,10 @@
               </a:rPr>
               <a:t>: hash the rendered ConfigMap into a pod-template annotation; a new hash rolls the pods.</a:t>
             </a:r>
-            <a:endParaRPr lang="en-US" sz="1500" dirty="0"/>
-          </a:p>
-          <a:p>
-            <a:pPr marL="228600" indent="-228600">
+            <a:endParaRPr lang="en-US" sz="1400" dirty="0"/>
+          </a:p>
+          <a:p>
+            <a:pPr marL="304800" indent="-304800">
               <a:lnSpc>
                 <a:spcPct val="112000"/>
               </a:lnSpc>
@@ -12911,7 +12146,7 @@
               <a:buChar char="●"/>
             </a:pPr>
             <a:r>
-              <a:rPr lang="en-US" sz="1500" b="1" dirty="0">
+              <a:rPr lang="en-US" sz="1400" b="1" dirty="0">
                 <a:solidFill>
                   <a:srgbClr val="151515"/>
                 </a:solidFill>
@@ -12921,14 +12156,8 @@
               </a:rPr>
               <a:t>Deterministic input only</a:t>
             </a:r>
-            <a:pPr indent="0" marL="0">
-              <a:lnSpc>
-                <a:spcPct val="112000"/>
-              </a:lnSpc>
-              <a:buNone/>
-            </a:pPr>
-            <a:r>
-              <a:rPr lang="en-US" sz="1500" dirty="0">
+            <a:r>
+              <a:rPr lang="en-US" sz="1400" dirty="0">
                 <a:solidFill>
                   <a:srgbClr val="242424"/>
                 </a:solidFill>
@@ -12938,10 +12167,10 @@
               </a:rPr>
               <a:t>: hashing a Secret built with randAlphaNum would roll pods on every render.</a:t>
             </a:r>
-            <a:endParaRPr lang="en-US" sz="1500" dirty="0"/>
-          </a:p>
-          <a:p>
-            <a:pPr marL="228600" indent="-228600">
+            <a:endParaRPr lang="en-US" sz="1400" dirty="0"/>
+          </a:p>
+          <a:p>
+            <a:pPr marL="304800" indent="-304800">
               <a:lnSpc>
                 <a:spcPct val="112000"/>
               </a:lnSpc>
@@ -12955,7 +12184,7 @@
               <a:buChar char="●"/>
             </a:pPr>
             <a:r>
-              <a:rPr lang="en-US" sz="1500" b="1" dirty="0">
+              <a:rPr lang="en-US" sz="1400" b="1" dirty="0">
                 <a:solidFill>
                   <a:srgbClr val="151515"/>
                 </a:solidFill>
@@ -12965,14 +12194,8 @@
               </a:rPr>
               <a:t>Alternative</a:t>
             </a:r>
-            <a:pPr indent="0" marL="0">
-              <a:lnSpc>
-                <a:spcPct val="112000"/>
-              </a:lnSpc>
-              <a:buNone/>
-            </a:pPr>
-            <a:r>
-              <a:rPr lang="en-US" sz="1500" dirty="0">
+            <a:r>
+              <a:rPr lang="en-US" sz="1400" dirty="0">
                 <a:solidFill>
                   <a:srgbClr val="242424"/>
                 </a:solidFill>
@@ -12982,7 +12205,7 @@
               </a:rPr>
               <a:t>: immutable ConfigMap with a content hash in its name.</a:t>
             </a:r>
-            <a:endParaRPr lang="en-US" sz="1500" dirty="0"/>
+            <a:endParaRPr lang="en-US" sz="1400" dirty="0"/>
           </a:p>
         </p:txBody>
       </p:sp>
@@ -13189,7 +12412,7 @@
                         <a:buNone/>
                       </a:pPr>
                       <a:r>
-                        <a:rPr lang="en-US" sz="1600" b="1" dirty="0">
+                        <a:rPr lang="en-US" sz="1500" b="1" dirty="0">
                           <a:solidFill>
                             <a:srgbClr val="EE0000"/>
                           </a:solidFill>
@@ -13199,7 +12422,7 @@
                         </a:rPr>
                         <a:t>existingSecret</a:t>
                       </a:r>
-                      <a:endParaRPr lang="en-US" sz="1600" dirty="0">
+                      <a:endParaRPr lang="en-US" sz="1500" dirty="0">
                         <a:latin typeface="Red Hat Mono" charset="0"/>
                         <a:ea typeface="Red Hat Mono" charset="0"/>
                         <a:cs typeface="Red Hat Mono" charset="0"/>
@@ -13254,7 +12477,7 @@
                         <a:buNone/>
                       </a:pPr>
                       <a:r>
-                        <a:rPr lang="en-US" sz="1600" b="1" dirty="0">
+                        <a:rPr lang="en-US" sz="1400" b="1" dirty="0">
                           <a:solidFill>
                             <a:srgbClr val="151515"/>
                           </a:solidFill>
@@ -13264,7 +12487,7 @@
                         </a:rPr>
                         <a:t>Nothing in Git</a:t>
                       </a:r>
-                      <a:endParaRPr lang="en-US" sz="1600" dirty="0">
+                      <a:endParaRPr lang="en-US" sz="1400" dirty="0">
                         <a:latin typeface="Red Hat Text" charset="0"/>
                         <a:ea typeface="Red Hat Text" charset="0"/>
                         <a:cs typeface="Red Hat Text" charset="0"/>
@@ -13319,7 +12542,7 @@
                         <a:buNone/>
                       </a:pPr>
                       <a:r>
-                        <a:rPr lang="en-US" sz="1500" dirty="0">
+                        <a:rPr lang="en-US" sz="1300" dirty="0">
                           <a:solidFill>
                             <a:srgbClr val="242424"/>
                           </a:solidFill>
@@ -13329,7 +12552,7 @@
                         </a:rPr>
                         <a:t>Secret created out of band; the chart references the name through secretKeyRef</a:t>
                       </a:r>
-                      <a:endParaRPr lang="en-US" sz="1500" dirty="0">
+                      <a:endParaRPr lang="en-US" sz="1300" dirty="0">
                         <a:latin typeface="Red Hat Text" charset="0"/>
                         <a:ea typeface="Red Hat Text" charset="0"/>
                         <a:cs typeface="Red Hat Text" charset="0"/>
@@ -13386,7 +12609,7 @@
                         <a:buNone/>
                       </a:pPr>
                       <a:r>
-                        <a:rPr lang="en-US" sz="1600" b="1" dirty="0">
+                        <a:rPr lang="en-US" sz="1500" b="1" dirty="0">
                           <a:solidFill>
                             <a:srgbClr val="EE0000"/>
                           </a:solidFill>
@@ -13396,7 +12619,7 @@
                         </a:rPr>
                         <a:t>External Secrets</a:t>
                       </a:r>
-                      <a:endParaRPr lang="en-US" sz="1600" dirty="0">
+                      <a:endParaRPr lang="en-US" sz="1500" dirty="0">
                         <a:latin typeface="Red Hat Mono" charset="0"/>
                         <a:ea typeface="Red Hat Mono" charset="0"/>
                         <a:cs typeface="Red Hat Mono" charset="0"/>
@@ -13451,7 +12674,7 @@
                         <a:buNone/>
                       </a:pPr>
                       <a:r>
-                        <a:rPr lang="en-US" sz="1600" b="1" dirty="0">
+                        <a:rPr lang="en-US" sz="1400" b="1" dirty="0">
                           <a:solidFill>
                             <a:srgbClr val="151515"/>
                           </a:solidFill>
@@ -13461,7 +12684,7 @@
                         </a:rPr>
                         <a:t>ExternalSecret in Git</a:t>
                       </a:r>
-                      <a:endParaRPr lang="en-US" sz="1600" dirty="0">
+                      <a:endParaRPr lang="en-US" sz="1400" dirty="0">
                         <a:latin typeface="Red Hat Text" charset="0"/>
                         <a:ea typeface="Red Hat Text" charset="0"/>
                         <a:cs typeface="Red Hat Text" charset="0"/>
@@ -13516,7 +12739,7 @@
                         <a:buNone/>
                       </a:pPr>
                       <a:r>
-                        <a:rPr lang="en-US" sz="1500" dirty="0">
+                        <a:rPr lang="en-US" sz="1300" dirty="0">
                           <a:solidFill>
                             <a:srgbClr val="242424"/>
                           </a:solidFill>
@@ -13526,7 +12749,7 @@
                         </a:rPr>
                         <a:t>The operator copies from a vault in the cluster; point existingSecret at its target</a:t>
                       </a:r>
-                      <a:endParaRPr lang="en-US" sz="1500" dirty="0">
+                      <a:endParaRPr lang="en-US" sz="1300" dirty="0">
                         <a:latin typeface="Red Hat Text" charset="0"/>
                         <a:ea typeface="Red Hat Text" charset="0"/>
                         <a:cs typeface="Red Hat Text" charset="0"/>
@@ -13583,7 +12806,7 @@
                         <a:buNone/>
                       </a:pPr>
                       <a:r>
-                        <a:rPr lang="en-US" sz="1600" b="1" dirty="0">
+                        <a:rPr lang="en-US" sz="1500" b="1" dirty="0">
                           <a:solidFill>
                             <a:srgbClr val="EE0000"/>
                           </a:solidFill>
@@ -13593,7 +12816,7 @@
                         </a:rPr>
                         <a:t>Sealed Secrets</a:t>
                       </a:r>
-                      <a:endParaRPr lang="en-US" sz="1600" dirty="0">
+                      <a:endParaRPr lang="en-US" sz="1500" dirty="0">
                         <a:latin typeface="Red Hat Mono" charset="0"/>
                         <a:ea typeface="Red Hat Mono" charset="0"/>
                         <a:cs typeface="Red Hat Mono" charset="0"/>
@@ -13648,7 +12871,7 @@
                         <a:buNone/>
                       </a:pPr>
                       <a:r>
-                        <a:rPr lang="en-US" sz="1600" b="1" dirty="0">
+                        <a:rPr lang="en-US" sz="1400" b="1" dirty="0">
                           <a:solidFill>
                             <a:srgbClr val="151515"/>
                           </a:solidFill>
@@ -13658,7 +12881,7 @@
                         </a:rPr>
                         <a:t>Encrypted in Git</a:t>
                       </a:r>
-                      <a:endParaRPr lang="en-US" sz="1600" dirty="0">
+                      <a:endParaRPr lang="en-US" sz="1400" dirty="0">
                         <a:latin typeface="Red Hat Text" charset="0"/>
                         <a:ea typeface="Red Hat Text" charset="0"/>
                         <a:cs typeface="Red Hat Text" charset="0"/>
@@ -13713,7 +12936,7 @@
                         <a:buNone/>
                       </a:pPr>
                       <a:r>
-                        <a:rPr lang="en-US" sz="1500" dirty="0">
+                        <a:rPr lang="en-US" sz="1300" dirty="0">
                           <a:solidFill>
                             <a:srgbClr val="242424"/>
                           </a:solidFill>
@@ -13723,7 +12946,7 @@
                         </a:rPr>
                         <a:t>The controller decrypts in the cluster and produces a Secret the chart references</a:t>
                       </a:r>
-                      <a:endParaRPr lang="en-US" sz="1500" dirty="0">
+                      <a:endParaRPr lang="en-US" sz="1300" dirty="0">
                         <a:latin typeface="Red Hat Text" charset="0"/>
                         <a:ea typeface="Red Hat Text" charset="0"/>
                         <a:cs typeface="Red Hat Text" charset="0"/>
@@ -13780,7 +13003,7 @@
                         <a:buNone/>
                       </a:pPr>
                       <a:r>
-                        <a:rPr lang="en-US" sz="1600" b="1" dirty="0">
+                        <a:rPr lang="en-US" sz="1500" b="1" dirty="0">
                           <a:solidFill>
                             <a:srgbClr val="EE0000"/>
                           </a:solidFill>
@@ -13790,7 +13013,7 @@
                         </a:rPr>
                         <a:t>SOPS</a:t>
                       </a:r>
-                      <a:endParaRPr lang="en-US" sz="1600" dirty="0">
+                      <a:endParaRPr lang="en-US" sz="1500" dirty="0">
                         <a:latin typeface="Red Hat Mono" charset="0"/>
                         <a:ea typeface="Red Hat Mono" charset="0"/>
                         <a:cs typeface="Red Hat Mono" charset="0"/>
@@ -13845,7 +13068,7 @@
                         <a:buNone/>
                       </a:pPr>
                       <a:r>
-                        <a:rPr lang="en-US" sz="1600" b="1" dirty="0">
+                        <a:rPr lang="en-US" sz="1400" b="1" dirty="0">
                           <a:solidFill>
                             <a:srgbClr val="151515"/>
                           </a:solidFill>
@@ -13855,7 +13078,7 @@
                         </a:rPr>
                         <a:t>Encrypted values</a:t>
                       </a:r>
-                      <a:endParaRPr lang="en-US" sz="1600" dirty="0">
+                      <a:endParaRPr lang="en-US" sz="1400" dirty="0">
                         <a:latin typeface="Red Hat Text" charset="0"/>
                         <a:ea typeface="Red Hat Text" charset="0"/>
                         <a:cs typeface="Red Hat Text" charset="0"/>
@@ -13910,7 +13133,7 @@
                         <a:buNone/>
                       </a:pPr>
                       <a:r>
-                        <a:rPr lang="en-US" sz="1500" dirty="0">
+                        <a:rPr lang="en-US" sz="1300" dirty="0">
                           <a:solidFill>
                             <a:srgbClr val="242424"/>
                           </a:solidFill>
@@ -13920,7 +13143,7 @@
                         </a:rPr>
                         <a:t>Client-side helm-secrets plugin; Helm 4 support is not verified in the tutorial</a:t>
                       </a:r>
-                      <a:endParaRPr lang="en-US" sz="1500" dirty="0">
+                      <a:endParaRPr lang="en-US" sz="1300" dirty="0">
                         <a:latin typeface="Red Hat Text" charset="0"/>
                         <a:ea typeface="Red Hat Text" charset="0"/>
                         <a:cs typeface="Red Hat Text" charset="0"/>
@@ -13977,7 +13200,7 @@
                         <a:buNone/>
                       </a:pPr>
                       <a:r>
-                        <a:rPr lang="en-US" sz="1600" b="1" dirty="0">
+                        <a:rPr lang="en-US" sz="1500" b="1" dirty="0">
                           <a:solidFill>
                             <a:srgbClr val="EE0000"/>
                           </a:solidFill>
@@ -13987,7 +13210,7 @@
                         </a:rPr>
                         <a:t>auth.token</a:t>
                       </a:r>
-                      <a:endParaRPr lang="en-US" sz="1600" dirty="0">
+                      <a:endParaRPr lang="en-US" sz="1500" dirty="0">
                         <a:latin typeface="Red Hat Mono" charset="0"/>
                         <a:ea typeface="Red Hat Mono" charset="0"/>
                         <a:cs typeface="Red Hat Mono" charset="0"/>
@@ -14042,7 +13265,7 @@
                         <a:buNone/>
                       </a:pPr>
                       <a:r>
-                        <a:rPr lang="en-US" sz="1600" b="1" dirty="0">
+                        <a:rPr lang="en-US" sz="1400" b="1" dirty="0">
                           <a:solidFill>
                             <a:srgbClr val="151515"/>
                           </a:solidFill>
@@ -14052,7 +13275,7 @@
                         </a:rPr>
                         <a:t>Plain in values</a:t>
                       </a:r>
-                      <a:endParaRPr lang="en-US" sz="1600" dirty="0">
+                      <a:endParaRPr lang="en-US" sz="1400" dirty="0">
                         <a:latin typeface="Red Hat Text" charset="0"/>
                         <a:ea typeface="Red Hat Text" charset="0"/>
                         <a:cs typeface="Red Hat Text" charset="0"/>
@@ -14107,7 +13330,7 @@
                         <a:buNone/>
                       </a:pPr>
                       <a:r>
-                        <a:rPr lang="en-US" sz="1500" dirty="0">
+                        <a:rPr lang="en-US" sz="1300" dirty="0">
                           <a:solidFill>
                             <a:srgbClr val="242424"/>
                           </a:solidFill>
@@ -14117,7 +13340,7 @@
                         </a:rPr>
                         <a:t>Stored in the release record and printed by helm get values; development only</a:t>
                       </a:r>
-                      <a:endParaRPr lang="en-US" sz="1500" dirty="0">
+                      <a:endParaRPr lang="en-US" sz="1300" dirty="0">
                         <a:latin typeface="Red Hat Text" charset="0"/>
                         <a:ea typeface="Red Hat Text" charset="0"/>
                         <a:cs typeface="Red Hat Text" charset="0"/>
@@ -14349,8 +13572,8 @@
         </p:blipFill>
         <p:spPr>
           <a:xfrm>
-            <a:off x="566928" y="1691640"/>
-            <a:ext cx="11055096" cy="4160520"/>
+            <a:off x="566928" y="1417320"/>
+            <a:ext cx="11055096" cy="4480560"/>
           </a:xfrm>
           <a:prstGeom prst="rect">
             <a:avLst/>
@@ -14577,8 +13800,8 @@
         </p:blipFill>
         <p:spPr>
           <a:xfrm>
-            <a:off x="566928" y="1691640"/>
-            <a:ext cx="11055096" cy="4160520"/>
+            <a:off x="566928" y="1417320"/>
+            <a:ext cx="11055096" cy="4480560"/>
           </a:xfrm>
           <a:prstGeom prst="rect">
             <a:avLst/>
@@ -15024,7 +14247,7 @@
                         <a:buNone/>
                       </a:pPr>
                       <a:r>
-                        <a:rPr lang="en-US" sz="1600" b="1" dirty="0">
+                        <a:rPr lang="en-US" sz="1500" b="1" dirty="0">
                           <a:solidFill>
                             <a:srgbClr val="EE0000"/>
                           </a:solidFill>
@@ -15034,7 +14257,7 @@
                         </a:rPr>
                         <a:t>helm.sh/hook</a:t>
                       </a:r>
-                      <a:endParaRPr lang="en-US" sz="1600" dirty="0">
+                      <a:endParaRPr lang="en-US" sz="1500" dirty="0">
                         <a:latin typeface="Red Hat Mono" charset="0"/>
                         <a:ea typeface="Red Hat Mono" charset="0"/>
                         <a:cs typeface="Red Hat Mono" charset="0"/>
@@ -15089,7 +14312,7 @@
                         <a:buNone/>
                       </a:pPr>
                       <a:r>
-                        <a:rPr lang="en-US" sz="1600" b="1" dirty="0">
+                        <a:rPr lang="en-US" sz="1400" b="1" dirty="0">
                           <a:solidFill>
                             <a:srgbClr val="151515"/>
                           </a:solidFill>
@@ -15099,7 +14322,7 @@
                         </a:rPr>
                         <a:t>Phase</a:t>
                       </a:r>
-                      <a:endParaRPr lang="en-US" sz="1600" dirty="0">
+                      <a:endParaRPr lang="en-US" sz="1400" dirty="0">
                         <a:latin typeface="Red Hat Text" charset="0"/>
                         <a:ea typeface="Red Hat Text" charset="0"/>
                         <a:cs typeface="Red Hat Text" charset="0"/>
@@ -15154,7 +14377,7 @@
                         <a:buNone/>
                       </a:pPr>
                       <a:r>
-                        <a:rPr lang="en-US" sz="1500" dirty="0">
+                        <a:rPr lang="en-US" sz="1300" dirty="0">
                           <a:solidFill>
                             <a:srgbClr val="242424"/>
                           </a:solidFill>
@@ -15164,7 +14387,7 @@
                         </a:rPr>
                         <a:t>pre-install, post-install, pre-upgrade, post-upgrade and more; several phases separated by commas</a:t>
                       </a:r>
-                      <a:endParaRPr lang="en-US" sz="1500" dirty="0">
+                      <a:endParaRPr lang="en-US" sz="1300" dirty="0">
                         <a:latin typeface="Red Hat Text" charset="0"/>
                         <a:ea typeface="Red Hat Text" charset="0"/>
                         <a:cs typeface="Red Hat Text" charset="0"/>
@@ -15221,7 +14444,7 @@
                         <a:buNone/>
                       </a:pPr>
                       <a:r>
-                        <a:rPr lang="en-US" sz="1600" b="1" dirty="0">
+                        <a:rPr lang="en-US" sz="1500" b="1" dirty="0">
                           <a:solidFill>
                             <a:srgbClr val="EE0000"/>
                           </a:solidFill>
@@ -15231,7 +14454,7 @@
                         </a:rPr>
                         <a:t>hook-weight</a:t>
                       </a:r>
-                      <a:endParaRPr lang="en-US" sz="1600" dirty="0">
+                      <a:endParaRPr lang="en-US" sz="1500" dirty="0">
                         <a:latin typeface="Red Hat Mono" charset="0"/>
                         <a:ea typeface="Red Hat Mono" charset="0"/>
                         <a:cs typeface="Red Hat Mono" charset="0"/>
@@ -15286,7 +14509,7 @@
                         <a:buNone/>
                       </a:pPr>
                       <a:r>
-                        <a:rPr lang="en-US" sz="1600" b="1" dirty="0">
+                        <a:rPr lang="en-US" sz="1400" b="1" dirty="0">
                           <a:solidFill>
                             <a:srgbClr val="151515"/>
                           </a:solidFill>
@@ -15296,7 +14519,7 @@
                         </a:rPr>
                         <a:t>Order</a:t>
                       </a:r>
-                      <a:endParaRPr lang="en-US" sz="1600" dirty="0">
+                      <a:endParaRPr lang="en-US" sz="1400" dirty="0">
                         <a:latin typeface="Red Hat Text" charset="0"/>
                         <a:ea typeface="Red Hat Text" charset="0"/>
                         <a:cs typeface="Red Hat Text" charset="0"/>
@@ -15351,7 +14574,7 @@
                         <a:buNone/>
                       </a:pPr>
                       <a:r>
-                        <a:rPr lang="en-US" sz="1500" dirty="0">
+                        <a:rPr lang="en-US" sz="1300" dirty="0">
                           <a:solidFill>
                             <a:srgbClr val="242424"/>
                           </a:solidFill>
@@ -15361,7 +14584,7 @@
                         </a:rPr>
                         <a:t>A string holding an integer, ascending within a phase; ties sort by kind, then name</a:t>
                       </a:r>
-                      <a:endParaRPr lang="en-US" sz="1500" dirty="0">
+                      <a:endParaRPr lang="en-US" sz="1300" dirty="0">
                         <a:latin typeface="Red Hat Text" charset="0"/>
                         <a:ea typeface="Red Hat Text" charset="0"/>
                         <a:cs typeface="Red Hat Text" charset="0"/>
@@ -15418,7 +14641,7 @@
                         <a:buNone/>
                       </a:pPr>
                       <a:r>
-                        <a:rPr lang="en-US" sz="1600" b="1" dirty="0">
+                        <a:rPr lang="en-US" sz="1500" b="1" dirty="0">
                           <a:solidFill>
                             <a:srgbClr val="EE0000"/>
                           </a:solidFill>
@@ -15428,7 +14651,7 @@
                         </a:rPr>
                         <a:t>hook-delete-policy</a:t>
                       </a:r>
-                      <a:endParaRPr lang="en-US" sz="1600" dirty="0">
+                      <a:endParaRPr lang="en-US" sz="1500" dirty="0">
                         <a:latin typeface="Red Hat Mono" charset="0"/>
                         <a:ea typeface="Red Hat Mono" charset="0"/>
                         <a:cs typeface="Red Hat Mono" charset="0"/>
@@ -15483,7 +14706,7 @@
                         <a:buNone/>
                       </a:pPr>
                       <a:r>
-                        <a:rPr lang="en-US" sz="1600" b="1" dirty="0">
+                        <a:rPr lang="en-US" sz="1400" b="1" dirty="0">
                           <a:solidFill>
                             <a:srgbClr val="151515"/>
                           </a:solidFill>
@@ -15493,7 +14716,7 @@
                         </a:rPr>
                         <a:t>Cleanup</a:t>
                       </a:r>
-                      <a:endParaRPr lang="en-US" sz="1600" dirty="0">
+                      <a:endParaRPr lang="en-US" sz="1400" dirty="0">
                         <a:latin typeface="Red Hat Text" charset="0"/>
                         <a:ea typeface="Red Hat Text" charset="0"/>
                         <a:cs typeface="Red Hat Text" charset="0"/>
@@ -15548,7 +14771,7 @@
                         <a:buNone/>
                       </a:pPr>
                       <a:r>
-                        <a:rPr lang="en-US" sz="1500" dirty="0">
+                        <a:rPr lang="en-US" sz="1300" dirty="0">
                           <a:solidFill>
                             <a:srgbClr val="242424"/>
                           </a:solidFill>
@@ -15558,7 +14781,7 @@
                         </a:rPr>
                         <a:t>before-hook-creation (default), hook-succeeded, hook-failed</a:t>
                       </a:r>
-                      <a:endParaRPr lang="en-US" sz="1500" dirty="0">
+                      <a:endParaRPr lang="en-US" sz="1300" dirty="0">
                         <a:latin typeface="Red Hat Text" charset="0"/>
                         <a:ea typeface="Red Hat Text" charset="0"/>
                         <a:cs typeface="Red Hat Text" charset="0"/>
@@ -15615,7 +14838,7 @@
                         <a:buNone/>
                       </a:pPr>
                       <a:r>
-                        <a:rPr lang="en-US" sz="1600" b="1" dirty="0">
+                        <a:rPr lang="en-US" sz="1500" b="1" dirty="0">
                           <a:solidFill>
                             <a:srgbClr val="EE0000"/>
                           </a:solidFill>
@@ -15625,7 +14848,7 @@
                         </a:rPr>
                         <a:t>pre-install</a:t>
                       </a:r>
-                      <a:endParaRPr lang="en-US" sz="1600" dirty="0">
+                      <a:endParaRPr lang="en-US" sz="1500" dirty="0">
                         <a:latin typeface="Red Hat Mono" charset="0"/>
                         <a:ea typeface="Red Hat Mono" charset="0"/>
                         <a:cs typeface="Red Hat Mono" charset="0"/>
@@ -15680,7 +14903,7 @@
                         <a:buNone/>
                       </a:pPr>
                       <a:r>
-                        <a:rPr lang="en-US" sz="1600" b="1" dirty="0">
+                        <a:rPr lang="en-US" sz="1400" b="1" dirty="0">
                           <a:solidFill>
                             <a:srgbClr val="151515"/>
                           </a:solidFill>
@@ -15690,7 +14913,7 @@
                         </a:rPr>
                         <a:t>Database exists</a:t>
                       </a:r>
-                      <a:endParaRPr lang="en-US" sz="1600" dirty="0">
+                      <a:endParaRPr lang="en-US" sz="1400" dirty="0">
                         <a:latin typeface="Red Hat Text" charset="0"/>
                         <a:ea typeface="Red Hat Text" charset="0"/>
                         <a:cs typeface="Red Hat Text" charset="0"/>
@@ -15745,7 +14968,7 @@
                         <a:buNone/>
                       </a:pPr>
                       <a:r>
-                        <a:rPr lang="en-US" sz="1500" dirty="0">
+                        <a:rPr lang="en-US" sz="1300" dirty="0">
                           <a:solidFill>
                             <a:srgbClr val="242424"/>
                           </a:solidFill>
@@ -15755,7 +14978,7 @@
                         </a:rPr>
                         <a:t>Runs before the resources; fails when the same release creates the database</a:t>
                       </a:r>
-                      <a:endParaRPr lang="en-US" sz="1500" dirty="0">
+                      <a:endParaRPr lang="en-US" sz="1300" dirty="0">
                         <a:latin typeface="Red Hat Text" charset="0"/>
                         <a:ea typeface="Red Hat Text" charset="0"/>
                         <a:cs typeface="Red Hat Text" charset="0"/>
@@ -15812,7 +15035,7 @@
                         <a:buNone/>
                       </a:pPr>
                       <a:r>
-                        <a:rPr lang="en-US" sz="1600" b="1" dirty="0">
+                        <a:rPr lang="en-US" sz="1500" b="1" dirty="0">
                           <a:solidFill>
                             <a:srgbClr val="EE0000"/>
                           </a:solidFill>
@@ -15822,7 +15045,7 @@
                         </a:rPr>
                         <a:t>post-install</a:t>
                       </a:r>
-                      <a:endParaRPr lang="en-US" sz="1600" dirty="0">
+                      <a:endParaRPr lang="en-US" sz="1500" dirty="0">
                         <a:latin typeface="Red Hat Mono" charset="0"/>
                         <a:ea typeface="Red Hat Mono" charset="0"/>
                         <a:cs typeface="Red Hat Mono" charset="0"/>
@@ -15877,7 +15100,7 @@
                         <a:buNone/>
                       </a:pPr>
                       <a:r>
-                        <a:rPr lang="en-US" sz="1600" b="1" dirty="0">
+                        <a:rPr lang="en-US" sz="1400" b="1" dirty="0">
                           <a:solidFill>
                             <a:srgbClr val="151515"/>
                           </a:solidFill>
@@ -15887,7 +15110,7 @@
                         </a:rPr>
                         <a:t>Needs readiness</a:t>
                       </a:r>
-                      <a:endParaRPr lang="en-US" sz="1600" dirty="0">
+                      <a:endParaRPr lang="en-US" sz="1400" dirty="0">
                         <a:latin typeface="Red Hat Text" charset="0"/>
                         <a:ea typeface="Red Hat Text" charset="0"/>
                         <a:cs typeface="Red Hat Text" charset="0"/>
@@ -15942,7 +15165,7 @@
                         <a:buNone/>
                       </a:pPr>
                       <a:r>
-                        <a:rPr lang="en-US" sz="1500" dirty="0">
+                        <a:rPr lang="en-US" sz="1300" dirty="0">
                           <a:solidFill>
                             <a:srgbClr val="242424"/>
                           </a:solidFill>
@@ -15950,9 +15173,41 @@
                           <a:ea typeface="Red Hat Text" pitchFamily="34" charset="-122"/>
                           <a:cs typeface="Red Hat Text" pitchFamily="34" charset="-120"/>
                         </a:rPr>
-                        <a:t>Runs after --wait; deadlocks when readiness depends on the migration</a:t>
+                        <a:t>Runs after </a:t>
                       </a:r>
-                      <a:endParaRPr lang="en-US" sz="1500" dirty="0">
+                      <a:endParaRPr lang="en-US" sz="1300" dirty="0">
+                        <a:latin typeface="Red Hat Text" charset="0"/>
+                        <a:ea typeface="Red Hat Text" charset="0"/>
+                        <a:cs typeface="Red Hat Text" charset="0"/>
+                      </a:endParaRPr>
+                    </a:p>
+                    <a:p>
+                      <a:pPr algn="l" indent="0" marL="0">
+                        <a:buNone/>
+                      </a:pPr>
+                      <a:r>
+                        <a:rPr lang="en-US" sz="1200" dirty="0">
+                          <a:solidFill>
+                            <a:srgbClr val="151515"/>
+                          </a:solidFill>
+                          <a:latin typeface="Red Hat Mono" pitchFamily="34" charset="0"/>
+                          <a:ea typeface="Red Hat Mono" pitchFamily="34" charset="-122"/>
+                          <a:cs typeface="Red Hat Mono" pitchFamily="34" charset="-120"/>
+                        </a:rPr>
+                        <a:t>--wait</a:t>
+                      </a:r>
+                      <a:r>
+                        <a:rPr lang="en-US" sz="1300" dirty="0">
+                          <a:solidFill>
+                            <a:srgbClr val="242424"/>
+                          </a:solidFill>
+                          <a:latin typeface="Red Hat Text" pitchFamily="34" charset="0"/>
+                          <a:ea typeface="Red Hat Text" pitchFamily="34" charset="-122"/>
+                          <a:cs typeface="Red Hat Text" pitchFamily="34" charset="-120"/>
+                        </a:rPr>
+                        <a:t>; deadlocks when readiness depends on the migration</a:t>
+                      </a:r>
+                      <a:endParaRPr lang="en-US" sz="1300" dirty="0">
                         <a:latin typeface="Red Hat Text" charset="0"/>
                         <a:ea typeface="Red Hat Text" charset="0"/>
                         <a:cs typeface="Red Hat Text" charset="0"/>
@@ -16413,8 +15668,8 @@
         </p:nvSpPr>
         <p:spPr>
           <a:xfrm>
-            <a:off x="566928" y="1691640"/>
-            <a:ext cx="7223760" cy="3097987"/>
+            <a:off x="566928" y="1417320"/>
+            <a:ext cx="8046720" cy="2788755"/>
           </a:xfrm>
           <a:prstGeom prst="rect">
             <a:avLst/>
@@ -16438,8 +15693,8 @@
         </p:nvSpPr>
         <p:spPr>
           <a:xfrm>
-            <a:off x="749808" y="1783080"/>
-            <a:ext cx="6858000" cy="2915107"/>
+            <a:off x="749808" y="1508760"/>
+            <a:ext cx="7680960" cy="2605875"/>
           </a:xfrm>
           <a:prstGeom prst="rect">
             <a:avLst/>
@@ -16458,7 +15713,7 @@
               <a:buNone/>
             </a:pPr>
             <a:r>
-              <a:rPr lang="en-US" sz="1200" dirty="0">
+              <a:rPr lang="en-US" sz="1300" dirty="0">
                 <a:solidFill>
                   <a:srgbClr val="E6E6E6"/>
                 </a:solidFill>
@@ -16469,14 +15724,8 @@
               <a:t>[host]$ cd examples/12-release-lifecycle
 </a:t>
             </a:r>
-            <a:pPr algn="l" indent="0" marL="0">
-              <a:lnSpc>
-                <a:spcPct val="110000"/>
-              </a:lnSpc>
-              <a:buNone/>
-            </a:pPr>
-            <a:r>
-              <a:rPr lang="en-US" sz="1200" dirty="0">
+            <a:r>
+              <a:rPr lang="en-US" sz="1300" dirty="0">
                 <a:solidFill>
                   <a:srgbClr val="E6E6E6"/>
                 </a:solidFill>
@@ -16487,14 +15736,8 @@
               <a:t>[host]$ helm upgrade shipping ./shipping-service -n hfd-12 \
 </a:t>
             </a:r>
-            <a:pPr algn="l" indent="0" marL="0">
-              <a:lnSpc>
-                <a:spcPct val="110000"/>
-              </a:lnSpc>
-              <a:buNone/>
-            </a:pPr>
-            <a:r>
-              <a:rPr lang="en-US" sz="1200" dirty="0">
+            <a:r>
+              <a:rPr lang="en-US" sz="1300" dirty="0">
                 <a:solidFill>
                   <a:srgbClr val="E6E6E6"/>
                 </a:solidFill>
@@ -16505,14 +15748,8 @@
               <a:t>          --set image.tag=doesnotexist --wait --timeout 60s \
 </a:t>
             </a:r>
-            <a:pPr algn="l" indent="0" marL="0">
-              <a:lnSpc>
-                <a:spcPct val="110000"/>
-              </a:lnSpc>
-              <a:buNone/>
-            </a:pPr>
-            <a:r>
-              <a:rPr lang="en-US" sz="1200" dirty="0">
+            <a:r>
+              <a:rPr lang="en-US" sz="1300" dirty="0">
                 <a:solidFill>
                   <a:srgbClr val="E6E6E6"/>
                 </a:solidFill>
@@ -16523,14 +15760,8 @@
               <a:t>          --rollback-on-failure
 </a:t>
             </a:r>
-            <a:pPr algn="l" indent="0" marL="0">
-              <a:lnSpc>
-                <a:spcPct val="110000"/>
-              </a:lnSpc>
-              <a:buNone/>
-            </a:pPr>
-            <a:r>
-              <a:rPr lang="en-US" sz="1200" dirty="0">
+            <a:r>
+              <a:rPr lang="en-US" sz="1300" dirty="0">
                 <a:solidFill>
                   <a:srgbClr val="E6E6E6"/>
                 </a:solidFill>
@@ -16541,14 +15772,8 @@
               <a:t>Error: UPGRADE FAILED: release shipping failed, and has been rolled back
 </a:t>
             </a:r>
-            <a:pPr algn="l" indent="0" marL="0">
-              <a:lnSpc>
-                <a:spcPct val="110000"/>
-              </a:lnSpc>
-              <a:buNone/>
-            </a:pPr>
-            <a:r>
-              <a:rPr lang="en-US" sz="1200" dirty="0">
+            <a:r>
+              <a:rPr lang="en-US" sz="1300" dirty="0">
                 <a:solidFill>
                   <a:srgbClr val="E6E6E6"/>
                 </a:solidFill>
@@ -16559,14 +15784,8 @@
               <a:t>due to rollback-on-failure being set: ... not ready. status: InProgress
 </a:t>
             </a:r>
-            <a:pPr algn="l" indent="0" marL="0">
-              <a:lnSpc>
-                <a:spcPct val="110000"/>
-              </a:lnSpc>
-              <a:buNone/>
-            </a:pPr>
-            <a:r>
-              <a:rPr lang="en-US" sz="1200" dirty="0">
+            <a:r>
+              <a:rPr lang="en-US" sz="1300" dirty="0">
                 <a:solidFill>
                   <a:srgbClr val="E6E6E6"/>
                 </a:solidFill>
@@ -16577,14 +15796,8 @@
               <a:t>[host]$ helm history shipping -n hfd-12
 </a:t>
             </a:r>
-            <a:pPr algn="l" indent="0" marL="0">
-              <a:lnSpc>
-                <a:spcPct val="110000"/>
-              </a:lnSpc>
-              <a:buNone/>
-            </a:pPr>
-            <a:r>
-              <a:rPr lang="en-US" sz="1200" dirty="0">
+            <a:r>
+              <a:rPr lang="en-US" sz="1300" dirty="0">
                 <a:solidFill>
                   <a:srgbClr val="8FB98F"/>
                 </a:solidFill>
@@ -16595,14 +15808,8 @@
               <a:t># 4 failed     Upgrade "shipping" failed
 </a:t>
             </a:r>
-            <a:pPr algn="l" indent="0" marL="0">
-              <a:lnSpc>
-                <a:spcPct val="110000"/>
-              </a:lnSpc>
-              <a:buNone/>
-            </a:pPr>
-            <a:r>
-              <a:rPr lang="en-US" sz="1200" dirty="0">
+            <a:r>
+              <a:rPr lang="en-US" sz="1300" dirty="0">
                 <a:solidFill>
                   <a:srgbClr val="8FB98F"/>
                 </a:solidFill>
@@ -16613,14 +15820,8 @@
               <a:t># 5 deployed   Rollback to 3
 </a:t>
             </a:r>
-            <a:pPr algn="l" indent="0" marL="0">
-              <a:lnSpc>
-                <a:spcPct val="110000"/>
-              </a:lnSpc>
-              <a:buNone/>
-            </a:pPr>
-            <a:r>
-              <a:rPr lang="en-US" sz="1200" dirty="0">
+            <a:r>
+              <a:rPr lang="en-US" sz="1300" dirty="0">
                 <a:solidFill>
                   <a:srgbClr val="E6E6E6"/>
                 </a:solidFill>
@@ -16631,14 +15832,8 @@
               <a:t>[host]$ helm upgrade shipping ./shipping-service -n hfd-12 \
 </a:t>
             </a:r>
-            <a:pPr algn="l" indent="0" marL="0">
-              <a:lnSpc>
-                <a:spcPct val="110000"/>
-              </a:lnSpc>
-              <a:buNone/>
-            </a:pPr>
-            <a:r>
-              <a:rPr lang="en-US" sz="1200" dirty="0">
+            <a:r>
+              <a:rPr lang="en-US" sz="1300" dirty="0">
                 <a:solidFill>
                   <a:srgbClr val="E6E6E6"/>
                 </a:solidFill>
@@ -16649,7 +15844,7 @@
               <a:t>          --cleanup-on-fail --wait
 </a:t>
             </a:r>
-            <a:endParaRPr lang="en-US" sz="1200" dirty="0"/>
+            <a:endParaRPr lang="en-US" sz="1300" dirty="0"/>
           </a:p>
         </p:txBody>
       </p:sp>
@@ -16661,8 +15856,8 @@
         </p:nvSpPr>
         <p:spPr>
           <a:xfrm>
-            <a:off x="566928" y="4862779"/>
-            <a:ext cx="7223760" cy="310896"/>
+            <a:off x="566928" y="4297515"/>
+            <a:ext cx="8046720" cy="310896"/>
           </a:xfrm>
           <a:prstGeom prst="rect">
             <a:avLst/>
@@ -16700,8 +15895,8 @@
         </p:nvSpPr>
         <p:spPr>
           <a:xfrm>
-            <a:off x="8110728" y="1783080"/>
-            <a:ext cx="3514039" cy="4114800"/>
+            <a:off x="8933688" y="1600200"/>
+            <a:ext cx="2691079" cy="4297680"/>
           </a:xfrm>
           <a:prstGeom prst="rect">
             <a:avLst/>
@@ -16713,7 +15908,7 @@
           <a:bodyPr wrap="square" lIns="0" tIns="0" rIns="0" bIns="0" rtlCol="0" anchor="t"/>
           <a:lstStyle/>
           <a:p>
-            <a:pPr marL="228600" indent="-228600">
+            <a:pPr marL="304800" indent="-304800">
               <a:lnSpc>
                 <a:spcPct val="112000"/>
               </a:lnSpc>
@@ -16727,6 +15922,17 @@
               <a:buChar char="●"/>
             </a:pPr>
             <a:r>
+              <a:rPr lang="en-US" sz="1300" dirty="0">
+                <a:solidFill>
+                  <a:srgbClr val="151515"/>
+                </a:solidFill>
+                <a:latin typeface="Red Hat Mono" pitchFamily="34" charset="0"/>
+                <a:ea typeface="Red Hat Mono" pitchFamily="34" charset="-122"/>
+                <a:cs typeface="Red Hat Mono" pitchFamily="34" charset="-120"/>
+              </a:rPr>
+              <a:t>--wait</a:t>
+            </a:r>
+            <a:r>
               <a:rPr lang="en-US" sz="1400" b="1" dirty="0">
                 <a:solidFill>
                   <a:srgbClr val="151515"/>
@@ -16735,14 +15941,8 @@
                 <a:ea typeface="Red Hat Text" pitchFamily="34" charset="-122"/>
                 <a:cs typeface="Red Hat Text" pitchFamily="34" charset="-120"/>
               </a:rPr>
-              <a:t>--wait strategies</a:t>
-            </a:r>
-            <a:pPr indent="0" marL="0">
-              <a:lnSpc>
-                <a:spcPct val="112000"/>
-              </a:lnSpc>
-              <a:buNone/>
-            </a:pPr>
+              <a:t> strategies</a:t>
+            </a:r>
             <a:r>
               <a:rPr lang="en-US" sz="1400" dirty="0">
                 <a:solidFill>
@@ -16754,10 +15954,10 @@
               </a:rPr>
               <a:t>: watcher (kstatus), hookOnly (default without the flag), legacy (Helm 3 polling).</a:t>
             </a:r>
-            <a:endParaRPr lang="en-US" sz="1400" dirty="0"/>
-          </a:p>
-          <a:p>
-            <a:pPr marL="228600" indent="-228600">
+            <a:endParaRPr lang="en-US" sz="1300" dirty="0"/>
+          </a:p>
+          <a:p>
+            <a:pPr marL="304800" indent="-304800">
               <a:lnSpc>
                 <a:spcPct val="112000"/>
               </a:lnSpc>
@@ -16771,37 +15971,31 @@
               <a:buChar char="●"/>
             </a:pPr>
             <a:r>
-              <a:rPr lang="en-US" sz="1400" b="1" dirty="0">
+              <a:rPr lang="en-US" sz="1300" dirty="0">
                 <a:solidFill>
                   <a:srgbClr val="151515"/>
+                </a:solidFill>
+                <a:latin typeface="Red Hat Mono" pitchFamily="34" charset="0"/>
+                <a:ea typeface="Red Hat Mono" pitchFamily="34" charset="-122"/>
+                <a:cs typeface="Red Hat Mono" pitchFamily="34" charset="-120"/>
+              </a:rPr>
+              <a:t>--rollback-on-failure</a:t>
+            </a:r>
+            <a:r>
+              <a:rPr lang="en-US" sz="1400" dirty="0">
+                <a:solidFill>
+                  <a:srgbClr val="242424"/>
                 </a:solidFill>
                 <a:latin typeface="Red Hat Text" pitchFamily="34" charset="0"/>
                 <a:ea typeface="Red Hat Text" pitchFamily="34" charset="-122"/>
                 <a:cs typeface="Red Hat Text" pitchFamily="34" charset="-120"/>
               </a:rPr>
-              <a:t>--rollback-on-failure</a:t>
-            </a:r>
-            <a:pPr indent="0" marL="0">
-              <a:lnSpc>
-                <a:spcPct val="112000"/>
-              </a:lnSpc>
-              <a:buNone/>
-            </a:pPr>
-            <a:r>
-              <a:rPr lang="en-US" sz="1400" dirty="0">
-                <a:solidFill>
-                  <a:srgbClr val="242424"/>
-                </a:solidFill>
-                <a:latin typeface="Red Hat Text" pitchFamily="34" charset="0"/>
-                <a:ea typeface="Red Hat Text" pitchFamily="34" charset="-122"/>
-                <a:cs typeface="Red Hat Text" pitchFamily="34" charset="-120"/>
-              </a:rPr>
               <a:t>: implies watcher; a failed first install is uninstalled.</a:t>
             </a:r>
-            <a:endParaRPr lang="en-US" sz="1400" dirty="0"/>
-          </a:p>
-          <a:p>
-            <a:pPr marL="228600" indent="-228600">
+            <a:endParaRPr lang="en-US" sz="1300" dirty="0"/>
+          </a:p>
+          <a:p>
+            <a:pPr marL="304800" indent="-304800">
               <a:lnSpc>
                 <a:spcPct val="112000"/>
               </a:lnSpc>
@@ -16815,37 +16009,31 @@
               <a:buChar char="●"/>
             </a:pPr>
             <a:r>
-              <a:rPr lang="en-US" sz="1400" b="1" dirty="0">
+              <a:rPr lang="en-US" sz="1300" dirty="0">
                 <a:solidFill>
                   <a:srgbClr val="151515"/>
+                </a:solidFill>
+                <a:latin typeface="Red Hat Mono" pitchFamily="34" charset="0"/>
+                <a:ea typeface="Red Hat Mono" pitchFamily="34" charset="-122"/>
+                <a:cs typeface="Red Hat Mono" pitchFamily="34" charset="-120"/>
+              </a:rPr>
+              <a:t>--cleanup-on-fail</a:t>
+            </a:r>
+            <a:r>
+              <a:rPr lang="en-US" sz="1400" dirty="0">
+                <a:solidFill>
+                  <a:srgbClr val="242424"/>
                 </a:solidFill>
                 <a:latin typeface="Red Hat Text" pitchFamily="34" charset="0"/>
                 <a:ea typeface="Red Hat Text" pitchFamily="34" charset="-122"/>
                 <a:cs typeface="Red Hat Text" pitchFamily="34" charset="-120"/>
               </a:rPr>
-              <a:t>--cleanup-on-fail</a:t>
-            </a:r>
-            <a:pPr indent="0" marL="0">
-              <a:lnSpc>
-                <a:spcPct val="112000"/>
-              </a:lnSpc>
-              <a:buNone/>
-            </a:pPr>
-            <a:r>
-              <a:rPr lang="en-US" sz="1400" dirty="0">
-                <a:solidFill>
-                  <a:srgbClr val="242424"/>
-                </a:solidFill>
-                <a:latin typeface="Red Hat Text" pitchFamily="34" charset="0"/>
-                <a:ea typeface="Red Hat Text" pitchFamily="34" charset="-122"/>
-                <a:cs typeface="Red Hat Text" pitchFamily="34" charset="-120"/>
-              </a:rPr>
               <a:t>: removes only what the upgrade created; revision stays failed.</a:t>
             </a:r>
-            <a:endParaRPr lang="en-US" sz="1400" dirty="0"/>
-          </a:p>
-          <a:p>
-            <a:pPr marL="228600" indent="-228600">
+            <a:endParaRPr lang="en-US" sz="1300" dirty="0"/>
+          </a:p>
+          <a:p>
+            <a:pPr marL="304800" indent="-304800">
               <a:lnSpc>
                 <a:spcPct val="112000"/>
               </a:lnSpc>
@@ -16869,12 +16057,6 @@
               </a:rPr>
               <a:t>Read the pod next</a:t>
             </a:r>
-            <a:pPr indent="0" marL="0">
-              <a:lnSpc>
-                <a:spcPct val="112000"/>
-              </a:lnSpc>
-              <a:buNone/>
-            </a:pPr>
             <a:r>
               <a:rPr lang="en-US" sz="1400" dirty="0">
                 <a:solidFill>
@@ -16886,7 +16068,7 @@
               </a:rPr>
               <a:t>: kstatus reports the Deployment; the cause is on the pod.</a:t>
             </a:r>
-            <a:endParaRPr lang="en-US" sz="1400" dirty="0"/>
+            <a:endParaRPr lang="en-US" sz="1300" dirty="0"/>
           </a:p>
         </p:txBody>
       </p:sp>
@@ -17077,7 +16259,7 @@
           <a:bodyPr wrap="square" lIns="0" tIns="0" rIns="0" bIns="0" rtlCol="0" anchor="t"/>
           <a:lstStyle/>
           <a:p>
-            <a:pPr marL="228600" indent="-228600">
+            <a:pPr marL="304800" indent="-304800">
               <a:lnSpc>
                 <a:spcPct val="112000"/>
               </a:lnSpc>
@@ -17101,12 +16283,6 @@
               </a:rPr>
               <a:t>Default for new releases</a:t>
             </a:r>
-            <a:pPr indent="0" marL="0">
-              <a:lnSpc>
-                <a:spcPct val="112000"/>
-              </a:lnSpc>
-              <a:buNone/>
-            </a:pPr>
             <a:r>
               <a:rPr lang="en-US" sz="2000" dirty="0">
                 <a:solidFill>
@@ -17118,12 +16294,6 @@
               </a:rPr>
               <a:t>: helm install </a:t>
             </a:r>
-            <a:pPr indent="0" marL="0">
-              <a:lnSpc>
-                <a:spcPct val="112000"/>
-              </a:lnSpc>
-              <a:buNone/>
-            </a:pPr>
             <a:r>
               <a:rPr lang="en-US" sz="1900" dirty="0">
                 <a:solidFill>
@@ -17135,12 +16305,6 @@
               </a:rPr>
               <a:t>--server-side</a:t>
             </a:r>
-            <a:pPr indent="0" marL="0">
-              <a:lnSpc>
-                <a:spcPct val="112000"/>
-              </a:lnSpc>
-              <a:buNone/>
-            </a:pPr>
             <a:r>
               <a:rPr lang="en-US" sz="2000" dirty="0">
                 <a:solidFill>
@@ -17155,7 +16319,7 @@
             <a:endParaRPr lang="en-US" sz="2000" dirty="0"/>
           </a:p>
           <a:p>
-            <a:pPr marL="228600" indent="-228600">
+            <a:pPr marL="304800" indent="-304800">
               <a:lnSpc>
                 <a:spcPct val="112000"/>
               </a:lnSpc>
@@ -17179,12 +16343,6 @@
               </a:rPr>
               <a:t>Field ownership</a:t>
             </a:r>
-            <a:pPr indent="0" marL="0">
-              <a:lnSpc>
-                <a:spcPct val="112000"/>
-              </a:lnSpc>
-              <a:buNone/>
-            </a:pPr>
             <a:r>
               <a:rPr lang="en-US" sz="2000" dirty="0">
                 <a:solidFill>
@@ -17199,7 +16357,7 @@
             <a:endParaRPr lang="en-US" sz="2000" dirty="0"/>
           </a:p>
           <a:p>
-            <a:pPr marL="228600" indent="-228600">
+            <a:pPr marL="304800" indent="-304800">
               <a:lnSpc>
                 <a:spcPct val="112000"/>
               </a:lnSpc>
@@ -17213,37 +16371,31 @@
               <a:buChar char="●"/>
             </a:pPr>
             <a:r>
-              <a:rPr lang="en-US" sz="2000" b="1" dirty="0">
+              <a:rPr lang="en-US" sz="1900" dirty="0">
                 <a:solidFill>
                   <a:srgbClr val="151515"/>
+                </a:solidFill>
+                <a:latin typeface="Red Hat Mono" pitchFamily="34" charset="0"/>
+                <a:ea typeface="Red Hat Mono" pitchFamily="34" charset="-122"/>
+                <a:cs typeface="Red Hat Mono" pitchFamily="34" charset="-120"/>
+              </a:rPr>
+              <a:t>--force-conflicts</a:t>
+            </a:r>
+            <a:r>
+              <a:rPr lang="en-US" sz="2000" dirty="0">
+                <a:solidFill>
+                  <a:srgbClr val="242424"/>
                 </a:solidFill>
                 <a:latin typeface="Red Hat Text" pitchFamily="34" charset="0"/>
                 <a:ea typeface="Red Hat Text" pitchFamily="34" charset="-122"/>
                 <a:cs typeface="Red Hat Text" pitchFamily="34" charset="-120"/>
               </a:rPr>
-              <a:t>--force-conflicts</a:t>
-            </a:r>
-            <a:pPr indent="0" marL="0">
-              <a:lnSpc>
-                <a:spcPct val="112000"/>
-              </a:lnSpc>
-              <a:buNone/>
-            </a:pPr>
-            <a:r>
-              <a:rPr lang="en-US" sz="2000" dirty="0">
-                <a:solidFill>
-                  <a:srgbClr val="242424"/>
-                </a:solidFill>
-                <a:latin typeface="Red Hat Text" pitchFamily="34" charset="0"/>
-                <a:ea typeface="Red Hat Text" pitchFamily="34" charset="-122"/>
-                <a:cs typeface="Red Hat Text" pitchFamily="34" charset="-120"/>
-              </a:rPr>
               <a:t>: takes over fields owned by another manager.</a:t>
             </a:r>
             <a:endParaRPr lang="en-US" sz="2000" dirty="0"/>
           </a:p>
           <a:p>
-            <a:pPr marL="228600" indent="-228600">
+            <a:pPr marL="304800" indent="-304800">
               <a:lnSpc>
                 <a:spcPct val="112000"/>
               </a:lnSpc>
@@ -17257,22 +16409,38 @@
               <a:buChar char="●"/>
             </a:pPr>
             <a:r>
-              <a:rPr lang="en-US" sz="2000" b="1" dirty="0">
+              <a:rPr lang="en-US" sz="1900" dirty="0">
                 <a:solidFill>
                   <a:srgbClr val="151515"/>
+                </a:solidFill>
+                <a:latin typeface="Red Hat Mono" pitchFamily="34" charset="0"/>
+                <a:ea typeface="Red Hat Mono" pitchFamily="34" charset="-122"/>
+                <a:cs typeface="Red Hat Mono" pitchFamily="34" charset="-120"/>
+              </a:rPr>
+              <a:t>--take-ownership</a:t>
+            </a:r>
+            <a:r>
+              <a:rPr lang="en-US" sz="2000" dirty="0">
+                <a:solidFill>
+                  <a:srgbClr val="242424"/>
                 </a:solidFill>
                 <a:latin typeface="Red Hat Text" pitchFamily="34" charset="0"/>
                 <a:ea typeface="Red Hat Text" pitchFamily="34" charset="-122"/>
                 <a:cs typeface="Red Hat Text" pitchFamily="34" charset="-120"/>
               </a:rPr>
-              <a:t>--take-ownership</a:t>
-            </a:r>
-            <a:pPr indent="0" marL="0">
-              <a:lnSpc>
-                <a:spcPct val="112000"/>
-              </a:lnSpc>
-              <a:buNone/>
-            </a:pPr>
+              <a:t>: with </a:t>
+            </a:r>
+            <a:r>
+              <a:rPr lang="en-US" sz="1900" dirty="0">
+                <a:solidFill>
+                  <a:srgbClr val="151515"/>
+                </a:solidFill>
+                <a:latin typeface="Red Hat Mono" pitchFamily="34" charset="0"/>
+                <a:ea typeface="Red Hat Mono" pitchFamily="34" charset="-122"/>
+                <a:cs typeface="Red Hat Mono" pitchFamily="34" charset="-120"/>
+              </a:rPr>
+              <a:t>--force-conflicts</a:t>
+            </a:r>
             <a:r>
               <a:rPr lang="en-US" sz="2000" dirty="0">
                 <a:solidFill>
@@ -17282,46 +16450,12 @@
                 <a:ea typeface="Red Hat Text" pitchFamily="34" charset="-122"/>
                 <a:cs typeface="Red Hat Text" pitchFamily="34" charset="-120"/>
               </a:rPr>
-              <a:t>: with </a:t>
-            </a:r>
-            <a:pPr indent="0" marL="0">
-              <a:lnSpc>
-                <a:spcPct val="112000"/>
-              </a:lnSpc>
-              <a:buNone/>
-            </a:pPr>
-            <a:r>
-              <a:rPr lang="en-US" sz="1900" dirty="0">
-                <a:solidFill>
-                  <a:srgbClr val="151515"/>
-                </a:solidFill>
-                <a:latin typeface="Red Hat Mono" pitchFamily="34" charset="0"/>
-                <a:ea typeface="Red Hat Mono" pitchFamily="34" charset="-122"/>
-                <a:cs typeface="Red Hat Mono" pitchFamily="34" charset="-120"/>
-              </a:rPr>
-              <a:t>--force-conflicts</a:t>
-            </a:r>
-            <a:pPr indent="0" marL="0">
-              <a:lnSpc>
-                <a:spcPct val="112000"/>
-              </a:lnSpc>
-              <a:buNone/>
-            </a:pPr>
-            <a:r>
-              <a:rPr lang="en-US" sz="2000" dirty="0">
-                <a:solidFill>
-                  <a:srgbClr val="242424"/>
-                </a:solidFill>
-                <a:latin typeface="Red Hat Text" pitchFamily="34" charset="0"/>
-                <a:ea typeface="Red Hat Text" pitchFamily="34" charset="-122"/>
-                <a:cs typeface="Red Hat Text" pitchFamily="34" charset="-120"/>
-              </a:rPr>
               <a:t>, lets an upgrade adopt resources that lack Helm's ownership annotations and belong to another manager.</a:t>
             </a:r>
             <a:endParaRPr lang="en-US" sz="2000" dirty="0"/>
           </a:p>
           <a:p>
-            <a:pPr marL="228600" indent="-228600">
+            <a:pPr marL="304800" indent="-304800">
               <a:lnSpc>
                 <a:spcPct val="112000"/>
               </a:lnSpc>
@@ -17335,39 +16469,27 @@
               <a:buChar char="●"/>
             </a:pPr>
             <a:r>
-              <a:rPr lang="en-US" sz="2000" b="1" dirty="0">
+              <a:rPr lang="en-US" sz="1900" dirty="0">
                 <a:solidFill>
                   <a:srgbClr val="151515"/>
+                </a:solidFill>
+                <a:latin typeface="Red Hat Mono" pitchFamily="34" charset="0"/>
+                <a:ea typeface="Red Hat Mono" pitchFamily="34" charset="-122"/>
+                <a:cs typeface="Red Hat Mono" pitchFamily="34" charset="-120"/>
+              </a:rPr>
+              <a:t>--force-replace</a:t>
+            </a:r>
+            <a:r>
+              <a:rPr lang="en-US" sz="2000" dirty="0">
+                <a:solidFill>
+                  <a:srgbClr val="242424"/>
                 </a:solidFill>
                 <a:latin typeface="Red Hat Text" pitchFamily="34" charset="0"/>
                 <a:ea typeface="Red Hat Text" pitchFamily="34" charset="-122"/>
                 <a:cs typeface="Red Hat Text" pitchFamily="34" charset="-120"/>
               </a:rPr>
-              <a:t>--force-replace</a:t>
-            </a:r>
-            <a:pPr indent="0" marL="0">
-              <a:lnSpc>
-                <a:spcPct val="112000"/>
-              </a:lnSpc>
-              <a:buNone/>
-            </a:pPr>
-            <a:r>
-              <a:rPr lang="en-US" sz="2000" dirty="0">
-                <a:solidFill>
-                  <a:srgbClr val="242424"/>
-                </a:solidFill>
-                <a:latin typeface="Red Hat Text" pitchFamily="34" charset="0"/>
-                <a:ea typeface="Red Hat Text" pitchFamily="34" charset="-122"/>
-                <a:cs typeface="Red Hat Text" pitchFamily="34" charset="-120"/>
-              </a:rPr>
               <a:t>: client-side replace; on Helm 4.3.0 it needs </a:t>
             </a:r>
-            <a:pPr indent="0" marL="0">
-              <a:lnSpc>
-                <a:spcPct val="112000"/>
-              </a:lnSpc>
-              <a:buNone/>
-            </a:pPr>
             <a:r>
               <a:rPr lang="en-US" sz="1900" dirty="0">
                 <a:solidFill>
@@ -17379,12 +16501,6 @@
               </a:rPr>
               <a:t>--server-side=false</a:t>
             </a:r>
-            <a:pPr indent="0" marL="0">
-              <a:lnSpc>
-                <a:spcPct val="112000"/>
-              </a:lnSpc>
-              <a:buNone/>
-            </a:pPr>
             <a:r>
               <a:rPr lang="en-US" sz="2000" dirty="0">
                 <a:solidFill>
@@ -17613,8 +16729,8 @@
         </p:nvSpPr>
         <p:spPr>
           <a:xfrm>
-            <a:off x="566928" y="1691640"/>
-            <a:ext cx="11055096" cy="4251960"/>
+            <a:off x="566928" y="1417320"/>
+            <a:ext cx="11055096" cy="2506142"/>
           </a:xfrm>
           <a:prstGeom prst="rect">
             <a:avLst/>
@@ -17638,8 +16754,8 @@
         </p:nvSpPr>
         <p:spPr>
           <a:xfrm>
-            <a:off x="749808" y="1783080"/>
-            <a:ext cx="10689336" cy="4069080"/>
+            <a:off x="749808" y="1508760"/>
+            <a:ext cx="10689336" cy="2323262"/>
           </a:xfrm>
           <a:prstGeom prst="rect">
             <a:avLst/>
@@ -17669,12 +16785,6 @@
               <a:t>[host]$ cd examples/05-values
 </a:t>
             </a:r>
-            <a:pPr algn="l" indent="0" marL="0">
-              <a:lnSpc>
-                <a:spcPct val="110000"/>
-              </a:lnSpc>
-              <a:buNone/>
-            </a:pPr>
             <a:r>
               <a:rPr lang="en-US" sz="1400" dirty="0">
                 <a:solidFill>
@@ -17687,12 +16797,6 @@
               <a:t>[host]$ helm lint ./shipping-service -f values-prod.yaml
 </a:t>
             </a:r>
-            <a:pPr algn="l" indent="0" marL="0">
-              <a:lnSpc>
-                <a:spcPct val="110000"/>
-              </a:lnSpc>
-              <a:buNone/>
-            </a:pPr>
             <a:r>
               <a:rPr lang="en-US" sz="1400" dirty="0">
                 <a:solidFill>
@@ -17705,12 +16809,6 @@
               <a:t>[host]$ helm template shipping ./shipping-service -n hfd-05 \
 </a:t>
             </a:r>
-            <a:pPr algn="l" indent="0" marL="0">
-              <a:lnSpc>
-                <a:spcPct val="110000"/>
-              </a:lnSpc>
-              <a:buNone/>
-            </a:pPr>
             <a:r>
               <a:rPr lang="en-US" sz="1400" dirty="0">
                 <a:solidFill>
@@ -17723,12 +16821,6 @@
               <a:t>          --show-only templates/deployment.yaml
 </a:t>
             </a:r>
-            <a:pPr algn="l" indent="0" marL="0">
-              <a:lnSpc>
-                <a:spcPct val="110000"/>
-              </a:lnSpc>
-              <a:buNone/>
-            </a:pPr>
             <a:r>
               <a:rPr lang="en-US" sz="1400" dirty="0">
                 <a:solidFill>
@@ -17741,12 +16833,6 @@
               <a:t>[host]$ helm template shipping ./shipping-service | kubeconform -strict -summary -
 </a:t>
             </a:r>
-            <a:pPr algn="l" indent="0" marL="0">
-              <a:lnSpc>
-                <a:spcPct val="110000"/>
-              </a:lnSpc>
-              <a:buNone/>
-            </a:pPr>
             <a:r>
               <a:rPr lang="en-US" sz="1400" dirty="0">
                 <a:solidFill>
@@ -17759,12 +16845,6 @@
               <a:t># client-side: no cluster, so lookup returns an empty map and the API list is the built-in one
 </a:t>
             </a:r>
-            <a:pPr algn="l" indent="0" marL="0">
-              <a:lnSpc>
-                <a:spcPct val="110000"/>
-              </a:lnSpc>
-              <a:buNone/>
-            </a:pPr>
             <a:r>
               <a:rPr lang="en-US" sz="1400" dirty="0">
                 <a:solidFill>
@@ -17777,12 +16857,6 @@
               <a:t>[host]$ helm upgrade --install shipping ./shipping-service -n hfd-05 --dry-run=client
 </a:t>
             </a:r>
-            <a:pPr algn="l" indent="0" marL="0">
-              <a:lnSpc>
-                <a:spcPct val="110000"/>
-              </a:lnSpc>
-              <a:buNone/>
-            </a:pPr>
             <a:r>
               <a:rPr lang="en-US" sz="1400" dirty="0">
                 <a:solidFill>
@@ -17795,12 +16869,6 @@
               <a:t># server-side: connects to the cluster, runs lookup and checks CRDs through .Capabilities
 </a:t>
             </a:r>
-            <a:pPr algn="l" indent="0" marL="0">
-              <a:lnSpc>
-                <a:spcPct val="110000"/>
-              </a:lnSpc>
-              <a:buNone/>
-            </a:pPr>
             <a:r>
               <a:rPr lang="en-US" sz="1400" dirty="0">
                 <a:solidFill>
@@ -17825,7 +16893,7 @@
         </p:nvSpPr>
         <p:spPr>
           <a:xfrm>
-            <a:off x="566928" y="5943600"/>
+            <a:off x="566928" y="4014902"/>
             <a:ext cx="11055096" cy="310896"/>
           </a:xfrm>
           <a:prstGeom prst="rect">
@@ -18043,7 +17111,7 @@
           <a:bodyPr wrap="square" lIns="0" tIns="0" rIns="0" bIns="0" rtlCol="0" anchor="t"/>
           <a:lstStyle/>
           <a:p>
-            <a:pPr marL="228600" indent="-228600">
+            <a:pPr marL="304800" indent="-304800">
               <a:lnSpc>
                 <a:spcPct val="112000"/>
               </a:lnSpc>
@@ -18067,12 +17135,6 @@
               </a:rPr>
               <a:t>Testing and debugging</a:t>
             </a:r>
-            <a:pPr indent="0" marL="0">
-              <a:lnSpc>
-                <a:spcPct val="112000"/>
-              </a:lnSpc>
-              <a:buNone/>
-            </a:pPr>
             <a:r>
               <a:rPr lang="en-US" sz="2000" dirty="0">
                 <a:solidFill>
@@ -18082,12 +17144,56 @@
                 <a:ea typeface="Red Hat Text" pitchFamily="34" charset="-122"/>
                 <a:cs typeface="Red Hat Text" pitchFamily="34" charset="-120"/>
               </a:rPr>
-              <a:t>: the debug ladder, helm diff, helm-unittest, chart-testing, kubeconform and a chart CI pipeline.</a:t>
+              <a:t>: the debug ladder, helm diff, </a:t>
+            </a:r>
+            <a:r>
+              <a:rPr lang="en-US" sz="1900" dirty="0">
+                <a:solidFill>
+                  <a:srgbClr val="151515"/>
+                </a:solidFill>
+                <a:latin typeface="Red Hat Mono" pitchFamily="34" charset="0"/>
+                <a:ea typeface="Red Hat Mono" pitchFamily="34" charset="-122"/>
+                <a:cs typeface="Red Hat Mono" pitchFamily="34" charset="-120"/>
+              </a:rPr>
+              <a:t>helm-unittest</a:t>
+            </a:r>
+            <a:r>
+              <a:rPr lang="en-US" sz="2000" dirty="0">
+                <a:solidFill>
+                  <a:srgbClr val="242424"/>
+                </a:solidFill>
+                <a:latin typeface="Red Hat Text" pitchFamily="34" charset="0"/>
+                <a:ea typeface="Red Hat Text" pitchFamily="34" charset="-122"/>
+                <a:cs typeface="Red Hat Text" pitchFamily="34" charset="-120"/>
+              </a:rPr>
+              <a:t>, </a:t>
+            </a:r>
+            <a:r>
+              <a:rPr lang="en-US" sz="1900" dirty="0">
+                <a:solidFill>
+                  <a:srgbClr val="151515"/>
+                </a:solidFill>
+                <a:latin typeface="Red Hat Mono" pitchFamily="34" charset="0"/>
+                <a:ea typeface="Red Hat Mono" pitchFamily="34" charset="-122"/>
+                <a:cs typeface="Red Hat Mono" pitchFamily="34" charset="-120"/>
+              </a:rPr>
+              <a:t>chart-testing</a:t>
+            </a:r>
+            <a:r>
+              <a:rPr lang="en-US" sz="2000" dirty="0">
+                <a:solidFill>
+                  <a:srgbClr val="242424"/>
+                </a:solidFill>
+                <a:latin typeface="Red Hat Text" pitchFamily="34" charset="0"/>
+                <a:ea typeface="Red Hat Text" pitchFamily="34" charset="-122"/>
+                <a:cs typeface="Red Hat Text" pitchFamily="34" charset="-120"/>
+              </a:rPr>
+              <a:t>, kubeconform and a chart CI pipeline.</a:t>
             </a:r>
             <a:endParaRPr lang="en-US" sz="2000" dirty="0"/>
           </a:p>
           <a:p>
-            <a:pPr marL="228600" indent="-228600">
+            <a:pPr marL="304800" indent="-304800">
               <a:lnSpc>
                 <a:spcPct val="112000"/>
               </a:lnSpc>
@@ -18111,12 +17217,6 @@
               </a:rPr>
               <a:t>Multi-service applications</a:t>
             </a:r>
-            <a:pPr indent="0" marL="0">
-              <a:lnSpc>
-                <a:spcPct val="112000"/>
-              </a:lnSpc>
-              <a:buNone/>
-            </a:pPr>
             <a:r>
               <a:rPr lang="en-US" sz="2000" dirty="0">
                 <a:solidFill>
@@ -18131,7 +17231,7 @@
             <a:endParaRPr lang="en-US" sz="2000" dirty="0"/>
           </a:p>
           <a:p>
-            <a:pPr marL="228600" indent="-228600">
+            <a:pPr marL="304800" indent="-304800">
               <a:lnSpc>
                 <a:spcPct val="112000"/>
               </a:lnSpc>
@@ -18155,12 +17255,6 @@
               </a:rPr>
               <a:t>Distribution</a:t>
             </a:r>
-            <a:pPr indent="0" marL="0">
-              <a:lnSpc>
-                <a:spcPct val="112000"/>
-              </a:lnSpc>
-              <a:buNone/>
-            </a:pPr>
             <a:r>
               <a:rPr lang="en-US" sz="2000" dirty="0">
                 <a:solidFill>
@@ -18175,7 +17269,7 @@
             <a:endParaRPr lang="en-US" sz="2000" dirty="0"/>
           </a:p>
           <a:p>
-            <a:pPr marL="228600" indent="-228600">
+            <a:pPr marL="304800" indent="-304800">
               <a:lnSpc>
                 <a:spcPct val="112000"/>
               </a:lnSpc>
@@ -18199,12 +17293,6 @@
               </a:rPr>
               <a:t>Extending and delivering</a:t>
             </a:r>
-            <a:pPr indent="0" marL="0">
-              <a:lnSpc>
-                <a:spcPct val="112000"/>
-              </a:lnSpc>
-              <a:buNone/>
-            </a:pPr>
             <a:r>
               <a:rPr lang="en-US" sz="2000" dirty="0">
                 <a:solidFill>
@@ -18219,7 +17307,7 @@
             <a:endParaRPr lang="en-US" sz="2000" dirty="0"/>
           </a:p>
           <a:p>
-            <a:pPr marL="228600" indent="-228600">
+            <a:pPr marL="304800" indent="-304800">
               <a:lnSpc>
                 <a:spcPct val="112000"/>
               </a:lnSpc>
@@ -18243,12 +17331,6 @@
               </a:rPr>
               <a:t>OpenShift</a:t>
             </a:r>
-            <a:pPr indent="0" marL="0">
-              <a:lnSpc>
-                <a:spcPct val="112000"/>
-              </a:lnSpc>
-              <a:buNone/>
-            </a:pPr>
             <a:r>
               <a:rPr lang="en-US" sz="2000" dirty="0">
                 <a:solidFill>
@@ -18467,7 +17549,7 @@
                         <a:buNone/>
                       </a:pPr>
                       <a:r>
-                        <a:rPr lang="en-US" sz="1600" b="1" dirty="0">
+                        <a:rPr lang="en-US" sz="1500" b="1" dirty="0">
                           <a:solidFill>
                             <a:srgbClr val="EE0000"/>
                           </a:solidFill>
@@ -18477,7 +17559,7 @@
                         </a:rPr>
                         <a:t>--atomic</a:t>
                       </a:r>
-                      <a:endParaRPr lang="en-US" sz="1600" dirty="0">
+                      <a:endParaRPr lang="en-US" sz="1500" dirty="0">
                         <a:latin typeface="Red Hat Mono" charset="0"/>
                         <a:ea typeface="Red Hat Mono" charset="0"/>
                         <a:cs typeface="Red Hat Mono" charset="0"/>
@@ -18532,17 +17614,17 @@
                         <a:buNone/>
                       </a:pPr>
                       <a:r>
-                        <a:rPr lang="en-US" sz="1600" b="1" dirty="0">
+                        <a:rPr lang="en-US" sz="1300" b="1" dirty="0">
                           <a:solidFill>
                             <a:srgbClr val="151515"/>
                           </a:solidFill>
-                          <a:latin typeface="Red Hat Text" pitchFamily="34" charset="0"/>
-                          <a:ea typeface="Red Hat Text" pitchFamily="34" charset="-122"/>
-                          <a:cs typeface="Red Hat Text" pitchFamily="34" charset="-120"/>
+                          <a:latin typeface="Red Hat Mono" pitchFamily="34" charset="0"/>
+                          <a:ea typeface="Red Hat Mono" pitchFamily="34" charset="-122"/>
+                          <a:cs typeface="Red Hat Mono" pitchFamily="34" charset="-120"/>
                         </a:rPr>
                         <a:t>--rollback-on-failure</a:t>
                       </a:r>
-                      <a:endParaRPr lang="en-US" sz="1600" dirty="0">
+                      <a:endParaRPr lang="en-US" sz="1400" dirty="0">
                         <a:latin typeface="Red Hat Text" charset="0"/>
                         <a:ea typeface="Red Hat Text" charset="0"/>
                         <a:cs typeface="Red Hat Text" charset="0"/>
@@ -18597,7 +17679,7 @@
                         <a:buNone/>
                       </a:pPr>
                       <a:r>
-                        <a:rPr lang="en-US" sz="1500" dirty="0">
+                        <a:rPr lang="en-US" sz="1300" dirty="0">
                           <a:solidFill>
                             <a:srgbClr val="242424"/>
                           </a:solidFill>
@@ -18605,9 +17687,30 @@
                           <a:ea typeface="Red Hat Text" pitchFamily="34" charset="-122"/>
                           <a:cs typeface="Red Hat Text" pitchFamily="34" charset="-120"/>
                         </a:rPr>
-                        <a:t>install and upgrade; implies --wait=watcher</a:t>
+                        <a:t>install and upgrade; implies </a:t>
                       </a:r>
-                      <a:endParaRPr lang="en-US" sz="1500" dirty="0">
+                      <a:endParaRPr lang="en-US" sz="1300" dirty="0">
+                        <a:latin typeface="Red Hat Text" charset="0"/>
+                        <a:ea typeface="Red Hat Text" charset="0"/>
+                        <a:cs typeface="Red Hat Text" charset="0"/>
+                      </a:endParaRPr>
+                    </a:p>
+                    <a:p>
+                      <a:pPr algn="l" indent="0" marL="0">
+                        <a:buNone/>
+                      </a:pPr>
+                      <a:r>
+                        <a:rPr lang="en-US" sz="1200" dirty="0">
+                          <a:solidFill>
+                            <a:srgbClr val="151515"/>
+                          </a:solidFill>
+                          <a:latin typeface="Red Hat Mono" pitchFamily="34" charset="0"/>
+                          <a:ea typeface="Red Hat Mono" pitchFamily="34" charset="-122"/>
+                          <a:cs typeface="Red Hat Mono" pitchFamily="34" charset="-120"/>
+                        </a:rPr>
+                        <a:t>--wait=watcher</a:t>
+                      </a:r>
+                      <a:endParaRPr lang="en-US" sz="1300" dirty="0">
                         <a:latin typeface="Red Hat Text" charset="0"/>
                         <a:ea typeface="Red Hat Text" charset="0"/>
                         <a:cs typeface="Red Hat Text" charset="0"/>
@@ -18664,7 +17767,7 @@
                         <a:buNone/>
                       </a:pPr>
                       <a:r>
-                        <a:rPr lang="en-US" sz="1600" b="1" dirty="0">
+                        <a:rPr lang="en-US" sz="1500" b="1" dirty="0">
                           <a:solidFill>
                             <a:srgbClr val="EE0000"/>
                           </a:solidFill>
@@ -18674,7 +17777,7 @@
                         </a:rPr>
                         <a:t>--force</a:t>
                       </a:r>
-                      <a:endParaRPr lang="en-US" sz="1600" dirty="0">
+                      <a:endParaRPr lang="en-US" sz="1500" dirty="0">
                         <a:latin typeface="Red Hat Mono" charset="0"/>
                         <a:ea typeface="Red Hat Mono" charset="0"/>
                         <a:cs typeface="Red Hat Mono" charset="0"/>
@@ -18729,17 +17832,17 @@
                         <a:buNone/>
                       </a:pPr>
                       <a:r>
-                        <a:rPr lang="en-US" sz="1600" b="1" dirty="0">
+                        <a:rPr lang="en-US" sz="1300" b="1" dirty="0">
                           <a:solidFill>
                             <a:srgbClr val="151515"/>
                           </a:solidFill>
-                          <a:latin typeface="Red Hat Text" pitchFamily="34" charset="0"/>
-                          <a:ea typeface="Red Hat Text" pitchFamily="34" charset="-122"/>
-                          <a:cs typeface="Red Hat Text" pitchFamily="34" charset="-120"/>
+                          <a:latin typeface="Red Hat Mono" pitchFamily="34" charset="0"/>
+                          <a:ea typeface="Red Hat Mono" pitchFamily="34" charset="-122"/>
+                          <a:cs typeface="Red Hat Mono" pitchFamily="34" charset="-120"/>
                         </a:rPr>
                         <a:t>--force-replace</a:t>
                       </a:r>
-                      <a:endParaRPr lang="en-US" sz="1600" dirty="0">
+                      <a:endParaRPr lang="en-US" sz="1400" dirty="0">
                         <a:latin typeface="Red Hat Text" charset="0"/>
                         <a:ea typeface="Red Hat Text" charset="0"/>
                         <a:cs typeface="Red Hat Text" charset="0"/>
@@ -18794,7 +17897,7 @@
                         <a:buNone/>
                       </a:pPr>
                       <a:r>
-                        <a:rPr lang="en-US" sz="1500" dirty="0">
+                        <a:rPr lang="en-US" sz="1300" dirty="0">
                           <a:solidFill>
                             <a:srgbClr val="242424"/>
                           </a:solidFill>
@@ -18802,9 +17905,41 @@
                           <a:ea typeface="Red Hat Text" pitchFamily="34" charset="-122"/>
                           <a:cs typeface="Red Hat Text" pitchFamily="34" charset="-120"/>
                         </a:rPr>
-                        <a:t>client-side only: needs --server-side=false; both spellings warn</a:t>
+                        <a:t>client-side only: needs </a:t>
                       </a:r>
-                      <a:endParaRPr lang="en-US" sz="1500" dirty="0">
+                      <a:endParaRPr lang="en-US" sz="1300" dirty="0">
+                        <a:latin typeface="Red Hat Text" charset="0"/>
+                        <a:ea typeface="Red Hat Text" charset="0"/>
+                        <a:cs typeface="Red Hat Text" charset="0"/>
+                      </a:endParaRPr>
+                    </a:p>
+                    <a:p>
+                      <a:pPr algn="l" indent="0" marL="0">
+                        <a:buNone/>
+                      </a:pPr>
+                      <a:r>
+                        <a:rPr lang="en-US" sz="1200" dirty="0">
+                          <a:solidFill>
+                            <a:srgbClr val="151515"/>
+                          </a:solidFill>
+                          <a:latin typeface="Red Hat Mono" pitchFamily="34" charset="0"/>
+                          <a:ea typeface="Red Hat Mono" pitchFamily="34" charset="-122"/>
+                          <a:cs typeface="Red Hat Mono" pitchFamily="34" charset="-120"/>
+                        </a:rPr>
+                        <a:t>--server-side=false</a:t>
+                      </a:r>
+                      <a:r>
+                        <a:rPr lang="en-US" sz="1300" dirty="0">
+                          <a:solidFill>
+                            <a:srgbClr val="242424"/>
+                          </a:solidFill>
+                          <a:latin typeface="Red Hat Text" pitchFamily="34" charset="0"/>
+                          <a:ea typeface="Red Hat Text" pitchFamily="34" charset="-122"/>
+                          <a:cs typeface="Red Hat Text" pitchFamily="34" charset="-120"/>
+                        </a:rPr>
+                        <a:t>; both spellings warn</a:t>
+                      </a:r>
+                      <a:endParaRPr lang="en-US" sz="1300" dirty="0">
                         <a:latin typeface="Red Hat Text" charset="0"/>
                         <a:ea typeface="Red Hat Text" charset="0"/>
                         <a:cs typeface="Red Hat Text" charset="0"/>
@@ -18861,7 +17996,7 @@
                         <a:buNone/>
                       </a:pPr>
                       <a:r>
-                        <a:rPr lang="en-US" sz="1600" b="1" dirty="0">
+                        <a:rPr lang="en-US" sz="1500" b="1" dirty="0">
                           <a:solidFill>
                             <a:srgbClr val="EE0000"/>
                           </a:solidFill>
@@ -18871,7 +18006,7 @@
                         </a:rPr>
                         <a:t>--wait (boolean)</a:t>
                       </a:r>
-                      <a:endParaRPr lang="en-US" sz="1600" dirty="0">
+                      <a:endParaRPr lang="en-US" sz="1500" dirty="0">
                         <a:latin typeface="Red Hat Mono" charset="0"/>
                         <a:ea typeface="Red Hat Mono" charset="0"/>
                         <a:cs typeface="Red Hat Mono" charset="0"/>
@@ -18926,17 +18061,17 @@
                         <a:buNone/>
                       </a:pPr>
                       <a:r>
-                        <a:rPr lang="en-US" sz="1600" b="1" dirty="0">
+                        <a:rPr lang="en-US" sz="1300" b="1" dirty="0">
                           <a:solidFill>
                             <a:srgbClr val="151515"/>
                           </a:solidFill>
-                          <a:latin typeface="Red Hat Text" pitchFamily="34" charset="0"/>
-                          <a:ea typeface="Red Hat Text" pitchFamily="34" charset="-122"/>
-                          <a:cs typeface="Red Hat Text" pitchFamily="34" charset="-120"/>
+                          <a:latin typeface="Red Hat Mono" pitchFamily="34" charset="0"/>
+                          <a:ea typeface="Red Hat Mono" pitchFamily="34" charset="-122"/>
+                          <a:cs typeface="Red Hat Mono" pitchFamily="34" charset="-120"/>
                         </a:rPr>
                         <a:t>--wait=watcher|hookOnly|legacy</a:t>
                       </a:r>
-                      <a:endParaRPr lang="en-US" sz="1600" dirty="0">
+                      <a:endParaRPr lang="en-US" sz="1400" dirty="0">
                         <a:latin typeface="Red Hat Text" charset="0"/>
                         <a:ea typeface="Red Hat Text" charset="0"/>
                         <a:cs typeface="Red Hat Text" charset="0"/>
@@ -18991,7 +18126,7 @@
                         <a:buNone/>
                       </a:pPr>
                       <a:r>
-                        <a:rPr lang="en-US" sz="1500" dirty="0">
+                        <a:rPr lang="en-US" sz="1300" dirty="0">
                           <a:solidFill>
                             <a:srgbClr val="242424"/>
                           </a:solidFill>
@@ -18999,9 +18134,41 @@
                           <a:ea typeface="Red Hat Text" pitchFamily="34" charset="-122"/>
                           <a:cs typeface="Red Hat Text" pitchFamily="34" charset="-120"/>
                         </a:rPr>
-                        <a:t>A bare --wait means watcher; no flag means hookOnly</a:t>
+                        <a:t>A bare </a:t>
                       </a:r>
-                      <a:endParaRPr lang="en-US" sz="1500" dirty="0">
+                      <a:endParaRPr lang="en-US" sz="1300" dirty="0">
+                        <a:latin typeface="Red Hat Text" charset="0"/>
+                        <a:ea typeface="Red Hat Text" charset="0"/>
+                        <a:cs typeface="Red Hat Text" charset="0"/>
+                      </a:endParaRPr>
+                    </a:p>
+                    <a:p>
+                      <a:pPr algn="l" indent="0" marL="0">
+                        <a:buNone/>
+                      </a:pPr>
+                      <a:r>
+                        <a:rPr lang="en-US" sz="1200" dirty="0">
+                          <a:solidFill>
+                            <a:srgbClr val="151515"/>
+                          </a:solidFill>
+                          <a:latin typeface="Red Hat Mono" pitchFamily="34" charset="0"/>
+                          <a:ea typeface="Red Hat Mono" pitchFamily="34" charset="-122"/>
+                          <a:cs typeface="Red Hat Mono" pitchFamily="34" charset="-120"/>
+                        </a:rPr>
+                        <a:t>--wait</a:t>
+                      </a:r>
+                      <a:r>
+                        <a:rPr lang="en-US" sz="1300" dirty="0">
+                          <a:solidFill>
+                            <a:srgbClr val="242424"/>
+                          </a:solidFill>
+                          <a:latin typeface="Red Hat Text" pitchFamily="34" charset="0"/>
+                          <a:ea typeface="Red Hat Text" pitchFamily="34" charset="-122"/>
+                          <a:cs typeface="Red Hat Text" pitchFamily="34" charset="-120"/>
+                        </a:rPr>
+                        <a:t> means watcher; no flag means hookOnly</a:t>
+                      </a:r>
+                      <a:endParaRPr lang="en-US" sz="1300" dirty="0">
                         <a:latin typeface="Red Hat Text" charset="0"/>
                         <a:ea typeface="Red Hat Text" charset="0"/>
                         <a:cs typeface="Red Hat Text" charset="0"/>
@@ -19058,7 +18225,7 @@
                         <a:buNone/>
                       </a:pPr>
                       <a:r>
-                        <a:rPr lang="en-US" sz="1600" b="1" dirty="0">
+                        <a:rPr lang="en-US" sz="1500" b="1" dirty="0">
                           <a:solidFill>
                             <a:srgbClr val="EE0000"/>
                           </a:solidFill>
@@ -19068,7 +18235,7 @@
                         </a:rPr>
                         <a:t>--dry-run (boolean)</a:t>
                       </a:r>
-                      <a:endParaRPr lang="en-US" sz="1600" dirty="0">
+                      <a:endParaRPr lang="en-US" sz="1500" dirty="0">
                         <a:latin typeface="Red Hat Mono" charset="0"/>
                         <a:ea typeface="Red Hat Mono" charset="0"/>
                         <a:cs typeface="Red Hat Mono" charset="0"/>
@@ -19123,17 +18290,17 @@
                         <a:buNone/>
                       </a:pPr>
                       <a:r>
-                        <a:rPr lang="en-US" sz="1600" b="1" dirty="0">
+                        <a:rPr lang="en-US" sz="1300" b="1" dirty="0">
                           <a:solidFill>
                             <a:srgbClr val="151515"/>
                           </a:solidFill>
-                          <a:latin typeface="Red Hat Text" pitchFamily="34" charset="0"/>
-                          <a:ea typeface="Red Hat Text" pitchFamily="34" charset="-122"/>
-                          <a:cs typeface="Red Hat Text" pitchFamily="34" charset="-120"/>
+                          <a:latin typeface="Red Hat Mono" pitchFamily="34" charset="0"/>
+                          <a:ea typeface="Red Hat Mono" pitchFamily="34" charset="-122"/>
+                          <a:cs typeface="Red Hat Mono" pitchFamily="34" charset="-120"/>
                         </a:rPr>
                         <a:t>--dry-run=none|client|server</a:t>
                       </a:r>
-                      <a:endParaRPr lang="en-US" sz="1600" dirty="0">
+                      <a:endParaRPr lang="en-US" sz="1400" dirty="0">
                         <a:latin typeface="Red Hat Text" charset="0"/>
                         <a:ea typeface="Red Hat Text" charset="0"/>
                         <a:cs typeface="Red Hat Text" charset="0"/>
@@ -19188,7 +18355,7 @@
                         <a:buNone/>
                       </a:pPr>
                       <a:r>
-                        <a:rPr lang="en-US" sz="1500" dirty="0">
+                        <a:rPr lang="en-US" sz="1300" dirty="0">
                           <a:solidFill>
                             <a:srgbClr val="242424"/>
                           </a:solidFill>
@@ -19198,7 +18365,7 @@
                         </a:rPr>
                         <a:t>template takes client or server and defaults to client</a:t>
                       </a:r>
-                      <a:endParaRPr lang="en-US" sz="1500" dirty="0">
+                      <a:endParaRPr lang="en-US" sz="1300" dirty="0">
                         <a:latin typeface="Red Hat Text" charset="0"/>
                         <a:ea typeface="Red Hat Text" charset="0"/>
                         <a:cs typeface="Red Hat Text" charset="0"/>
@@ -19255,7 +18422,7 @@
                         <a:buNone/>
                       </a:pPr>
                       <a:r>
-                        <a:rPr lang="en-US" sz="1600" b="1" dirty="0">
+                        <a:rPr lang="en-US" sz="1500" b="1" dirty="0">
                           <a:solidFill>
                             <a:srgbClr val="EE0000"/>
                           </a:solidFill>
@@ -19265,7 +18432,7 @@
                         </a:rPr>
                         <a:t>--post-renderer &lt;exe&gt;</a:t>
                       </a:r>
-                      <a:endParaRPr lang="en-US" sz="1600" dirty="0">
+                      <a:endParaRPr lang="en-US" sz="1500" dirty="0">
                         <a:latin typeface="Red Hat Mono" charset="0"/>
                         <a:ea typeface="Red Hat Mono" charset="0"/>
                         <a:cs typeface="Red Hat Mono" charset="0"/>
@@ -19320,7 +18487,28 @@
                         <a:buNone/>
                       </a:pPr>
                       <a:r>
-                        <a:rPr lang="en-US" sz="1600" b="1" dirty="0">
+                        <a:rPr lang="en-US" sz="1300" b="1" dirty="0">
+                          <a:solidFill>
+                            <a:srgbClr val="151515"/>
+                          </a:solidFill>
+                          <a:latin typeface="Red Hat Mono" pitchFamily="34" charset="0"/>
+                          <a:ea typeface="Red Hat Mono" pitchFamily="34" charset="-122"/>
+                          <a:cs typeface="Red Hat Mono" pitchFamily="34" charset="-120"/>
+                        </a:rPr>
+                        <a:t>--post-renderer</a:t>
+                      </a:r>
+                      <a:endParaRPr lang="en-US" sz="1400" dirty="0">
+                        <a:latin typeface="Red Hat Text" charset="0"/>
+                        <a:ea typeface="Red Hat Text" charset="0"/>
+                        <a:cs typeface="Red Hat Text" charset="0"/>
+                      </a:endParaRPr>
+                    </a:p>
+                    <a:p>
+                      <a:pPr algn="l" indent="0" marL="0">
+                        <a:buNone/>
+                      </a:pPr>
+                      <a:r>
+                        <a:rPr lang="en-US" sz="1400" b="1" dirty="0">
                           <a:solidFill>
                             <a:srgbClr val="151515"/>
                           </a:solidFill>
@@ -19328,9 +18516,9 @@
                           <a:ea typeface="Red Hat Text" pitchFamily="34" charset="-122"/>
                           <a:cs typeface="Red Hat Text" pitchFamily="34" charset="-120"/>
                         </a:rPr>
-                        <a:t>--post-renderer &lt;plugin&gt;</a:t>
+                        <a:t> &lt;plugin&gt;</a:t>
                       </a:r>
-                      <a:endParaRPr lang="en-US" sz="1600" dirty="0">
+                      <a:endParaRPr lang="en-US" sz="1400" dirty="0">
                         <a:latin typeface="Red Hat Text" charset="0"/>
                         <a:ea typeface="Red Hat Text" charset="0"/>
                         <a:cs typeface="Red Hat Text" charset="0"/>
@@ -19385,7 +18573,7 @@
                         <a:buNone/>
                       </a:pPr>
                       <a:r>
-                        <a:rPr lang="en-US" sz="1500" dirty="0">
+                        <a:rPr lang="en-US" sz="1300" dirty="0">
                           <a:solidFill>
                             <a:srgbClr val="242424"/>
                           </a:solidFill>
@@ -19395,7 +18583,7 @@
                         </a:rPr>
                         <a:t>A path is rejected; pass a postrenderer/v1 plugin name</a:t>
                       </a:r>
-                      <a:endParaRPr lang="en-US" sz="1500" dirty="0">
+                      <a:endParaRPr lang="en-US" sz="1300" dirty="0">
                         <a:latin typeface="Red Hat Text" charset="0"/>
                         <a:ea typeface="Red Hat Text" charset="0"/>
                         <a:cs typeface="Red Hat Text" charset="0"/>
@@ -19452,7 +18640,7 @@
                         <a:buNone/>
                       </a:pPr>
                       <a:r>
-                        <a:rPr lang="en-US" sz="1600" b="1" dirty="0">
+                        <a:rPr lang="en-US" sz="1500" b="1" dirty="0">
                           <a:solidFill>
                             <a:srgbClr val="EE0000"/>
                           </a:solidFill>
@@ -19462,7 +18650,7 @@
                         </a:rPr>
                         <a:t>registry login oci://host</a:t>
                       </a:r>
-                      <a:endParaRPr lang="en-US" sz="1600" dirty="0">
+                      <a:endParaRPr lang="en-US" sz="1500" dirty="0">
                         <a:latin typeface="Red Hat Mono" charset="0"/>
                         <a:ea typeface="Red Hat Mono" charset="0"/>
                         <a:cs typeface="Red Hat Mono" charset="0"/>
@@ -19517,7 +18705,7 @@
                         <a:buNone/>
                       </a:pPr>
                       <a:r>
-                        <a:rPr lang="en-US" sz="1600" b="1" dirty="0">
+                        <a:rPr lang="en-US" sz="1400" b="1" dirty="0">
                           <a:solidFill>
                             <a:srgbClr val="151515"/>
                           </a:solidFill>
@@ -19527,7 +18715,7 @@
                         </a:rPr>
                         <a:t>registry login host</a:t>
                       </a:r>
-                      <a:endParaRPr lang="en-US" sz="1600" dirty="0">
+                      <a:endParaRPr lang="en-US" sz="1400" dirty="0">
                         <a:latin typeface="Red Hat Text" charset="0"/>
                         <a:ea typeface="Red Hat Text" charset="0"/>
                         <a:cs typeface="Red Hat Text" charset="0"/>
@@ -19582,7 +18770,7 @@
                         <a:buNone/>
                       </a:pPr>
                       <a:r>
-                        <a:rPr lang="en-US" sz="1500" dirty="0">
+                        <a:rPr lang="en-US" sz="1300" dirty="0">
                           <a:solidFill>
                             <a:srgbClr val="242424"/>
                           </a:solidFill>
@@ -19592,7 +18780,7 @@
                         </a:rPr>
                         <a:t>Domain name only</a:t>
                       </a:r>
-                      <a:endParaRPr lang="en-US" sz="1500" dirty="0">
+                      <a:endParaRPr lang="en-US" sz="1300" dirty="0">
                         <a:latin typeface="Red Hat Text" charset="0"/>
                         <a:ea typeface="Red Hat Text" charset="0"/>
                         <a:cs typeface="Red Hat Text" charset="0"/>
@@ -19824,8 +19012,8 @@
         </p:blipFill>
         <p:spPr>
           <a:xfrm>
-            <a:off x="566928" y="1691640"/>
-            <a:ext cx="11055096" cy="4160520"/>
+            <a:off x="566928" y="1417320"/>
+            <a:ext cx="11055096" cy="4480560"/>
           </a:xfrm>
           <a:prstGeom prst="rect">
             <a:avLst/>
@@ -20058,7 +19246,7 @@
           <a:bodyPr wrap="square" lIns="0" tIns="0" rIns="0" bIns="0" rtlCol="0" anchor="t"/>
           <a:lstStyle/>
           <a:p>
-            <a:pPr marL="228600" indent="-228600">
+            <a:pPr marL="304800" indent="-304800">
               <a:lnSpc>
                 <a:spcPct val="112000"/>
               </a:lnSpc>
@@ -20082,12 +19270,6 @@
               </a:rPr>
               <a:t>A chart is a versioned package</a:t>
             </a:r>
-            <a:pPr indent="0" marL="0">
-              <a:lnSpc>
-                <a:spcPct val="112000"/>
-              </a:lnSpc>
-              <a:buNone/>
-            </a:pPr>
             <a:r>
               <a:rPr lang="en-US" sz="2000" dirty="0">
                 <a:solidFill>
@@ -20102,7 +19284,7 @@
             <a:endParaRPr lang="en-US" sz="2000" dirty="0"/>
           </a:p>
           <a:p>
-            <a:pPr marL="228600" indent="-228600">
+            <a:pPr marL="304800" indent="-304800">
               <a:lnSpc>
                 <a:spcPct val="112000"/>
               </a:lnSpc>
@@ -20126,12 +19308,6 @@
               </a:rPr>
               <a:t>A release is a named installation</a:t>
             </a:r>
-            <a:pPr indent="0" marL="0">
-              <a:lnSpc>
-                <a:spcPct val="112000"/>
-              </a:lnSpc>
-              <a:buNone/>
-            </a:pPr>
             <a:r>
               <a:rPr lang="en-US" sz="2000" dirty="0">
                 <a:solidFill>
@@ -20146,7 +19322,7 @@
             <a:endParaRPr lang="en-US" sz="2000" dirty="0"/>
           </a:p>
           <a:p>
-            <a:pPr marL="228600" indent="-228600">
+            <a:pPr marL="304800" indent="-304800">
               <a:lnSpc>
                 <a:spcPct val="112000"/>
               </a:lnSpc>
@@ -20170,12 +19346,6 @@
               </a:rPr>
               <a:t>Helm records every change</a:t>
             </a:r>
-            <a:pPr indent="0" marL="0">
-              <a:lnSpc>
-                <a:spcPct val="112000"/>
-              </a:lnSpc>
-              <a:buNone/>
-            </a:pPr>
             <a:r>
               <a:rPr lang="en-US" sz="2000" dirty="0">
                 <a:solidFill>
@@ -20190,7 +19360,7 @@
             <a:endParaRPr lang="en-US" sz="2000" dirty="0"/>
           </a:p>
           <a:p>
-            <a:pPr marL="228600" indent="-228600">
+            <a:pPr marL="304800" indent="-304800">
               <a:lnSpc>
                 <a:spcPct val="112000"/>
               </a:lnSpc>
@@ -20214,12 +19384,6 @@
               </a:rPr>
               <a:t>Helm is a command-line client</a:t>
             </a:r>
-            <a:pPr indent="0" marL="0">
-              <a:lnSpc>
-                <a:spcPct val="112000"/>
-              </a:lnSpc>
-              <a:buNone/>
-            </a:pPr>
             <a:r>
               <a:rPr lang="en-US" sz="2000" dirty="0">
                 <a:solidFill>
@@ -20438,7 +19602,7 @@
                         <a:buNone/>
                       </a:pPr>
                       <a:r>
-                        <a:rPr lang="en-US" sz="1600" b="1" dirty="0">
+                        <a:rPr lang="en-US" sz="1500" b="1" dirty="0">
                           <a:solidFill>
                             <a:srgbClr val="EE0000"/>
                           </a:solidFill>
@@ -20448,7 +19612,7 @@
                         </a:rPr>
                         <a:t>Apply</a:t>
                       </a:r>
-                      <a:endParaRPr lang="en-US" sz="1600" dirty="0">
+                      <a:endParaRPr lang="en-US" sz="1500" dirty="0">
                         <a:latin typeface="Red Hat Mono" charset="0"/>
                         <a:ea typeface="Red Hat Mono" charset="0"/>
                         <a:cs typeface="Red Hat Mono" charset="0"/>
@@ -20503,7 +19667,7 @@
                         <a:buNone/>
                       </a:pPr>
                       <a:r>
-                        <a:rPr lang="en-US" sz="1600" b="1" dirty="0">
+                        <a:rPr lang="en-US" sz="1400" b="1" dirty="0">
                           <a:solidFill>
                             <a:srgbClr val="151515"/>
                           </a:solidFill>
@@ -20513,7 +19677,7 @@
                         </a:rPr>
                         <a:t>Server-side apply</a:t>
                       </a:r>
-                      <a:endParaRPr lang="en-US" sz="1600" dirty="0">
+                      <a:endParaRPr lang="en-US" sz="1400" dirty="0">
                         <a:latin typeface="Red Hat Text" charset="0"/>
                         <a:ea typeface="Red Hat Text" charset="0"/>
                         <a:cs typeface="Red Hat Text" charset="0"/>
@@ -20568,7 +19732,7 @@
                         <a:buNone/>
                       </a:pPr>
                       <a:r>
-                        <a:rPr lang="en-US" sz="1500" dirty="0">
+                        <a:rPr lang="en-US" sz="1300" dirty="0">
                           <a:solidFill>
                             <a:srgbClr val="242424"/>
                           </a:solidFill>
@@ -20578,7 +19742,7 @@
                         </a:rPr>
                         <a:t>Default for new releases; upgrades follow the method the previous revision used</a:t>
                       </a:r>
-                      <a:endParaRPr lang="en-US" sz="1500" dirty="0">
+                      <a:endParaRPr lang="en-US" sz="1300" dirty="0">
                         <a:latin typeface="Red Hat Text" charset="0"/>
                         <a:ea typeface="Red Hat Text" charset="0"/>
                         <a:cs typeface="Red Hat Text" charset="0"/>
@@ -20635,7 +19799,7 @@
                         <a:buNone/>
                       </a:pPr>
                       <a:r>
-                        <a:rPr lang="en-US" sz="1600" b="1" dirty="0">
+                        <a:rPr lang="en-US" sz="1500" b="1" dirty="0">
                           <a:solidFill>
                             <a:srgbClr val="EE0000"/>
                           </a:solidFill>
@@ -20645,7 +19809,7 @@
                         </a:rPr>
                         <a:t>Failure</a:t>
                       </a:r>
-                      <a:endParaRPr lang="en-US" sz="1600" dirty="0">
+                      <a:endParaRPr lang="en-US" sz="1500" dirty="0">
                         <a:latin typeface="Red Hat Mono" charset="0"/>
                         <a:ea typeface="Red Hat Mono" charset="0"/>
                         <a:cs typeface="Red Hat Mono" charset="0"/>
@@ -20700,17 +19864,17 @@
                         <a:buNone/>
                       </a:pPr>
                       <a:r>
-                        <a:rPr lang="en-US" sz="1600" b="1" dirty="0">
+                        <a:rPr lang="en-US" sz="1300" b="1" dirty="0">
                           <a:solidFill>
                             <a:srgbClr val="151515"/>
                           </a:solidFill>
-                          <a:latin typeface="Red Hat Text" pitchFamily="34" charset="0"/>
-                          <a:ea typeface="Red Hat Text" pitchFamily="34" charset="-122"/>
-                          <a:cs typeface="Red Hat Text" pitchFamily="34" charset="-120"/>
+                          <a:latin typeface="Red Hat Mono" pitchFamily="34" charset="0"/>
+                          <a:ea typeface="Red Hat Mono" pitchFamily="34" charset="-122"/>
+                          <a:cs typeface="Red Hat Mono" pitchFamily="34" charset="-120"/>
                         </a:rPr>
                         <a:t>--rollback-on-failure</a:t>
                       </a:r>
-                      <a:endParaRPr lang="en-US" sz="1600" dirty="0">
+                      <a:endParaRPr lang="en-US" sz="1400" dirty="0">
                         <a:latin typeface="Red Hat Text" charset="0"/>
                         <a:ea typeface="Red Hat Text" charset="0"/>
                         <a:cs typeface="Red Hat Text" charset="0"/>
@@ -20765,7 +19929,7 @@
                         <a:buNone/>
                       </a:pPr>
                       <a:r>
-                        <a:rPr lang="en-US" sz="1500" dirty="0">
+                        <a:rPr lang="en-US" sz="1300" dirty="0">
                           <a:solidFill>
                             <a:srgbClr val="242424"/>
                           </a:solidFill>
@@ -20773,9 +19937,30 @@
                           <a:ea typeface="Red Hat Text" pitchFamily="34" charset="-122"/>
                           <a:cs typeface="Red Hat Text" pitchFamily="34" charset="-120"/>
                         </a:rPr>
-                        <a:t>Replaces Helm 3's atomic flag; implies --wait=watcher</a:t>
+                        <a:t>Replaces Helm 3's atomic flag; implies </a:t>
                       </a:r>
-                      <a:endParaRPr lang="en-US" sz="1500" dirty="0">
+                      <a:endParaRPr lang="en-US" sz="1300" dirty="0">
+                        <a:latin typeface="Red Hat Text" charset="0"/>
+                        <a:ea typeface="Red Hat Text" charset="0"/>
+                        <a:cs typeface="Red Hat Text" charset="0"/>
+                      </a:endParaRPr>
+                    </a:p>
+                    <a:p>
+                      <a:pPr algn="l" indent="0" marL="0">
+                        <a:buNone/>
+                      </a:pPr>
+                      <a:r>
+                        <a:rPr lang="en-US" sz="1200" dirty="0">
+                          <a:solidFill>
+                            <a:srgbClr val="151515"/>
+                          </a:solidFill>
+                          <a:latin typeface="Red Hat Mono" pitchFamily="34" charset="0"/>
+                          <a:ea typeface="Red Hat Mono" pitchFamily="34" charset="-122"/>
+                          <a:cs typeface="Red Hat Mono" pitchFamily="34" charset="-120"/>
+                        </a:rPr>
+                        <a:t>--wait=watcher</a:t>
+                      </a:r>
+                      <a:endParaRPr lang="en-US" sz="1300" dirty="0">
                         <a:latin typeface="Red Hat Text" charset="0"/>
                         <a:ea typeface="Red Hat Text" charset="0"/>
                         <a:cs typeface="Red Hat Text" charset="0"/>
@@ -20832,7 +20017,7 @@
                         <a:buNone/>
                       </a:pPr>
                       <a:r>
-                        <a:rPr lang="en-US" sz="1600" b="1" dirty="0">
+                        <a:rPr lang="en-US" sz="1500" b="1" dirty="0">
                           <a:solidFill>
                             <a:srgbClr val="EE0000"/>
                           </a:solidFill>
@@ -20842,7 +20027,7 @@
                         </a:rPr>
                         <a:t>Wait</a:t>
                       </a:r>
-                      <a:endParaRPr lang="en-US" sz="1600" dirty="0">
+                      <a:endParaRPr lang="en-US" sz="1500" dirty="0">
                         <a:latin typeface="Red Hat Mono" charset="0"/>
                         <a:ea typeface="Red Hat Mono" charset="0"/>
                         <a:cs typeface="Red Hat Mono" charset="0"/>
@@ -20897,7 +20082,7 @@
                         <a:buNone/>
                       </a:pPr>
                       <a:r>
-                        <a:rPr lang="en-US" sz="1600" b="1" dirty="0">
+                        <a:rPr lang="en-US" sz="1400" b="1" dirty="0">
                           <a:solidFill>
                             <a:srgbClr val="151515"/>
                           </a:solidFill>
@@ -20907,7 +20092,7 @@
                         </a:rPr>
                         <a:t>kstatus watcher</a:t>
                       </a:r>
-                      <a:endParaRPr lang="en-US" sz="1600" dirty="0">
+                      <a:endParaRPr lang="en-US" sz="1400" dirty="0">
                         <a:latin typeface="Red Hat Text" charset="0"/>
                         <a:ea typeface="Red Hat Text" charset="0"/>
                         <a:cs typeface="Red Hat Text" charset="0"/>
@@ -20962,7 +20147,28 @@
                         <a:buNone/>
                       </a:pPr>
                       <a:r>
-                        <a:rPr lang="en-US" sz="1500" dirty="0">
+                        <a:rPr lang="en-US" sz="1200" dirty="0">
+                          <a:solidFill>
+                            <a:srgbClr val="151515"/>
+                          </a:solidFill>
+                          <a:latin typeface="Red Hat Mono" pitchFamily="34" charset="0"/>
+                          <a:ea typeface="Red Hat Mono" pitchFamily="34" charset="-122"/>
+                          <a:cs typeface="Red Hat Mono" pitchFamily="34" charset="-120"/>
+                        </a:rPr>
+                        <a:t>--wait</a:t>
+                      </a:r>
+                      <a:endParaRPr lang="en-US" sz="1300" dirty="0">
+                        <a:latin typeface="Red Hat Text" charset="0"/>
+                        <a:ea typeface="Red Hat Text" charset="0"/>
+                        <a:cs typeface="Red Hat Text" charset="0"/>
+                      </a:endParaRPr>
+                    </a:p>
+                    <a:p>
+                      <a:pPr algn="l" indent="0" marL="0">
+                        <a:buNone/>
+                      </a:pPr>
+                      <a:r>
+                        <a:rPr lang="en-US" sz="1300" dirty="0">
                           <a:solidFill>
                             <a:srgbClr val="242424"/>
                           </a:solidFill>
@@ -20970,9 +20176,31 @@
                           <a:ea typeface="Red Hat Text" pitchFamily="34" charset="-122"/>
                           <a:cs typeface="Red Hat Text" pitchFamily="34" charset="-120"/>
                         </a:rPr>
-                        <a:t>--wait takes watcher, hookOnly or legacy; a bare --wait means watcher</a:t>
+                        <a:t> takes watcher, hookOnly or legacy; a bare </a:t>
                       </a:r>
-                      <a:endParaRPr lang="en-US" sz="1500" dirty="0">
+                      <a:r>
+                        <a:rPr lang="en-US" sz="1200" dirty="0">
+                          <a:solidFill>
+                            <a:srgbClr val="151515"/>
+                          </a:solidFill>
+                          <a:latin typeface="Red Hat Mono" pitchFamily="34" charset="0"/>
+                          <a:ea typeface="Red Hat Mono" pitchFamily="34" charset="-122"/>
+                          <a:cs typeface="Red Hat Mono" pitchFamily="34" charset="-120"/>
+                        </a:rPr>
+                        <a:t>--wait</a:t>
+                      </a:r>
+                      <a:r>
+                        <a:rPr lang="en-US" sz="1300" dirty="0">
+                          <a:solidFill>
+                            <a:srgbClr val="242424"/>
+                          </a:solidFill>
+                          <a:latin typeface="Red Hat Text" pitchFamily="34" charset="0"/>
+                          <a:ea typeface="Red Hat Text" pitchFamily="34" charset="-122"/>
+                          <a:cs typeface="Red Hat Text" pitchFamily="34" charset="-120"/>
+                        </a:rPr>
+                        <a:t> means watcher</a:t>
+                      </a:r>
+                      <a:endParaRPr lang="en-US" sz="1300" dirty="0">
                         <a:latin typeface="Red Hat Text" charset="0"/>
                         <a:ea typeface="Red Hat Text" charset="0"/>
                         <a:cs typeface="Red Hat Text" charset="0"/>
@@ -21029,7 +20257,7 @@
                         <a:buNone/>
                       </a:pPr>
                       <a:r>
-                        <a:rPr lang="en-US" sz="1600" b="1" dirty="0">
+                        <a:rPr lang="en-US" sz="1500" b="1" dirty="0">
                           <a:solidFill>
                             <a:srgbClr val="EE0000"/>
                           </a:solidFill>
@@ -21039,7 +20267,7 @@
                         </a:rPr>
                         <a:t>Plugins</a:t>
                       </a:r>
-                      <a:endParaRPr lang="en-US" sz="1600" dirty="0">
+                      <a:endParaRPr lang="en-US" sz="1500" dirty="0">
                         <a:latin typeface="Red Hat Mono" charset="0"/>
                         <a:ea typeface="Red Hat Mono" charset="0"/>
                         <a:cs typeface="Red Hat Mono" charset="0"/>
@@ -21094,7 +20322,7 @@
                         <a:buNone/>
                       </a:pPr>
                       <a:r>
-                        <a:rPr lang="en-US" sz="1600" b="1" dirty="0">
+                        <a:rPr lang="en-US" sz="1400" b="1" dirty="0">
                           <a:solidFill>
                             <a:srgbClr val="151515"/>
                           </a:solidFill>
@@ -21104,7 +20332,7 @@
                         </a:rPr>
                         <a:t>Typed, optional Wasm</a:t>
                       </a:r>
-                      <a:endParaRPr lang="en-US" sz="1600" dirty="0">
+                      <a:endParaRPr lang="en-US" sz="1400" dirty="0">
                         <a:latin typeface="Red Hat Text" charset="0"/>
                         <a:ea typeface="Red Hat Text" charset="0"/>
                         <a:cs typeface="Red Hat Text" charset="0"/>
@@ -21159,7 +20387,7 @@
                         <a:buNone/>
                       </a:pPr>
                       <a:r>
-                        <a:rPr lang="en-US" sz="1500" dirty="0">
+                        <a:rPr lang="en-US" sz="1300" dirty="0">
                           <a:solidFill>
                             <a:srgbClr val="242424"/>
                           </a:solidFill>
@@ -21169,7 +20397,7 @@
                         </a:rPr>
                         <a:t>cli/v1, getter/v1 and postrenderer/v1; subprocess or Wasm runtime</a:t>
                       </a:r>
-                      <a:endParaRPr lang="en-US" sz="1500" dirty="0">
+                      <a:endParaRPr lang="en-US" sz="1300" dirty="0">
                         <a:latin typeface="Red Hat Text" charset="0"/>
                         <a:ea typeface="Red Hat Text" charset="0"/>
                         <a:cs typeface="Red Hat Text" charset="0"/>
@@ -21226,7 +20454,7 @@
                         <a:buNone/>
                       </a:pPr>
                       <a:r>
-                        <a:rPr lang="en-US" sz="1600" b="1" dirty="0">
+                        <a:rPr lang="en-US" sz="1500" b="1" dirty="0">
                           <a:solidFill>
                             <a:srgbClr val="EE0000"/>
                           </a:solidFill>
@@ -21236,7 +20464,7 @@
                         </a:rPr>
                         <a:t>Post-renderers</a:t>
                       </a:r>
-                      <a:endParaRPr lang="en-US" sz="1600" dirty="0">
+                      <a:endParaRPr lang="en-US" sz="1500" dirty="0">
                         <a:latin typeface="Red Hat Mono" charset="0"/>
                         <a:ea typeface="Red Hat Mono" charset="0"/>
                         <a:cs typeface="Red Hat Mono" charset="0"/>
@@ -21291,7 +20519,7 @@
                         <a:buNone/>
                       </a:pPr>
                       <a:r>
-                        <a:rPr lang="en-US" sz="1600" b="1" dirty="0">
+                        <a:rPr lang="en-US" sz="1400" b="1" dirty="0">
                           <a:solidFill>
                             <a:srgbClr val="151515"/>
                           </a:solidFill>
@@ -21301,7 +20529,7 @@
                         </a:rPr>
                         <a:t>Plugins only</a:t>
                       </a:r>
-                      <a:endParaRPr lang="en-US" sz="1600" dirty="0">
+                      <a:endParaRPr lang="en-US" sz="1400" dirty="0">
                         <a:latin typeface="Red Hat Text" charset="0"/>
                         <a:ea typeface="Red Hat Text" charset="0"/>
                         <a:cs typeface="Red Hat Text" charset="0"/>
@@ -21356,7 +20584,7 @@
                         <a:buNone/>
                       </a:pPr>
                       <a:r>
-                        <a:rPr lang="en-US" sz="1500" dirty="0">
+                        <a:rPr lang="en-US" sz="1300" dirty="0">
                           <a:solidFill>
                             <a:srgbClr val="242424"/>
                           </a:solidFill>
@@ -21366,7 +20594,7 @@
                         </a:rPr>
                         <a:t>The flag takes a plugin name; a bare executable path is rejected</a:t>
                       </a:r>
-                      <a:endParaRPr lang="en-US" sz="1500" dirty="0">
+                      <a:endParaRPr lang="en-US" sz="1300" dirty="0">
                         <a:latin typeface="Red Hat Text" charset="0"/>
                         <a:ea typeface="Red Hat Text" charset="0"/>
                         <a:cs typeface="Red Hat Text" charset="0"/>
@@ -21423,7 +20651,7 @@
                         <a:buNone/>
                       </a:pPr>
                       <a:r>
-                        <a:rPr lang="en-US" sz="1600" b="1" dirty="0">
+                        <a:rPr lang="en-US" sz="1500" b="1" dirty="0">
                           <a:solidFill>
                             <a:srgbClr val="EE0000"/>
                           </a:solidFill>
@@ -21433,7 +20661,7 @@
                         </a:rPr>
                         <a:t>Charts</a:t>
                       </a:r>
-                      <a:endParaRPr lang="en-US" sz="1600" dirty="0">
+                      <a:endParaRPr lang="en-US" sz="1500" dirty="0">
                         <a:latin typeface="Red Hat Mono" charset="0"/>
                         <a:ea typeface="Red Hat Mono" charset="0"/>
                         <a:cs typeface="Red Hat Mono" charset="0"/>
@@ -21488,7 +20716,7 @@
                         <a:buNone/>
                       </a:pPr>
                       <a:r>
-                        <a:rPr lang="en-US" sz="1600" b="1" dirty="0">
+                        <a:rPr lang="en-US" sz="1400" b="1" dirty="0">
                           <a:solidFill>
                             <a:srgbClr val="151515"/>
                           </a:solidFill>
@@ -21498,7 +20726,7 @@
                         </a:rPr>
                         <a:t>apiVersion v2 unchanged</a:t>
                       </a:r>
-                      <a:endParaRPr lang="en-US" sz="1600" dirty="0">
+                      <a:endParaRPr lang="en-US" sz="1400" dirty="0">
                         <a:latin typeface="Red Hat Text" charset="0"/>
                         <a:ea typeface="Red Hat Text" charset="0"/>
                         <a:cs typeface="Red Hat Text" charset="0"/>
@@ -21553,7 +20781,7 @@
                         <a:buNone/>
                       </a:pPr>
                       <a:r>
-                        <a:rPr lang="en-US" sz="1500" dirty="0">
+                        <a:rPr lang="en-US" sz="1300" dirty="0">
                           <a:solidFill>
                             <a:srgbClr val="242424"/>
                           </a:solidFill>
@@ -21563,7 +20791,7 @@
                         </a:rPr>
                         <a:t>Chart API v3 is experimental; existing charts install without edits</a:t>
                       </a:r>
-                      <a:endParaRPr lang="en-US" sz="1500" dirty="0">
+                      <a:endParaRPr lang="en-US" sz="1300" dirty="0">
                         <a:latin typeface="Red Hat Text" charset="0"/>
                         <a:ea typeface="Red Hat Text" charset="0"/>
                         <a:cs typeface="Red Hat Text" charset="0"/>
@@ -21998,7 +21226,7 @@
           <a:bodyPr wrap="square" lIns="0" tIns="0" rIns="0" bIns="0" rtlCol="0" anchor="t"/>
           <a:lstStyle/>
           <a:p>
-            <a:pPr marL="228600" indent="-228600">
+            <a:pPr marL="304800" indent="-304800">
               <a:lnSpc>
                 <a:spcPct val="112000"/>
               </a:lnSpc>
@@ -22022,12 +21250,6 @@
               </a:rPr>
               <a:t>Chart</a:t>
             </a:r>
-            <a:pPr indent="0" marL="0">
-              <a:lnSpc>
-                <a:spcPct val="112000"/>
-              </a:lnSpc>
-              <a:buNone/>
-            </a:pPr>
             <a:r>
               <a:rPr lang="en-US" sz="2000" dirty="0">
                 <a:solidFill>
@@ -22042,7 +21264,7 @@
             <a:endParaRPr lang="en-US" sz="2000" dirty="0"/>
           </a:p>
           <a:p>
-            <a:pPr marL="228600" indent="-228600">
+            <a:pPr marL="304800" indent="-304800">
               <a:lnSpc>
                 <a:spcPct val="112000"/>
               </a:lnSpc>
@@ -22066,12 +21288,6 @@
               </a:rPr>
               <a:t>Release</a:t>
             </a:r>
-            <a:pPr indent="0" marL="0">
-              <a:lnSpc>
-                <a:spcPct val="112000"/>
-              </a:lnSpc>
-              <a:buNone/>
-            </a:pPr>
             <a:r>
               <a:rPr lang="en-US" sz="2000" dirty="0">
                 <a:solidFill>
@@ -22086,7 +21302,7 @@
             <a:endParaRPr lang="en-US" sz="2000" dirty="0"/>
           </a:p>
           <a:p>
-            <a:pPr marL="228600" indent="-228600">
+            <a:pPr marL="304800" indent="-304800">
               <a:lnSpc>
                 <a:spcPct val="112000"/>
               </a:lnSpc>
@@ -22110,12 +21326,6 @@
               </a:rPr>
               <a:t>Repository or registry</a:t>
             </a:r>
-            <a:pPr indent="0" marL="0">
-              <a:lnSpc>
-                <a:spcPct val="112000"/>
-              </a:lnSpc>
-              <a:buNone/>
-            </a:pPr>
             <a:r>
               <a:rPr lang="en-US" sz="2000" dirty="0">
                 <a:solidFill>
@@ -22130,7 +21340,7 @@
             <a:endParaRPr lang="en-US" sz="2000" dirty="0"/>
           </a:p>
           <a:p>
-            <a:pPr marL="228600" indent="-228600">
+            <a:pPr marL="304800" indent="-304800">
               <a:lnSpc>
                 <a:spcPct val="112000"/>
               </a:lnSpc>
@@ -22154,12 +21364,6 @@
               </a:rPr>
               <a:t>Values</a:t>
             </a:r>
-            <a:pPr indent="0" marL="0">
-              <a:lnSpc>
-                <a:spcPct val="112000"/>
-              </a:lnSpc>
-              <a:buNone/>
-            </a:pPr>
             <a:r>
               <a:rPr lang="en-US" sz="2000" dirty="0">
                 <a:solidFill>
@@ -22356,8 +21560,8 @@
         </p:blipFill>
         <p:spPr>
           <a:xfrm>
-            <a:off x="566928" y="1691640"/>
-            <a:ext cx="11055096" cy="4160520"/>
+            <a:off x="566928" y="1417320"/>
+            <a:ext cx="11055096" cy="4480560"/>
           </a:xfrm>
           <a:prstGeom prst="rect">
             <a:avLst/>

--- a/presentation/helm-101/Helm-101-r1.0.pptx
+++ b/presentation/helm-101/Helm-101-r1.0.pptx
@@ -1153,7 +1153,7 @@
           <a:p>
             <a:r>
               <a:rPr lang="en-US" dirty="0"/>
-              <a:t>What it shows: how Helm builds the single .Values map. The chart's values.yaml is the base, each -f or --values file merges over it from left to right, and the --set family wins over every file. Maps merge key by key; lists and scalars are replaced whole, so overriding one entry of imagePullSecrets means supplying the full list. After the merge, values.schema.json validates the result before any template runs. What to show: examples/05-values, ./demo.sh offline, which renders replicas: 5 for values-prod.yaml plus --set replicaCount=5, and LOG_LEVEL: DEBUG when values-dev.yaml is passed last. Fallback: the two helm template commands in chapter 05, section Precedence. On upgrade, previous flags are forgotten unless the same -f files are passed again or --reuse-values or --reset-then-reuse-values is used.</a:t>
+              <a:t>What it shows: how Helm builds the single .Values map. The chart's values.yaml is the base, each -f or --values file merges over it from left to right, and the --set family wins over every file. Maps merge key by key; lists and scalars are replaced whole, so overriding one entry of imagePullSecrets means supplying the full list. After the merge, values.schema.json validates the result before any template runs. What to show: examples/05-values, ./demo.sh offline, which renders replicas: 5 for values-prod.yaml plus --set replicaCount=5, and LOG_LEVEL: DEBUG when values-dev.yaml is passed last. Fallback: the two helm template commands in chapter 05, section Precedence. On upgrade in Helm 4.3.0: with no value flags, the last release's values are reused; with any -f or --set flag, the chart defaults plus the values given in that command are used and the earlier overrides drop out unless --reuse-values or --reset-then-reuse-values is passed.</a:t>
             </a:r>
             <a:endParaRPr lang="en-US" dirty="0"/>
           </a:p>
